--- a/Milestone 5/Milestone5_Testing&Evaluation.pptx
+++ b/Milestone 5/Milestone5_Testing&Evaluation.pptx
@@ -1595,7 +1595,7 @@
               </a:spcAft>
               <a:buNone/>
             </a:pPr>
-            <a:endParaRPr/>
+            <a:endParaRPr dirty="0"/>
           </a:p>
         </p:txBody>
       </p:sp>
@@ -17090,8 +17090,12 @@
               <a:buChar char="•"/>
             </a:pPr>
             <a:r>
+              <a:rPr lang="en-US" dirty="0" smtClean="0"/>
+              <a:t>Upload video of performing </a:t>
+            </a:r>
+            <a:r>
               <a:rPr lang="en-US" dirty="0"/>
-              <a:t>Record actors performing scenes naturally.</a:t>
+              <a:t>scenes naturally.</a:t>
             </a:r>
           </a:p>
           <a:p>
@@ -17141,7 +17145,15 @@
             </a:pPr>
             <a:r>
               <a:rPr lang="en-US" dirty="0"/>
-              <a:t>Observations – Interviews - Video recordings - User feedback</a:t>
+              <a:t>Observations – Interviews - Video recordings </a:t>
+            </a:r>
+            <a:r>
+              <a:rPr lang="en-US" dirty="0" smtClean="0"/>
+              <a:t>upload- </a:t>
+            </a:r>
+            <a:r>
+              <a:rPr lang="en-US" dirty="0"/>
+              <a:t>User feedback</a:t>
             </a:r>
           </a:p>
         </p:txBody>
@@ -17179,9 +17191,18 @@
               <a:buChar char="•"/>
             </a:pPr>
             <a:r>
-              <a:rPr lang="en-US" dirty="0"/>
-              <a:t>Lighting affects emotion detection</a:t>
+              <a:rPr lang="en-US" dirty="0" smtClean="0"/>
+              <a:t>Backend processing </a:t>
             </a:r>
+            <a:r>
+              <a:rPr lang="en-US" smtClean="0"/>
+              <a:t>time, report </a:t>
+            </a:r>
+            <a:r>
+              <a:rPr lang="en-US" dirty="0" smtClean="0"/>
+              <a:t>accuracy</a:t>
+            </a:r>
+            <a:endParaRPr lang="en-US" dirty="0"/>
           </a:p>
           <a:p>
             <a:pPr marL="285750" lvl="0" indent="-285750" algn="l">
@@ -26636,7 +26657,7 @@
           <p:nvPr>
             <p:extLst>
               <p:ext uri="{D42A27DB-BD31-4B8C-83A1-F6EECF244321}">
-                <p14:modId xmlns:p14="http://schemas.microsoft.com/office/powerpoint/2010/main" val="666758693"/>
+                <p14:modId xmlns:p14="http://schemas.microsoft.com/office/powerpoint/2010/main" val="2591724647"/>
               </p:ext>
             </p:extLst>
           </p:nvPr>
@@ -27472,7 +27493,19 @@
                           <a:cs typeface="Montserrat Medium"/>
                           <a:sym typeface="Montserrat Medium"/>
                         </a:rPr>
-                        <a:t>&lt; 200 </a:t>
+                        <a:t>&lt; </a:t>
+                      </a:r>
+                      <a:r>
+                        <a:rPr lang="en-US" sz="1200" b="1" dirty="0" smtClean="0">
+                          <a:solidFill>
+                            <a:schemeClr val="tx1"/>
+                          </a:solidFill>
+                          <a:latin typeface="Montserrat Medium"/>
+                          <a:ea typeface="Montserrat Medium"/>
+                          <a:cs typeface="Montserrat Medium"/>
+                          <a:sym typeface="Montserrat Medium"/>
+                        </a:rPr>
+                        <a:t>5000 </a:t>
                       </a:r>
                       <a:r>
                         <a:rPr lang="en-US" sz="1200" b="1" dirty="0" err="1" smtClean="0">

--- a/Milestone 5/Milestone5_Testing&Evaluation.pptx
+++ b/Milestone 5/Milestone5_Testing&Evaluation.pptx
@@ -5,7 +5,7 @@
     <p:sldMasterId id="2147483677" r:id="rId1"/>
   </p:sldMasterIdLst>
   <p:notesMasterIdLst>
-    <p:notesMasterId r:id="rId22"/>
+    <p:notesMasterId r:id="rId25"/>
   </p:notesMasterIdLst>
   <p:sldIdLst>
     <p:sldId id="256" r:id="rId2"/>
@@ -28,42 +28,45 @@
     <p:sldId id="290" r:id="rId19"/>
     <p:sldId id="312" r:id="rId20"/>
     <p:sldId id="313" r:id="rId21"/>
+    <p:sldId id="314" r:id="rId22"/>
+    <p:sldId id="315" r:id="rId23"/>
+    <p:sldId id="316" r:id="rId24"/>
   </p:sldIdLst>
   <p:sldSz cx="9144000" cy="5143500" type="screen16x9"/>
   <p:notesSz cx="6858000" cy="9144000"/>
   <p:embeddedFontLst>
     <p:embeddedFont>
       <p:font typeface="Montserrat Black" panose="020B0604020202020204" charset="0"/>
-      <p:bold r:id="rId23"/>
-      <p:boldItalic r:id="rId24"/>
+      <p:bold r:id="rId26"/>
+      <p:boldItalic r:id="rId27"/>
     </p:embeddedFont>
     <p:embeddedFont>
       <p:font typeface="Montserrat Medium" panose="020B0604020202020204" charset="0"/>
-      <p:regular r:id="rId25"/>
-      <p:bold r:id="rId26"/>
-      <p:italic r:id="rId27"/>
-      <p:boldItalic r:id="rId28"/>
+      <p:regular r:id="rId28"/>
+      <p:bold r:id="rId29"/>
+      <p:italic r:id="rId30"/>
+      <p:boldItalic r:id="rId31"/>
     </p:embeddedFont>
     <p:embeddedFont>
       <p:font typeface="Quicksand Medium" panose="020B0604020202020204" charset="0"/>
-      <p:regular r:id="rId29"/>
-      <p:bold r:id="rId30"/>
+      <p:regular r:id="rId32"/>
+      <p:bold r:id="rId33"/>
     </p:embeddedFont>
     <p:embeddedFont>
       <p:font typeface="Quicksand" panose="020B0604020202020204" charset="0"/>
-      <p:regular r:id="rId31"/>
-      <p:bold r:id="rId32"/>
+      <p:regular r:id="rId34"/>
+      <p:bold r:id="rId35"/>
     </p:embeddedFont>
     <p:embeddedFont>
       <p:font typeface="Montserrat" panose="020B0604020202020204" charset="0"/>
-      <p:regular r:id="rId33"/>
-      <p:bold r:id="rId34"/>
-      <p:italic r:id="rId35"/>
-      <p:boldItalic r:id="rId36"/>
+      <p:regular r:id="rId36"/>
+      <p:bold r:id="rId37"/>
+      <p:italic r:id="rId38"/>
+      <p:boldItalic r:id="rId39"/>
     </p:embeddedFont>
     <p:embeddedFont>
       <p:font typeface="Bebas Neue" panose="020B0604020202020204" charset="0"/>
-      <p:regular r:id="rId37"/>
+      <p:regular r:id="rId40"/>
     </p:embeddedFont>
   </p:embeddedFontLst>
   <p:defaultTextStyle>
@@ -2138,6 +2141,115 @@
     <p:extLst>
       <p:ext uri="{BB962C8B-B14F-4D97-AF65-F5344CB8AC3E}">
         <p14:creationId xmlns:p14="http://schemas.microsoft.com/office/powerpoint/2010/main" val="2648421745"/>
+      </p:ext>
+    </p:extLst>
+  </p:cSld>
+  <p:clrMapOvr>
+    <a:masterClrMapping/>
+  </p:clrMapOvr>
+</p:notes>
+</file>
+
+<file path=ppt/notesSlides/notesSlide21.xml><?xml version="1.0" encoding="utf-8"?>
+<p:notes xmlns:a="http://schemas.openxmlformats.org/drawingml/2006/main" xmlns:r="http://schemas.openxmlformats.org/officeDocument/2006/relationships" xmlns:p="http://schemas.openxmlformats.org/presentationml/2006/main" showMasterSp="0" showMasterPhAnim="0">
+  <p:cSld>
+    <p:spTree>
+      <p:nvGrpSpPr>
+        <p:cNvPr id="1" name="Shape 228"/>
+        <p:cNvGrpSpPr/>
+        <p:nvPr/>
+      </p:nvGrpSpPr>
+      <p:grpSpPr>
+        <a:xfrm>
+          <a:off x="0" y="0"/>
+          <a:ext cx="0" cy="0"/>
+          <a:chOff x="0" y="0"/>
+          <a:chExt cx="0" cy="0"/>
+        </a:xfrm>
+      </p:grpSpPr>
+      <p:sp>
+        <p:nvSpPr>
+          <p:cNvPr id="229" name="Google Shape;229;g1435532658d_0_45314:notes"/>
+          <p:cNvSpPr>
+            <a:spLocks noGrp="1" noRot="1" noChangeAspect="1"/>
+          </p:cNvSpPr>
+          <p:nvPr>
+            <p:ph type="sldImg" idx="2"/>
+          </p:nvPr>
+        </p:nvSpPr>
+        <p:spPr>
+          <a:xfrm>
+            <a:off x="381000" y="685800"/>
+            <a:ext cx="6096000" cy="3429000"/>
+          </a:xfrm>
+          <a:custGeom>
+            <a:avLst/>
+            <a:gdLst/>
+            <a:ahLst/>
+            <a:cxnLst/>
+            <a:rect l="l" t="t" r="r" b="b"/>
+            <a:pathLst>
+              <a:path w="120000" h="120000" extrusionOk="0">
+                <a:moveTo>
+                  <a:pt x="0" y="0"/>
+                </a:moveTo>
+                <a:lnTo>
+                  <a:pt x="120000" y="0"/>
+                </a:lnTo>
+                <a:lnTo>
+                  <a:pt x="120000" y="120000"/>
+                </a:lnTo>
+                <a:lnTo>
+                  <a:pt x="0" y="120000"/>
+                </a:lnTo>
+                <a:close/>
+              </a:path>
+            </a:pathLst>
+          </a:custGeom>
+        </p:spPr>
+      </p:sp>
+      <p:sp>
+        <p:nvSpPr>
+          <p:cNvPr id="230" name="Google Shape;230;g1435532658d_0_45314:notes"/>
+          <p:cNvSpPr txBox="1">
+            <a:spLocks noGrp="1"/>
+          </p:cNvSpPr>
+          <p:nvPr>
+            <p:ph type="body" idx="1"/>
+          </p:nvPr>
+        </p:nvSpPr>
+        <p:spPr>
+          <a:xfrm>
+            <a:off x="685800" y="4343400"/>
+            <a:ext cx="5486400" cy="4114800"/>
+          </a:xfrm>
+          <a:prstGeom prst="rect">
+            <a:avLst/>
+          </a:prstGeom>
+        </p:spPr>
+        <p:txBody>
+          <a:bodyPr spcFirstLastPara="1" wrap="square" lIns="91425" tIns="91425" rIns="91425" bIns="91425" anchor="t" anchorCtr="0">
+            <a:noAutofit/>
+          </a:bodyPr>
+          <a:lstStyle/>
+          <a:p>
+            <a:pPr marL="0" lvl="0" indent="0" algn="l" rtl="0">
+              <a:spcBef>
+                <a:spcPts val="0"/>
+              </a:spcBef>
+              <a:spcAft>
+                <a:spcPts val="0"/>
+              </a:spcAft>
+              <a:buNone/>
+            </a:pPr>
+            <a:endParaRPr/>
+          </a:p>
+        </p:txBody>
+      </p:sp>
+    </p:spTree>
+    <p:extLst>
+      <p:ext uri="{BB962C8B-B14F-4D97-AF65-F5344CB8AC3E}">
+        <p14:creationId xmlns:p14="http://schemas.microsoft.com/office/powerpoint/2010/main" val="873448322"/>
       </p:ext>
     </p:extLst>
   </p:cSld>
@@ -17192,15 +17304,7 @@
             </a:pPr>
             <a:r>
               <a:rPr lang="en-US" dirty="0" smtClean="0"/>
-              <a:t>Backend processing </a:t>
-            </a:r>
-            <a:r>
-              <a:rPr lang="en-US" smtClean="0"/>
-              <a:t>time, report </a:t>
-            </a:r>
-            <a:r>
-              <a:rPr lang="en-US" dirty="0" smtClean="0"/>
-              <a:t>accuracy</a:t>
+              <a:t>Backend processing time, report accuracy</a:t>
             </a:r>
             <a:endParaRPr lang="en-US" dirty="0"/>
           </a:p>
@@ -17885,6 +17989,1384 @@
     <p:extLst>
       <p:ext uri="{BB962C8B-B14F-4D97-AF65-F5344CB8AC3E}">
         <p14:creationId xmlns:p14="http://schemas.microsoft.com/office/powerpoint/2010/main" val="324543133"/>
+      </p:ext>
+    </p:extLst>
+  </p:cSld>
+  <p:clrMapOvr>
+    <a:masterClrMapping/>
+  </p:clrMapOvr>
+</p:sld>
+</file>
+
+<file path=ppt/slides/slide21.xml><?xml version="1.0" encoding="utf-8"?>
+<p:sld xmlns:a="http://schemas.openxmlformats.org/drawingml/2006/main" xmlns:r="http://schemas.openxmlformats.org/officeDocument/2006/relationships" xmlns:p="http://schemas.openxmlformats.org/presentationml/2006/main">
+  <p:cSld>
+    <p:bg>
+      <p:bgPr>
+        <a:solidFill>
+          <a:schemeClr val="dk2"/>
+        </a:solidFill>
+        <a:effectLst/>
+      </p:bgPr>
+    </p:bg>
+    <p:spTree>
+      <p:nvGrpSpPr>
+        <p:cNvPr id="1" name="Shape 231"/>
+        <p:cNvGrpSpPr/>
+        <p:nvPr/>
+      </p:nvGrpSpPr>
+      <p:grpSpPr>
+        <a:xfrm>
+          <a:off x="0" y="0"/>
+          <a:ext cx="0" cy="0"/>
+          <a:chOff x="0" y="0"/>
+          <a:chExt cx="0" cy="0"/>
+        </a:xfrm>
+      </p:grpSpPr>
+      <p:sp>
+        <p:nvSpPr>
+          <p:cNvPr id="232" name="Google Shape;232;p37"/>
+          <p:cNvSpPr txBox="1">
+            <a:spLocks noGrp="1"/>
+          </p:cNvSpPr>
+          <p:nvPr>
+            <p:ph type="title"/>
+          </p:nvPr>
+        </p:nvSpPr>
+        <p:spPr>
+          <a:xfrm>
+            <a:off x="238000" y="1295400"/>
+            <a:ext cx="4334000" cy="3352800"/>
+          </a:xfrm>
+          <a:prstGeom prst="rect">
+            <a:avLst/>
+          </a:prstGeom>
+        </p:spPr>
+        <p:txBody>
+          <a:bodyPr spcFirstLastPara="1" wrap="square" lIns="91425" tIns="0" rIns="91425" bIns="0" anchor="ctr" anchorCtr="0">
+            <a:noAutofit/>
+          </a:bodyPr>
+          <a:lstStyle/>
+          <a:p>
+            <a:r>
+              <a:rPr lang="en-US" dirty="0" smtClean="0"/>
+              <a:t>Playwright</a:t>
+            </a:r>
+            <a:br>
+              <a:rPr lang="en-US" dirty="0" smtClean="0"/>
+            </a:br>
+            <a:r>
+              <a:rPr lang="en-US" dirty="0" smtClean="0"/>
+              <a:t>Automated </a:t>
+            </a:r>
+            <a:br>
+              <a:rPr lang="en-US" dirty="0" smtClean="0"/>
+            </a:br>
+            <a:r>
+              <a:rPr lang="en-US" dirty="0" smtClean="0"/>
+              <a:t>testing</a:t>
+            </a:r>
+            <a:r>
+              <a:rPr lang="en-US" sz="4000" dirty="0"/>
+              <a:t/>
+            </a:r>
+            <a:br>
+              <a:rPr lang="en-US" sz="4000" dirty="0"/>
+            </a:br>
+            <a:endParaRPr sz="3200" dirty="0"/>
+          </a:p>
+        </p:txBody>
+      </p:sp>
+      <p:sp>
+        <p:nvSpPr>
+          <p:cNvPr id="233" name="Google Shape;233;p37"/>
+          <p:cNvSpPr txBox="1">
+            <a:spLocks noGrp="1"/>
+          </p:cNvSpPr>
+          <p:nvPr>
+            <p:ph type="title" idx="2"/>
+          </p:nvPr>
+        </p:nvSpPr>
+        <p:spPr>
+          <a:xfrm>
+            <a:off x="4648200" y="1748375"/>
+            <a:ext cx="2286000" cy="1664100"/>
+          </a:xfrm>
+          <a:prstGeom prst="rect">
+            <a:avLst/>
+          </a:prstGeom>
+        </p:spPr>
+        <p:txBody>
+          <a:bodyPr spcFirstLastPara="1" wrap="square" lIns="91425" tIns="0" rIns="91425" bIns="0" anchor="ctr" anchorCtr="0">
+            <a:noAutofit/>
+          </a:bodyPr>
+          <a:lstStyle/>
+          <a:p>
+            <a:pPr marL="0" lvl="0" indent="0" algn="l" rtl="0">
+              <a:spcBef>
+                <a:spcPts val="0"/>
+              </a:spcBef>
+              <a:spcAft>
+                <a:spcPts val="0"/>
+              </a:spcAft>
+              <a:buNone/>
+            </a:pPr>
+            <a:r>
+              <a:rPr lang="en" dirty="0" smtClean="0"/>
+              <a:t>05</a:t>
+            </a:r>
+            <a:endParaRPr dirty="0"/>
+          </a:p>
+        </p:txBody>
+      </p:sp>
+    </p:spTree>
+    <p:extLst>
+      <p:ext uri="{BB962C8B-B14F-4D97-AF65-F5344CB8AC3E}">
+        <p14:creationId xmlns:p14="http://schemas.microsoft.com/office/powerpoint/2010/main" val="592434141"/>
+      </p:ext>
+    </p:extLst>
+  </p:cSld>
+  <p:clrMapOvr>
+    <a:masterClrMapping/>
+  </p:clrMapOvr>
+</p:sld>
+</file>
+
+<file path=ppt/slides/slide22.xml><?xml version="1.0" encoding="utf-8"?>
+<p:sld xmlns:a="http://schemas.openxmlformats.org/drawingml/2006/main" xmlns:r="http://schemas.openxmlformats.org/officeDocument/2006/relationships" xmlns:p="http://schemas.openxmlformats.org/presentationml/2006/main">
+  <p:cSld>
+    <p:spTree>
+      <p:nvGrpSpPr>
+        <p:cNvPr id="1" name=""/>
+        <p:cNvGrpSpPr/>
+        <p:nvPr/>
+      </p:nvGrpSpPr>
+      <p:grpSpPr>
+        <a:xfrm>
+          <a:off x="0" y="0"/>
+          <a:ext cx="0" cy="0"/>
+          <a:chOff x="0" y="0"/>
+          <a:chExt cx="0" cy="0"/>
+        </a:xfrm>
+      </p:grpSpPr>
+      <p:sp>
+        <p:nvSpPr>
+          <p:cNvPr id="5" name="Text Placeholder 4"/>
+          <p:cNvSpPr>
+            <a:spLocks noGrp="1"/>
+          </p:cNvSpPr>
+          <p:nvPr>
+            <p:ph type="body" idx="1"/>
+          </p:nvPr>
+        </p:nvSpPr>
+        <p:spPr>
+          <a:xfrm>
+            <a:off x="228600" y="646784"/>
+            <a:ext cx="8860199" cy="4839616"/>
+          </a:xfrm>
+        </p:spPr>
+        <p:txBody>
+          <a:bodyPr/>
+          <a:lstStyle/>
+          <a:p>
+            <a:pPr marL="139700" indent="0">
+              <a:lnSpc>
+                <a:spcPct val="100000"/>
+              </a:lnSpc>
+              <a:buNone/>
+            </a:pPr>
+            <a:r>
+              <a:rPr lang="en-US" sz="800" dirty="0"/>
+              <a:t>=================================================================== test session starts ===================================================================</a:t>
+            </a:r>
+          </a:p>
+          <a:p>
+            <a:pPr marL="139700" indent="0">
+              <a:lnSpc>
+                <a:spcPct val="100000"/>
+              </a:lnSpc>
+              <a:buNone/>
+            </a:pPr>
+            <a:r>
+              <a:rPr lang="en-US" sz="800" dirty="0"/>
+              <a:t>platform win32 -- Python 3.9.23, pytest-8.4.2, pluggy-1.6.0 -- C:\Graduation Project\V8\</a:t>
+            </a:r>
+            <a:r>
+              <a:rPr lang="en-US" sz="800" dirty="0" err="1"/>
+              <a:t>venv</a:t>
+            </a:r>
+            <a:r>
+              <a:rPr lang="en-US" sz="800" dirty="0"/>
+              <a:t>\Scripts\python.exe</a:t>
+            </a:r>
+          </a:p>
+          <a:p>
+            <a:pPr marL="139700" indent="0">
+              <a:lnSpc>
+                <a:spcPct val="100000"/>
+              </a:lnSpc>
+              <a:buNone/>
+            </a:pPr>
+            <a:r>
+              <a:rPr lang="en-US" sz="800" dirty="0" err="1"/>
+              <a:t>cachedir</a:t>
+            </a:r>
+            <a:r>
+              <a:rPr lang="en-US" sz="800" dirty="0"/>
+              <a:t>: .</a:t>
+            </a:r>
+            <a:r>
+              <a:rPr lang="en-US" sz="800" dirty="0" err="1"/>
+              <a:t>pytest_cache</a:t>
+            </a:r>
+            <a:endParaRPr lang="en-US" sz="800" dirty="0"/>
+          </a:p>
+          <a:p>
+            <a:pPr marL="139700" indent="0">
+              <a:lnSpc>
+                <a:spcPct val="100000"/>
+              </a:lnSpc>
+              <a:buNone/>
+            </a:pPr>
+            <a:r>
+              <a:rPr lang="en-US" sz="800" dirty="0" err="1"/>
+              <a:t>rootdir</a:t>
+            </a:r>
+            <a:r>
+              <a:rPr lang="en-US" sz="800" dirty="0"/>
+              <a:t>: C:\Graduation Project\V8\</a:t>
+            </a:r>
+            <a:r>
+              <a:rPr lang="en-US" sz="800" dirty="0" err="1"/>
+              <a:t>web_app</a:t>
+            </a:r>
+            <a:r>
+              <a:rPr lang="en-US" sz="800" dirty="0"/>
+              <a:t>\tests</a:t>
+            </a:r>
+          </a:p>
+          <a:p>
+            <a:pPr marL="139700" indent="0">
+              <a:lnSpc>
+                <a:spcPct val="100000"/>
+              </a:lnSpc>
+              <a:buNone/>
+            </a:pPr>
+            <a:r>
+              <a:rPr lang="en-US" sz="800" dirty="0"/>
+              <a:t>plugins: anyio-4.12.1, dash-4.0.0, base-url-2.1.0, playwright-0.7.1, timeout-2.4.0</a:t>
+            </a:r>
+          </a:p>
+          <a:p>
+            <a:pPr marL="139700" indent="0">
+              <a:lnSpc>
+                <a:spcPct val="100000"/>
+              </a:lnSpc>
+              <a:buNone/>
+            </a:pPr>
+            <a:r>
+              <a:rPr lang="en-US" sz="800" dirty="0"/>
+              <a:t>collected 16 items                                                                                                                                         </a:t>
+            </a:r>
+          </a:p>
+          <a:p>
+            <a:pPr marL="139700" indent="0">
+              <a:lnSpc>
+                <a:spcPct val="100000"/>
+              </a:lnSpc>
+              <a:buNone/>
+            </a:pPr>
+            <a:endParaRPr lang="en-US" sz="800" dirty="0"/>
+          </a:p>
+          <a:p>
+            <a:pPr marL="139700" indent="0">
+              <a:lnSpc>
+                <a:spcPct val="100000"/>
+              </a:lnSpc>
+              <a:buNone/>
+            </a:pPr>
+            <a:r>
+              <a:rPr lang="en-US" sz="800" dirty="0"/>
+              <a:t>test_app.py::</a:t>
+            </a:r>
+            <a:r>
+              <a:rPr lang="en-US" sz="800" dirty="0" err="1"/>
+              <a:t>TestFunctionalCases</a:t>
+            </a:r>
+            <a:r>
+              <a:rPr lang="en-US" sz="800" dirty="0"/>
+              <a:t>::test_A1_user_authentication_and_session PASSED</a:t>
+            </a:r>
+          </a:p>
+          <a:p>
+            <a:pPr marL="139700" indent="0">
+              <a:lnSpc>
+                <a:spcPct val="100000"/>
+              </a:lnSpc>
+              <a:buNone/>
+            </a:pPr>
+            <a:r>
+              <a:rPr lang="en-US" sz="800" dirty="0"/>
+              <a:t>test_app.py::</a:t>
+            </a:r>
+            <a:r>
+              <a:rPr lang="en-US" sz="800" dirty="0" err="1"/>
+              <a:t>TestFunctionalCases</a:t>
+            </a:r>
+            <a:r>
+              <a:rPr lang="en-US" sz="800" dirty="0"/>
+              <a:t>::test_A2_report_generation_and_download PASSED</a:t>
+            </a:r>
+          </a:p>
+          <a:p>
+            <a:pPr marL="139700" indent="0">
+              <a:lnSpc>
+                <a:spcPct val="100000"/>
+              </a:lnSpc>
+              <a:buNone/>
+            </a:pPr>
+            <a:r>
+              <a:rPr lang="en-US" sz="800" dirty="0"/>
+              <a:t>test_app.py::</a:t>
+            </a:r>
+            <a:r>
+              <a:rPr lang="en-US" sz="800" dirty="0" err="1"/>
+              <a:t>TestFunctionalCases</a:t>
+            </a:r>
+            <a:r>
+              <a:rPr lang="en-US" sz="800" dirty="0"/>
+              <a:t>::test_A3_report_content_validation PASSED</a:t>
+            </a:r>
+          </a:p>
+          <a:p>
+            <a:pPr marL="139700" indent="0">
+              <a:lnSpc>
+                <a:spcPct val="100000"/>
+              </a:lnSpc>
+              <a:buNone/>
+            </a:pPr>
+            <a:r>
+              <a:rPr lang="en-US" sz="800" dirty="0"/>
+              <a:t>test_app.py::</a:t>
+            </a:r>
+            <a:r>
+              <a:rPr lang="en-US" sz="800" dirty="0" err="1"/>
+              <a:t>TestFunctionalCases</a:t>
+            </a:r>
+            <a:r>
+              <a:rPr lang="en-US" sz="800" dirty="0"/>
+              <a:t>::test_A4_report_history_and_retrieval PASSED</a:t>
+            </a:r>
+          </a:p>
+          <a:p>
+            <a:pPr marL="139700" indent="0">
+              <a:lnSpc>
+                <a:spcPct val="100000"/>
+              </a:lnSpc>
+              <a:buNone/>
+            </a:pPr>
+            <a:r>
+              <a:rPr lang="en-US" sz="800" dirty="0"/>
+              <a:t>test_app.py::</a:t>
+            </a:r>
+            <a:r>
+              <a:rPr lang="en-US" sz="800" dirty="0" err="1"/>
+              <a:t>TestFunctionalCases</a:t>
+            </a:r>
+            <a:r>
+              <a:rPr lang="en-US" sz="800" dirty="0"/>
+              <a:t>::test_A5_performance_metrics_in_report PASSED</a:t>
+            </a:r>
+          </a:p>
+          <a:p>
+            <a:pPr marL="139700" indent="0">
+              <a:lnSpc>
+                <a:spcPct val="100000"/>
+              </a:lnSpc>
+              <a:buNone/>
+            </a:pPr>
+            <a:r>
+              <a:rPr lang="en-US" sz="800" dirty="0"/>
+              <a:t>test_app.py::</a:t>
+            </a:r>
+            <a:r>
+              <a:rPr lang="en-US" sz="800" dirty="0" err="1"/>
+              <a:t>TestNonFunctionalCases</a:t>
+            </a:r>
+            <a:r>
+              <a:rPr lang="en-US" sz="800" dirty="0"/>
+              <a:t>::test_B1_page_load_time   Page load time: 1752ms ✓</a:t>
+            </a:r>
+          </a:p>
+          <a:p>
+            <a:pPr marL="139700" indent="0">
+              <a:lnSpc>
+                <a:spcPct val="100000"/>
+              </a:lnSpc>
+              <a:buNone/>
+            </a:pPr>
+            <a:r>
+              <a:rPr lang="en-US" sz="800" dirty="0"/>
+              <a:t>PASSED</a:t>
+            </a:r>
+          </a:p>
+          <a:p>
+            <a:pPr marL="139700" indent="0">
+              <a:lnSpc>
+                <a:spcPct val="100000"/>
+              </a:lnSpc>
+              <a:buNone/>
+            </a:pPr>
+            <a:r>
+              <a:rPr lang="en-US" sz="800" dirty="0"/>
+              <a:t>test_app.py::</a:t>
+            </a:r>
+            <a:r>
+              <a:rPr lang="en-US" sz="800" dirty="0" err="1"/>
+              <a:t>TestNonFunctionalCases</a:t>
+            </a:r>
+            <a:r>
+              <a:rPr lang="en-US" sz="800" dirty="0"/>
+              <a:t>::test_B2_report_generation_time PASSED</a:t>
+            </a:r>
+          </a:p>
+          <a:p>
+            <a:pPr marL="139700" indent="0">
+              <a:lnSpc>
+                <a:spcPct val="100000"/>
+              </a:lnSpc>
+              <a:buNone/>
+            </a:pPr>
+            <a:r>
+              <a:rPr lang="en-US" sz="800" dirty="0"/>
+              <a:t>test_app.py::</a:t>
+            </a:r>
+            <a:r>
+              <a:rPr lang="en-US" sz="800" dirty="0" err="1"/>
+              <a:t>TestNonFunctionalCases</a:t>
+            </a:r>
+            <a:r>
+              <a:rPr lang="en-US" sz="800" dirty="0"/>
+              <a:t>::test_B3_concurrent_report_requests FAILED</a:t>
+            </a:r>
+          </a:p>
+          <a:p>
+            <a:pPr marL="139700" indent="0">
+              <a:lnSpc>
+                <a:spcPct val="100000"/>
+              </a:lnSpc>
+              <a:buNone/>
+            </a:pPr>
+            <a:r>
+              <a:rPr lang="en-US" sz="800" dirty="0"/>
+              <a:t>test_app.py::</a:t>
+            </a:r>
+            <a:r>
+              <a:rPr lang="en-US" sz="800" dirty="0" err="1"/>
+              <a:t>TestNonFunctionalCases</a:t>
+            </a:r>
+            <a:r>
+              <a:rPr lang="en-US" sz="800" dirty="0"/>
+              <a:t>::test_B4_api_response_time   /</a:t>
+            </a:r>
+            <a:r>
+              <a:rPr lang="en-US" sz="800" dirty="0" err="1"/>
+              <a:t>api</a:t>
+            </a:r>
+            <a:r>
+              <a:rPr lang="en-US" sz="800" dirty="0"/>
+              <a:t>/reports: Not available</a:t>
+            </a:r>
+          </a:p>
+          <a:p>
+            <a:pPr marL="139700" indent="0">
+              <a:lnSpc>
+                <a:spcPct val="100000"/>
+              </a:lnSpc>
+              <a:buNone/>
+            </a:pPr>
+            <a:r>
+              <a:rPr lang="en-US" sz="800" dirty="0"/>
+              <a:t>  /</a:t>
+            </a:r>
+            <a:r>
+              <a:rPr lang="en-US" sz="800" dirty="0" err="1"/>
+              <a:t>api</a:t>
+            </a:r>
+            <a:r>
+              <a:rPr lang="en-US" sz="800" dirty="0"/>
+              <a:t>/performance-metrics: Not available</a:t>
+            </a:r>
+          </a:p>
+          <a:p>
+            <a:pPr marL="139700" indent="0">
+              <a:lnSpc>
+                <a:spcPct val="100000"/>
+              </a:lnSpc>
+              <a:buNone/>
+            </a:pPr>
+            <a:r>
+              <a:rPr lang="en-US" sz="800" dirty="0"/>
+              <a:t>  /</a:t>
+            </a:r>
+            <a:r>
+              <a:rPr lang="en-US" sz="800" dirty="0" err="1"/>
+              <a:t>api</a:t>
+            </a:r>
+            <a:r>
+              <a:rPr lang="en-US" sz="800" dirty="0"/>
+              <a:t>/user/history: Not available</a:t>
+            </a:r>
+          </a:p>
+          <a:p>
+            <a:pPr marL="139700" indent="0">
+              <a:lnSpc>
+                <a:spcPct val="100000"/>
+              </a:lnSpc>
+              <a:buNone/>
+            </a:pPr>
+            <a:r>
+              <a:rPr lang="en-US" sz="800" dirty="0"/>
+              <a:t>PASSED</a:t>
+            </a:r>
+          </a:p>
+          <a:p>
+            <a:pPr marL="139700" indent="0">
+              <a:lnSpc>
+                <a:spcPct val="100000"/>
+              </a:lnSpc>
+              <a:buNone/>
+            </a:pPr>
+            <a:r>
+              <a:rPr lang="en-US" sz="800" dirty="0"/>
+              <a:t>test_app.py::</a:t>
+            </a:r>
+            <a:r>
+              <a:rPr lang="en-US" sz="800" dirty="0" err="1"/>
+              <a:t>TestNonFunctionalCases</a:t>
+            </a:r>
+            <a:r>
+              <a:rPr lang="en-US" sz="800" dirty="0"/>
+              <a:t>::test_B5_database_query_performance   Database query time: 542ms ✓</a:t>
+            </a:r>
+          </a:p>
+          <a:p>
+            <a:pPr marL="139700" indent="0">
+              <a:lnSpc>
+                <a:spcPct val="100000"/>
+              </a:lnSpc>
+              <a:buNone/>
+            </a:pPr>
+            <a:r>
+              <a:rPr lang="en-US" sz="800" dirty="0"/>
+              <a:t>PASSED</a:t>
+            </a:r>
+          </a:p>
+          <a:p>
+            <a:pPr marL="139700" indent="0">
+              <a:lnSpc>
+                <a:spcPct val="100000"/>
+              </a:lnSpc>
+              <a:buNone/>
+            </a:pPr>
+            <a:r>
+              <a:rPr lang="en-US" sz="800" dirty="0"/>
+              <a:t>test_app.py::</a:t>
+            </a:r>
+            <a:r>
+              <a:rPr lang="en-US" sz="800" dirty="0" err="1"/>
+              <a:t>TestReportQuality</a:t>
+            </a:r>
+            <a:r>
+              <a:rPr lang="en-US" sz="800" dirty="0"/>
+              <a:t>::</a:t>
+            </a:r>
+            <a:r>
+              <a:rPr lang="en-US" sz="800" dirty="0" err="1"/>
+              <a:t>test_report_emotion_summary_exists</a:t>
+            </a:r>
+            <a:r>
+              <a:rPr lang="en-US" sz="800" dirty="0"/>
+              <a:t> PASSED</a:t>
+            </a:r>
+          </a:p>
+          <a:p>
+            <a:pPr marL="139700" indent="0">
+              <a:lnSpc>
+                <a:spcPct val="100000"/>
+              </a:lnSpc>
+              <a:buNone/>
+            </a:pPr>
+            <a:r>
+              <a:rPr lang="en-US" sz="800" dirty="0"/>
+              <a:t>test_app.py::</a:t>
+            </a:r>
+            <a:r>
+              <a:rPr lang="en-US" sz="800" dirty="0" err="1"/>
+              <a:t>TestReportQuality</a:t>
+            </a:r>
+            <a:r>
+              <a:rPr lang="en-US" sz="800" dirty="0"/>
+              <a:t>::</a:t>
+            </a:r>
+            <a:r>
+              <a:rPr lang="en-US" sz="800" dirty="0" err="1"/>
+              <a:t>test_report_recommendations_exist</a:t>
+            </a:r>
+            <a:r>
+              <a:rPr lang="en-US" sz="800" dirty="0"/>
+              <a:t> PASSED</a:t>
+            </a:r>
+          </a:p>
+          <a:p>
+            <a:pPr marL="139700" indent="0">
+              <a:lnSpc>
+                <a:spcPct val="100000"/>
+              </a:lnSpc>
+              <a:buNone/>
+            </a:pPr>
+            <a:r>
+              <a:rPr lang="en-US" sz="800" dirty="0"/>
+              <a:t>test_app.py::</a:t>
+            </a:r>
+            <a:r>
+              <a:rPr lang="en-US" sz="800" dirty="0" err="1"/>
+              <a:t>TestReportQuality</a:t>
+            </a:r>
+            <a:r>
+              <a:rPr lang="en-US" sz="800" dirty="0"/>
+              <a:t>::</a:t>
+            </a:r>
+            <a:r>
+              <a:rPr lang="en-US" sz="800" dirty="0" err="1"/>
+              <a:t>test_report_download_formats</a:t>
+            </a:r>
+            <a:r>
+              <a:rPr lang="en-US" sz="800" dirty="0"/>
+              <a:t> PASSED</a:t>
+            </a:r>
+          </a:p>
+          <a:p>
+            <a:pPr marL="139700" indent="0">
+              <a:lnSpc>
+                <a:spcPct val="100000"/>
+              </a:lnSpc>
+              <a:buNone/>
+            </a:pPr>
+            <a:r>
+              <a:rPr lang="en-US" sz="800" dirty="0"/>
+              <a:t>test_app.py::</a:t>
+            </a:r>
+            <a:r>
+              <a:rPr lang="en-US" sz="800" dirty="0" err="1"/>
+              <a:t>TestUsabilitySUS</a:t>
+            </a:r>
+            <a:r>
+              <a:rPr lang="en-US" sz="800" dirty="0"/>
+              <a:t>::</a:t>
+            </a:r>
+            <a:r>
+              <a:rPr lang="en-US" sz="800" dirty="0" err="1"/>
+              <a:t>test_sus_task_navigation</a:t>
+            </a:r>
+            <a:r>
+              <a:rPr lang="en-US" sz="800" dirty="0"/>
+              <a:t> ✓ SUS navigation test passed</a:t>
+            </a:r>
+          </a:p>
+          <a:p>
+            <a:pPr marL="139700" indent="0">
+              <a:lnSpc>
+                <a:spcPct val="100000"/>
+              </a:lnSpc>
+              <a:buNone/>
+            </a:pPr>
+            <a:r>
+              <a:rPr lang="en-US" sz="800" dirty="0"/>
+              <a:t>PASSED</a:t>
+            </a:r>
+          </a:p>
+          <a:p>
+            <a:pPr marL="139700" indent="0">
+              <a:lnSpc>
+                <a:spcPct val="100000"/>
+              </a:lnSpc>
+              <a:buNone/>
+            </a:pPr>
+            <a:r>
+              <a:rPr lang="en-US" sz="800" dirty="0"/>
+              <a:t>test_app.py::</a:t>
+            </a:r>
+            <a:r>
+              <a:rPr lang="en-US" sz="800" dirty="0" err="1"/>
+              <a:t>TestUsabilitySUS</a:t>
+            </a:r>
+            <a:r>
+              <a:rPr lang="en-US" sz="800" dirty="0"/>
+              <a:t>::</a:t>
+            </a:r>
+            <a:r>
+              <a:rPr lang="en-US" sz="800" dirty="0" err="1"/>
+              <a:t>test_sus_error_count</a:t>
+            </a:r>
+            <a:r>
+              <a:rPr lang="en-US" sz="800" dirty="0"/>
+              <a:t>   Errors in workflow: 0 ✓</a:t>
+            </a:r>
+          </a:p>
+          <a:p>
+            <a:pPr marL="139700" indent="0">
+              <a:lnSpc>
+                <a:spcPct val="100000"/>
+              </a:lnSpc>
+              <a:buNone/>
+            </a:pPr>
+            <a:r>
+              <a:rPr lang="en-US" sz="800" dirty="0"/>
+              <a:t>PASSED</a:t>
+            </a:r>
+          </a:p>
+          <a:p>
+            <a:pPr marL="139700" indent="0">
+              <a:lnSpc>
+                <a:spcPct val="100000"/>
+              </a:lnSpc>
+              <a:buNone/>
+            </a:pPr>
+            <a:r>
+              <a:rPr lang="en-US" sz="800" dirty="0"/>
+              <a:t>test_app.py::</a:t>
+            </a:r>
+            <a:r>
+              <a:rPr lang="en-US" sz="800" dirty="0" err="1"/>
+              <a:t>test_backend_emotion_api</a:t>
+            </a:r>
+            <a:r>
+              <a:rPr lang="en-US" sz="800" dirty="0"/>
+              <a:t>   Note: Backend emotion API endpoint not found - check implementation</a:t>
+            </a:r>
+          </a:p>
+          <a:p>
+            <a:pPr marL="139700" indent="0">
+              <a:lnSpc>
+                <a:spcPct val="100000"/>
+              </a:lnSpc>
+              <a:buNone/>
+            </a:pPr>
+            <a:r>
+              <a:rPr lang="en-US" sz="800" dirty="0"/>
+              <a:t>PASSED</a:t>
+            </a:r>
+          </a:p>
+          <a:p>
+            <a:pPr marL="139700" indent="0">
+              <a:lnSpc>
+                <a:spcPct val="100000"/>
+              </a:lnSpc>
+              <a:buNone/>
+            </a:pPr>
+            <a:endParaRPr lang="en-US" sz="800" dirty="0"/>
+          </a:p>
+        </p:txBody>
+      </p:sp>
+    </p:spTree>
+    <p:extLst>
+      <p:ext uri="{BB962C8B-B14F-4D97-AF65-F5344CB8AC3E}">
+        <p14:creationId xmlns:p14="http://schemas.microsoft.com/office/powerpoint/2010/main" val="3319357168"/>
+      </p:ext>
+    </p:extLst>
+  </p:cSld>
+  <p:clrMapOvr>
+    <a:masterClrMapping/>
+  </p:clrMapOvr>
+</p:sld>
+</file>
+
+<file path=ppt/slides/slide23.xml><?xml version="1.0" encoding="utf-8"?>
+<p:sld xmlns:a="http://schemas.openxmlformats.org/drawingml/2006/main" xmlns:r="http://schemas.openxmlformats.org/officeDocument/2006/relationships" xmlns:p="http://schemas.openxmlformats.org/presentationml/2006/main">
+  <p:cSld>
+    <p:spTree>
+      <p:nvGrpSpPr>
+        <p:cNvPr id="1" name=""/>
+        <p:cNvGrpSpPr/>
+        <p:nvPr/>
+      </p:nvGrpSpPr>
+      <p:grpSpPr>
+        <a:xfrm>
+          <a:off x="0" y="0"/>
+          <a:ext cx="0" cy="0"/>
+          <a:chOff x="0" y="0"/>
+          <a:chExt cx="0" cy="0"/>
+        </a:xfrm>
+      </p:grpSpPr>
+      <p:sp>
+        <p:nvSpPr>
+          <p:cNvPr id="5" name="Text Placeholder 4"/>
+          <p:cNvSpPr>
+            <a:spLocks noGrp="1"/>
+          </p:cNvSpPr>
+          <p:nvPr>
+            <p:ph type="body" idx="1"/>
+          </p:nvPr>
+        </p:nvSpPr>
+        <p:spPr>
+          <a:xfrm>
+            <a:off x="55417" y="535948"/>
+            <a:ext cx="10176165" cy="4839616"/>
+          </a:xfrm>
+        </p:spPr>
+        <p:txBody>
+          <a:bodyPr/>
+          <a:lstStyle/>
+          <a:p>
+            <a:pPr marL="139700" indent="0">
+              <a:lnSpc>
+                <a:spcPct val="100000"/>
+              </a:lnSpc>
+              <a:buNone/>
+            </a:pPr>
+            <a:r>
+              <a:rPr lang="en-US" sz="800" dirty="0"/>
+              <a:t>======================================================================== FAILURES =========================================================================</a:t>
+            </a:r>
+          </a:p>
+          <a:p>
+            <a:pPr marL="139700" indent="0">
+              <a:lnSpc>
+                <a:spcPct val="100000"/>
+              </a:lnSpc>
+              <a:buNone/>
+            </a:pPr>
+            <a:r>
+              <a:rPr lang="en-US" sz="800" dirty="0" smtClean="0"/>
+              <a:t>_______________________________________ </a:t>
+            </a:r>
+            <a:r>
+              <a:rPr lang="en-US" sz="800" dirty="0"/>
+              <a:t>TestNonFunctionalCases.test_B3_concurrent_report_requests </a:t>
+            </a:r>
+            <a:r>
+              <a:rPr lang="en-US" sz="800" dirty="0" smtClean="0"/>
+              <a:t>_______________________________________</a:t>
+            </a:r>
+            <a:endParaRPr lang="en-US" sz="800" dirty="0"/>
+          </a:p>
+          <a:p>
+            <a:pPr marL="139700" indent="0">
+              <a:lnSpc>
+                <a:spcPct val="100000"/>
+              </a:lnSpc>
+              <a:buNone/>
+            </a:pPr>
+            <a:endParaRPr lang="en-US" sz="800" dirty="0"/>
+          </a:p>
+          <a:p>
+            <a:pPr marL="139700" indent="0">
+              <a:lnSpc>
+                <a:spcPct val="100000"/>
+              </a:lnSpc>
+              <a:buNone/>
+            </a:pPr>
+            <a:r>
+              <a:rPr lang="en-US" sz="800" dirty="0"/>
+              <a:t>self = &lt;</a:t>
+            </a:r>
+            <a:r>
+              <a:rPr lang="en-US" sz="800" dirty="0" err="1"/>
+              <a:t>test_app.TestNonFunctionalCases</a:t>
+            </a:r>
+            <a:r>
+              <a:rPr lang="en-US" sz="800" dirty="0"/>
+              <a:t> object at 0x000002ABFF2E9070&gt;</a:t>
+            </a:r>
+          </a:p>
+          <a:p>
+            <a:pPr marL="139700" indent="0">
+              <a:lnSpc>
+                <a:spcPct val="100000"/>
+              </a:lnSpc>
+              <a:buNone/>
+            </a:pPr>
+            <a:endParaRPr lang="en-US" sz="800" dirty="0"/>
+          </a:p>
+          <a:p>
+            <a:pPr marL="139700" indent="0">
+              <a:lnSpc>
+                <a:spcPct val="100000"/>
+              </a:lnSpc>
+              <a:buNone/>
+            </a:pPr>
+            <a:r>
+              <a:rPr lang="en-US" sz="800" dirty="0"/>
+              <a:t>    </a:t>
+            </a:r>
+            <a:r>
+              <a:rPr lang="en-US" sz="800" dirty="0" err="1"/>
+              <a:t>def</a:t>
+            </a:r>
+            <a:r>
+              <a:rPr lang="en-US" sz="800" dirty="0"/>
+              <a:t> test_B3_concurrent_report_requests(self):</a:t>
+            </a:r>
+          </a:p>
+          <a:p>
+            <a:pPr marL="139700" indent="0">
+              <a:lnSpc>
+                <a:spcPct val="100000"/>
+              </a:lnSpc>
+              <a:buNone/>
+            </a:pPr>
+            <a:r>
+              <a:rPr lang="en-US" sz="800" dirty="0"/>
+              <a:t>        """Test handling concurrent report requests"""</a:t>
+            </a:r>
+          </a:p>
+          <a:p>
+            <a:pPr marL="139700" indent="0">
+              <a:lnSpc>
+                <a:spcPct val="100000"/>
+              </a:lnSpc>
+              <a:buNone/>
+            </a:pPr>
+            <a:r>
+              <a:rPr lang="en-US" sz="800" dirty="0"/>
+              <a:t>        import </a:t>
+            </a:r>
+            <a:r>
+              <a:rPr lang="en-US" sz="800" dirty="0" err="1"/>
+              <a:t>concurrent.futures</a:t>
+            </a:r>
+            <a:endParaRPr lang="en-US" sz="800" dirty="0"/>
+          </a:p>
+          <a:p>
+            <a:pPr marL="139700" indent="0">
+              <a:lnSpc>
+                <a:spcPct val="100000"/>
+              </a:lnSpc>
+              <a:buNone/>
+            </a:pPr>
+            <a:r>
+              <a:rPr lang="en-US" sz="800" dirty="0"/>
+              <a:t>    </a:t>
+            </a:r>
+          </a:p>
+          <a:p>
+            <a:pPr marL="139700" indent="0">
+              <a:lnSpc>
+                <a:spcPct val="100000"/>
+              </a:lnSpc>
+              <a:buNone/>
+            </a:pPr>
+            <a:r>
+              <a:rPr lang="en-US" sz="800" dirty="0"/>
+              <a:t>        </a:t>
+            </a:r>
+            <a:r>
+              <a:rPr lang="en-US" sz="800" dirty="0" err="1"/>
+              <a:t>def</a:t>
+            </a:r>
+            <a:r>
+              <a:rPr lang="en-US" sz="800" dirty="0"/>
+              <a:t> </a:t>
+            </a:r>
+            <a:r>
+              <a:rPr lang="en-US" sz="800" dirty="0" err="1"/>
+              <a:t>request_report</a:t>
+            </a:r>
+            <a:r>
+              <a:rPr lang="en-US" sz="800" dirty="0"/>
+              <a:t>():</a:t>
+            </a:r>
+          </a:p>
+          <a:p>
+            <a:pPr marL="139700" indent="0">
+              <a:lnSpc>
+                <a:spcPct val="100000"/>
+              </a:lnSpc>
+              <a:buNone/>
+            </a:pPr>
+            <a:r>
+              <a:rPr lang="en-US" sz="800" dirty="0"/>
+              <a:t>            try:</a:t>
+            </a:r>
+          </a:p>
+          <a:p>
+            <a:pPr marL="139700" indent="0">
+              <a:lnSpc>
+                <a:spcPct val="100000"/>
+              </a:lnSpc>
+              <a:buNone/>
+            </a:pPr>
+            <a:r>
+              <a:rPr lang="en-US" sz="800" dirty="0"/>
+              <a:t>                response = </a:t>
+            </a:r>
+            <a:r>
+              <a:rPr lang="en-US" sz="800" dirty="0" err="1"/>
+              <a:t>requests.get</a:t>
+            </a:r>
+            <a:r>
+              <a:rPr lang="en-US" sz="800" dirty="0"/>
+              <a:t>(f'{</a:t>
+            </a:r>
+            <a:r>
+              <a:rPr lang="en-US" sz="800" dirty="0" err="1"/>
+              <a:t>self.api_base</a:t>
+            </a:r>
+            <a:r>
+              <a:rPr lang="en-US" sz="800" dirty="0"/>
+              <a:t>}/</a:t>
+            </a:r>
+            <a:r>
+              <a:rPr lang="en-US" sz="800" dirty="0" err="1"/>
+              <a:t>api</a:t>
+            </a:r>
+            <a:r>
+              <a:rPr lang="en-US" sz="800" dirty="0"/>
+              <a:t>/generate-report', timeout=10)</a:t>
+            </a:r>
+          </a:p>
+          <a:p>
+            <a:pPr marL="139700" indent="0">
+              <a:lnSpc>
+                <a:spcPct val="100000"/>
+              </a:lnSpc>
+              <a:buNone/>
+            </a:pPr>
+            <a:r>
+              <a:rPr lang="en-US" sz="800" dirty="0"/>
+              <a:t>                return </a:t>
+            </a:r>
+            <a:r>
+              <a:rPr lang="en-US" sz="800" dirty="0" err="1"/>
+              <a:t>response.status_code</a:t>
+            </a:r>
+            <a:r>
+              <a:rPr lang="en-US" sz="800" dirty="0"/>
+              <a:t> == 200</a:t>
+            </a:r>
+          </a:p>
+          <a:p>
+            <a:pPr marL="139700" indent="0">
+              <a:lnSpc>
+                <a:spcPct val="100000"/>
+              </a:lnSpc>
+              <a:buNone/>
+            </a:pPr>
+            <a:r>
+              <a:rPr lang="en-US" sz="800" dirty="0"/>
+              <a:t>            except:</a:t>
+            </a:r>
+          </a:p>
+          <a:p>
+            <a:pPr marL="139700" indent="0">
+              <a:lnSpc>
+                <a:spcPct val="100000"/>
+              </a:lnSpc>
+              <a:buNone/>
+            </a:pPr>
+            <a:r>
+              <a:rPr lang="en-US" sz="800" dirty="0"/>
+              <a:t>                return False</a:t>
+            </a:r>
+          </a:p>
+          <a:p>
+            <a:pPr marL="139700" indent="0">
+              <a:lnSpc>
+                <a:spcPct val="100000"/>
+              </a:lnSpc>
+              <a:buNone/>
+            </a:pPr>
+            <a:r>
+              <a:rPr lang="en-US" sz="800" dirty="0"/>
+              <a:t>    </a:t>
+            </a:r>
+          </a:p>
+          <a:p>
+            <a:pPr marL="139700" indent="0">
+              <a:lnSpc>
+                <a:spcPct val="100000"/>
+              </a:lnSpc>
+              <a:buNone/>
+            </a:pPr>
+            <a:r>
+              <a:rPr lang="en-US" sz="800" dirty="0"/>
+              <a:t>        # Simulate 5 concurrent report requests</a:t>
+            </a:r>
+          </a:p>
+          <a:p>
+            <a:pPr marL="139700" indent="0">
+              <a:lnSpc>
+                <a:spcPct val="100000"/>
+              </a:lnSpc>
+              <a:buNone/>
+            </a:pPr>
+            <a:r>
+              <a:rPr lang="en-US" sz="800" dirty="0"/>
+              <a:t>        with </a:t>
+            </a:r>
+            <a:r>
+              <a:rPr lang="en-US" sz="800" dirty="0" err="1"/>
+              <a:t>concurrent.futures.ThreadPoolExecutor</a:t>
+            </a:r>
+            <a:r>
+              <a:rPr lang="en-US" sz="800" dirty="0"/>
+              <a:t>(</a:t>
+            </a:r>
+            <a:r>
+              <a:rPr lang="en-US" sz="800" dirty="0" err="1"/>
+              <a:t>max_workers</a:t>
+            </a:r>
+            <a:r>
+              <a:rPr lang="en-US" sz="800" dirty="0"/>
+              <a:t>=5) as executor:</a:t>
+            </a:r>
+          </a:p>
+          <a:p>
+            <a:pPr marL="139700" indent="0">
+              <a:lnSpc>
+                <a:spcPct val="100000"/>
+              </a:lnSpc>
+              <a:buNone/>
+            </a:pPr>
+            <a:r>
+              <a:rPr lang="en-US" sz="800" dirty="0"/>
+              <a:t>            futures = [</a:t>
+            </a:r>
+            <a:r>
+              <a:rPr lang="en-US" sz="800" dirty="0" err="1"/>
+              <a:t>executor.submit</a:t>
+            </a:r>
+            <a:r>
+              <a:rPr lang="en-US" sz="800" dirty="0"/>
+              <a:t>(</a:t>
+            </a:r>
+            <a:r>
+              <a:rPr lang="en-US" sz="800" dirty="0" err="1"/>
+              <a:t>request_report</a:t>
+            </a:r>
+            <a:r>
+              <a:rPr lang="en-US" sz="800" dirty="0"/>
+              <a:t>) for _ in range(5)]</a:t>
+            </a:r>
+          </a:p>
+          <a:p>
+            <a:pPr marL="139700" indent="0">
+              <a:lnSpc>
+                <a:spcPct val="100000"/>
+              </a:lnSpc>
+              <a:buNone/>
+            </a:pPr>
+            <a:r>
+              <a:rPr lang="en-US" sz="800" dirty="0"/>
+              <a:t>            results = [</a:t>
+            </a:r>
+            <a:r>
+              <a:rPr lang="en-US" sz="800" dirty="0" err="1"/>
+              <a:t>f.result</a:t>
+            </a:r>
+            <a:r>
+              <a:rPr lang="en-US" sz="800" dirty="0"/>
+              <a:t>() for f in futures]</a:t>
+            </a:r>
+          </a:p>
+          <a:p>
+            <a:pPr marL="139700" indent="0">
+              <a:lnSpc>
+                <a:spcPct val="100000"/>
+              </a:lnSpc>
+              <a:buNone/>
+            </a:pPr>
+            <a:r>
+              <a:rPr lang="en-US" sz="800" dirty="0"/>
+              <a:t>    </a:t>
+            </a:r>
+          </a:p>
+          <a:p>
+            <a:pPr marL="139700" indent="0">
+              <a:lnSpc>
+                <a:spcPct val="100000"/>
+              </a:lnSpc>
+              <a:buNone/>
+            </a:pPr>
+            <a:r>
+              <a:rPr lang="en-US" sz="800" dirty="0"/>
+              <a:t>        </a:t>
+            </a:r>
+            <a:r>
+              <a:rPr lang="en-US" sz="800" dirty="0" err="1"/>
+              <a:t>success_rate</a:t>
+            </a:r>
+            <a:r>
+              <a:rPr lang="en-US" sz="800" dirty="0"/>
+              <a:t> = sum(results) / </a:t>
+            </a:r>
+            <a:r>
+              <a:rPr lang="en-US" sz="800" dirty="0" err="1"/>
+              <a:t>len</a:t>
+            </a:r>
+            <a:r>
+              <a:rPr lang="en-US" sz="800" dirty="0"/>
+              <a:t>(results) * 100</a:t>
+            </a:r>
+          </a:p>
+          <a:p>
+            <a:pPr marL="139700" indent="0">
+              <a:lnSpc>
+                <a:spcPct val="100000"/>
+              </a:lnSpc>
+              <a:buNone/>
+            </a:pPr>
+            <a:r>
+              <a:rPr lang="en-US" sz="800" dirty="0"/>
+              <a:t>&gt;       assert </a:t>
+            </a:r>
+            <a:r>
+              <a:rPr lang="en-US" sz="800" dirty="0" err="1"/>
+              <a:t>success_rate</a:t>
+            </a:r>
+            <a:r>
+              <a:rPr lang="en-US" sz="800" dirty="0"/>
+              <a:t> &gt;= 80, </a:t>
+            </a:r>
+            <a:r>
+              <a:rPr lang="en-US" sz="800" dirty="0" err="1"/>
+              <a:t>f"Only</a:t>
+            </a:r>
+            <a:r>
+              <a:rPr lang="en-US" sz="800" dirty="0"/>
+              <a:t> {</a:t>
+            </a:r>
+            <a:r>
+              <a:rPr lang="en-US" sz="800" dirty="0" err="1"/>
+              <a:t>success_rate</a:t>
+            </a:r>
+            <a:r>
+              <a:rPr lang="en-US" sz="800" dirty="0"/>
+              <a:t>}% of concurrent requests succeeded"</a:t>
+            </a:r>
+          </a:p>
+          <a:p>
+            <a:pPr marL="139700" indent="0">
+              <a:lnSpc>
+                <a:spcPct val="100000"/>
+              </a:lnSpc>
+              <a:buNone/>
+            </a:pPr>
+            <a:r>
+              <a:rPr lang="en-US" sz="800" dirty="0"/>
+              <a:t>E       </a:t>
+            </a:r>
+            <a:r>
+              <a:rPr lang="en-US" sz="800" dirty="0" err="1"/>
+              <a:t>AssertionError</a:t>
+            </a:r>
+            <a:r>
+              <a:rPr lang="en-US" sz="800" dirty="0"/>
+              <a:t>: Only 0.0% of concurrent requests succeeded</a:t>
+            </a:r>
+          </a:p>
+          <a:p>
+            <a:pPr marL="139700" indent="0">
+              <a:lnSpc>
+                <a:spcPct val="100000"/>
+              </a:lnSpc>
+              <a:buNone/>
+            </a:pPr>
+            <a:r>
+              <a:rPr lang="en-US" sz="800" dirty="0"/>
+              <a:t>E       assert 0.0 &gt;= 80</a:t>
+            </a:r>
+          </a:p>
+          <a:p>
+            <a:pPr marL="139700" indent="0">
+              <a:lnSpc>
+                <a:spcPct val="100000"/>
+              </a:lnSpc>
+              <a:buNone/>
+            </a:pPr>
+            <a:endParaRPr lang="en-US" sz="800" dirty="0"/>
+          </a:p>
+          <a:p>
+            <a:pPr marL="139700" indent="0">
+              <a:lnSpc>
+                <a:spcPct val="100000"/>
+              </a:lnSpc>
+              <a:buNone/>
+            </a:pPr>
+            <a:r>
+              <a:rPr lang="en-US" sz="800" dirty="0"/>
+              <a:t>test_app.py:179: </a:t>
+            </a:r>
+            <a:r>
+              <a:rPr lang="en-US" sz="800" dirty="0" err="1"/>
+              <a:t>AssertionError</a:t>
+            </a:r>
+            <a:endParaRPr lang="en-US" sz="800" dirty="0"/>
+          </a:p>
+          <a:p>
+            <a:pPr marL="139700" indent="0">
+              <a:lnSpc>
+                <a:spcPct val="100000"/>
+              </a:lnSpc>
+              <a:buNone/>
+            </a:pPr>
+            <a:r>
+              <a:rPr lang="en-US" sz="800" dirty="0"/>
+              <a:t>================================================================= short test summary info =================================================================</a:t>
+            </a:r>
+          </a:p>
+          <a:p>
+            <a:pPr marL="139700" indent="0">
+              <a:lnSpc>
+                <a:spcPct val="100000"/>
+              </a:lnSpc>
+              <a:buNone/>
+            </a:pPr>
+            <a:r>
+              <a:rPr lang="en-US" sz="800" dirty="0"/>
+              <a:t>FAILED test_app.py::</a:t>
+            </a:r>
+            <a:r>
+              <a:rPr lang="en-US" sz="800" dirty="0" err="1"/>
+              <a:t>TestNonFunctionalCases</a:t>
+            </a:r>
+            <a:r>
+              <a:rPr lang="en-US" sz="800" dirty="0"/>
+              <a:t>::test_B3_concurrent_report_requests - </a:t>
+            </a:r>
+            <a:r>
+              <a:rPr lang="en-US" sz="800" dirty="0" err="1"/>
+              <a:t>AssertionError</a:t>
+            </a:r>
+            <a:r>
+              <a:rPr lang="en-US" sz="800" dirty="0"/>
+              <a:t>: Only 0.0% of concurrent requests succeeded</a:t>
+            </a:r>
+          </a:p>
+          <a:p>
+            <a:pPr marL="139700" indent="0">
+              <a:lnSpc>
+                <a:spcPct val="100000"/>
+              </a:lnSpc>
+              <a:buNone/>
+            </a:pPr>
+            <a:r>
+              <a:rPr lang="en-US" sz="800" dirty="0"/>
+              <a:t>======================================================== 1 failed, 15 passed in 155.01s (0:02:35) </a:t>
+            </a:r>
+            <a:r>
+              <a:rPr lang="en-US" sz="800" dirty="0" smtClean="0"/>
+              <a:t>=========================================================</a:t>
+            </a:r>
+            <a:endParaRPr lang="en-US" sz="800" dirty="0"/>
+          </a:p>
+        </p:txBody>
+      </p:sp>
+    </p:spTree>
+    <p:extLst>
+      <p:ext uri="{BB962C8B-B14F-4D97-AF65-F5344CB8AC3E}">
+        <p14:creationId xmlns:p14="http://schemas.microsoft.com/office/powerpoint/2010/main" val="4032219147"/>
       </p:ext>
     </p:extLst>
   </p:cSld>

--- a/Milestone 5/Milestone5_Testing&Evaluation.pptx
+++ b/Milestone 5/Milestone5_Testing&Evaluation.pptx
@@ -5,68 +5,71 @@
     <p:sldMasterId id="2147483677" r:id="rId1"/>
   </p:sldMasterIdLst>
   <p:notesMasterIdLst>
-    <p:notesMasterId r:id="rId25"/>
+    <p:notesMasterId r:id="rId27"/>
   </p:notesMasterIdLst>
   <p:sldIdLst>
     <p:sldId id="256" r:id="rId2"/>
-    <p:sldId id="298" r:id="rId3"/>
-    <p:sldId id="299" r:id="rId4"/>
-    <p:sldId id="300" r:id="rId5"/>
-    <p:sldId id="301" r:id="rId6"/>
-    <p:sldId id="302" r:id="rId7"/>
-    <p:sldId id="304" r:id="rId8"/>
-    <p:sldId id="305" r:id="rId9"/>
-    <p:sldId id="306" r:id="rId10"/>
-    <p:sldId id="307" r:id="rId11"/>
-    <p:sldId id="308" r:id="rId12"/>
-    <p:sldId id="261" r:id="rId13"/>
-    <p:sldId id="259" r:id="rId14"/>
-    <p:sldId id="309" r:id="rId15"/>
-    <p:sldId id="310" r:id="rId16"/>
-    <p:sldId id="265" r:id="rId17"/>
-    <p:sldId id="311" r:id="rId18"/>
-    <p:sldId id="290" r:id="rId19"/>
-    <p:sldId id="312" r:id="rId20"/>
-    <p:sldId id="313" r:id="rId21"/>
-    <p:sldId id="314" r:id="rId22"/>
-    <p:sldId id="315" r:id="rId23"/>
-    <p:sldId id="316" r:id="rId24"/>
+    <p:sldId id="317" r:id="rId3"/>
+    <p:sldId id="318" r:id="rId4"/>
+    <p:sldId id="298" r:id="rId5"/>
+    <p:sldId id="299" r:id="rId6"/>
+    <p:sldId id="300" r:id="rId7"/>
+    <p:sldId id="301" r:id="rId8"/>
+    <p:sldId id="302" r:id="rId9"/>
+    <p:sldId id="304" r:id="rId10"/>
+    <p:sldId id="305" r:id="rId11"/>
+    <p:sldId id="306" r:id="rId12"/>
+    <p:sldId id="307" r:id="rId13"/>
+    <p:sldId id="308" r:id="rId14"/>
+    <p:sldId id="261" r:id="rId15"/>
+    <p:sldId id="259" r:id="rId16"/>
+    <p:sldId id="309" r:id="rId17"/>
+    <p:sldId id="310" r:id="rId18"/>
+    <p:sldId id="265" r:id="rId19"/>
+    <p:sldId id="314" r:id="rId20"/>
+    <p:sldId id="315" r:id="rId21"/>
+    <p:sldId id="316" r:id="rId22"/>
+    <p:sldId id="311" r:id="rId23"/>
+    <p:sldId id="290" r:id="rId24"/>
+    <p:sldId id="312" r:id="rId25"/>
+    <p:sldId id="313" r:id="rId26"/>
   </p:sldIdLst>
   <p:sldSz cx="9144000" cy="5143500" type="screen16x9"/>
   <p:notesSz cx="6858000" cy="9144000"/>
   <p:embeddedFontLst>
     <p:embeddedFont>
       <p:font typeface="Montserrat Black" panose="020B0604020202020204" charset="0"/>
-      <p:bold r:id="rId26"/>
-      <p:boldItalic r:id="rId27"/>
+      <p:bold r:id="rId28"/>
+      <p:italic r:id="rId29"/>
+      <p:boldItalic r:id="rId30"/>
     </p:embeddedFont>
     <p:embeddedFont>
       <p:font typeface="Montserrat Medium" panose="020B0604020202020204" charset="0"/>
-      <p:regular r:id="rId28"/>
-      <p:bold r:id="rId29"/>
-      <p:italic r:id="rId30"/>
-      <p:boldItalic r:id="rId31"/>
+      <p:regular r:id="rId31"/>
+      <p:bold r:id="rId32"/>
+      <p:italic r:id="rId33"/>
+      <p:boldItalic r:id="rId34"/>
     </p:embeddedFont>
     <p:embeddedFont>
       <p:font typeface="Quicksand Medium" panose="020B0604020202020204" charset="0"/>
-      <p:regular r:id="rId32"/>
-      <p:bold r:id="rId33"/>
+      <p:regular r:id="rId35"/>
+      <p:bold r:id="rId36"/>
     </p:embeddedFont>
     <p:embeddedFont>
       <p:font typeface="Quicksand" panose="020B0604020202020204" charset="0"/>
-      <p:regular r:id="rId34"/>
-      <p:bold r:id="rId35"/>
+      <p:regular r:id="rId37"/>
+      <p:bold r:id="rId38"/>
     </p:embeddedFont>
     <p:embeddedFont>
       <p:font typeface="Montserrat" panose="020B0604020202020204" charset="0"/>
-      <p:regular r:id="rId36"/>
-      <p:bold r:id="rId37"/>
-      <p:italic r:id="rId38"/>
-      <p:boldItalic r:id="rId39"/>
+      <p:regular r:id="rId39"/>
+      <p:bold r:id="rId40"/>
+      <p:italic r:id="rId41"/>
+      <p:boldItalic r:id="rId42"/>
     </p:embeddedFont>
     <p:embeddedFont>
       <p:font typeface="Bebas Neue" panose="020B0604020202020204" charset="0"/>
-      <p:regular r:id="rId40"/>
+      <p:regular r:id="rId43"/>
     </p:embeddedFont>
   </p:embeddedFontLst>
   <p:defaultTextStyle>
@@ -1709,7 +1712,7 @@
     </p:spTree>
     <p:extLst>
       <p:ext uri="{BB962C8B-B14F-4D97-AF65-F5344CB8AC3E}">
-        <p14:creationId xmlns:p14="http://schemas.microsoft.com/office/powerpoint/2010/main" val="3429225023"/>
+        <p14:creationId xmlns:p14="http://schemas.microsoft.com/office/powerpoint/2010/main" val="873448322"/>
       </p:ext>
     </p:extLst>
   </p:cSld>
@@ -1724,7 +1727,7 @@
   <p:cSld>
     <p:spTree>
       <p:nvGrpSpPr>
-        <p:cNvPr id="1" name="Shape 1000"/>
+        <p:cNvPr id="1" name="Shape 228"/>
         <p:cNvGrpSpPr/>
         <p:nvPr/>
       </p:nvGrpSpPr>
@@ -1738,7 +1741,7 @@
       </p:grpSpPr>
       <p:sp>
         <p:nvSpPr>
-          <p:cNvPr id="1001" name="Google Shape;1001;g1435532658d_0_50378:notes"/>
+          <p:cNvPr id="229" name="Google Shape;229;g1435532658d_0_45314:notes"/>
           <p:cNvSpPr>
             <a:spLocks noGrp="1" noRot="1" noChangeAspect="1"/>
           </p:cNvSpPr>
@@ -1779,7 +1782,7 @@
       </p:sp>
       <p:sp>
         <p:nvSpPr>
-          <p:cNvPr id="1002" name="Google Shape;1002;g1435532658d_0_50378:notes"/>
+          <p:cNvPr id="230" name="Google Shape;230;g1435532658d_0_45314:notes"/>
           <p:cNvSpPr txBox="1">
             <a:spLocks noGrp="1"/>
           </p:cNvSpPr>
@@ -1816,6 +1819,11 @@
         </p:txBody>
       </p:sp>
     </p:spTree>
+    <p:extLst>
+      <p:ext uri="{BB962C8B-B14F-4D97-AF65-F5344CB8AC3E}">
+        <p14:creationId xmlns:p14="http://schemas.microsoft.com/office/powerpoint/2010/main" val="3429225023"/>
+      </p:ext>
+    </p:extLst>
   </p:cSld>
   <p:clrMapOvr>
     <a:masterClrMapping/>
@@ -1920,11 +1928,6 @@
         </p:txBody>
       </p:sp>
     </p:spTree>
-    <p:extLst>
-      <p:ext uri="{BB962C8B-B14F-4D97-AF65-F5344CB8AC3E}">
-        <p14:creationId xmlns:p14="http://schemas.microsoft.com/office/powerpoint/2010/main" val="2441249065"/>
-      </p:ext>
-    </p:extLst>
   </p:cSld>
   <p:clrMapOvr>
     <a:masterClrMapping/>
@@ -2140,7 +2143,7 @@
     </p:spTree>
     <p:extLst>
       <p:ext uri="{BB962C8B-B14F-4D97-AF65-F5344CB8AC3E}">
-        <p14:creationId xmlns:p14="http://schemas.microsoft.com/office/powerpoint/2010/main" val="2648421745"/>
+        <p14:creationId xmlns:p14="http://schemas.microsoft.com/office/powerpoint/2010/main" val="2441249065"/>
       </p:ext>
     </p:extLst>
   </p:cSld>
@@ -2155,7 +2158,7 @@
   <p:cSld>
     <p:spTree>
       <p:nvGrpSpPr>
-        <p:cNvPr id="1" name="Shape 228"/>
+        <p:cNvPr id="1" name="Shape 1000"/>
         <p:cNvGrpSpPr/>
         <p:nvPr/>
       </p:nvGrpSpPr>
@@ -2169,7 +2172,7 @@
       </p:grpSpPr>
       <p:sp>
         <p:nvSpPr>
-          <p:cNvPr id="229" name="Google Shape;229;g1435532658d_0_45314:notes"/>
+          <p:cNvPr id="1001" name="Google Shape;1001;g1435532658d_0_50378:notes"/>
           <p:cNvSpPr>
             <a:spLocks noGrp="1" noRot="1" noChangeAspect="1"/>
           </p:cNvSpPr>
@@ -2210,7 +2213,7 @@
       </p:sp>
       <p:sp>
         <p:nvSpPr>
-          <p:cNvPr id="230" name="Google Shape;230;g1435532658d_0_45314:notes"/>
+          <p:cNvPr id="1002" name="Google Shape;1002;g1435532658d_0_50378:notes"/>
           <p:cNvSpPr txBox="1">
             <a:spLocks noGrp="1"/>
           </p:cNvSpPr>
@@ -2249,7 +2252,7 @@
     </p:spTree>
     <p:extLst>
       <p:ext uri="{BB962C8B-B14F-4D97-AF65-F5344CB8AC3E}">
-        <p14:creationId xmlns:p14="http://schemas.microsoft.com/office/powerpoint/2010/main" val="873448322"/>
+        <p14:creationId xmlns:p14="http://schemas.microsoft.com/office/powerpoint/2010/main" val="2648421745"/>
       </p:ext>
     </p:extLst>
   </p:cSld>
@@ -11232,6 +11235,2932 @@
           <p:nvPr>
             <p:extLst>
               <p:ext uri="{D42A27DB-BD31-4B8C-83A1-F6EECF244321}">
+                <p14:modId xmlns:p14="http://schemas.microsoft.com/office/powerpoint/2010/main" val="2591724647"/>
+              </p:ext>
+            </p:extLst>
+          </p:nvPr>
+        </p:nvGraphicFramePr>
+        <p:xfrm>
+          <a:off x="910670" y="1248229"/>
+          <a:ext cx="7447428" cy="3489054"/>
+        </p:xfrm>
+        <a:graphic>
+          <a:graphicData uri="http://schemas.openxmlformats.org/drawingml/2006/table">
+            <a:tbl>
+              <a:tblPr>
+                <a:noFill/>
+              </a:tblPr>
+              <a:tblGrid>
+                <a:gridCol w="2482476">
+                  <a:extLst>
+                    <a:ext uri="{9D8B030D-6E8A-4147-A177-3AD203B41FA5}">
+                      <a16:colId xmlns:a16="http://schemas.microsoft.com/office/drawing/2014/main" val="20000"/>
+                    </a:ext>
+                  </a:extLst>
+                </a:gridCol>
+                <a:gridCol w="2482476">
+                  <a:extLst>
+                    <a:ext uri="{9D8B030D-6E8A-4147-A177-3AD203B41FA5}">
+                      <a16:colId xmlns:a16="http://schemas.microsoft.com/office/drawing/2014/main" val="1186318376"/>
+                    </a:ext>
+                  </a:extLst>
+                </a:gridCol>
+                <a:gridCol w="2482476">
+                  <a:extLst>
+                    <a:ext uri="{9D8B030D-6E8A-4147-A177-3AD203B41FA5}">
+                      <a16:colId xmlns:a16="http://schemas.microsoft.com/office/drawing/2014/main" val="3049769508"/>
+                    </a:ext>
+                  </a:extLst>
+                </a:gridCol>
+              </a:tblGrid>
+              <a:tr h="588889">
+                <a:tc gridSpan="3">
+                  <a:txBody>
+                    <a:bodyPr/>
+                    <a:lstStyle/>
+                    <a:p>
+                      <a:pPr marL="0" lvl="0" indent="0" algn="ctr" rtl="0">
+                        <a:spcBef>
+                          <a:spcPts val="0"/>
+                        </a:spcBef>
+                        <a:spcAft>
+                          <a:spcPts val="0"/>
+                        </a:spcAft>
+                        <a:buNone/>
+                      </a:pPr>
+                      <a:r>
+                        <a:rPr lang="en" sz="2400" b="1" dirty="0" smtClean="0">
+                          <a:solidFill>
+                            <a:schemeClr val="tx1"/>
+                          </a:solidFill>
+                          <a:latin typeface="Montserrat Black"/>
+                          <a:ea typeface="Montserrat Black"/>
+                          <a:cs typeface="Montserrat Black"/>
+                          <a:sym typeface="Montserrat Black"/>
+                        </a:rPr>
+                        <a:t>B1. </a:t>
+                      </a:r>
+                      <a:r>
+                        <a:rPr lang="en-US" sz="2400" b="1" dirty="0" smtClean="0">
+                          <a:solidFill>
+                            <a:schemeClr val="tx1"/>
+                          </a:solidFill>
+                          <a:latin typeface="Montserrat Black"/>
+                          <a:ea typeface="Montserrat Black"/>
+                          <a:cs typeface="Montserrat Black"/>
+                          <a:sym typeface="Montserrat Black"/>
+                        </a:rPr>
+                        <a:t>Performance Testing</a:t>
+                      </a:r>
+                      <a:endParaRPr sz="2400" b="1" dirty="0">
+                        <a:solidFill>
+                          <a:schemeClr val="tx1"/>
+                        </a:solidFill>
+                        <a:latin typeface="Montserrat Black"/>
+                        <a:ea typeface="Montserrat Black"/>
+                        <a:cs typeface="Montserrat Black"/>
+                        <a:sym typeface="Montserrat Black"/>
+                      </a:endParaRPr>
+                    </a:p>
+                  </a:txBody>
+                  <a:tcPr marL="90000" marR="90000" marT="91425" marB="91425" anchor="ctr">
+                    <a:lnL w="12700" cap="flat" cmpd="sng" algn="ctr">
+                      <a:solidFill>
+                        <a:schemeClr val="tx1"/>
+                      </a:solidFill>
+                      <a:prstDash val="solid"/>
+                      <a:round/>
+                      <a:headEnd type="none" w="med" len="med"/>
+                      <a:tailEnd type="none" w="med" len="med"/>
+                    </a:lnL>
+                    <a:lnR w="12700" cap="flat" cmpd="sng" algn="ctr">
+                      <a:solidFill>
+                        <a:schemeClr val="tx1"/>
+                      </a:solidFill>
+                      <a:prstDash val="solid"/>
+                      <a:round/>
+                      <a:headEnd type="none" w="med" len="med"/>
+                      <a:tailEnd type="none" w="med" len="med"/>
+                    </a:lnR>
+                    <a:lnT w="12700" cap="flat" cmpd="sng" algn="ctr">
+                      <a:solidFill>
+                        <a:schemeClr val="tx1"/>
+                      </a:solidFill>
+                      <a:prstDash val="solid"/>
+                      <a:round/>
+                      <a:headEnd type="none" w="med" len="med"/>
+                      <a:tailEnd type="none" w="med" len="med"/>
+                    </a:lnT>
+                    <a:lnB w="12700" cap="flat" cmpd="sng" algn="ctr">
+                      <a:solidFill>
+                        <a:schemeClr val="tx1"/>
+                      </a:solidFill>
+                      <a:prstDash val="solid"/>
+                      <a:round/>
+                      <a:headEnd type="none" w="med" len="med"/>
+                      <a:tailEnd type="none" w="med" len="med"/>
+                    </a:lnB>
+                  </a:tcPr>
+                </a:tc>
+                <a:tc hMerge="1">
+                  <a:txBody>
+                    <a:bodyPr/>
+                    <a:lstStyle/>
+                    <a:p>
+                      <a:endParaRPr lang="en-US"/>
+                    </a:p>
+                  </a:txBody>
+                  <a:tcPr/>
+                </a:tc>
+                <a:tc hMerge="1">
+                  <a:txBody>
+                    <a:bodyPr/>
+                    <a:lstStyle/>
+                    <a:p>
+                      <a:endParaRPr lang="en-US"/>
+                    </a:p>
+                  </a:txBody>
+                  <a:tcPr/>
+                </a:tc>
+                <a:extLst>
+                  <a:ext uri="{0D108BD9-81ED-4DB2-BD59-A6C34878D82A}">
+                    <a16:rowId xmlns:a16="http://schemas.microsoft.com/office/drawing/2014/main" val="10000"/>
+                  </a:ext>
+                </a:extLst>
+              </a:tr>
+              <a:tr h="654335">
+                <a:tc>
+                  <a:txBody>
+                    <a:bodyPr/>
+                    <a:lstStyle/>
+                    <a:p>
+                      <a:pPr marL="0" lvl="0" indent="0" algn="ctr" rtl="0">
+                        <a:spcBef>
+                          <a:spcPts val="0"/>
+                        </a:spcBef>
+                        <a:spcAft>
+                          <a:spcPts val="0"/>
+                        </a:spcAft>
+                        <a:buNone/>
+                      </a:pPr>
+                      <a:r>
+                        <a:rPr lang="en" b="1" dirty="0" smtClean="0">
+                          <a:solidFill>
+                            <a:schemeClr val="tx1"/>
+                          </a:solidFill>
+                          <a:latin typeface="Montserrat Medium"/>
+                          <a:ea typeface="Montserrat Medium"/>
+                          <a:cs typeface="Montserrat Medium"/>
+                          <a:sym typeface="Montserrat Medium"/>
+                        </a:rPr>
+                        <a:t>TEST</a:t>
+                      </a:r>
+                      <a:r>
+                        <a:rPr lang="en" b="1" baseline="0" dirty="0" smtClean="0">
+                          <a:solidFill>
+                            <a:schemeClr val="tx1"/>
+                          </a:solidFill>
+                          <a:latin typeface="Montserrat Medium"/>
+                          <a:ea typeface="Montserrat Medium"/>
+                          <a:cs typeface="Montserrat Medium"/>
+                          <a:sym typeface="Montserrat Medium"/>
+                        </a:rPr>
+                        <a:t> ID</a:t>
+                      </a:r>
+                      <a:endParaRPr b="1" dirty="0">
+                        <a:solidFill>
+                          <a:schemeClr val="tx1"/>
+                        </a:solidFill>
+                        <a:latin typeface="Montserrat Medium"/>
+                        <a:ea typeface="Montserrat Medium"/>
+                        <a:cs typeface="Montserrat Medium"/>
+                        <a:sym typeface="Montserrat Medium"/>
+                      </a:endParaRPr>
+                    </a:p>
+                  </a:txBody>
+                  <a:tcPr marL="90000" marR="90000" marT="91425" marB="91425" anchor="ctr">
+                    <a:lnL w="12700" cap="flat" cmpd="sng" algn="ctr">
+                      <a:solidFill>
+                        <a:schemeClr val="tx1"/>
+                      </a:solidFill>
+                      <a:prstDash val="solid"/>
+                      <a:round/>
+                      <a:headEnd type="none" w="med" len="med"/>
+                      <a:tailEnd type="none" w="med" len="med"/>
+                    </a:lnL>
+                    <a:lnR w="12700" cap="flat" cmpd="sng" algn="ctr">
+                      <a:solidFill>
+                        <a:schemeClr val="tx1"/>
+                      </a:solidFill>
+                      <a:prstDash val="solid"/>
+                      <a:round/>
+                      <a:headEnd type="none" w="med" len="med"/>
+                      <a:tailEnd type="none" w="med" len="med"/>
+                    </a:lnR>
+                    <a:lnT w="12700" cap="flat" cmpd="sng" algn="ctr">
+                      <a:solidFill>
+                        <a:schemeClr val="tx1"/>
+                      </a:solidFill>
+                      <a:prstDash val="solid"/>
+                      <a:round/>
+                      <a:headEnd type="none" w="med" len="med"/>
+                      <a:tailEnd type="none" w="med" len="med"/>
+                    </a:lnT>
+                    <a:lnB w="12700" cap="flat" cmpd="sng" algn="ctr">
+                      <a:solidFill>
+                        <a:schemeClr val="tx1"/>
+                      </a:solidFill>
+                      <a:prstDash val="solid"/>
+                      <a:round/>
+                      <a:headEnd type="none" w="med" len="med"/>
+                      <a:tailEnd type="none" w="med" len="med"/>
+                    </a:lnB>
+                  </a:tcPr>
+                </a:tc>
+                <a:tc>
+                  <a:txBody>
+                    <a:bodyPr/>
+                    <a:lstStyle/>
+                    <a:p>
+                      <a:pPr marL="0" lvl="0" indent="0" algn="ctr" rtl="0">
+                        <a:spcBef>
+                          <a:spcPts val="0"/>
+                        </a:spcBef>
+                        <a:spcAft>
+                          <a:spcPts val="0"/>
+                        </a:spcAft>
+                        <a:buNone/>
+                      </a:pPr>
+                      <a:r>
+                        <a:rPr lang="en" b="1" dirty="0" smtClean="0">
+                          <a:solidFill>
+                            <a:schemeClr val="tx1"/>
+                          </a:solidFill>
+                          <a:latin typeface="Montserrat Medium"/>
+                          <a:ea typeface="Montserrat Medium"/>
+                          <a:cs typeface="Montserrat Medium"/>
+                          <a:sym typeface="Montserrat Medium"/>
+                        </a:rPr>
+                        <a:t>TEST</a:t>
+                      </a:r>
+                      <a:r>
+                        <a:rPr lang="en" b="1" baseline="0" dirty="0" smtClean="0">
+                          <a:solidFill>
+                            <a:schemeClr val="tx1"/>
+                          </a:solidFill>
+                          <a:latin typeface="Montserrat Medium"/>
+                          <a:ea typeface="Montserrat Medium"/>
+                          <a:cs typeface="Montserrat Medium"/>
+                          <a:sym typeface="Montserrat Medium"/>
+                        </a:rPr>
+                        <a:t> CASE</a:t>
+                      </a:r>
+                      <a:endParaRPr b="1" dirty="0">
+                        <a:solidFill>
+                          <a:schemeClr val="tx1"/>
+                        </a:solidFill>
+                        <a:latin typeface="Montserrat Medium"/>
+                        <a:ea typeface="Montserrat Medium"/>
+                        <a:cs typeface="Montserrat Medium"/>
+                        <a:sym typeface="Montserrat Medium"/>
+                      </a:endParaRPr>
+                    </a:p>
+                  </a:txBody>
+                  <a:tcPr marL="90000" marR="90000" marT="91425" marB="91425" anchor="ctr">
+                    <a:lnL w="12700" cap="flat" cmpd="sng" algn="ctr">
+                      <a:solidFill>
+                        <a:schemeClr val="tx1"/>
+                      </a:solidFill>
+                      <a:prstDash val="solid"/>
+                      <a:round/>
+                      <a:headEnd type="none" w="med" len="med"/>
+                      <a:tailEnd type="none" w="med" len="med"/>
+                    </a:lnL>
+                    <a:lnR w="12700" cap="flat" cmpd="sng" algn="ctr">
+                      <a:solidFill>
+                        <a:schemeClr val="tx1"/>
+                      </a:solidFill>
+                      <a:prstDash val="solid"/>
+                      <a:round/>
+                      <a:headEnd type="none" w="med" len="med"/>
+                      <a:tailEnd type="none" w="med" len="med"/>
+                    </a:lnR>
+                    <a:lnT w="12700" cap="flat" cmpd="sng" algn="ctr">
+                      <a:solidFill>
+                        <a:schemeClr val="tx1"/>
+                      </a:solidFill>
+                      <a:prstDash val="solid"/>
+                      <a:round/>
+                      <a:headEnd type="none" w="med" len="med"/>
+                      <a:tailEnd type="none" w="med" len="med"/>
+                    </a:lnT>
+                    <a:lnB w="12700" cap="flat" cmpd="sng" algn="ctr">
+                      <a:solidFill>
+                        <a:schemeClr val="tx1"/>
+                      </a:solidFill>
+                      <a:prstDash val="solid"/>
+                      <a:round/>
+                      <a:headEnd type="none" w="med" len="med"/>
+                      <a:tailEnd type="none" w="med" len="med"/>
+                    </a:lnB>
+                  </a:tcPr>
+                </a:tc>
+                <a:tc>
+                  <a:txBody>
+                    <a:bodyPr/>
+                    <a:lstStyle/>
+                    <a:p>
+                      <a:pPr marL="0" lvl="0" indent="0" algn="ctr" rtl="0">
+                        <a:spcBef>
+                          <a:spcPts val="0"/>
+                        </a:spcBef>
+                        <a:spcAft>
+                          <a:spcPts val="0"/>
+                        </a:spcAft>
+                        <a:buNone/>
+                      </a:pPr>
+                      <a:r>
+                        <a:rPr lang="en" b="1" dirty="0" smtClean="0">
+                          <a:solidFill>
+                            <a:schemeClr val="tx1"/>
+                          </a:solidFill>
+                          <a:latin typeface="Montserrat Medium"/>
+                          <a:ea typeface="Montserrat Medium"/>
+                          <a:cs typeface="Montserrat Medium"/>
+                          <a:sym typeface="Montserrat Medium"/>
+                        </a:rPr>
+                        <a:t>EXPECTED</a:t>
+                      </a:r>
+                      <a:r>
+                        <a:rPr lang="en" b="1" baseline="0" dirty="0" smtClean="0">
+                          <a:solidFill>
+                            <a:schemeClr val="tx1"/>
+                          </a:solidFill>
+                          <a:latin typeface="Montserrat Medium"/>
+                          <a:ea typeface="Montserrat Medium"/>
+                          <a:cs typeface="Montserrat Medium"/>
+                          <a:sym typeface="Montserrat Medium"/>
+                        </a:rPr>
+                        <a:t> RESULT</a:t>
+                      </a:r>
+                      <a:endParaRPr b="1" dirty="0">
+                        <a:solidFill>
+                          <a:schemeClr val="tx1"/>
+                        </a:solidFill>
+                        <a:latin typeface="Montserrat Medium"/>
+                        <a:ea typeface="Montserrat Medium"/>
+                        <a:cs typeface="Montserrat Medium"/>
+                        <a:sym typeface="Montserrat Medium"/>
+                      </a:endParaRPr>
+                    </a:p>
+                  </a:txBody>
+                  <a:tcPr marL="90000" marR="90000" marT="91425" marB="91425" anchor="ctr">
+                    <a:lnL w="12700" cap="flat" cmpd="sng" algn="ctr">
+                      <a:solidFill>
+                        <a:schemeClr val="tx1"/>
+                      </a:solidFill>
+                      <a:prstDash val="solid"/>
+                      <a:round/>
+                      <a:headEnd type="none" w="med" len="med"/>
+                      <a:tailEnd type="none" w="med" len="med"/>
+                    </a:lnL>
+                    <a:lnR w="12700" cap="flat" cmpd="sng" algn="ctr">
+                      <a:solidFill>
+                        <a:schemeClr val="tx1"/>
+                      </a:solidFill>
+                      <a:prstDash val="solid"/>
+                      <a:round/>
+                      <a:headEnd type="none" w="med" len="med"/>
+                      <a:tailEnd type="none" w="med" len="med"/>
+                    </a:lnR>
+                    <a:lnT w="12700" cap="flat" cmpd="sng" algn="ctr">
+                      <a:solidFill>
+                        <a:schemeClr val="tx1"/>
+                      </a:solidFill>
+                      <a:prstDash val="solid"/>
+                      <a:round/>
+                      <a:headEnd type="none" w="med" len="med"/>
+                      <a:tailEnd type="none" w="med" len="med"/>
+                    </a:lnT>
+                    <a:lnB w="12700" cap="flat" cmpd="sng" algn="ctr">
+                      <a:solidFill>
+                        <a:schemeClr val="tx1"/>
+                      </a:solidFill>
+                      <a:prstDash val="solid"/>
+                      <a:round/>
+                      <a:headEnd type="none" w="med" len="med"/>
+                      <a:tailEnd type="none" w="med" len="med"/>
+                    </a:lnB>
+                  </a:tcPr>
+                </a:tc>
+                <a:extLst>
+                  <a:ext uri="{0D108BD9-81ED-4DB2-BD59-A6C34878D82A}">
+                    <a16:rowId xmlns:a16="http://schemas.microsoft.com/office/drawing/2014/main" val="10001"/>
+                  </a:ext>
+                </a:extLst>
+              </a:tr>
+              <a:tr h="538803">
+                <a:tc>
+                  <a:txBody>
+                    <a:bodyPr/>
+                    <a:lstStyle/>
+                    <a:p>
+                      <a:pPr marL="0" lvl="0" indent="0" algn="ctr" rtl="0">
+                        <a:spcBef>
+                          <a:spcPts val="0"/>
+                        </a:spcBef>
+                        <a:spcAft>
+                          <a:spcPts val="0"/>
+                        </a:spcAft>
+                        <a:buNone/>
+                      </a:pPr>
+                      <a:r>
+                        <a:rPr lang="en" sz="1600" b="1" dirty="0" smtClean="0">
+                          <a:solidFill>
+                            <a:schemeClr val="tx1"/>
+                          </a:solidFill>
+                          <a:latin typeface="Montserrat Black"/>
+                          <a:ea typeface="Montserrat Black"/>
+                          <a:cs typeface="Montserrat Black"/>
+                          <a:sym typeface="Montserrat Black"/>
+                        </a:rPr>
+                        <a:t>TC-25</a:t>
+                      </a:r>
+                      <a:endParaRPr sz="1600" b="1" dirty="0">
+                        <a:solidFill>
+                          <a:schemeClr val="tx1"/>
+                        </a:solidFill>
+                        <a:latin typeface="Montserrat Black"/>
+                        <a:ea typeface="Montserrat Black"/>
+                        <a:cs typeface="Montserrat Black"/>
+                        <a:sym typeface="Montserrat Black"/>
+                      </a:endParaRPr>
+                    </a:p>
+                  </a:txBody>
+                  <a:tcPr marL="90000" marR="90000" marT="91425" marB="91425" anchor="ctr">
+                    <a:lnL w="12700" cap="flat" cmpd="sng" algn="ctr">
+                      <a:solidFill>
+                        <a:schemeClr val="tx1"/>
+                      </a:solidFill>
+                      <a:prstDash val="solid"/>
+                      <a:round/>
+                      <a:headEnd type="none" w="med" len="med"/>
+                      <a:tailEnd type="none" w="med" len="med"/>
+                    </a:lnL>
+                    <a:lnR w="12700" cap="flat" cmpd="sng" algn="ctr">
+                      <a:solidFill>
+                        <a:schemeClr val="tx1"/>
+                      </a:solidFill>
+                      <a:prstDash val="solid"/>
+                      <a:round/>
+                      <a:headEnd type="none" w="med" len="med"/>
+                      <a:tailEnd type="none" w="med" len="med"/>
+                    </a:lnR>
+                    <a:lnT w="12700" cap="flat" cmpd="sng" algn="ctr">
+                      <a:solidFill>
+                        <a:schemeClr val="tx1"/>
+                      </a:solidFill>
+                      <a:prstDash val="solid"/>
+                      <a:round/>
+                      <a:headEnd type="none" w="med" len="med"/>
+                      <a:tailEnd type="none" w="med" len="med"/>
+                    </a:lnT>
+                    <a:lnB w="12700" cap="flat" cmpd="sng" algn="ctr">
+                      <a:solidFill>
+                        <a:schemeClr val="tx1"/>
+                      </a:solidFill>
+                      <a:prstDash val="solid"/>
+                      <a:round/>
+                      <a:headEnd type="none" w="med" len="med"/>
+                      <a:tailEnd type="none" w="med" len="med"/>
+                    </a:lnB>
+                  </a:tcPr>
+                </a:tc>
+                <a:tc>
+                  <a:txBody>
+                    <a:bodyPr/>
+                    <a:lstStyle/>
+                    <a:p>
+                      <a:pPr marL="0" lvl="0" indent="0" algn="ctr" rtl="0">
+                        <a:spcBef>
+                          <a:spcPts val="0"/>
+                        </a:spcBef>
+                        <a:spcAft>
+                          <a:spcPts val="0"/>
+                        </a:spcAft>
+                        <a:buNone/>
+                      </a:pPr>
+                      <a:r>
+                        <a:rPr lang="en-US" sz="1200" b="1" dirty="0" smtClean="0">
+                          <a:solidFill>
+                            <a:schemeClr val="tx1"/>
+                          </a:solidFill>
+                          <a:latin typeface="Montserrat Medium"/>
+                          <a:ea typeface="Montserrat Medium"/>
+                          <a:cs typeface="Montserrat Medium"/>
+                          <a:sym typeface="Montserrat Medium"/>
+                        </a:rPr>
+                        <a:t>FPS (real-time)</a:t>
+                      </a:r>
+                      <a:endParaRPr sz="1200" b="1" dirty="0">
+                        <a:solidFill>
+                          <a:schemeClr val="tx1"/>
+                        </a:solidFill>
+                        <a:latin typeface="Montserrat Medium"/>
+                        <a:ea typeface="Montserrat Medium"/>
+                        <a:cs typeface="Montserrat Medium"/>
+                        <a:sym typeface="Montserrat Medium"/>
+                      </a:endParaRPr>
+                    </a:p>
+                  </a:txBody>
+                  <a:tcPr marL="90000" marR="90000" marT="91425" marB="91425" anchor="ctr">
+                    <a:lnL w="12700" cap="flat" cmpd="sng" algn="ctr">
+                      <a:solidFill>
+                        <a:schemeClr val="tx1"/>
+                      </a:solidFill>
+                      <a:prstDash val="solid"/>
+                      <a:round/>
+                      <a:headEnd type="none" w="med" len="med"/>
+                      <a:tailEnd type="none" w="med" len="med"/>
+                    </a:lnL>
+                    <a:lnR w="12700" cap="flat" cmpd="sng" algn="ctr">
+                      <a:solidFill>
+                        <a:schemeClr val="tx1"/>
+                      </a:solidFill>
+                      <a:prstDash val="solid"/>
+                      <a:round/>
+                      <a:headEnd type="none" w="med" len="med"/>
+                      <a:tailEnd type="none" w="med" len="med"/>
+                    </a:lnR>
+                    <a:lnT w="12700" cap="flat" cmpd="sng" algn="ctr">
+                      <a:solidFill>
+                        <a:schemeClr val="tx1"/>
+                      </a:solidFill>
+                      <a:prstDash val="solid"/>
+                      <a:round/>
+                      <a:headEnd type="none" w="med" len="med"/>
+                      <a:tailEnd type="none" w="med" len="med"/>
+                    </a:lnT>
+                    <a:lnB w="12700" cap="flat" cmpd="sng" algn="ctr">
+                      <a:solidFill>
+                        <a:schemeClr val="tx1"/>
+                      </a:solidFill>
+                      <a:prstDash val="solid"/>
+                      <a:round/>
+                      <a:headEnd type="none" w="med" len="med"/>
+                      <a:tailEnd type="none" w="med" len="med"/>
+                    </a:lnB>
+                  </a:tcPr>
+                </a:tc>
+                <a:tc>
+                  <a:txBody>
+                    <a:bodyPr/>
+                    <a:lstStyle/>
+                    <a:p>
+                      <a:pPr marL="0" lvl="0" indent="0" algn="ctr" rtl="0">
+                        <a:spcBef>
+                          <a:spcPts val="0"/>
+                        </a:spcBef>
+                        <a:spcAft>
+                          <a:spcPts val="0"/>
+                        </a:spcAft>
+                        <a:buNone/>
+                      </a:pPr>
+                      <a:r>
+                        <a:rPr lang="en-US" sz="1200" b="1" dirty="0" smtClean="0">
+                          <a:solidFill>
+                            <a:schemeClr val="tx1"/>
+                          </a:solidFill>
+                          <a:latin typeface="Montserrat Medium"/>
+                          <a:ea typeface="Montserrat Medium"/>
+                          <a:cs typeface="Montserrat Medium"/>
+                          <a:sym typeface="Montserrat Medium"/>
+                        </a:rPr>
+                        <a:t>≥ 15 FPS</a:t>
+                      </a:r>
+                      <a:endParaRPr sz="1200" b="1" dirty="0">
+                        <a:solidFill>
+                          <a:schemeClr val="tx1"/>
+                        </a:solidFill>
+                        <a:latin typeface="Montserrat Medium"/>
+                        <a:ea typeface="Montserrat Medium"/>
+                        <a:cs typeface="Montserrat Medium"/>
+                        <a:sym typeface="Montserrat Medium"/>
+                      </a:endParaRPr>
+                    </a:p>
+                  </a:txBody>
+                  <a:tcPr marL="90000" marR="90000" marT="91425" marB="91425" anchor="ctr">
+                    <a:lnL w="12700" cap="flat" cmpd="sng" algn="ctr">
+                      <a:solidFill>
+                        <a:schemeClr val="tx1"/>
+                      </a:solidFill>
+                      <a:prstDash val="solid"/>
+                      <a:round/>
+                      <a:headEnd type="none" w="med" len="med"/>
+                      <a:tailEnd type="none" w="med" len="med"/>
+                    </a:lnL>
+                    <a:lnR w="12700" cap="flat" cmpd="sng" algn="ctr">
+                      <a:solidFill>
+                        <a:schemeClr val="tx1"/>
+                      </a:solidFill>
+                      <a:prstDash val="solid"/>
+                      <a:round/>
+                      <a:headEnd type="none" w="med" len="med"/>
+                      <a:tailEnd type="none" w="med" len="med"/>
+                    </a:lnR>
+                    <a:lnT w="12700" cap="flat" cmpd="sng" algn="ctr">
+                      <a:solidFill>
+                        <a:schemeClr val="tx1"/>
+                      </a:solidFill>
+                      <a:prstDash val="solid"/>
+                      <a:round/>
+                      <a:headEnd type="none" w="med" len="med"/>
+                      <a:tailEnd type="none" w="med" len="med"/>
+                    </a:lnT>
+                    <a:lnB w="12700" cap="flat" cmpd="sng" algn="ctr">
+                      <a:solidFill>
+                        <a:schemeClr val="tx1"/>
+                      </a:solidFill>
+                      <a:prstDash val="solid"/>
+                      <a:round/>
+                      <a:headEnd type="none" w="med" len="med"/>
+                      <a:tailEnd type="none" w="med" len="med"/>
+                    </a:lnB>
+                  </a:tcPr>
+                </a:tc>
+                <a:extLst>
+                  <a:ext uri="{0D108BD9-81ED-4DB2-BD59-A6C34878D82A}">
+                    <a16:rowId xmlns:a16="http://schemas.microsoft.com/office/drawing/2014/main" val="10002"/>
+                  </a:ext>
+                </a:extLst>
+              </a:tr>
+              <a:tr h="569009">
+                <a:tc>
+                  <a:txBody>
+                    <a:bodyPr/>
+                    <a:lstStyle/>
+                    <a:p>
+                      <a:pPr marL="0" lvl="0" indent="0" algn="ctr" rtl="0">
+                        <a:spcBef>
+                          <a:spcPts val="0"/>
+                        </a:spcBef>
+                        <a:spcAft>
+                          <a:spcPts val="0"/>
+                        </a:spcAft>
+                        <a:buNone/>
+                      </a:pPr>
+                      <a:r>
+                        <a:rPr lang="en" sz="1600" b="1" dirty="0" smtClean="0">
+                          <a:solidFill>
+                            <a:schemeClr val="tx1"/>
+                          </a:solidFill>
+                          <a:latin typeface="Montserrat Black"/>
+                          <a:ea typeface="Montserrat Black"/>
+                          <a:cs typeface="Montserrat Black"/>
+                          <a:sym typeface="Montserrat Black"/>
+                        </a:rPr>
+                        <a:t>TC-26</a:t>
+                      </a:r>
+                      <a:endParaRPr sz="1600" b="1" dirty="0">
+                        <a:solidFill>
+                          <a:schemeClr val="tx1"/>
+                        </a:solidFill>
+                        <a:latin typeface="Montserrat Black"/>
+                        <a:ea typeface="Montserrat Black"/>
+                        <a:cs typeface="Montserrat Black"/>
+                        <a:sym typeface="Montserrat Black"/>
+                      </a:endParaRPr>
+                    </a:p>
+                  </a:txBody>
+                  <a:tcPr marL="90000" marR="90000" marT="91425" marB="91425" anchor="ctr">
+                    <a:lnL w="12700" cap="flat" cmpd="sng" algn="ctr">
+                      <a:solidFill>
+                        <a:schemeClr val="tx1"/>
+                      </a:solidFill>
+                      <a:prstDash val="solid"/>
+                      <a:round/>
+                      <a:headEnd type="none" w="med" len="med"/>
+                      <a:tailEnd type="none" w="med" len="med"/>
+                    </a:lnL>
+                    <a:lnR w="12700" cap="flat" cmpd="sng" algn="ctr">
+                      <a:solidFill>
+                        <a:schemeClr val="tx1"/>
+                      </a:solidFill>
+                      <a:prstDash val="solid"/>
+                      <a:round/>
+                      <a:headEnd type="none" w="med" len="med"/>
+                      <a:tailEnd type="none" w="med" len="med"/>
+                    </a:lnR>
+                    <a:lnT w="12700" cap="flat" cmpd="sng" algn="ctr">
+                      <a:solidFill>
+                        <a:schemeClr val="tx1"/>
+                      </a:solidFill>
+                      <a:prstDash val="solid"/>
+                      <a:round/>
+                      <a:headEnd type="none" w="med" len="med"/>
+                      <a:tailEnd type="none" w="med" len="med"/>
+                    </a:lnT>
+                    <a:lnB w="12700" cap="flat" cmpd="sng" algn="ctr">
+                      <a:solidFill>
+                        <a:schemeClr val="tx1"/>
+                      </a:solidFill>
+                      <a:prstDash val="solid"/>
+                      <a:round/>
+                      <a:headEnd type="none" w="med" len="med"/>
+                      <a:tailEnd type="none" w="med" len="med"/>
+                    </a:lnB>
+                  </a:tcPr>
+                </a:tc>
+                <a:tc>
+                  <a:txBody>
+                    <a:bodyPr/>
+                    <a:lstStyle/>
+                    <a:p>
+                      <a:pPr marL="0" lvl="0" indent="0" algn="ctr" rtl="0">
+                        <a:spcBef>
+                          <a:spcPts val="0"/>
+                        </a:spcBef>
+                        <a:spcAft>
+                          <a:spcPts val="0"/>
+                        </a:spcAft>
+                        <a:buNone/>
+                      </a:pPr>
+                      <a:r>
+                        <a:rPr lang="en-US" sz="1200" b="1" dirty="0" smtClean="0">
+                          <a:solidFill>
+                            <a:schemeClr val="tx1"/>
+                          </a:solidFill>
+                          <a:latin typeface="Montserrat Medium"/>
+                          <a:ea typeface="Montserrat Medium"/>
+                          <a:cs typeface="Montserrat Medium"/>
+                          <a:sym typeface="Montserrat Medium"/>
+                        </a:rPr>
+                        <a:t>Processing delay</a:t>
+                      </a:r>
+                      <a:endParaRPr sz="1200" b="1" dirty="0">
+                        <a:solidFill>
+                          <a:schemeClr val="tx1"/>
+                        </a:solidFill>
+                        <a:latin typeface="Montserrat Medium"/>
+                        <a:ea typeface="Montserrat Medium"/>
+                        <a:cs typeface="Montserrat Medium"/>
+                        <a:sym typeface="Montserrat Medium"/>
+                      </a:endParaRPr>
+                    </a:p>
+                  </a:txBody>
+                  <a:tcPr marL="90000" marR="90000" marT="91425" marB="91425" anchor="ctr">
+                    <a:lnL w="12700" cap="flat" cmpd="sng" algn="ctr">
+                      <a:solidFill>
+                        <a:schemeClr val="tx1"/>
+                      </a:solidFill>
+                      <a:prstDash val="solid"/>
+                      <a:round/>
+                      <a:headEnd type="none" w="med" len="med"/>
+                      <a:tailEnd type="none" w="med" len="med"/>
+                    </a:lnL>
+                    <a:lnR w="12700" cap="flat" cmpd="sng" algn="ctr">
+                      <a:solidFill>
+                        <a:schemeClr val="tx1"/>
+                      </a:solidFill>
+                      <a:prstDash val="solid"/>
+                      <a:round/>
+                      <a:headEnd type="none" w="med" len="med"/>
+                      <a:tailEnd type="none" w="med" len="med"/>
+                    </a:lnR>
+                    <a:lnT w="12700" cap="flat" cmpd="sng" algn="ctr">
+                      <a:solidFill>
+                        <a:schemeClr val="tx1"/>
+                      </a:solidFill>
+                      <a:prstDash val="solid"/>
+                      <a:round/>
+                      <a:headEnd type="none" w="med" len="med"/>
+                      <a:tailEnd type="none" w="med" len="med"/>
+                    </a:lnT>
+                    <a:lnB w="12700" cap="flat" cmpd="sng" algn="ctr">
+                      <a:solidFill>
+                        <a:schemeClr val="tx1"/>
+                      </a:solidFill>
+                      <a:prstDash val="solid"/>
+                      <a:round/>
+                      <a:headEnd type="none" w="med" len="med"/>
+                      <a:tailEnd type="none" w="med" len="med"/>
+                    </a:lnB>
+                  </a:tcPr>
+                </a:tc>
+                <a:tc>
+                  <a:txBody>
+                    <a:bodyPr/>
+                    <a:lstStyle/>
+                    <a:p>
+                      <a:pPr marL="0" lvl="0" indent="0" algn="ctr" rtl="0">
+                        <a:spcBef>
+                          <a:spcPts val="0"/>
+                        </a:spcBef>
+                        <a:spcAft>
+                          <a:spcPts val="0"/>
+                        </a:spcAft>
+                        <a:buNone/>
+                      </a:pPr>
+                      <a:r>
+                        <a:rPr lang="en-US" sz="1200" b="1" dirty="0" smtClean="0">
+                          <a:solidFill>
+                            <a:schemeClr val="tx1"/>
+                          </a:solidFill>
+                          <a:latin typeface="Montserrat Medium"/>
+                          <a:ea typeface="Montserrat Medium"/>
+                          <a:cs typeface="Montserrat Medium"/>
+                          <a:sym typeface="Montserrat Medium"/>
+                        </a:rPr>
+                        <a:t>&lt; </a:t>
+                      </a:r>
+                      <a:r>
+                        <a:rPr lang="en-US" sz="1200" b="1" dirty="0" smtClean="0">
+                          <a:solidFill>
+                            <a:schemeClr val="tx1"/>
+                          </a:solidFill>
+                          <a:latin typeface="Montserrat Medium"/>
+                          <a:ea typeface="Montserrat Medium"/>
+                          <a:cs typeface="Montserrat Medium"/>
+                          <a:sym typeface="Montserrat Medium"/>
+                        </a:rPr>
+                        <a:t>5000 </a:t>
+                      </a:r>
+                      <a:r>
+                        <a:rPr lang="en-US" sz="1200" b="1" dirty="0" err="1" smtClean="0">
+                          <a:solidFill>
+                            <a:schemeClr val="tx1"/>
+                          </a:solidFill>
+                          <a:latin typeface="Montserrat Medium"/>
+                          <a:ea typeface="Montserrat Medium"/>
+                          <a:cs typeface="Montserrat Medium"/>
+                          <a:sym typeface="Montserrat Medium"/>
+                        </a:rPr>
+                        <a:t>ms</a:t>
+                      </a:r>
+                      <a:endParaRPr sz="1200" b="1" dirty="0">
+                        <a:solidFill>
+                          <a:schemeClr val="tx1"/>
+                        </a:solidFill>
+                        <a:latin typeface="Montserrat Medium"/>
+                        <a:ea typeface="Montserrat Medium"/>
+                        <a:cs typeface="Montserrat Medium"/>
+                        <a:sym typeface="Montserrat Medium"/>
+                      </a:endParaRPr>
+                    </a:p>
+                  </a:txBody>
+                  <a:tcPr marL="90000" marR="90000" marT="91425" marB="91425" anchor="ctr">
+                    <a:lnL w="12700" cap="flat" cmpd="sng" algn="ctr">
+                      <a:solidFill>
+                        <a:schemeClr val="tx1"/>
+                      </a:solidFill>
+                      <a:prstDash val="solid"/>
+                      <a:round/>
+                      <a:headEnd type="none" w="med" len="med"/>
+                      <a:tailEnd type="none" w="med" len="med"/>
+                    </a:lnL>
+                    <a:lnR w="12700" cap="flat" cmpd="sng" algn="ctr">
+                      <a:solidFill>
+                        <a:schemeClr val="tx1"/>
+                      </a:solidFill>
+                      <a:prstDash val="solid"/>
+                      <a:round/>
+                      <a:headEnd type="none" w="med" len="med"/>
+                      <a:tailEnd type="none" w="med" len="med"/>
+                    </a:lnR>
+                    <a:lnT w="12700" cap="flat" cmpd="sng" algn="ctr">
+                      <a:solidFill>
+                        <a:schemeClr val="tx1"/>
+                      </a:solidFill>
+                      <a:prstDash val="solid"/>
+                      <a:round/>
+                      <a:headEnd type="none" w="med" len="med"/>
+                      <a:tailEnd type="none" w="med" len="med"/>
+                    </a:lnT>
+                    <a:lnB w="12700" cap="flat" cmpd="sng" algn="ctr">
+                      <a:solidFill>
+                        <a:schemeClr val="tx1"/>
+                      </a:solidFill>
+                      <a:prstDash val="solid"/>
+                      <a:round/>
+                      <a:headEnd type="none" w="med" len="med"/>
+                      <a:tailEnd type="none" w="med" len="med"/>
+                    </a:lnB>
+                  </a:tcPr>
+                </a:tc>
+                <a:extLst>
+                  <a:ext uri="{0D108BD9-81ED-4DB2-BD59-A6C34878D82A}">
+                    <a16:rowId xmlns:a16="http://schemas.microsoft.com/office/drawing/2014/main" val="10003"/>
+                  </a:ext>
+                </a:extLst>
+              </a:tr>
+              <a:tr h="569009">
+                <a:tc>
+                  <a:txBody>
+                    <a:bodyPr/>
+                    <a:lstStyle/>
+                    <a:p>
+                      <a:pPr marL="0" lvl="0" indent="0" algn="ctr" rtl="0">
+                        <a:spcBef>
+                          <a:spcPts val="0"/>
+                        </a:spcBef>
+                        <a:spcAft>
+                          <a:spcPts val="0"/>
+                        </a:spcAft>
+                        <a:buNone/>
+                      </a:pPr>
+                      <a:r>
+                        <a:rPr lang="en" sz="1600" b="1" dirty="0" smtClean="0">
+                          <a:solidFill>
+                            <a:schemeClr val="tx1"/>
+                          </a:solidFill>
+                          <a:latin typeface="Montserrat Black"/>
+                          <a:ea typeface="Montserrat Black"/>
+                          <a:cs typeface="Montserrat Black"/>
+                          <a:sym typeface="Montserrat Black"/>
+                        </a:rPr>
+                        <a:t>TC-27</a:t>
+                      </a:r>
+                      <a:endParaRPr sz="1600" b="1" dirty="0">
+                        <a:solidFill>
+                          <a:schemeClr val="tx1"/>
+                        </a:solidFill>
+                        <a:latin typeface="Montserrat Black"/>
+                        <a:ea typeface="Montserrat Black"/>
+                        <a:cs typeface="Montserrat Black"/>
+                        <a:sym typeface="Montserrat Black"/>
+                      </a:endParaRPr>
+                    </a:p>
+                  </a:txBody>
+                  <a:tcPr marL="90000" marR="90000" marT="91425" marB="91425" anchor="ctr">
+                    <a:lnL w="12700" cap="flat" cmpd="sng" algn="ctr">
+                      <a:solidFill>
+                        <a:schemeClr val="tx1"/>
+                      </a:solidFill>
+                      <a:prstDash val="solid"/>
+                      <a:round/>
+                      <a:headEnd type="none" w="med" len="med"/>
+                      <a:tailEnd type="none" w="med" len="med"/>
+                    </a:lnL>
+                    <a:lnR w="12700" cap="flat" cmpd="sng" algn="ctr">
+                      <a:solidFill>
+                        <a:schemeClr val="tx1"/>
+                      </a:solidFill>
+                      <a:prstDash val="solid"/>
+                      <a:round/>
+                      <a:headEnd type="none" w="med" len="med"/>
+                      <a:tailEnd type="none" w="med" len="med"/>
+                    </a:lnR>
+                    <a:lnT w="12700" cap="flat" cmpd="sng" algn="ctr">
+                      <a:solidFill>
+                        <a:schemeClr val="tx1"/>
+                      </a:solidFill>
+                      <a:prstDash val="solid"/>
+                      <a:round/>
+                      <a:headEnd type="none" w="med" len="med"/>
+                      <a:tailEnd type="none" w="med" len="med"/>
+                    </a:lnT>
+                    <a:lnB w="12700" cap="flat" cmpd="sng" algn="ctr">
+                      <a:solidFill>
+                        <a:schemeClr val="tx1"/>
+                      </a:solidFill>
+                      <a:prstDash val="solid"/>
+                      <a:round/>
+                      <a:headEnd type="none" w="med" len="med"/>
+                      <a:tailEnd type="none" w="med" len="med"/>
+                    </a:lnB>
+                  </a:tcPr>
+                </a:tc>
+                <a:tc>
+                  <a:txBody>
+                    <a:bodyPr/>
+                    <a:lstStyle/>
+                    <a:p>
+                      <a:pPr marL="0" lvl="0" indent="0" algn="ctr" rtl="0">
+                        <a:spcBef>
+                          <a:spcPts val="0"/>
+                        </a:spcBef>
+                        <a:spcAft>
+                          <a:spcPts val="0"/>
+                        </a:spcAft>
+                        <a:buNone/>
+                      </a:pPr>
+                      <a:r>
+                        <a:rPr lang="en-US" sz="1200" b="1" dirty="0" smtClean="0">
+                          <a:solidFill>
+                            <a:schemeClr val="tx1"/>
+                          </a:solidFill>
+                          <a:latin typeface="Montserrat Medium"/>
+                          <a:ea typeface="Montserrat Medium"/>
+                          <a:cs typeface="Montserrat Medium"/>
+                          <a:sym typeface="Montserrat Medium"/>
+                        </a:rPr>
+                        <a:t>CPU usage</a:t>
+                      </a:r>
+                      <a:endParaRPr sz="1200" b="1" dirty="0">
+                        <a:solidFill>
+                          <a:schemeClr val="tx1"/>
+                        </a:solidFill>
+                        <a:latin typeface="Montserrat Medium"/>
+                        <a:ea typeface="Montserrat Medium"/>
+                        <a:cs typeface="Montserrat Medium"/>
+                        <a:sym typeface="Montserrat Medium"/>
+                      </a:endParaRPr>
+                    </a:p>
+                  </a:txBody>
+                  <a:tcPr marL="90000" marR="90000" marT="91425" marB="91425" anchor="ctr">
+                    <a:lnL w="12700" cap="flat" cmpd="sng" algn="ctr">
+                      <a:solidFill>
+                        <a:schemeClr val="tx1"/>
+                      </a:solidFill>
+                      <a:prstDash val="solid"/>
+                      <a:round/>
+                      <a:headEnd type="none" w="med" len="med"/>
+                      <a:tailEnd type="none" w="med" len="med"/>
+                    </a:lnL>
+                    <a:lnR w="12700" cap="flat" cmpd="sng" algn="ctr">
+                      <a:solidFill>
+                        <a:schemeClr val="tx1"/>
+                      </a:solidFill>
+                      <a:prstDash val="solid"/>
+                      <a:round/>
+                      <a:headEnd type="none" w="med" len="med"/>
+                      <a:tailEnd type="none" w="med" len="med"/>
+                    </a:lnR>
+                    <a:lnT w="12700" cap="flat" cmpd="sng" algn="ctr">
+                      <a:solidFill>
+                        <a:schemeClr val="tx1"/>
+                      </a:solidFill>
+                      <a:prstDash val="solid"/>
+                      <a:round/>
+                      <a:headEnd type="none" w="med" len="med"/>
+                      <a:tailEnd type="none" w="med" len="med"/>
+                    </a:lnT>
+                    <a:lnB w="12700" cap="flat" cmpd="sng" algn="ctr">
+                      <a:solidFill>
+                        <a:schemeClr val="tx1"/>
+                      </a:solidFill>
+                      <a:prstDash val="solid"/>
+                      <a:round/>
+                      <a:headEnd type="none" w="med" len="med"/>
+                      <a:tailEnd type="none" w="med" len="med"/>
+                    </a:lnB>
+                  </a:tcPr>
+                </a:tc>
+                <a:tc>
+                  <a:txBody>
+                    <a:bodyPr/>
+                    <a:lstStyle/>
+                    <a:p>
+                      <a:pPr marL="0" lvl="0" indent="0" algn="ctr" rtl="0">
+                        <a:spcBef>
+                          <a:spcPts val="0"/>
+                        </a:spcBef>
+                        <a:spcAft>
+                          <a:spcPts val="0"/>
+                        </a:spcAft>
+                        <a:buNone/>
+                      </a:pPr>
+                      <a:r>
+                        <a:rPr lang="en-US" sz="1200" b="1" dirty="0" smtClean="0">
+                          <a:solidFill>
+                            <a:schemeClr val="tx1"/>
+                          </a:solidFill>
+                          <a:latin typeface="Montserrat Medium"/>
+                          <a:ea typeface="Montserrat Medium"/>
+                          <a:cs typeface="Montserrat Medium"/>
+                          <a:sym typeface="Montserrat Medium"/>
+                        </a:rPr>
+                        <a:t>&lt; 80%</a:t>
+                      </a:r>
+                      <a:endParaRPr sz="1200" b="1" dirty="0">
+                        <a:solidFill>
+                          <a:schemeClr val="tx1"/>
+                        </a:solidFill>
+                        <a:latin typeface="Montserrat Medium"/>
+                        <a:ea typeface="Montserrat Medium"/>
+                        <a:cs typeface="Montserrat Medium"/>
+                        <a:sym typeface="Montserrat Medium"/>
+                      </a:endParaRPr>
+                    </a:p>
+                  </a:txBody>
+                  <a:tcPr marL="90000" marR="90000" marT="91425" marB="91425" anchor="ctr">
+                    <a:lnL w="12700" cap="flat" cmpd="sng" algn="ctr">
+                      <a:solidFill>
+                        <a:schemeClr val="tx1"/>
+                      </a:solidFill>
+                      <a:prstDash val="solid"/>
+                      <a:round/>
+                      <a:headEnd type="none" w="med" len="med"/>
+                      <a:tailEnd type="none" w="med" len="med"/>
+                    </a:lnL>
+                    <a:lnR w="12700" cap="flat" cmpd="sng" algn="ctr">
+                      <a:solidFill>
+                        <a:schemeClr val="tx1"/>
+                      </a:solidFill>
+                      <a:prstDash val="solid"/>
+                      <a:round/>
+                      <a:headEnd type="none" w="med" len="med"/>
+                      <a:tailEnd type="none" w="med" len="med"/>
+                    </a:lnR>
+                    <a:lnT w="12700" cap="flat" cmpd="sng" algn="ctr">
+                      <a:solidFill>
+                        <a:schemeClr val="tx1"/>
+                      </a:solidFill>
+                      <a:prstDash val="solid"/>
+                      <a:round/>
+                      <a:headEnd type="none" w="med" len="med"/>
+                      <a:tailEnd type="none" w="med" len="med"/>
+                    </a:lnT>
+                    <a:lnB w="12700" cap="flat" cmpd="sng" algn="ctr">
+                      <a:solidFill>
+                        <a:schemeClr val="tx1"/>
+                      </a:solidFill>
+                      <a:prstDash val="solid"/>
+                      <a:round/>
+                      <a:headEnd type="none" w="med" len="med"/>
+                      <a:tailEnd type="none" w="med" len="med"/>
+                    </a:lnB>
+                  </a:tcPr>
+                </a:tc>
+                <a:extLst>
+                  <a:ext uri="{0D108BD9-81ED-4DB2-BD59-A6C34878D82A}">
+                    <a16:rowId xmlns:a16="http://schemas.microsoft.com/office/drawing/2014/main" val="10004"/>
+                  </a:ext>
+                </a:extLst>
+              </a:tr>
+              <a:tr h="569009">
+                <a:tc>
+                  <a:txBody>
+                    <a:bodyPr/>
+                    <a:lstStyle/>
+                    <a:p>
+                      <a:pPr marL="0" lvl="0" indent="0" algn="ctr" rtl="0">
+                        <a:spcBef>
+                          <a:spcPts val="0"/>
+                        </a:spcBef>
+                        <a:spcAft>
+                          <a:spcPts val="0"/>
+                        </a:spcAft>
+                        <a:buNone/>
+                      </a:pPr>
+                      <a:r>
+                        <a:rPr lang="en" sz="1600" b="1" dirty="0" smtClean="0">
+                          <a:solidFill>
+                            <a:schemeClr val="tx1"/>
+                          </a:solidFill>
+                          <a:latin typeface="Montserrat Black"/>
+                          <a:ea typeface="Montserrat Black"/>
+                          <a:cs typeface="Montserrat Black"/>
+                          <a:sym typeface="Montserrat Black"/>
+                        </a:rPr>
+                        <a:t>TC-28</a:t>
+                      </a:r>
+                      <a:endParaRPr lang="en" sz="1600" b="1" dirty="0" smtClean="0">
+                        <a:solidFill>
+                          <a:schemeClr val="tx1"/>
+                        </a:solidFill>
+                        <a:latin typeface="Montserrat Black"/>
+                        <a:ea typeface="Montserrat Black"/>
+                        <a:cs typeface="Montserrat Black"/>
+                        <a:sym typeface="Montserrat Black"/>
+                      </a:endParaRPr>
+                    </a:p>
+                  </a:txBody>
+                  <a:tcPr marL="90000" marR="90000" marT="91425" marB="91425" anchor="ctr">
+                    <a:lnL w="12700" cap="flat" cmpd="sng" algn="ctr">
+                      <a:solidFill>
+                        <a:schemeClr val="tx1"/>
+                      </a:solidFill>
+                      <a:prstDash val="solid"/>
+                      <a:round/>
+                      <a:headEnd type="none" w="med" len="med"/>
+                      <a:tailEnd type="none" w="med" len="med"/>
+                    </a:lnL>
+                    <a:lnR w="12700" cap="flat" cmpd="sng" algn="ctr">
+                      <a:solidFill>
+                        <a:schemeClr val="tx1"/>
+                      </a:solidFill>
+                      <a:prstDash val="solid"/>
+                      <a:round/>
+                      <a:headEnd type="none" w="med" len="med"/>
+                      <a:tailEnd type="none" w="med" len="med"/>
+                    </a:lnR>
+                    <a:lnT w="12700" cap="flat" cmpd="sng" algn="ctr">
+                      <a:solidFill>
+                        <a:schemeClr val="tx1"/>
+                      </a:solidFill>
+                      <a:prstDash val="solid"/>
+                      <a:round/>
+                      <a:headEnd type="none" w="med" len="med"/>
+                      <a:tailEnd type="none" w="med" len="med"/>
+                    </a:lnT>
+                    <a:lnB w="12700" cap="flat" cmpd="sng" algn="ctr">
+                      <a:solidFill>
+                        <a:schemeClr val="tx1"/>
+                      </a:solidFill>
+                      <a:prstDash val="solid"/>
+                      <a:round/>
+                      <a:headEnd type="none" w="med" len="med"/>
+                      <a:tailEnd type="none" w="med" len="med"/>
+                    </a:lnB>
+                  </a:tcPr>
+                </a:tc>
+                <a:tc>
+                  <a:txBody>
+                    <a:bodyPr/>
+                    <a:lstStyle/>
+                    <a:p>
+                      <a:pPr marL="0" lvl="0" indent="0" algn="ctr" rtl="0">
+                        <a:spcBef>
+                          <a:spcPts val="0"/>
+                        </a:spcBef>
+                        <a:spcAft>
+                          <a:spcPts val="0"/>
+                        </a:spcAft>
+                        <a:buNone/>
+                      </a:pPr>
+                      <a:r>
+                        <a:rPr lang="en-US" sz="1200" b="1" dirty="0" smtClean="0">
+                          <a:solidFill>
+                            <a:schemeClr val="tx1"/>
+                          </a:solidFill>
+                          <a:latin typeface="Montserrat Medium"/>
+                          <a:ea typeface="Montserrat Medium"/>
+                          <a:cs typeface="Montserrat Medium"/>
+                          <a:sym typeface="Montserrat Medium"/>
+                        </a:rPr>
+                        <a:t>Memory usage</a:t>
+                      </a:r>
+                      <a:endParaRPr sz="1200" b="1" dirty="0">
+                        <a:solidFill>
+                          <a:schemeClr val="tx1"/>
+                        </a:solidFill>
+                        <a:latin typeface="Montserrat Medium"/>
+                        <a:ea typeface="Montserrat Medium"/>
+                        <a:cs typeface="Montserrat Medium"/>
+                        <a:sym typeface="Montserrat Medium"/>
+                      </a:endParaRPr>
+                    </a:p>
+                  </a:txBody>
+                  <a:tcPr marL="90000" marR="90000" marT="91425" marB="91425" anchor="ctr">
+                    <a:lnL w="12700" cap="flat" cmpd="sng" algn="ctr">
+                      <a:solidFill>
+                        <a:schemeClr val="tx1"/>
+                      </a:solidFill>
+                      <a:prstDash val="solid"/>
+                      <a:round/>
+                      <a:headEnd type="none" w="med" len="med"/>
+                      <a:tailEnd type="none" w="med" len="med"/>
+                    </a:lnL>
+                    <a:lnR w="12700" cap="flat" cmpd="sng" algn="ctr">
+                      <a:solidFill>
+                        <a:schemeClr val="tx1"/>
+                      </a:solidFill>
+                      <a:prstDash val="solid"/>
+                      <a:round/>
+                      <a:headEnd type="none" w="med" len="med"/>
+                      <a:tailEnd type="none" w="med" len="med"/>
+                    </a:lnR>
+                    <a:lnT w="12700" cap="flat" cmpd="sng" algn="ctr">
+                      <a:solidFill>
+                        <a:schemeClr val="tx1"/>
+                      </a:solidFill>
+                      <a:prstDash val="solid"/>
+                      <a:round/>
+                      <a:headEnd type="none" w="med" len="med"/>
+                      <a:tailEnd type="none" w="med" len="med"/>
+                    </a:lnT>
+                    <a:lnB w="12700" cap="flat" cmpd="sng" algn="ctr">
+                      <a:solidFill>
+                        <a:schemeClr val="tx1"/>
+                      </a:solidFill>
+                      <a:prstDash val="solid"/>
+                      <a:round/>
+                      <a:headEnd type="none" w="med" len="med"/>
+                      <a:tailEnd type="none" w="med" len="med"/>
+                    </a:lnB>
+                  </a:tcPr>
+                </a:tc>
+                <a:tc>
+                  <a:txBody>
+                    <a:bodyPr/>
+                    <a:lstStyle/>
+                    <a:p>
+                      <a:pPr marL="0" lvl="0" indent="0" algn="ctr" rtl="0">
+                        <a:spcBef>
+                          <a:spcPts val="0"/>
+                        </a:spcBef>
+                        <a:spcAft>
+                          <a:spcPts val="0"/>
+                        </a:spcAft>
+                        <a:buNone/>
+                      </a:pPr>
+                      <a:r>
+                        <a:rPr lang="en-US" sz="1200" b="1" dirty="0" smtClean="0">
+                          <a:solidFill>
+                            <a:schemeClr val="tx1"/>
+                          </a:solidFill>
+                          <a:latin typeface="Montserrat Medium"/>
+                          <a:ea typeface="Montserrat Medium"/>
+                          <a:cs typeface="Montserrat Medium"/>
+                          <a:sym typeface="Montserrat Medium"/>
+                        </a:rPr>
+                        <a:t>Stable</a:t>
+                      </a:r>
+                      <a:endParaRPr sz="1200" b="1" dirty="0">
+                        <a:solidFill>
+                          <a:schemeClr val="tx1"/>
+                        </a:solidFill>
+                        <a:latin typeface="Montserrat Medium"/>
+                        <a:ea typeface="Montserrat Medium"/>
+                        <a:cs typeface="Montserrat Medium"/>
+                        <a:sym typeface="Montserrat Medium"/>
+                      </a:endParaRPr>
+                    </a:p>
+                  </a:txBody>
+                  <a:tcPr marL="90000" marR="90000" marT="91425" marB="91425" anchor="ctr">
+                    <a:lnL w="12700" cap="flat" cmpd="sng" algn="ctr">
+                      <a:solidFill>
+                        <a:schemeClr val="tx1"/>
+                      </a:solidFill>
+                      <a:prstDash val="solid"/>
+                      <a:round/>
+                      <a:headEnd type="none" w="med" len="med"/>
+                      <a:tailEnd type="none" w="med" len="med"/>
+                    </a:lnL>
+                    <a:lnR w="12700" cap="flat" cmpd="sng" algn="ctr">
+                      <a:solidFill>
+                        <a:schemeClr val="tx1"/>
+                      </a:solidFill>
+                      <a:prstDash val="solid"/>
+                      <a:round/>
+                      <a:headEnd type="none" w="med" len="med"/>
+                      <a:tailEnd type="none" w="med" len="med"/>
+                    </a:lnR>
+                    <a:lnT w="12700" cap="flat" cmpd="sng" algn="ctr">
+                      <a:solidFill>
+                        <a:schemeClr val="tx1"/>
+                      </a:solidFill>
+                      <a:prstDash val="solid"/>
+                      <a:round/>
+                      <a:headEnd type="none" w="med" len="med"/>
+                      <a:tailEnd type="none" w="med" len="med"/>
+                    </a:lnT>
+                    <a:lnB w="12700" cap="flat" cmpd="sng" algn="ctr">
+                      <a:solidFill>
+                        <a:schemeClr val="tx1"/>
+                      </a:solidFill>
+                      <a:prstDash val="solid"/>
+                      <a:round/>
+                      <a:headEnd type="none" w="med" len="med"/>
+                      <a:tailEnd type="none" w="med" len="med"/>
+                    </a:lnB>
+                  </a:tcPr>
+                </a:tc>
+                <a:extLst>
+                  <a:ext uri="{0D108BD9-81ED-4DB2-BD59-A6C34878D82A}">
+                    <a16:rowId xmlns:a16="http://schemas.microsoft.com/office/drawing/2014/main" val="10005"/>
+                  </a:ext>
+                </a:extLst>
+              </a:tr>
+            </a:tbl>
+          </a:graphicData>
+        </a:graphic>
+      </p:graphicFrame>
+    </p:spTree>
+    <p:extLst>
+      <p:ext uri="{BB962C8B-B14F-4D97-AF65-F5344CB8AC3E}">
+        <p14:creationId xmlns:p14="http://schemas.microsoft.com/office/powerpoint/2010/main" val="3897021202"/>
+      </p:ext>
+    </p:extLst>
+  </p:cSld>
+  <p:clrMapOvr>
+    <a:masterClrMapping/>
+  </p:clrMapOvr>
+</p:sld>
+</file>
+
+<file path=ppt/slides/slide11.xml><?xml version="1.0" encoding="utf-8"?>
+<p:sld xmlns:a="http://schemas.openxmlformats.org/drawingml/2006/main" xmlns:r="http://schemas.openxmlformats.org/officeDocument/2006/relationships" xmlns:p="http://schemas.openxmlformats.org/presentationml/2006/main">
+  <p:cSld>
+    <p:spTree>
+      <p:nvGrpSpPr>
+        <p:cNvPr id="1" name="Shape 1612"/>
+        <p:cNvGrpSpPr/>
+        <p:nvPr/>
+      </p:nvGrpSpPr>
+      <p:grpSpPr>
+        <a:xfrm>
+          <a:off x="0" y="0"/>
+          <a:ext cx="0" cy="0"/>
+          <a:chOff x="0" y="0"/>
+          <a:chExt cx="0" cy="0"/>
+        </a:xfrm>
+      </p:grpSpPr>
+      <p:sp>
+        <p:nvSpPr>
+          <p:cNvPr id="1613" name="Google Shape;1613;p57"/>
+          <p:cNvSpPr txBox="1">
+            <a:spLocks noGrp="1"/>
+          </p:cNvSpPr>
+          <p:nvPr>
+            <p:ph type="title"/>
+          </p:nvPr>
+        </p:nvSpPr>
+        <p:spPr>
+          <a:xfrm>
+            <a:off x="1478140" y="159129"/>
+            <a:ext cx="6162501" cy="836928"/>
+          </a:xfrm>
+          <a:prstGeom prst="rect">
+            <a:avLst/>
+          </a:prstGeom>
+        </p:spPr>
+        <p:txBody>
+          <a:bodyPr spcFirstLastPara="1" wrap="square" lIns="90000" tIns="91425" rIns="90000" bIns="91425" anchor="ctr" anchorCtr="0">
+            <a:noAutofit/>
+          </a:bodyPr>
+          <a:lstStyle/>
+          <a:p>
+            <a:pPr marL="0" lvl="0" indent="0" algn="ctr" rtl="0">
+              <a:spcBef>
+                <a:spcPts val="0"/>
+              </a:spcBef>
+              <a:spcAft>
+                <a:spcPts val="0"/>
+              </a:spcAft>
+              <a:buNone/>
+            </a:pPr>
+            <a:r>
+              <a:rPr lang="en" sz="3600" dirty="0"/>
+              <a:t>B</a:t>
+            </a:r>
+            <a:r>
+              <a:rPr lang="en" sz="3600" dirty="0" smtClean="0"/>
+              <a:t>. Non-Functional Cases</a:t>
+            </a:r>
+            <a:endParaRPr sz="3600" dirty="0"/>
+          </a:p>
+        </p:txBody>
+      </p:sp>
+      <p:graphicFrame>
+        <p:nvGraphicFramePr>
+          <p:cNvPr id="89" name="Google Shape;698;p43"/>
+          <p:cNvGraphicFramePr/>
+          <p:nvPr>
+            <p:extLst>
+              <p:ext uri="{D42A27DB-BD31-4B8C-83A1-F6EECF244321}">
+                <p14:modId xmlns:p14="http://schemas.microsoft.com/office/powerpoint/2010/main" val="3530948272"/>
+              </p:ext>
+            </p:extLst>
+          </p:nvPr>
+        </p:nvGraphicFramePr>
+        <p:xfrm>
+          <a:off x="910670" y="1248229"/>
+          <a:ext cx="7447428" cy="3489054"/>
+        </p:xfrm>
+        <a:graphic>
+          <a:graphicData uri="http://schemas.openxmlformats.org/drawingml/2006/table">
+            <a:tbl>
+              <a:tblPr>
+                <a:noFill/>
+              </a:tblPr>
+              <a:tblGrid>
+                <a:gridCol w="2482476">
+                  <a:extLst>
+                    <a:ext uri="{9D8B030D-6E8A-4147-A177-3AD203B41FA5}">
+                      <a16:colId xmlns:a16="http://schemas.microsoft.com/office/drawing/2014/main" val="20000"/>
+                    </a:ext>
+                  </a:extLst>
+                </a:gridCol>
+                <a:gridCol w="2482476">
+                  <a:extLst>
+                    <a:ext uri="{9D8B030D-6E8A-4147-A177-3AD203B41FA5}">
+                      <a16:colId xmlns:a16="http://schemas.microsoft.com/office/drawing/2014/main" val="1186318376"/>
+                    </a:ext>
+                  </a:extLst>
+                </a:gridCol>
+                <a:gridCol w="2482476">
+                  <a:extLst>
+                    <a:ext uri="{9D8B030D-6E8A-4147-A177-3AD203B41FA5}">
+                      <a16:colId xmlns:a16="http://schemas.microsoft.com/office/drawing/2014/main" val="3049769508"/>
+                    </a:ext>
+                  </a:extLst>
+                </a:gridCol>
+              </a:tblGrid>
+              <a:tr h="588889">
+                <a:tc gridSpan="3">
+                  <a:txBody>
+                    <a:bodyPr/>
+                    <a:lstStyle/>
+                    <a:p>
+                      <a:pPr marL="0" lvl="0" indent="0" algn="ctr" rtl="0">
+                        <a:spcBef>
+                          <a:spcPts val="0"/>
+                        </a:spcBef>
+                        <a:spcAft>
+                          <a:spcPts val="0"/>
+                        </a:spcAft>
+                        <a:buNone/>
+                      </a:pPr>
+                      <a:r>
+                        <a:rPr lang="en" sz="2400" b="1" dirty="0" smtClean="0">
+                          <a:solidFill>
+                            <a:schemeClr val="tx1"/>
+                          </a:solidFill>
+                          <a:latin typeface="Montserrat Black"/>
+                          <a:ea typeface="Montserrat Black"/>
+                          <a:cs typeface="Montserrat Black"/>
+                          <a:sym typeface="Montserrat Black"/>
+                        </a:rPr>
+                        <a:t>B2. </a:t>
+                      </a:r>
+                      <a:r>
+                        <a:rPr lang="en-US" sz="2400" b="1" dirty="0" smtClean="0">
+                          <a:solidFill>
+                            <a:schemeClr val="tx1"/>
+                          </a:solidFill>
+                          <a:latin typeface="Montserrat Black"/>
+                          <a:ea typeface="Montserrat Black"/>
+                          <a:cs typeface="Montserrat Black"/>
+                          <a:sym typeface="Montserrat Black"/>
+                        </a:rPr>
+                        <a:t>Usability Testing</a:t>
+                      </a:r>
+                      <a:endParaRPr sz="2400" b="1" dirty="0">
+                        <a:solidFill>
+                          <a:schemeClr val="tx1"/>
+                        </a:solidFill>
+                        <a:latin typeface="Montserrat Black"/>
+                        <a:ea typeface="Montserrat Black"/>
+                        <a:cs typeface="Montserrat Black"/>
+                        <a:sym typeface="Montserrat Black"/>
+                      </a:endParaRPr>
+                    </a:p>
+                  </a:txBody>
+                  <a:tcPr marL="90000" marR="90000" marT="91425" marB="91425" anchor="ctr">
+                    <a:lnL w="12700" cap="flat" cmpd="sng" algn="ctr">
+                      <a:solidFill>
+                        <a:schemeClr val="tx1"/>
+                      </a:solidFill>
+                      <a:prstDash val="solid"/>
+                      <a:round/>
+                      <a:headEnd type="none" w="med" len="med"/>
+                      <a:tailEnd type="none" w="med" len="med"/>
+                    </a:lnL>
+                    <a:lnR w="12700" cap="flat" cmpd="sng" algn="ctr">
+                      <a:solidFill>
+                        <a:schemeClr val="tx1"/>
+                      </a:solidFill>
+                      <a:prstDash val="solid"/>
+                      <a:round/>
+                      <a:headEnd type="none" w="med" len="med"/>
+                      <a:tailEnd type="none" w="med" len="med"/>
+                    </a:lnR>
+                    <a:lnT w="12700" cap="flat" cmpd="sng" algn="ctr">
+                      <a:solidFill>
+                        <a:schemeClr val="tx1"/>
+                      </a:solidFill>
+                      <a:prstDash val="solid"/>
+                      <a:round/>
+                      <a:headEnd type="none" w="med" len="med"/>
+                      <a:tailEnd type="none" w="med" len="med"/>
+                    </a:lnT>
+                    <a:lnB w="12700" cap="flat" cmpd="sng" algn="ctr">
+                      <a:solidFill>
+                        <a:schemeClr val="tx1"/>
+                      </a:solidFill>
+                      <a:prstDash val="solid"/>
+                      <a:round/>
+                      <a:headEnd type="none" w="med" len="med"/>
+                      <a:tailEnd type="none" w="med" len="med"/>
+                    </a:lnB>
+                  </a:tcPr>
+                </a:tc>
+                <a:tc hMerge="1">
+                  <a:txBody>
+                    <a:bodyPr/>
+                    <a:lstStyle/>
+                    <a:p>
+                      <a:endParaRPr lang="en-US"/>
+                    </a:p>
+                  </a:txBody>
+                  <a:tcPr/>
+                </a:tc>
+                <a:tc hMerge="1">
+                  <a:txBody>
+                    <a:bodyPr/>
+                    <a:lstStyle/>
+                    <a:p>
+                      <a:endParaRPr lang="en-US"/>
+                    </a:p>
+                  </a:txBody>
+                  <a:tcPr/>
+                </a:tc>
+                <a:extLst>
+                  <a:ext uri="{0D108BD9-81ED-4DB2-BD59-A6C34878D82A}">
+                    <a16:rowId xmlns:a16="http://schemas.microsoft.com/office/drawing/2014/main" val="10000"/>
+                  </a:ext>
+                </a:extLst>
+              </a:tr>
+              <a:tr h="654335">
+                <a:tc>
+                  <a:txBody>
+                    <a:bodyPr/>
+                    <a:lstStyle/>
+                    <a:p>
+                      <a:pPr marL="0" lvl="0" indent="0" algn="ctr" rtl="0">
+                        <a:spcBef>
+                          <a:spcPts val="0"/>
+                        </a:spcBef>
+                        <a:spcAft>
+                          <a:spcPts val="0"/>
+                        </a:spcAft>
+                        <a:buNone/>
+                      </a:pPr>
+                      <a:r>
+                        <a:rPr lang="en" b="1" dirty="0" smtClean="0">
+                          <a:solidFill>
+                            <a:schemeClr val="tx1"/>
+                          </a:solidFill>
+                          <a:latin typeface="Montserrat Medium"/>
+                          <a:ea typeface="Montserrat Medium"/>
+                          <a:cs typeface="Montserrat Medium"/>
+                          <a:sym typeface="Montserrat Medium"/>
+                        </a:rPr>
+                        <a:t>TEST</a:t>
+                      </a:r>
+                      <a:r>
+                        <a:rPr lang="en" b="1" baseline="0" dirty="0" smtClean="0">
+                          <a:solidFill>
+                            <a:schemeClr val="tx1"/>
+                          </a:solidFill>
+                          <a:latin typeface="Montserrat Medium"/>
+                          <a:ea typeface="Montserrat Medium"/>
+                          <a:cs typeface="Montserrat Medium"/>
+                          <a:sym typeface="Montserrat Medium"/>
+                        </a:rPr>
+                        <a:t> ID</a:t>
+                      </a:r>
+                      <a:endParaRPr b="1" dirty="0">
+                        <a:solidFill>
+                          <a:schemeClr val="tx1"/>
+                        </a:solidFill>
+                        <a:latin typeface="Montserrat Medium"/>
+                        <a:ea typeface="Montserrat Medium"/>
+                        <a:cs typeface="Montserrat Medium"/>
+                        <a:sym typeface="Montserrat Medium"/>
+                      </a:endParaRPr>
+                    </a:p>
+                  </a:txBody>
+                  <a:tcPr marL="90000" marR="90000" marT="91425" marB="91425" anchor="ctr">
+                    <a:lnL w="12700" cap="flat" cmpd="sng" algn="ctr">
+                      <a:solidFill>
+                        <a:schemeClr val="tx1"/>
+                      </a:solidFill>
+                      <a:prstDash val="solid"/>
+                      <a:round/>
+                      <a:headEnd type="none" w="med" len="med"/>
+                      <a:tailEnd type="none" w="med" len="med"/>
+                    </a:lnL>
+                    <a:lnR w="12700" cap="flat" cmpd="sng" algn="ctr">
+                      <a:solidFill>
+                        <a:schemeClr val="tx1"/>
+                      </a:solidFill>
+                      <a:prstDash val="solid"/>
+                      <a:round/>
+                      <a:headEnd type="none" w="med" len="med"/>
+                      <a:tailEnd type="none" w="med" len="med"/>
+                    </a:lnR>
+                    <a:lnT w="12700" cap="flat" cmpd="sng" algn="ctr">
+                      <a:solidFill>
+                        <a:schemeClr val="tx1"/>
+                      </a:solidFill>
+                      <a:prstDash val="solid"/>
+                      <a:round/>
+                      <a:headEnd type="none" w="med" len="med"/>
+                      <a:tailEnd type="none" w="med" len="med"/>
+                    </a:lnT>
+                    <a:lnB w="12700" cap="flat" cmpd="sng" algn="ctr">
+                      <a:solidFill>
+                        <a:schemeClr val="tx1"/>
+                      </a:solidFill>
+                      <a:prstDash val="solid"/>
+                      <a:round/>
+                      <a:headEnd type="none" w="med" len="med"/>
+                      <a:tailEnd type="none" w="med" len="med"/>
+                    </a:lnB>
+                  </a:tcPr>
+                </a:tc>
+                <a:tc>
+                  <a:txBody>
+                    <a:bodyPr/>
+                    <a:lstStyle/>
+                    <a:p>
+                      <a:pPr marL="0" lvl="0" indent="0" algn="ctr" rtl="0">
+                        <a:spcBef>
+                          <a:spcPts val="0"/>
+                        </a:spcBef>
+                        <a:spcAft>
+                          <a:spcPts val="0"/>
+                        </a:spcAft>
+                        <a:buNone/>
+                      </a:pPr>
+                      <a:r>
+                        <a:rPr lang="en" b="1" dirty="0" smtClean="0">
+                          <a:solidFill>
+                            <a:schemeClr val="tx1"/>
+                          </a:solidFill>
+                          <a:latin typeface="Montserrat Medium"/>
+                          <a:ea typeface="Montserrat Medium"/>
+                          <a:cs typeface="Montserrat Medium"/>
+                          <a:sym typeface="Montserrat Medium"/>
+                        </a:rPr>
+                        <a:t>TEST</a:t>
+                      </a:r>
+                      <a:r>
+                        <a:rPr lang="en" b="1" baseline="0" dirty="0" smtClean="0">
+                          <a:solidFill>
+                            <a:schemeClr val="tx1"/>
+                          </a:solidFill>
+                          <a:latin typeface="Montserrat Medium"/>
+                          <a:ea typeface="Montserrat Medium"/>
+                          <a:cs typeface="Montserrat Medium"/>
+                          <a:sym typeface="Montserrat Medium"/>
+                        </a:rPr>
+                        <a:t> CASE</a:t>
+                      </a:r>
+                      <a:endParaRPr b="1" dirty="0">
+                        <a:solidFill>
+                          <a:schemeClr val="tx1"/>
+                        </a:solidFill>
+                        <a:latin typeface="Montserrat Medium"/>
+                        <a:ea typeface="Montserrat Medium"/>
+                        <a:cs typeface="Montserrat Medium"/>
+                        <a:sym typeface="Montserrat Medium"/>
+                      </a:endParaRPr>
+                    </a:p>
+                  </a:txBody>
+                  <a:tcPr marL="90000" marR="90000" marT="91425" marB="91425" anchor="ctr">
+                    <a:lnL w="12700" cap="flat" cmpd="sng" algn="ctr">
+                      <a:solidFill>
+                        <a:schemeClr val="tx1"/>
+                      </a:solidFill>
+                      <a:prstDash val="solid"/>
+                      <a:round/>
+                      <a:headEnd type="none" w="med" len="med"/>
+                      <a:tailEnd type="none" w="med" len="med"/>
+                    </a:lnL>
+                    <a:lnR w="12700" cap="flat" cmpd="sng" algn="ctr">
+                      <a:solidFill>
+                        <a:schemeClr val="tx1"/>
+                      </a:solidFill>
+                      <a:prstDash val="solid"/>
+                      <a:round/>
+                      <a:headEnd type="none" w="med" len="med"/>
+                      <a:tailEnd type="none" w="med" len="med"/>
+                    </a:lnR>
+                    <a:lnT w="12700" cap="flat" cmpd="sng" algn="ctr">
+                      <a:solidFill>
+                        <a:schemeClr val="tx1"/>
+                      </a:solidFill>
+                      <a:prstDash val="solid"/>
+                      <a:round/>
+                      <a:headEnd type="none" w="med" len="med"/>
+                      <a:tailEnd type="none" w="med" len="med"/>
+                    </a:lnT>
+                    <a:lnB w="12700" cap="flat" cmpd="sng" algn="ctr">
+                      <a:solidFill>
+                        <a:schemeClr val="tx1"/>
+                      </a:solidFill>
+                      <a:prstDash val="solid"/>
+                      <a:round/>
+                      <a:headEnd type="none" w="med" len="med"/>
+                      <a:tailEnd type="none" w="med" len="med"/>
+                    </a:lnB>
+                  </a:tcPr>
+                </a:tc>
+                <a:tc>
+                  <a:txBody>
+                    <a:bodyPr/>
+                    <a:lstStyle/>
+                    <a:p>
+                      <a:pPr marL="0" lvl="0" indent="0" algn="ctr" rtl="0">
+                        <a:spcBef>
+                          <a:spcPts val="0"/>
+                        </a:spcBef>
+                        <a:spcAft>
+                          <a:spcPts val="0"/>
+                        </a:spcAft>
+                        <a:buNone/>
+                      </a:pPr>
+                      <a:r>
+                        <a:rPr lang="en" b="1" dirty="0" smtClean="0">
+                          <a:solidFill>
+                            <a:schemeClr val="tx1"/>
+                          </a:solidFill>
+                          <a:latin typeface="Montserrat Medium"/>
+                          <a:ea typeface="Montserrat Medium"/>
+                          <a:cs typeface="Montserrat Medium"/>
+                          <a:sym typeface="Montserrat Medium"/>
+                        </a:rPr>
+                        <a:t>EXPECTED</a:t>
+                      </a:r>
+                      <a:r>
+                        <a:rPr lang="en" b="1" baseline="0" dirty="0" smtClean="0">
+                          <a:solidFill>
+                            <a:schemeClr val="tx1"/>
+                          </a:solidFill>
+                          <a:latin typeface="Montserrat Medium"/>
+                          <a:ea typeface="Montserrat Medium"/>
+                          <a:cs typeface="Montserrat Medium"/>
+                          <a:sym typeface="Montserrat Medium"/>
+                        </a:rPr>
+                        <a:t> RESULT</a:t>
+                      </a:r>
+                      <a:endParaRPr b="1" dirty="0">
+                        <a:solidFill>
+                          <a:schemeClr val="tx1"/>
+                        </a:solidFill>
+                        <a:latin typeface="Montserrat Medium"/>
+                        <a:ea typeface="Montserrat Medium"/>
+                        <a:cs typeface="Montserrat Medium"/>
+                        <a:sym typeface="Montserrat Medium"/>
+                      </a:endParaRPr>
+                    </a:p>
+                  </a:txBody>
+                  <a:tcPr marL="90000" marR="90000" marT="91425" marB="91425" anchor="ctr">
+                    <a:lnL w="12700" cap="flat" cmpd="sng" algn="ctr">
+                      <a:solidFill>
+                        <a:schemeClr val="tx1"/>
+                      </a:solidFill>
+                      <a:prstDash val="solid"/>
+                      <a:round/>
+                      <a:headEnd type="none" w="med" len="med"/>
+                      <a:tailEnd type="none" w="med" len="med"/>
+                    </a:lnL>
+                    <a:lnR w="12700" cap="flat" cmpd="sng" algn="ctr">
+                      <a:solidFill>
+                        <a:schemeClr val="tx1"/>
+                      </a:solidFill>
+                      <a:prstDash val="solid"/>
+                      <a:round/>
+                      <a:headEnd type="none" w="med" len="med"/>
+                      <a:tailEnd type="none" w="med" len="med"/>
+                    </a:lnR>
+                    <a:lnT w="12700" cap="flat" cmpd="sng" algn="ctr">
+                      <a:solidFill>
+                        <a:schemeClr val="tx1"/>
+                      </a:solidFill>
+                      <a:prstDash val="solid"/>
+                      <a:round/>
+                      <a:headEnd type="none" w="med" len="med"/>
+                      <a:tailEnd type="none" w="med" len="med"/>
+                    </a:lnT>
+                    <a:lnB w="12700" cap="flat" cmpd="sng" algn="ctr">
+                      <a:solidFill>
+                        <a:schemeClr val="tx1"/>
+                      </a:solidFill>
+                      <a:prstDash val="solid"/>
+                      <a:round/>
+                      <a:headEnd type="none" w="med" len="med"/>
+                      <a:tailEnd type="none" w="med" len="med"/>
+                    </a:lnB>
+                  </a:tcPr>
+                </a:tc>
+                <a:extLst>
+                  <a:ext uri="{0D108BD9-81ED-4DB2-BD59-A6C34878D82A}">
+                    <a16:rowId xmlns:a16="http://schemas.microsoft.com/office/drawing/2014/main" val="10001"/>
+                  </a:ext>
+                </a:extLst>
+              </a:tr>
+              <a:tr h="538803">
+                <a:tc>
+                  <a:txBody>
+                    <a:bodyPr/>
+                    <a:lstStyle/>
+                    <a:p>
+                      <a:pPr marL="0" lvl="0" indent="0" algn="ctr" rtl="0">
+                        <a:spcBef>
+                          <a:spcPts val="0"/>
+                        </a:spcBef>
+                        <a:spcAft>
+                          <a:spcPts val="0"/>
+                        </a:spcAft>
+                        <a:buNone/>
+                      </a:pPr>
+                      <a:r>
+                        <a:rPr lang="en" sz="1600" b="1" dirty="0" smtClean="0">
+                          <a:solidFill>
+                            <a:schemeClr val="tx1"/>
+                          </a:solidFill>
+                          <a:latin typeface="Montserrat Black"/>
+                          <a:ea typeface="Montserrat Black"/>
+                          <a:cs typeface="Montserrat Black"/>
+                          <a:sym typeface="Montserrat Black"/>
+                        </a:rPr>
+                        <a:t>TC-29</a:t>
+                      </a:r>
+                      <a:endParaRPr sz="1600" b="1" dirty="0">
+                        <a:solidFill>
+                          <a:schemeClr val="tx1"/>
+                        </a:solidFill>
+                        <a:latin typeface="Montserrat Black"/>
+                        <a:ea typeface="Montserrat Black"/>
+                        <a:cs typeface="Montserrat Black"/>
+                        <a:sym typeface="Montserrat Black"/>
+                      </a:endParaRPr>
+                    </a:p>
+                  </a:txBody>
+                  <a:tcPr marL="90000" marR="90000" marT="91425" marB="91425" anchor="ctr">
+                    <a:lnL w="12700" cap="flat" cmpd="sng" algn="ctr">
+                      <a:solidFill>
+                        <a:schemeClr val="tx1"/>
+                      </a:solidFill>
+                      <a:prstDash val="solid"/>
+                      <a:round/>
+                      <a:headEnd type="none" w="med" len="med"/>
+                      <a:tailEnd type="none" w="med" len="med"/>
+                    </a:lnL>
+                    <a:lnR w="12700" cap="flat" cmpd="sng" algn="ctr">
+                      <a:solidFill>
+                        <a:schemeClr val="tx1"/>
+                      </a:solidFill>
+                      <a:prstDash val="solid"/>
+                      <a:round/>
+                      <a:headEnd type="none" w="med" len="med"/>
+                      <a:tailEnd type="none" w="med" len="med"/>
+                    </a:lnR>
+                    <a:lnT w="12700" cap="flat" cmpd="sng" algn="ctr">
+                      <a:solidFill>
+                        <a:schemeClr val="tx1"/>
+                      </a:solidFill>
+                      <a:prstDash val="solid"/>
+                      <a:round/>
+                      <a:headEnd type="none" w="med" len="med"/>
+                      <a:tailEnd type="none" w="med" len="med"/>
+                    </a:lnT>
+                    <a:lnB w="12700" cap="flat" cmpd="sng" algn="ctr">
+                      <a:solidFill>
+                        <a:schemeClr val="tx1"/>
+                      </a:solidFill>
+                      <a:prstDash val="solid"/>
+                      <a:round/>
+                      <a:headEnd type="none" w="med" len="med"/>
+                      <a:tailEnd type="none" w="med" len="med"/>
+                    </a:lnB>
+                  </a:tcPr>
+                </a:tc>
+                <a:tc>
+                  <a:txBody>
+                    <a:bodyPr/>
+                    <a:lstStyle/>
+                    <a:p>
+                      <a:pPr marL="0" lvl="0" indent="0" algn="ctr" rtl="0">
+                        <a:spcBef>
+                          <a:spcPts val="0"/>
+                        </a:spcBef>
+                        <a:spcAft>
+                          <a:spcPts val="0"/>
+                        </a:spcAft>
+                        <a:buNone/>
+                      </a:pPr>
+                      <a:r>
+                        <a:rPr lang="en-US" sz="1200" b="1" dirty="0" smtClean="0">
+                          <a:solidFill>
+                            <a:schemeClr val="tx1"/>
+                          </a:solidFill>
+                          <a:latin typeface="Montserrat Medium"/>
+                          <a:ea typeface="Montserrat Medium"/>
+                          <a:cs typeface="Montserrat Medium"/>
+                          <a:sym typeface="Montserrat Medium"/>
+                        </a:rPr>
+                        <a:t>First-time user</a:t>
+                      </a:r>
+                      <a:endParaRPr sz="1200" b="1" dirty="0">
+                        <a:solidFill>
+                          <a:schemeClr val="tx1"/>
+                        </a:solidFill>
+                        <a:latin typeface="Montserrat Medium"/>
+                        <a:ea typeface="Montserrat Medium"/>
+                        <a:cs typeface="Montserrat Medium"/>
+                        <a:sym typeface="Montserrat Medium"/>
+                      </a:endParaRPr>
+                    </a:p>
+                  </a:txBody>
+                  <a:tcPr marL="90000" marR="90000" marT="91425" marB="91425" anchor="ctr">
+                    <a:lnL w="12700" cap="flat" cmpd="sng" algn="ctr">
+                      <a:solidFill>
+                        <a:schemeClr val="tx1"/>
+                      </a:solidFill>
+                      <a:prstDash val="solid"/>
+                      <a:round/>
+                      <a:headEnd type="none" w="med" len="med"/>
+                      <a:tailEnd type="none" w="med" len="med"/>
+                    </a:lnL>
+                    <a:lnR w="12700" cap="flat" cmpd="sng" algn="ctr">
+                      <a:solidFill>
+                        <a:schemeClr val="tx1"/>
+                      </a:solidFill>
+                      <a:prstDash val="solid"/>
+                      <a:round/>
+                      <a:headEnd type="none" w="med" len="med"/>
+                      <a:tailEnd type="none" w="med" len="med"/>
+                    </a:lnR>
+                    <a:lnT w="12700" cap="flat" cmpd="sng" algn="ctr">
+                      <a:solidFill>
+                        <a:schemeClr val="tx1"/>
+                      </a:solidFill>
+                      <a:prstDash val="solid"/>
+                      <a:round/>
+                      <a:headEnd type="none" w="med" len="med"/>
+                      <a:tailEnd type="none" w="med" len="med"/>
+                    </a:lnT>
+                    <a:lnB w="12700" cap="flat" cmpd="sng" algn="ctr">
+                      <a:solidFill>
+                        <a:schemeClr val="tx1"/>
+                      </a:solidFill>
+                      <a:prstDash val="solid"/>
+                      <a:round/>
+                      <a:headEnd type="none" w="med" len="med"/>
+                      <a:tailEnd type="none" w="med" len="med"/>
+                    </a:lnB>
+                  </a:tcPr>
+                </a:tc>
+                <a:tc>
+                  <a:txBody>
+                    <a:bodyPr/>
+                    <a:lstStyle/>
+                    <a:p>
+                      <a:pPr marL="0" lvl="0" indent="0" algn="ctr" rtl="0">
+                        <a:spcBef>
+                          <a:spcPts val="0"/>
+                        </a:spcBef>
+                        <a:spcAft>
+                          <a:spcPts val="0"/>
+                        </a:spcAft>
+                        <a:buNone/>
+                      </a:pPr>
+                      <a:r>
+                        <a:rPr lang="en-US" sz="1200" b="1" dirty="0" smtClean="0">
+                          <a:solidFill>
+                            <a:schemeClr val="tx1"/>
+                          </a:solidFill>
+                          <a:latin typeface="Montserrat Medium"/>
+                          <a:ea typeface="Montserrat Medium"/>
+                          <a:cs typeface="Montserrat Medium"/>
+                          <a:sym typeface="Montserrat Medium"/>
+                        </a:rPr>
+                        <a:t>Can run without help</a:t>
+                      </a:r>
+                      <a:endParaRPr sz="1200" b="1" dirty="0">
+                        <a:solidFill>
+                          <a:schemeClr val="tx1"/>
+                        </a:solidFill>
+                        <a:latin typeface="Montserrat Medium"/>
+                        <a:ea typeface="Montserrat Medium"/>
+                        <a:cs typeface="Montserrat Medium"/>
+                        <a:sym typeface="Montserrat Medium"/>
+                      </a:endParaRPr>
+                    </a:p>
+                  </a:txBody>
+                  <a:tcPr marL="90000" marR="90000" marT="91425" marB="91425" anchor="ctr">
+                    <a:lnL w="12700" cap="flat" cmpd="sng" algn="ctr">
+                      <a:solidFill>
+                        <a:schemeClr val="tx1"/>
+                      </a:solidFill>
+                      <a:prstDash val="solid"/>
+                      <a:round/>
+                      <a:headEnd type="none" w="med" len="med"/>
+                      <a:tailEnd type="none" w="med" len="med"/>
+                    </a:lnL>
+                    <a:lnR w="12700" cap="flat" cmpd="sng" algn="ctr">
+                      <a:solidFill>
+                        <a:schemeClr val="tx1"/>
+                      </a:solidFill>
+                      <a:prstDash val="solid"/>
+                      <a:round/>
+                      <a:headEnd type="none" w="med" len="med"/>
+                      <a:tailEnd type="none" w="med" len="med"/>
+                    </a:lnR>
+                    <a:lnT w="12700" cap="flat" cmpd="sng" algn="ctr">
+                      <a:solidFill>
+                        <a:schemeClr val="tx1"/>
+                      </a:solidFill>
+                      <a:prstDash val="solid"/>
+                      <a:round/>
+                      <a:headEnd type="none" w="med" len="med"/>
+                      <a:tailEnd type="none" w="med" len="med"/>
+                    </a:lnT>
+                    <a:lnB w="12700" cap="flat" cmpd="sng" algn="ctr">
+                      <a:solidFill>
+                        <a:schemeClr val="tx1"/>
+                      </a:solidFill>
+                      <a:prstDash val="solid"/>
+                      <a:round/>
+                      <a:headEnd type="none" w="med" len="med"/>
+                      <a:tailEnd type="none" w="med" len="med"/>
+                    </a:lnB>
+                  </a:tcPr>
+                </a:tc>
+                <a:extLst>
+                  <a:ext uri="{0D108BD9-81ED-4DB2-BD59-A6C34878D82A}">
+                    <a16:rowId xmlns:a16="http://schemas.microsoft.com/office/drawing/2014/main" val="10002"/>
+                  </a:ext>
+                </a:extLst>
+              </a:tr>
+              <a:tr h="569009">
+                <a:tc>
+                  <a:txBody>
+                    <a:bodyPr/>
+                    <a:lstStyle/>
+                    <a:p>
+                      <a:pPr marL="0" lvl="0" indent="0" algn="ctr" rtl="0">
+                        <a:spcBef>
+                          <a:spcPts val="0"/>
+                        </a:spcBef>
+                        <a:spcAft>
+                          <a:spcPts val="0"/>
+                        </a:spcAft>
+                        <a:buNone/>
+                      </a:pPr>
+                      <a:r>
+                        <a:rPr lang="en" sz="1600" b="1" dirty="0" smtClean="0">
+                          <a:solidFill>
+                            <a:schemeClr val="tx1"/>
+                          </a:solidFill>
+                          <a:latin typeface="Montserrat Black"/>
+                          <a:ea typeface="Montserrat Black"/>
+                          <a:cs typeface="Montserrat Black"/>
+                          <a:sym typeface="Montserrat Black"/>
+                        </a:rPr>
+                        <a:t>TC-30</a:t>
+                      </a:r>
+                      <a:endParaRPr sz="1600" b="1" dirty="0">
+                        <a:solidFill>
+                          <a:schemeClr val="tx1"/>
+                        </a:solidFill>
+                        <a:latin typeface="Montserrat Black"/>
+                        <a:ea typeface="Montserrat Black"/>
+                        <a:cs typeface="Montserrat Black"/>
+                        <a:sym typeface="Montserrat Black"/>
+                      </a:endParaRPr>
+                    </a:p>
+                  </a:txBody>
+                  <a:tcPr marL="90000" marR="90000" marT="91425" marB="91425" anchor="ctr">
+                    <a:lnL w="12700" cap="flat" cmpd="sng" algn="ctr">
+                      <a:solidFill>
+                        <a:schemeClr val="tx1"/>
+                      </a:solidFill>
+                      <a:prstDash val="solid"/>
+                      <a:round/>
+                      <a:headEnd type="none" w="med" len="med"/>
+                      <a:tailEnd type="none" w="med" len="med"/>
+                    </a:lnL>
+                    <a:lnR w="12700" cap="flat" cmpd="sng" algn="ctr">
+                      <a:solidFill>
+                        <a:schemeClr val="tx1"/>
+                      </a:solidFill>
+                      <a:prstDash val="solid"/>
+                      <a:round/>
+                      <a:headEnd type="none" w="med" len="med"/>
+                      <a:tailEnd type="none" w="med" len="med"/>
+                    </a:lnR>
+                    <a:lnT w="12700" cap="flat" cmpd="sng" algn="ctr">
+                      <a:solidFill>
+                        <a:schemeClr val="tx1"/>
+                      </a:solidFill>
+                      <a:prstDash val="solid"/>
+                      <a:round/>
+                      <a:headEnd type="none" w="med" len="med"/>
+                      <a:tailEnd type="none" w="med" len="med"/>
+                    </a:lnT>
+                    <a:lnB w="12700" cap="flat" cmpd="sng" algn="ctr">
+                      <a:solidFill>
+                        <a:schemeClr val="tx1"/>
+                      </a:solidFill>
+                      <a:prstDash val="solid"/>
+                      <a:round/>
+                      <a:headEnd type="none" w="med" len="med"/>
+                      <a:tailEnd type="none" w="med" len="med"/>
+                    </a:lnB>
+                  </a:tcPr>
+                </a:tc>
+                <a:tc>
+                  <a:txBody>
+                    <a:bodyPr/>
+                    <a:lstStyle/>
+                    <a:p>
+                      <a:pPr marL="0" lvl="0" indent="0" algn="ctr" rtl="0">
+                        <a:spcBef>
+                          <a:spcPts val="0"/>
+                        </a:spcBef>
+                        <a:spcAft>
+                          <a:spcPts val="0"/>
+                        </a:spcAft>
+                        <a:buNone/>
+                      </a:pPr>
+                      <a:r>
+                        <a:rPr lang="en-US" sz="1200" b="1" dirty="0" smtClean="0">
+                          <a:solidFill>
+                            <a:schemeClr val="tx1"/>
+                          </a:solidFill>
+                          <a:latin typeface="Montserrat Medium"/>
+                          <a:ea typeface="Montserrat Medium"/>
+                          <a:cs typeface="Montserrat Medium"/>
+                          <a:sym typeface="Montserrat Medium"/>
+                        </a:rPr>
+                        <a:t>UI clarity</a:t>
+                      </a:r>
+                      <a:endParaRPr sz="1200" b="1" dirty="0">
+                        <a:solidFill>
+                          <a:schemeClr val="tx1"/>
+                        </a:solidFill>
+                        <a:latin typeface="Montserrat Medium"/>
+                        <a:ea typeface="Montserrat Medium"/>
+                        <a:cs typeface="Montserrat Medium"/>
+                        <a:sym typeface="Montserrat Medium"/>
+                      </a:endParaRPr>
+                    </a:p>
+                  </a:txBody>
+                  <a:tcPr marL="90000" marR="90000" marT="91425" marB="91425" anchor="ctr">
+                    <a:lnL w="12700" cap="flat" cmpd="sng" algn="ctr">
+                      <a:solidFill>
+                        <a:schemeClr val="tx1"/>
+                      </a:solidFill>
+                      <a:prstDash val="solid"/>
+                      <a:round/>
+                      <a:headEnd type="none" w="med" len="med"/>
+                      <a:tailEnd type="none" w="med" len="med"/>
+                    </a:lnL>
+                    <a:lnR w="12700" cap="flat" cmpd="sng" algn="ctr">
+                      <a:solidFill>
+                        <a:schemeClr val="tx1"/>
+                      </a:solidFill>
+                      <a:prstDash val="solid"/>
+                      <a:round/>
+                      <a:headEnd type="none" w="med" len="med"/>
+                      <a:tailEnd type="none" w="med" len="med"/>
+                    </a:lnR>
+                    <a:lnT w="12700" cap="flat" cmpd="sng" algn="ctr">
+                      <a:solidFill>
+                        <a:schemeClr val="tx1"/>
+                      </a:solidFill>
+                      <a:prstDash val="solid"/>
+                      <a:round/>
+                      <a:headEnd type="none" w="med" len="med"/>
+                      <a:tailEnd type="none" w="med" len="med"/>
+                    </a:lnT>
+                    <a:lnB w="12700" cap="flat" cmpd="sng" algn="ctr">
+                      <a:solidFill>
+                        <a:schemeClr val="tx1"/>
+                      </a:solidFill>
+                      <a:prstDash val="solid"/>
+                      <a:round/>
+                      <a:headEnd type="none" w="med" len="med"/>
+                      <a:tailEnd type="none" w="med" len="med"/>
+                    </a:lnB>
+                  </a:tcPr>
+                </a:tc>
+                <a:tc>
+                  <a:txBody>
+                    <a:bodyPr/>
+                    <a:lstStyle/>
+                    <a:p>
+                      <a:pPr marL="0" lvl="0" indent="0" algn="ctr" rtl="0">
+                        <a:spcBef>
+                          <a:spcPts val="0"/>
+                        </a:spcBef>
+                        <a:spcAft>
+                          <a:spcPts val="0"/>
+                        </a:spcAft>
+                        <a:buNone/>
+                      </a:pPr>
+                      <a:r>
+                        <a:rPr lang="en-US" sz="1200" b="1" dirty="0" smtClean="0">
+                          <a:solidFill>
+                            <a:schemeClr val="tx1"/>
+                          </a:solidFill>
+                          <a:latin typeface="Montserrat Medium"/>
+                          <a:ea typeface="Montserrat Medium"/>
+                          <a:cs typeface="Montserrat Medium"/>
+                          <a:sym typeface="Montserrat Medium"/>
+                        </a:rPr>
+                        <a:t>Buttons understandable</a:t>
+                      </a:r>
+                      <a:endParaRPr sz="1200" b="1" dirty="0">
+                        <a:solidFill>
+                          <a:schemeClr val="tx1"/>
+                        </a:solidFill>
+                        <a:latin typeface="Montserrat Medium"/>
+                        <a:ea typeface="Montserrat Medium"/>
+                        <a:cs typeface="Montserrat Medium"/>
+                        <a:sym typeface="Montserrat Medium"/>
+                      </a:endParaRPr>
+                    </a:p>
+                  </a:txBody>
+                  <a:tcPr marL="90000" marR="90000" marT="91425" marB="91425" anchor="ctr">
+                    <a:lnL w="12700" cap="flat" cmpd="sng" algn="ctr">
+                      <a:solidFill>
+                        <a:schemeClr val="tx1"/>
+                      </a:solidFill>
+                      <a:prstDash val="solid"/>
+                      <a:round/>
+                      <a:headEnd type="none" w="med" len="med"/>
+                      <a:tailEnd type="none" w="med" len="med"/>
+                    </a:lnL>
+                    <a:lnR w="12700" cap="flat" cmpd="sng" algn="ctr">
+                      <a:solidFill>
+                        <a:schemeClr val="tx1"/>
+                      </a:solidFill>
+                      <a:prstDash val="solid"/>
+                      <a:round/>
+                      <a:headEnd type="none" w="med" len="med"/>
+                      <a:tailEnd type="none" w="med" len="med"/>
+                    </a:lnR>
+                    <a:lnT w="12700" cap="flat" cmpd="sng" algn="ctr">
+                      <a:solidFill>
+                        <a:schemeClr val="tx1"/>
+                      </a:solidFill>
+                      <a:prstDash val="solid"/>
+                      <a:round/>
+                      <a:headEnd type="none" w="med" len="med"/>
+                      <a:tailEnd type="none" w="med" len="med"/>
+                    </a:lnT>
+                    <a:lnB w="12700" cap="flat" cmpd="sng" algn="ctr">
+                      <a:solidFill>
+                        <a:schemeClr val="tx1"/>
+                      </a:solidFill>
+                      <a:prstDash val="solid"/>
+                      <a:round/>
+                      <a:headEnd type="none" w="med" len="med"/>
+                      <a:tailEnd type="none" w="med" len="med"/>
+                    </a:lnB>
+                  </a:tcPr>
+                </a:tc>
+                <a:extLst>
+                  <a:ext uri="{0D108BD9-81ED-4DB2-BD59-A6C34878D82A}">
+                    <a16:rowId xmlns:a16="http://schemas.microsoft.com/office/drawing/2014/main" val="10003"/>
+                  </a:ext>
+                </a:extLst>
+              </a:tr>
+              <a:tr h="569009">
+                <a:tc>
+                  <a:txBody>
+                    <a:bodyPr/>
+                    <a:lstStyle/>
+                    <a:p>
+                      <a:pPr marL="0" lvl="0" indent="0" algn="ctr" rtl="0">
+                        <a:spcBef>
+                          <a:spcPts val="0"/>
+                        </a:spcBef>
+                        <a:spcAft>
+                          <a:spcPts val="0"/>
+                        </a:spcAft>
+                        <a:buNone/>
+                      </a:pPr>
+                      <a:r>
+                        <a:rPr lang="en" sz="1600" b="1" dirty="0" smtClean="0">
+                          <a:solidFill>
+                            <a:schemeClr val="tx1"/>
+                          </a:solidFill>
+                          <a:latin typeface="Montserrat Black"/>
+                          <a:ea typeface="Montserrat Black"/>
+                          <a:cs typeface="Montserrat Black"/>
+                          <a:sym typeface="Montserrat Black"/>
+                        </a:rPr>
+                        <a:t>TC-31</a:t>
+                      </a:r>
+                      <a:endParaRPr sz="1600" b="1" dirty="0">
+                        <a:solidFill>
+                          <a:schemeClr val="tx1"/>
+                        </a:solidFill>
+                        <a:latin typeface="Montserrat Black"/>
+                        <a:ea typeface="Montserrat Black"/>
+                        <a:cs typeface="Montserrat Black"/>
+                        <a:sym typeface="Montserrat Black"/>
+                      </a:endParaRPr>
+                    </a:p>
+                  </a:txBody>
+                  <a:tcPr marL="90000" marR="90000" marT="91425" marB="91425" anchor="ctr">
+                    <a:lnL w="12700" cap="flat" cmpd="sng" algn="ctr">
+                      <a:solidFill>
+                        <a:schemeClr val="tx1"/>
+                      </a:solidFill>
+                      <a:prstDash val="solid"/>
+                      <a:round/>
+                      <a:headEnd type="none" w="med" len="med"/>
+                      <a:tailEnd type="none" w="med" len="med"/>
+                    </a:lnL>
+                    <a:lnR w="12700" cap="flat" cmpd="sng" algn="ctr">
+                      <a:solidFill>
+                        <a:schemeClr val="tx1"/>
+                      </a:solidFill>
+                      <a:prstDash val="solid"/>
+                      <a:round/>
+                      <a:headEnd type="none" w="med" len="med"/>
+                      <a:tailEnd type="none" w="med" len="med"/>
+                    </a:lnR>
+                    <a:lnT w="12700" cap="flat" cmpd="sng" algn="ctr">
+                      <a:solidFill>
+                        <a:schemeClr val="tx1"/>
+                      </a:solidFill>
+                      <a:prstDash val="solid"/>
+                      <a:round/>
+                      <a:headEnd type="none" w="med" len="med"/>
+                      <a:tailEnd type="none" w="med" len="med"/>
+                    </a:lnT>
+                    <a:lnB w="12700" cap="flat" cmpd="sng" algn="ctr">
+                      <a:solidFill>
+                        <a:schemeClr val="tx1"/>
+                      </a:solidFill>
+                      <a:prstDash val="solid"/>
+                      <a:round/>
+                      <a:headEnd type="none" w="med" len="med"/>
+                      <a:tailEnd type="none" w="med" len="med"/>
+                    </a:lnB>
+                  </a:tcPr>
+                </a:tc>
+                <a:tc>
+                  <a:txBody>
+                    <a:bodyPr/>
+                    <a:lstStyle/>
+                    <a:p>
+                      <a:pPr marL="0" lvl="0" indent="0" algn="ctr" rtl="0">
+                        <a:spcBef>
+                          <a:spcPts val="0"/>
+                        </a:spcBef>
+                        <a:spcAft>
+                          <a:spcPts val="0"/>
+                        </a:spcAft>
+                        <a:buNone/>
+                      </a:pPr>
+                      <a:r>
+                        <a:rPr lang="en-US" sz="1200" b="1" dirty="0" smtClean="0">
+                          <a:solidFill>
+                            <a:schemeClr val="tx1"/>
+                          </a:solidFill>
+                          <a:latin typeface="Montserrat Medium"/>
+                          <a:ea typeface="Montserrat Medium"/>
+                          <a:cs typeface="Montserrat Medium"/>
+                          <a:sym typeface="Montserrat Medium"/>
+                        </a:rPr>
+                        <a:t>Report readability</a:t>
+                      </a:r>
+                      <a:endParaRPr sz="1200" b="1" dirty="0">
+                        <a:solidFill>
+                          <a:schemeClr val="tx1"/>
+                        </a:solidFill>
+                        <a:latin typeface="Montserrat Medium"/>
+                        <a:ea typeface="Montserrat Medium"/>
+                        <a:cs typeface="Montserrat Medium"/>
+                        <a:sym typeface="Montserrat Medium"/>
+                      </a:endParaRPr>
+                    </a:p>
+                  </a:txBody>
+                  <a:tcPr marL="90000" marR="90000" marT="91425" marB="91425" anchor="ctr">
+                    <a:lnL w="12700" cap="flat" cmpd="sng" algn="ctr">
+                      <a:solidFill>
+                        <a:schemeClr val="tx1"/>
+                      </a:solidFill>
+                      <a:prstDash val="solid"/>
+                      <a:round/>
+                      <a:headEnd type="none" w="med" len="med"/>
+                      <a:tailEnd type="none" w="med" len="med"/>
+                    </a:lnL>
+                    <a:lnR w="12700" cap="flat" cmpd="sng" algn="ctr">
+                      <a:solidFill>
+                        <a:schemeClr val="tx1"/>
+                      </a:solidFill>
+                      <a:prstDash val="solid"/>
+                      <a:round/>
+                      <a:headEnd type="none" w="med" len="med"/>
+                      <a:tailEnd type="none" w="med" len="med"/>
+                    </a:lnR>
+                    <a:lnT w="12700" cap="flat" cmpd="sng" algn="ctr">
+                      <a:solidFill>
+                        <a:schemeClr val="tx1"/>
+                      </a:solidFill>
+                      <a:prstDash val="solid"/>
+                      <a:round/>
+                      <a:headEnd type="none" w="med" len="med"/>
+                      <a:tailEnd type="none" w="med" len="med"/>
+                    </a:lnT>
+                    <a:lnB w="12700" cap="flat" cmpd="sng" algn="ctr">
+                      <a:solidFill>
+                        <a:schemeClr val="tx1"/>
+                      </a:solidFill>
+                      <a:prstDash val="solid"/>
+                      <a:round/>
+                      <a:headEnd type="none" w="med" len="med"/>
+                      <a:tailEnd type="none" w="med" len="med"/>
+                    </a:lnB>
+                  </a:tcPr>
+                </a:tc>
+                <a:tc>
+                  <a:txBody>
+                    <a:bodyPr/>
+                    <a:lstStyle/>
+                    <a:p>
+                      <a:pPr marL="0" lvl="0" indent="0" algn="ctr" rtl="0">
+                        <a:spcBef>
+                          <a:spcPts val="0"/>
+                        </a:spcBef>
+                        <a:spcAft>
+                          <a:spcPts val="0"/>
+                        </a:spcAft>
+                        <a:buNone/>
+                      </a:pPr>
+                      <a:r>
+                        <a:rPr lang="en-US" sz="1200" b="1" dirty="0" smtClean="0">
+                          <a:solidFill>
+                            <a:schemeClr val="tx1"/>
+                          </a:solidFill>
+                          <a:latin typeface="Montserrat Medium"/>
+                          <a:ea typeface="Montserrat Medium"/>
+                          <a:cs typeface="Montserrat Medium"/>
+                          <a:sym typeface="Montserrat Medium"/>
+                        </a:rPr>
+                        <a:t>Easy to interpret</a:t>
+                      </a:r>
+                      <a:endParaRPr sz="1200" b="1" dirty="0">
+                        <a:solidFill>
+                          <a:schemeClr val="tx1"/>
+                        </a:solidFill>
+                        <a:latin typeface="Montserrat Medium"/>
+                        <a:ea typeface="Montserrat Medium"/>
+                        <a:cs typeface="Montserrat Medium"/>
+                        <a:sym typeface="Montserrat Medium"/>
+                      </a:endParaRPr>
+                    </a:p>
+                  </a:txBody>
+                  <a:tcPr marL="90000" marR="90000" marT="91425" marB="91425" anchor="ctr">
+                    <a:lnL w="12700" cap="flat" cmpd="sng" algn="ctr">
+                      <a:solidFill>
+                        <a:schemeClr val="tx1"/>
+                      </a:solidFill>
+                      <a:prstDash val="solid"/>
+                      <a:round/>
+                      <a:headEnd type="none" w="med" len="med"/>
+                      <a:tailEnd type="none" w="med" len="med"/>
+                    </a:lnL>
+                    <a:lnR w="12700" cap="flat" cmpd="sng" algn="ctr">
+                      <a:solidFill>
+                        <a:schemeClr val="tx1"/>
+                      </a:solidFill>
+                      <a:prstDash val="solid"/>
+                      <a:round/>
+                      <a:headEnd type="none" w="med" len="med"/>
+                      <a:tailEnd type="none" w="med" len="med"/>
+                    </a:lnR>
+                    <a:lnT w="12700" cap="flat" cmpd="sng" algn="ctr">
+                      <a:solidFill>
+                        <a:schemeClr val="tx1"/>
+                      </a:solidFill>
+                      <a:prstDash val="solid"/>
+                      <a:round/>
+                      <a:headEnd type="none" w="med" len="med"/>
+                      <a:tailEnd type="none" w="med" len="med"/>
+                    </a:lnT>
+                    <a:lnB w="12700" cap="flat" cmpd="sng" algn="ctr">
+                      <a:solidFill>
+                        <a:schemeClr val="tx1"/>
+                      </a:solidFill>
+                      <a:prstDash val="solid"/>
+                      <a:round/>
+                      <a:headEnd type="none" w="med" len="med"/>
+                      <a:tailEnd type="none" w="med" len="med"/>
+                    </a:lnB>
+                  </a:tcPr>
+                </a:tc>
+                <a:extLst>
+                  <a:ext uri="{0D108BD9-81ED-4DB2-BD59-A6C34878D82A}">
+                    <a16:rowId xmlns:a16="http://schemas.microsoft.com/office/drawing/2014/main" val="10004"/>
+                  </a:ext>
+                </a:extLst>
+              </a:tr>
+              <a:tr h="569009">
+                <a:tc>
+                  <a:txBody>
+                    <a:bodyPr/>
+                    <a:lstStyle/>
+                    <a:p>
+                      <a:pPr marL="0" lvl="0" indent="0" algn="ctr" rtl="0">
+                        <a:spcBef>
+                          <a:spcPts val="0"/>
+                        </a:spcBef>
+                        <a:spcAft>
+                          <a:spcPts val="0"/>
+                        </a:spcAft>
+                        <a:buNone/>
+                      </a:pPr>
+                      <a:r>
+                        <a:rPr lang="en" sz="1600" b="1" dirty="0" smtClean="0">
+                          <a:solidFill>
+                            <a:schemeClr val="tx1"/>
+                          </a:solidFill>
+                          <a:latin typeface="Montserrat Black"/>
+                          <a:ea typeface="Montserrat Black"/>
+                          <a:cs typeface="Montserrat Black"/>
+                          <a:sym typeface="Montserrat Black"/>
+                        </a:rPr>
+                        <a:t>TC-32</a:t>
+                      </a:r>
+                      <a:endParaRPr lang="en" sz="1600" b="1" dirty="0" smtClean="0">
+                        <a:solidFill>
+                          <a:schemeClr val="tx1"/>
+                        </a:solidFill>
+                        <a:latin typeface="Montserrat Black"/>
+                        <a:ea typeface="Montserrat Black"/>
+                        <a:cs typeface="Montserrat Black"/>
+                        <a:sym typeface="Montserrat Black"/>
+                      </a:endParaRPr>
+                    </a:p>
+                  </a:txBody>
+                  <a:tcPr marL="90000" marR="90000" marT="91425" marB="91425" anchor="ctr">
+                    <a:lnL w="12700" cap="flat" cmpd="sng" algn="ctr">
+                      <a:solidFill>
+                        <a:schemeClr val="tx1"/>
+                      </a:solidFill>
+                      <a:prstDash val="solid"/>
+                      <a:round/>
+                      <a:headEnd type="none" w="med" len="med"/>
+                      <a:tailEnd type="none" w="med" len="med"/>
+                    </a:lnL>
+                    <a:lnR w="12700" cap="flat" cmpd="sng" algn="ctr">
+                      <a:solidFill>
+                        <a:schemeClr val="tx1"/>
+                      </a:solidFill>
+                      <a:prstDash val="solid"/>
+                      <a:round/>
+                      <a:headEnd type="none" w="med" len="med"/>
+                      <a:tailEnd type="none" w="med" len="med"/>
+                    </a:lnR>
+                    <a:lnT w="12700" cap="flat" cmpd="sng" algn="ctr">
+                      <a:solidFill>
+                        <a:schemeClr val="tx1"/>
+                      </a:solidFill>
+                      <a:prstDash val="solid"/>
+                      <a:round/>
+                      <a:headEnd type="none" w="med" len="med"/>
+                      <a:tailEnd type="none" w="med" len="med"/>
+                    </a:lnT>
+                    <a:lnB w="12700" cap="flat" cmpd="sng" algn="ctr">
+                      <a:solidFill>
+                        <a:schemeClr val="tx1"/>
+                      </a:solidFill>
+                      <a:prstDash val="solid"/>
+                      <a:round/>
+                      <a:headEnd type="none" w="med" len="med"/>
+                      <a:tailEnd type="none" w="med" len="med"/>
+                    </a:lnB>
+                  </a:tcPr>
+                </a:tc>
+                <a:tc>
+                  <a:txBody>
+                    <a:bodyPr/>
+                    <a:lstStyle/>
+                    <a:p>
+                      <a:pPr marL="0" lvl="0" indent="0" algn="ctr" rtl="0">
+                        <a:spcBef>
+                          <a:spcPts val="0"/>
+                        </a:spcBef>
+                        <a:spcAft>
+                          <a:spcPts val="0"/>
+                        </a:spcAft>
+                        <a:buNone/>
+                      </a:pPr>
+                      <a:r>
+                        <a:rPr lang="en-US" sz="1200" b="1" dirty="0" smtClean="0">
+                          <a:solidFill>
+                            <a:schemeClr val="tx1"/>
+                          </a:solidFill>
+                          <a:latin typeface="Montserrat Medium"/>
+                          <a:ea typeface="Montserrat Medium"/>
+                          <a:cs typeface="Montserrat Medium"/>
+                          <a:sym typeface="Montserrat Medium"/>
+                        </a:rPr>
+                        <a:t>Error messages</a:t>
+                      </a:r>
+                      <a:endParaRPr sz="1200" b="1" dirty="0">
+                        <a:solidFill>
+                          <a:schemeClr val="tx1"/>
+                        </a:solidFill>
+                        <a:latin typeface="Montserrat Medium"/>
+                        <a:ea typeface="Montserrat Medium"/>
+                        <a:cs typeface="Montserrat Medium"/>
+                        <a:sym typeface="Montserrat Medium"/>
+                      </a:endParaRPr>
+                    </a:p>
+                  </a:txBody>
+                  <a:tcPr marL="90000" marR="90000" marT="91425" marB="91425" anchor="ctr">
+                    <a:lnL w="12700" cap="flat" cmpd="sng" algn="ctr">
+                      <a:solidFill>
+                        <a:schemeClr val="tx1"/>
+                      </a:solidFill>
+                      <a:prstDash val="solid"/>
+                      <a:round/>
+                      <a:headEnd type="none" w="med" len="med"/>
+                      <a:tailEnd type="none" w="med" len="med"/>
+                    </a:lnL>
+                    <a:lnR w="12700" cap="flat" cmpd="sng" algn="ctr">
+                      <a:solidFill>
+                        <a:schemeClr val="tx1"/>
+                      </a:solidFill>
+                      <a:prstDash val="solid"/>
+                      <a:round/>
+                      <a:headEnd type="none" w="med" len="med"/>
+                      <a:tailEnd type="none" w="med" len="med"/>
+                    </a:lnR>
+                    <a:lnT w="12700" cap="flat" cmpd="sng" algn="ctr">
+                      <a:solidFill>
+                        <a:schemeClr val="tx1"/>
+                      </a:solidFill>
+                      <a:prstDash val="solid"/>
+                      <a:round/>
+                      <a:headEnd type="none" w="med" len="med"/>
+                      <a:tailEnd type="none" w="med" len="med"/>
+                    </a:lnT>
+                    <a:lnB w="12700" cap="flat" cmpd="sng" algn="ctr">
+                      <a:solidFill>
+                        <a:schemeClr val="tx1"/>
+                      </a:solidFill>
+                      <a:prstDash val="solid"/>
+                      <a:round/>
+                      <a:headEnd type="none" w="med" len="med"/>
+                      <a:tailEnd type="none" w="med" len="med"/>
+                    </a:lnB>
+                  </a:tcPr>
+                </a:tc>
+                <a:tc>
+                  <a:txBody>
+                    <a:bodyPr/>
+                    <a:lstStyle/>
+                    <a:p>
+                      <a:pPr marL="0" lvl="0" indent="0" algn="ctr" rtl="0">
+                        <a:spcBef>
+                          <a:spcPts val="0"/>
+                        </a:spcBef>
+                        <a:spcAft>
+                          <a:spcPts val="0"/>
+                        </a:spcAft>
+                        <a:buNone/>
+                      </a:pPr>
+                      <a:r>
+                        <a:rPr lang="en-US" sz="1200" b="1" dirty="0" smtClean="0">
+                          <a:solidFill>
+                            <a:schemeClr val="tx1"/>
+                          </a:solidFill>
+                          <a:latin typeface="Montserrat Medium"/>
+                          <a:ea typeface="Montserrat Medium"/>
+                          <a:cs typeface="Montserrat Medium"/>
+                          <a:sym typeface="Montserrat Medium"/>
+                        </a:rPr>
+                        <a:t>Clear</a:t>
+                      </a:r>
+                      <a:endParaRPr sz="1200" b="1" dirty="0">
+                        <a:solidFill>
+                          <a:schemeClr val="tx1"/>
+                        </a:solidFill>
+                        <a:latin typeface="Montserrat Medium"/>
+                        <a:ea typeface="Montserrat Medium"/>
+                        <a:cs typeface="Montserrat Medium"/>
+                        <a:sym typeface="Montserrat Medium"/>
+                      </a:endParaRPr>
+                    </a:p>
+                  </a:txBody>
+                  <a:tcPr marL="90000" marR="90000" marT="91425" marB="91425" anchor="ctr">
+                    <a:lnL w="12700" cap="flat" cmpd="sng" algn="ctr">
+                      <a:solidFill>
+                        <a:schemeClr val="tx1"/>
+                      </a:solidFill>
+                      <a:prstDash val="solid"/>
+                      <a:round/>
+                      <a:headEnd type="none" w="med" len="med"/>
+                      <a:tailEnd type="none" w="med" len="med"/>
+                    </a:lnL>
+                    <a:lnR w="12700" cap="flat" cmpd="sng" algn="ctr">
+                      <a:solidFill>
+                        <a:schemeClr val="tx1"/>
+                      </a:solidFill>
+                      <a:prstDash val="solid"/>
+                      <a:round/>
+                      <a:headEnd type="none" w="med" len="med"/>
+                      <a:tailEnd type="none" w="med" len="med"/>
+                    </a:lnR>
+                    <a:lnT w="12700" cap="flat" cmpd="sng" algn="ctr">
+                      <a:solidFill>
+                        <a:schemeClr val="tx1"/>
+                      </a:solidFill>
+                      <a:prstDash val="solid"/>
+                      <a:round/>
+                      <a:headEnd type="none" w="med" len="med"/>
+                      <a:tailEnd type="none" w="med" len="med"/>
+                    </a:lnT>
+                    <a:lnB w="12700" cap="flat" cmpd="sng" algn="ctr">
+                      <a:solidFill>
+                        <a:schemeClr val="tx1"/>
+                      </a:solidFill>
+                      <a:prstDash val="solid"/>
+                      <a:round/>
+                      <a:headEnd type="none" w="med" len="med"/>
+                      <a:tailEnd type="none" w="med" len="med"/>
+                    </a:lnB>
+                  </a:tcPr>
+                </a:tc>
+                <a:extLst>
+                  <a:ext uri="{0D108BD9-81ED-4DB2-BD59-A6C34878D82A}">
+                    <a16:rowId xmlns:a16="http://schemas.microsoft.com/office/drawing/2014/main" val="10005"/>
+                  </a:ext>
+                </a:extLst>
+              </a:tr>
+            </a:tbl>
+          </a:graphicData>
+        </a:graphic>
+      </p:graphicFrame>
+    </p:spTree>
+    <p:extLst>
+      <p:ext uri="{BB962C8B-B14F-4D97-AF65-F5344CB8AC3E}">
+        <p14:creationId xmlns:p14="http://schemas.microsoft.com/office/powerpoint/2010/main" val="3489262634"/>
+      </p:ext>
+    </p:extLst>
+  </p:cSld>
+  <p:clrMapOvr>
+    <a:masterClrMapping/>
+  </p:clrMapOvr>
+</p:sld>
+</file>
+
+<file path=ppt/slides/slide12.xml><?xml version="1.0" encoding="utf-8"?>
+<p:sld xmlns:a="http://schemas.openxmlformats.org/drawingml/2006/main" xmlns:r="http://schemas.openxmlformats.org/officeDocument/2006/relationships" xmlns:p="http://schemas.openxmlformats.org/presentationml/2006/main">
+  <p:cSld>
+    <p:spTree>
+      <p:nvGrpSpPr>
+        <p:cNvPr id="1" name="Shape 1612"/>
+        <p:cNvGrpSpPr/>
+        <p:nvPr/>
+      </p:nvGrpSpPr>
+      <p:grpSpPr>
+        <a:xfrm>
+          <a:off x="0" y="0"/>
+          <a:ext cx="0" cy="0"/>
+          <a:chOff x="0" y="0"/>
+          <a:chExt cx="0" cy="0"/>
+        </a:xfrm>
+      </p:grpSpPr>
+      <p:sp>
+        <p:nvSpPr>
+          <p:cNvPr id="1613" name="Google Shape;1613;p57"/>
+          <p:cNvSpPr txBox="1">
+            <a:spLocks noGrp="1"/>
+          </p:cNvSpPr>
+          <p:nvPr>
+            <p:ph type="title"/>
+          </p:nvPr>
+        </p:nvSpPr>
+        <p:spPr>
+          <a:xfrm>
+            <a:off x="1478140" y="159129"/>
+            <a:ext cx="6162501" cy="836928"/>
+          </a:xfrm>
+          <a:prstGeom prst="rect">
+            <a:avLst/>
+          </a:prstGeom>
+        </p:spPr>
+        <p:txBody>
+          <a:bodyPr spcFirstLastPara="1" wrap="square" lIns="90000" tIns="91425" rIns="90000" bIns="91425" anchor="ctr" anchorCtr="0">
+            <a:noAutofit/>
+          </a:bodyPr>
+          <a:lstStyle/>
+          <a:p>
+            <a:pPr marL="0" lvl="0" indent="0" algn="ctr" rtl="0">
+              <a:spcBef>
+                <a:spcPts val="0"/>
+              </a:spcBef>
+              <a:spcAft>
+                <a:spcPts val="0"/>
+              </a:spcAft>
+              <a:buNone/>
+            </a:pPr>
+            <a:r>
+              <a:rPr lang="en" sz="3600" dirty="0"/>
+              <a:t>B</a:t>
+            </a:r>
+            <a:r>
+              <a:rPr lang="en" sz="3600" dirty="0" smtClean="0"/>
+              <a:t>. Non-Functional Cases</a:t>
+            </a:r>
+            <a:endParaRPr sz="3600" dirty="0"/>
+          </a:p>
+        </p:txBody>
+      </p:sp>
+      <p:graphicFrame>
+        <p:nvGraphicFramePr>
+          <p:cNvPr id="89" name="Google Shape;698;p43"/>
+          <p:cNvGraphicFramePr/>
+          <p:nvPr>
+            <p:extLst>
+              <p:ext uri="{D42A27DB-BD31-4B8C-83A1-F6EECF244321}">
                 <p14:modId xmlns:p14="http://schemas.microsoft.com/office/powerpoint/2010/main" val="531579917"/>
               </p:ext>
             </p:extLst>
@@ -12625,7 +15554,7 @@
 </p:sld>
 </file>
 
-<file path=ppt/slides/slide11.xml><?xml version="1.0" encoding="utf-8"?>
+<file path=ppt/slides/slide13.xml><?xml version="1.0" encoding="utf-8"?>
 <p:sld xmlns:a="http://schemas.openxmlformats.org/drawingml/2006/main" xmlns:r="http://schemas.openxmlformats.org/officeDocument/2006/relationships" xmlns:p="http://schemas.openxmlformats.org/presentationml/2006/main">
   <p:cSld>
     <p:spTree>
@@ -14582,7 +17511,7 @@
 </p:sld>
 </file>
 
-<file path=ppt/slides/slide12.xml><?xml version="1.0" encoding="utf-8"?>
+<file path=ppt/slides/slide14.xml><?xml version="1.0" encoding="utf-8"?>
 <p:sld xmlns:a="http://schemas.openxmlformats.org/drawingml/2006/main" xmlns:r="http://schemas.openxmlformats.org/officeDocument/2006/relationships" xmlns:p="http://schemas.openxmlformats.org/presentationml/2006/main">
   <p:cSld>
     <p:bg>
@@ -14706,7 +17635,7 @@
 </p:sld>
 </file>
 
-<file path=ppt/slides/slide13.xml><?xml version="1.0" encoding="utf-8"?>
+<file path=ppt/slides/slide15.xml><?xml version="1.0" encoding="utf-8"?>
 <p:sld xmlns:a="http://schemas.openxmlformats.org/drawingml/2006/main" xmlns:r="http://schemas.openxmlformats.org/officeDocument/2006/relationships" xmlns:p="http://schemas.openxmlformats.org/presentationml/2006/main">
   <p:cSld>
     <p:bg>
@@ -14901,7 +17830,7 @@
 </p:sld>
 </file>
 
-<file path=ppt/slides/slide14.xml><?xml version="1.0" encoding="utf-8"?>
+<file path=ppt/slides/slide16.xml><?xml version="1.0" encoding="utf-8"?>
 <p:sld xmlns:a="http://schemas.openxmlformats.org/drawingml/2006/main" xmlns:r="http://schemas.openxmlformats.org/officeDocument/2006/relationships" xmlns:p="http://schemas.openxmlformats.org/presentationml/2006/main">
   <p:cSld>
     <p:bg>
@@ -16987,7 +19916,7 @@
 </p:sld>
 </file>
 
-<file path=ppt/slides/slide15.xml><?xml version="1.0" encoding="utf-8"?>
+<file path=ppt/slides/slide17.xml><?xml version="1.0" encoding="utf-8"?>
 <p:sld xmlns:a="http://schemas.openxmlformats.org/drawingml/2006/main" xmlns:r="http://schemas.openxmlformats.org/officeDocument/2006/relationships" xmlns:p="http://schemas.openxmlformats.org/presentationml/2006/main">
   <p:cSld>
     <p:bg>
@@ -17119,7 +20048,7 @@
 </p:sld>
 </file>
 
-<file path=ppt/slides/slide16.xml><?xml version="1.0" encoding="utf-8"?>
+<file path=ppt/slides/slide18.xml><?xml version="1.0" encoding="utf-8"?>
 <p:sld xmlns:a="http://schemas.openxmlformats.org/drawingml/2006/main" xmlns:r="http://schemas.openxmlformats.org/officeDocument/2006/relationships" xmlns:p="http://schemas.openxmlformats.org/presentationml/2006/main">
   <p:cSld>
     <p:spTree>
@@ -17439,566 +20368,7 @@
 </p:sld>
 </file>
 
-<file path=ppt/slides/slide17.xml><?xml version="1.0" encoding="utf-8"?>
-<p:sld xmlns:a="http://schemas.openxmlformats.org/drawingml/2006/main" xmlns:r="http://schemas.openxmlformats.org/officeDocument/2006/relationships" xmlns:p="http://schemas.openxmlformats.org/presentationml/2006/main">
-  <p:cSld>
-    <p:bg>
-      <p:bgPr>
-        <a:solidFill>
-          <a:schemeClr val="dk2"/>
-        </a:solidFill>
-        <a:effectLst/>
-      </p:bgPr>
-    </p:bg>
-    <p:spTree>
-      <p:nvGrpSpPr>
-        <p:cNvPr id="1" name="Shape 231"/>
-        <p:cNvGrpSpPr/>
-        <p:nvPr/>
-      </p:nvGrpSpPr>
-      <p:grpSpPr>
-        <a:xfrm>
-          <a:off x="0" y="0"/>
-          <a:ext cx="0" cy="0"/>
-          <a:chOff x="0" y="0"/>
-          <a:chExt cx="0" cy="0"/>
-        </a:xfrm>
-      </p:grpSpPr>
-      <p:sp>
-        <p:nvSpPr>
-          <p:cNvPr id="232" name="Google Shape;232;p37"/>
-          <p:cNvSpPr txBox="1">
-            <a:spLocks noGrp="1"/>
-          </p:cNvSpPr>
-          <p:nvPr>
-            <p:ph type="title"/>
-          </p:nvPr>
-        </p:nvSpPr>
-        <p:spPr>
-          <a:xfrm>
-            <a:off x="238000" y="1295400"/>
-            <a:ext cx="4334000" cy="3352800"/>
-          </a:xfrm>
-          <a:prstGeom prst="rect">
-            <a:avLst/>
-          </a:prstGeom>
-        </p:spPr>
-        <p:txBody>
-          <a:bodyPr spcFirstLastPara="1" wrap="square" lIns="91425" tIns="0" rIns="91425" bIns="0" anchor="ctr" anchorCtr="0">
-            <a:noAutofit/>
-          </a:bodyPr>
-          <a:lstStyle/>
-          <a:p>
-            <a:r>
-              <a:rPr lang="en-US" dirty="0"/>
-              <a:t>System</a:t>
-            </a:r>
-            <a:br>
-              <a:rPr lang="en-US" dirty="0"/>
-            </a:br>
-            <a:r>
-              <a:rPr lang="en-US" dirty="0"/>
-              <a:t>Performance Testing</a:t>
-            </a:r>
-            <a:r>
-              <a:rPr lang="en-US" sz="4000" dirty="0"/>
-              <a:t/>
-            </a:r>
-            <a:br>
-              <a:rPr lang="en-US" sz="4000" dirty="0"/>
-            </a:br>
-            <a:endParaRPr sz="3200" dirty="0"/>
-          </a:p>
-        </p:txBody>
-      </p:sp>
-      <p:sp>
-        <p:nvSpPr>
-          <p:cNvPr id="233" name="Google Shape;233;p37"/>
-          <p:cNvSpPr txBox="1">
-            <a:spLocks noGrp="1"/>
-          </p:cNvSpPr>
-          <p:nvPr>
-            <p:ph type="title" idx="2"/>
-          </p:nvPr>
-        </p:nvSpPr>
-        <p:spPr>
-          <a:xfrm>
-            <a:off x="4648200" y="1748375"/>
-            <a:ext cx="2286000" cy="1664100"/>
-          </a:xfrm>
-          <a:prstGeom prst="rect">
-            <a:avLst/>
-          </a:prstGeom>
-        </p:spPr>
-        <p:txBody>
-          <a:bodyPr spcFirstLastPara="1" wrap="square" lIns="91425" tIns="0" rIns="91425" bIns="0" anchor="ctr" anchorCtr="0">
-            <a:noAutofit/>
-          </a:bodyPr>
-          <a:lstStyle/>
-          <a:p>
-            <a:pPr marL="0" lvl="0" indent="0" algn="l" rtl="0">
-              <a:spcBef>
-                <a:spcPts val="0"/>
-              </a:spcBef>
-              <a:spcAft>
-                <a:spcPts val="0"/>
-              </a:spcAft>
-              <a:buNone/>
-            </a:pPr>
-            <a:r>
-              <a:rPr lang="en" dirty="0" smtClean="0"/>
-              <a:t>04</a:t>
-            </a:r>
-            <a:endParaRPr dirty="0"/>
-          </a:p>
-        </p:txBody>
-      </p:sp>
-    </p:spTree>
-    <p:extLst>
-      <p:ext uri="{BB962C8B-B14F-4D97-AF65-F5344CB8AC3E}">
-        <p14:creationId xmlns:p14="http://schemas.microsoft.com/office/powerpoint/2010/main" val="1893718626"/>
-      </p:ext>
-    </p:extLst>
-  </p:cSld>
-  <p:clrMapOvr>
-    <a:masterClrMapping/>
-  </p:clrMapOvr>
-</p:sld>
-</file>
-
-<file path=ppt/slides/slide18.xml><?xml version="1.0" encoding="utf-8"?>
-<p:sld xmlns:a="http://schemas.openxmlformats.org/drawingml/2006/main" xmlns:r="http://schemas.openxmlformats.org/officeDocument/2006/relationships" xmlns:p="http://schemas.openxmlformats.org/presentationml/2006/main">
-  <p:cSld>
-    <p:spTree>
-      <p:nvGrpSpPr>
-        <p:cNvPr id="1" name="Shape 1003"/>
-        <p:cNvGrpSpPr/>
-        <p:nvPr/>
-      </p:nvGrpSpPr>
-      <p:grpSpPr>
-        <a:xfrm>
-          <a:off x="0" y="0"/>
-          <a:ext cx="0" cy="0"/>
-          <a:chOff x="0" y="0"/>
-          <a:chExt cx="0" cy="0"/>
-        </a:xfrm>
-      </p:grpSpPr>
-      <p:sp>
-        <p:nvSpPr>
-          <p:cNvPr id="1007" name="Google Shape;1007;p66"/>
-          <p:cNvSpPr txBox="1">
-            <a:spLocks noGrp="1"/>
-          </p:cNvSpPr>
-          <p:nvPr>
-            <p:ph type="title"/>
-          </p:nvPr>
-        </p:nvSpPr>
-        <p:spPr>
-          <a:xfrm>
-            <a:off x="720000" y="255372"/>
-            <a:ext cx="7704000" cy="572700"/>
-          </a:xfrm>
-          <a:prstGeom prst="rect">
-            <a:avLst/>
-          </a:prstGeom>
-        </p:spPr>
-        <p:txBody>
-          <a:bodyPr spcFirstLastPara="1" wrap="square" lIns="91425" tIns="0" rIns="91425" bIns="0" anchor="b" anchorCtr="0">
-            <a:noAutofit/>
-          </a:bodyPr>
-          <a:lstStyle/>
-          <a:p>
-            <a:pPr marL="0" lvl="0" indent="0" algn="ctr" rtl="0">
-              <a:spcBef>
-                <a:spcPts val="0"/>
-              </a:spcBef>
-              <a:spcAft>
-                <a:spcPts val="0"/>
-              </a:spcAft>
-              <a:buNone/>
-            </a:pPr>
-            <a:r>
-              <a:rPr lang="en" sz="4000" dirty="0"/>
-              <a:t>PREDICTED GROWTH</a:t>
-            </a:r>
-            <a:endParaRPr sz="4000" dirty="0"/>
-          </a:p>
-        </p:txBody>
-      </p:sp>
-      <p:pic>
-        <p:nvPicPr>
-          <p:cNvPr id="2" name="Picture 1"/>
-          <p:cNvPicPr>
-            <a:picLocks noChangeAspect="1"/>
-          </p:cNvPicPr>
-          <p:nvPr/>
-        </p:nvPicPr>
-        <p:blipFill>
-          <a:blip r:embed="rId3">
-            <a:extLst>
-              <a:ext uri="{28A0092B-C50C-407E-A947-70E740481C1C}">
-                <a14:useLocalDpi xmlns:a14="http://schemas.microsoft.com/office/drawing/2010/main" val="0"/>
-              </a:ext>
-            </a:extLst>
-          </a:blip>
-          <a:stretch>
-            <a:fillRect/>
-          </a:stretch>
-        </p:blipFill>
-        <p:spPr>
-          <a:xfrm>
-            <a:off x="541020" y="828072"/>
-            <a:ext cx="8061960" cy="3976508"/>
-          </a:xfrm>
-          <a:prstGeom prst="rect">
-            <a:avLst/>
-          </a:prstGeom>
-          <a:ln w="38100" cap="sq">
-            <a:solidFill>
-              <a:srgbClr val="000000"/>
-            </a:solidFill>
-            <a:prstDash val="solid"/>
-            <a:miter lim="800000"/>
-          </a:ln>
-          <a:effectLst>
-            <a:outerShdw blurRad="50800" dist="38100" dir="2700000" algn="tl" rotWithShape="0">
-              <a:srgbClr val="000000">
-                <a:alpha val="43000"/>
-              </a:srgbClr>
-            </a:outerShdw>
-          </a:effectLst>
-        </p:spPr>
-      </p:pic>
-    </p:spTree>
-  </p:cSld>
-  <p:clrMapOvr>
-    <a:masterClrMapping/>
-  </p:clrMapOvr>
-</p:sld>
-</file>
-
 <file path=ppt/slides/slide19.xml><?xml version="1.0" encoding="utf-8"?>
-<p:sld xmlns:a="http://schemas.openxmlformats.org/drawingml/2006/main" xmlns:r="http://schemas.openxmlformats.org/officeDocument/2006/relationships" xmlns:p="http://schemas.openxmlformats.org/presentationml/2006/main">
-  <p:cSld>
-    <p:spTree>
-      <p:nvGrpSpPr>
-        <p:cNvPr id="1" name="Shape 1003"/>
-        <p:cNvGrpSpPr/>
-        <p:nvPr/>
-      </p:nvGrpSpPr>
-      <p:grpSpPr>
-        <a:xfrm>
-          <a:off x="0" y="0"/>
-          <a:ext cx="0" cy="0"/>
-          <a:chOff x="0" y="0"/>
-          <a:chExt cx="0" cy="0"/>
-        </a:xfrm>
-      </p:grpSpPr>
-      <p:sp>
-        <p:nvSpPr>
-          <p:cNvPr id="1007" name="Google Shape;1007;p66"/>
-          <p:cNvSpPr txBox="1">
-            <a:spLocks noGrp="1"/>
-          </p:cNvSpPr>
-          <p:nvPr>
-            <p:ph type="title"/>
-          </p:nvPr>
-        </p:nvSpPr>
-        <p:spPr>
-          <a:xfrm>
-            <a:off x="720000" y="255372"/>
-            <a:ext cx="7704000" cy="572700"/>
-          </a:xfrm>
-          <a:prstGeom prst="rect">
-            <a:avLst/>
-          </a:prstGeom>
-        </p:spPr>
-        <p:txBody>
-          <a:bodyPr spcFirstLastPara="1" wrap="square" lIns="91425" tIns="0" rIns="91425" bIns="0" anchor="b" anchorCtr="0">
-            <a:noAutofit/>
-          </a:bodyPr>
-          <a:lstStyle/>
-          <a:p>
-            <a:pPr marL="0" lvl="0" indent="0" algn="ctr" rtl="0">
-              <a:spcBef>
-                <a:spcPts val="0"/>
-              </a:spcBef>
-              <a:spcAft>
-                <a:spcPts val="0"/>
-              </a:spcAft>
-              <a:buNone/>
-            </a:pPr>
-            <a:r>
-              <a:rPr lang="en" sz="4000" dirty="0"/>
-              <a:t>PREDICTED GROWTH</a:t>
-            </a:r>
-            <a:endParaRPr sz="4000" dirty="0"/>
-          </a:p>
-        </p:txBody>
-      </p:sp>
-      <p:pic>
-        <p:nvPicPr>
-          <p:cNvPr id="3" name="Picture 2"/>
-          <p:cNvPicPr>
-            <a:picLocks noChangeAspect="1"/>
-          </p:cNvPicPr>
-          <p:nvPr/>
-        </p:nvPicPr>
-        <p:blipFill>
-          <a:blip r:embed="rId3">
-            <a:extLst>
-              <a:ext uri="{28A0092B-C50C-407E-A947-70E740481C1C}">
-                <a14:useLocalDpi xmlns:a14="http://schemas.microsoft.com/office/drawing/2010/main" val="0"/>
-              </a:ext>
-            </a:extLst>
-          </a:blip>
-          <a:stretch>
-            <a:fillRect/>
-          </a:stretch>
-        </p:blipFill>
-        <p:spPr>
-          <a:xfrm>
-            <a:off x="1215389" y="934751"/>
-            <a:ext cx="6831331" cy="3789903"/>
-          </a:xfrm>
-          <a:prstGeom prst="rect">
-            <a:avLst/>
-          </a:prstGeom>
-        </p:spPr>
-      </p:pic>
-    </p:spTree>
-    <p:extLst>
-      <p:ext uri="{BB962C8B-B14F-4D97-AF65-F5344CB8AC3E}">
-        <p14:creationId xmlns:p14="http://schemas.microsoft.com/office/powerpoint/2010/main" val="2924020551"/>
-      </p:ext>
-    </p:extLst>
-  </p:cSld>
-  <p:clrMapOvr>
-    <a:masterClrMapping/>
-  </p:clrMapOvr>
-</p:sld>
-</file>
-
-<file path=ppt/slides/slide2.xml><?xml version="1.0" encoding="utf-8"?>
-<p:sld xmlns:a="http://schemas.openxmlformats.org/drawingml/2006/main" xmlns:r="http://schemas.openxmlformats.org/officeDocument/2006/relationships" xmlns:p="http://schemas.openxmlformats.org/presentationml/2006/main">
-  <p:cSld>
-    <p:spTree>
-      <p:nvGrpSpPr>
-        <p:cNvPr id="1" name="Shape 333"/>
-        <p:cNvGrpSpPr/>
-        <p:nvPr/>
-      </p:nvGrpSpPr>
-      <p:grpSpPr>
-        <a:xfrm>
-          <a:off x="0" y="0"/>
-          <a:ext cx="0" cy="0"/>
-          <a:chOff x="0" y="0"/>
-          <a:chExt cx="0" cy="0"/>
-        </a:xfrm>
-      </p:grpSpPr>
-      <p:sp>
-        <p:nvSpPr>
-          <p:cNvPr id="347" name="Google Shape;347;p36"/>
-          <p:cNvSpPr txBox="1">
-            <a:spLocks noGrp="1"/>
-          </p:cNvSpPr>
-          <p:nvPr>
-            <p:ph type="title" idx="4294967295"/>
-          </p:nvPr>
-        </p:nvSpPr>
-        <p:spPr>
-          <a:xfrm>
-            <a:off x="720000" y="352713"/>
-            <a:ext cx="7702550" cy="676275"/>
-          </a:xfrm>
-          <a:prstGeom prst="rect">
-            <a:avLst/>
-          </a:prstGeom>
-        </p:spPr>
-        <p:txBody>
-          <a:bodyPr spcFirstLastPara="1" wrap="square" lIns="90000" tIns="91425" rIns="90000" bIns="91425" anchor="t" anchorCtr="0">
-            <a:noAutofit/>
-          </a:bodyPr>
-          <a:lstStyle/>
-          <a:p>
-            <a:pPr marL="0" lvl="0" indent="0" algn="ctr" rtl="0">
-              <a:spcBef>
-                <a:spcPts val="0"/>
-              </a:spcBef>
-              <a:spcAft>
-                <a:spcPts val="0"/>
-              </a:spcAft>
-              <a:buNone/>
-            </a:pPr>
-            <a:r>
-              <a:rPr lang="en" dirty="0" smtClean="0"/>
-              <a:t>TESTING STRATEGY</a:t>
-            </a:r>
-            <a:endParaRPr dirty="0"/>
-          </a:p>
-        </p:txBody>
-      </p:sp>
-      <p:pic>
-        <p:nvPicPr>
-          <p:cNvPr id="16" name="Picture 15"/>
-          <p:cNvPicPr>
-            <a:picLocks noChangeAspect="1"/>
-          </p:cNvPicPr>
-          <p:nvPr/>
-        </p:nvPicPr>
-        <p:blipFill>
-          <a:blip r:embed="rId3"/>
-          <a:stretch>
-            <a:fillRect/>
-          </a:stretch>
-        </p:blipFill>
-        <p:spPr>
-          <a:xfrm>
-            <a:off x="953397" y="1311672"/>
-            <a:ext cx="8096190" cy="3365284"/>
-          </a:xfrm>
-          <a:prstGeom prst="rect">
-            <a:avLst/>
-          </a:prstGeom>
-        </p:spPr>
-      </p:pic>
-    </p:spTree>
-    <p:extLst>
-      <p:ext uri="{BB962C8B-B14F-4D97-AF65-F5344CB8AC3E}">
-        <p14:creationId xmlns:p14="http://schemas.microsoft.com/office/powerpoint/2010/main" val="2317547124"/>
-      </p:ext>
-    </p:extLst>
-  </p:cSld>
-  <p:clrMapOvr>
-    <a:masterClrMapping/>
-  </p:clrMapOvr>
-  <p:timing>
-    <p:tnLst>
-      <p:par>
-        <p:cTn id="1" dur="indefinite" restart="never" nodeType="tmRoot"/>
-      </p:par>
-    </p:tnLst>
-  </p:timing>
-</p:sld>
-</file>
-
-<file path=ppt/slides/slide20.xml><?xml version="1.0" encoding="utf-8"?>
-<p:sld xmlns:a="http://schemas.openxmlformats.org/drawingml/2006/main" xmlns:r="http://schemas.openxmlformats.org/officeDocument/2006/relationships" xmlns:p="http://schemas.openxmlformats.org/presentationml/2006/main">
-  <p:cSld>
-    <p:spTree>
-      <p:nvGrpSpPr>
-        <p:cNvPr id="1" name="Shape 1003"/>
-        <p:cNvGrpSpPr/>
-        <p:nvPr/>
-      </p:nvGrpSpPr>
-      <p:grpSpPr>
-        <a:xfrm>
-          <a:off x="0" y="0"/>
-          <a:ext cx="0" cy="0"/>
-          <a:chOff x="0" y="0"/>
-          <a:chExt cx="0" cy="0"/>
-        </a:xfrm>
-      </p:grpSpPr>
-      <p:sp>
-        <p:nvSpPr>
-          <p:cNvPr id="1007" name="Google Shape;1007;p66"/>
-          <p:cNvSpPr txBox="1">
-            <a:spLocks noGrp="1"/>
-          </p:cNvSpPr>
-          <p:nvPr>
-            <p:ph type="title"/>
-          </p:nvPr>
-        </p:nvSpPr>
-        <p:spPr>
-          <a:xfrm>
-            <a:off x="720000" y="255372"/>
-            <a:ext cx="7704000" cy="572700"/>
-          </a:xfrm>
-          <a:prstGeom prst="rect">
-            <a:avLst/>
-          </a:prstGeom>
-        </p:spPr>
-        <p:txBody>
-          <a:bodyPr spcFirstLastPara="1" wrap="square" lIns="91425" tIns="0" rIns="91425" bIns="0" anchor="b" anchorCtr="0">
-            <a:noAutofit/>
-          </a:bodyPr>
-          <a:lstStyle/>
-          <a:p>
-            <a:pPr marL="0" lvl="0" indent="0" algn="ctr" rtl="0">
-              <a:spcBef>
-                <a:spcPts val="0"/>
-              </a:spcBef>
-              <a:spcAft>
-                <a:spcPts val="0"/>
-              </a:spcAft>
-              <a:buNone/>
-            </a:pPr>
-            <a:r>
-              <a:rPr lang="en" sz="4000" dirty="0"/>
-              <a:t>PREDICTED GROWTH</a:t>
-            </a:r>
-            <a:endParaRPr sz="4000" dirty="0"/>
-          </a:p>
-        </p:txBody>
-      </p:sp>
-      <p:pic>
-        <p:nvPicPr>
-          <p:cNvPr id="2" name="Picture 1"/>
-          <p:cNvPicPr>
-            <a:picLocks noChangeAspect="1"/>
-          </p:cNvPicPr>
-          <p:nvPr/>
-        </p:nvPicPr>
-        <p:blipFill>
-          <a:blip r:embed="rId3">
-            <a:extLst>
-              <a:ext uri="{28A0092B-C50C-407E-A947-70E740481C1C}">
-                <a14:useLocalDpi xmlns:a14="http://schemas.microsoft.com/office/drawing/2010/main" val="0"/>
-              </a:ext>
-            </a:extLst>
-          </a:blip>
-          <a:stretch>
-            <a:fillRect/>
-          </a:stretch>
-        </p:blipFill>
-        <p:spPr>
-          <a:xfrm>
-            <a:off x="2099786" y="828072"/>
-            <a:ext cx="4944427" cy="3955542"/>
-          </a:xfrm>
-          <a:prstGeom prst="rect">
-            <a:avLst/>
-          </a:prstGeom>
-          <a:ln w="38100" cap="sq">
-            <a:solidFill>
-              <a:srgbClr val="000000"/>
-            </a:solidFill>
-            <a:prstDash val="solid"/>
-            <a:miter lim="800000"/>
-          </a:ln>
-          <a:effectLst>
-            <a:outerShdw blurRad="50800" dist="38100" dir="2700000" algn="tl" rotWithShape="0">
-              <a:srgbClr val="000000">
-                <a:alpha val="43000"/>
-              </a:srgbClr>
-            </a:outerShdw>
-          </a:effectLst>
-        </p:spPr>
-      </p:pic>
-    </p:spTree>
-    <p:extLst>
-      <p:ext uri="{BB962C8B-B14F-4D97-AF65-F5344CB8AC3E}">
-        <p14:creationId xmlns:p14="http://schemas.microsoft.com/office/powerpoint/2010/main" val="324543133"/>
-      </p:ext>
-    </p:extLst>
-  </p:cSld>
-  <p:clrMapOvr>
-    <a:masterClrMapping/>
-  </p:clrMapOvr>
-</p:sld>
-</file>
-
-<file path=ppt/slides/slide21.xml><?xml version="1.0" encoding="utf-8"?>
 <p:sld xmlns:a="http://schemas.openxmlformats.org/drawingml/2006/main" xmlns:r="http://schemas.openxmlformats.org/officeDocument/2006/relationships" xmlns:p="http://schemas.openxmlformats.org/presentationml/2006/main">
   <p:cSld>
     <p:bg>
@@ -18113,7 +20483,7 @@
             </a:pPr>
             <a:r>
               <a:rPr lang="en" dirty="0" smtClean="0"/>
-              <a:t>05</a:t>
+              <a:t>04</a:t>
             </a:r>
             <a:endParaRPr dirty="0"/>
           </a:p>
@@ -18132,7 +20502,328 @@
 </p:sld>
 </file>
 
-<file path=ppt/slides/slide22.xml><?xml version="1.0" encoding="utf-8"?>
+<file path=ppt/slides/slide2.xml><?xml version="1.0" encoding="utf-8"?>
+<p:sld xmlns:a="http://schemas.openxmlformats.org/drawingml/2006/main" xmlns:r="http://schemas.openxmlformats.org/officeDocument/2006/relationships" xmlns:p="http://schemas.openxmlformats.org/presentationml/2006/main">
+  <p:cSld>
+    <p:spTree>
+      <p:nvGrpSpPr>
+        <p:cNvPr id="1" name=""/>
+        <p:cNvGrpSpPr/>
+        <p:nvPr/>
+      </p:nvGrpSpPr>
+      <p:grpSpPr>
+        <a:xfrm>
+          <a:off x="0" y="0"/>
+          <a:ext cx="0" cy="0"/>
+          <a:chOff x="0" y="0"/>
+          <a:chExt cx="0" cy="0"/>
+        </a:xfrm>
+      </p:grpSpPr>
+      <p:sp>
+        <p:nvSpPr>
+          <p:cNvPr id="2" name="Title 1">
+            <a:extLst>
+              <a:ext uri="{FF2B5EF4-FFF2-40B4-BE49-F238E27FC236}">
+                <a16:creationId xmlns:a16="http://schemas.microsoft.com/office/drawing/2014/main" id="{20816D1B-0AAA-8D3B-111D-F5C50EFFA327}"/>
+              </a:ext>
+            </a:extLst>
+          </p:cNvPr>
+          <p:cNvSpPr>
+            <a:spLocks noGrp="1"/>
+          </p:cNvSpPr>
+          <p:nvPr>
+            <p:ph type="title"/>
+          </p:nvPr>
+        </p:nvSpPr>
+        <p:spPr>
+          <a:xfrm>
+            <a:off x="284572" y="534499"/>
+            <a:ext cx="7704000" cy="572700"/>
+          </a:xfrm>
+        </p:spPr>
+        <p:txBody>
+          <a:bodyPr/>
+          <a:lstStyle/>
+          <a:p>
+            <a:r>
+              <a:rPr lang="en-US" dirty="0"/>
+              <a:t>Acting Evaluation System Overview</a:t>
+            </a:r>
+            <a:endParaRPr lang="en-EG" dirty="0"/>
+          </a:p>
+        </p:txBody>
+      </p:sp>
+      <p:sp>
+        <p:nvSpPr>
+          <p:cNvPr id="3" name="Text Placeholder 2">
+            <a:extLst>
+              <a:ext uri="{FF2B5EF4-FFF2-40B4-BE49-F238E27FC236}">
+                <a16:creationId xmlns:a16="http://schemas.microsoft.com/office/drawing/2014/main" id="{9BDBD0A0-1B3B-343B-16A6-E250E110C68D}"/>
+              </a:ext>
+            </a:extLst>
+          </p:cNvPr>
+          <p:cNvSpPr>
+            <a:spLocks noGrp="1"/>
+          </p:cNvSpPr>
+          <p:nvPr>
+            <p:ph type="body" idx="1"/>
+          </p:nvPr>
+        </p:nvSpPr>
+        <p:spPr>
+          <a:xfrm>
+            <a:off x="284572" y="1192601"/>
+            <a:ext cx="7008857" cy="3416400"/>
+          </a:xfrm>
+        </p:spPr>
+        <p:txBody>
+          <a:bodyPr/>
+          <a:lstStyle/>
+          <a:p>
+            <a:r>
+              <a:rPr lang="en-US" dirty="0"/>
+              <a:t>Our system is an AI-based platform designed to automatically evaluate acting performances in a structured and objective way.</a:t>
+            </a:r>
+          </a:p>
+          <a:p>
+            <a:r>
+              <a:rPr lang="en-US" dirty="0"/>
+              <a:t>It takes a video of an actor as input and analyzes multiple performance aspects, including facial expressions, eye movement, voice activity, and body gestures. These features are extracted from each frame and processed using machine learning models.</a:t>
+            </a:r>
+          </a:p>
+          <a:p>
+            <a:r>
+              <a:rPr lang="en-US" dirty="0"/>
+              <a:t>The system then generates a detailed performance report that includes:</a:t>
+            </a:r>
+          </a:p>
+          <a:p>
+            <a:r>
+              <a:rPr lang="en-US" dirty="0"/>
+              <a:t>Emotion classification (e.g., happy, sad, neutral)</a:t>
+            </a:r>
+          </a:p>
+          <a:p>
+            <a:r>
+              <a:rPr lang="en-US" dirty="0"/>
+              <a:t>Gesture and movement analysis</a:t>
+            </a:r>
+          </a:p>
+          <a:p>
+            <a:r>
+              <a:rPr lang="en-US" dirty="0"/>
+              <a:t>Eye tracking and engagement scoring</a:t>
+            </a:r>
+          </a:p>
+          <a:p>
+            <a:r>
+              <a:rPr lang="en-US" dirty="0"/>
+              <a:t>Overall performance evaluation (Good, Moderate, Bad)</a:t>
+            </a:r>
+          </a:p>
+          <a:p>
+            <a:r>
+              <a:rPr lang="en-US" dirty="0"/>
+              <a:t>The goal of this system is to assist directors and evaluators by reducing human bias and providing consistent, data-driven feedback.</a:t>
+            </a:r>
+          </a:p>
+          <a:p>
+            <a:endParaRPr lang="en-EG" dirty="0"/>
+          </a:p>
+        </p:txBody>
+      </p:sp>
+      <p:pic>
+        <p:nvPicPr>
+          <p:cNvPr id="7" name="Backhand2_Bad.mp4">
+            <a:hlinkClick r:id="" action="ppaction://media"/>
+            <a:extLst>
+              <a:ext uri="{FF2B5EF4-FFF2-40B4-BE49-F238E27FC236}">
+                <a16:creationId xmlns:a16="http://schemas.microsoft.com/office/drawing/2014/main" id="{51F28A0F-257C-C4B0-F138-C85E0286471A}"/>
+              </a:ext>
+            </a:extLst>
+          </p:cNvPr>
+          <p:cNvPicPr>
+            <a:picLocks noChangeAspect="1"/>
+          </p:cNvPicPr>
+          <p:nvPr>
+            <a:videoFile r:link="rId2"/>
+            <p:extLst>
+              <p:ext uri="{DAA4B4D4-6D71-4841-9C94-3DE7FCFB9230}">
+                <p14:media xmlns:p14="http://schemas.microsoft.com/office/powerpoint/2010/main" r:embed="rId1"/>
+              </p:ext>
+            </p:extLst>
+          </p:nvPr>
+        </p:nvPicPr>
+        <p:blipFill>
+          <a:blip r:embed="rId4"/>
+          <a:stretch>
+            <a:fillRect/>
+          </a:stretch>
+        </p:blipFill>
+        <p:spPr>
+          <a:xfrm>
+            <a:off x="7033830" y="1192601"/>
+            <a:ext cx="1825598" cy="3330998"/>
+          </a:xfrm>
+          <a:prstGeom prst="rect">
+            <a:avLst/>
+          </a:prstGeom>
+          <a:ln>
+            <a:noFill/>
+          </a:ln>
+          <a:effectLst>
+            <a:softEdge rad="112500"/>
+          </a:effectLst>
+        </p:spPr>
+      </p:pic>
+    </p:spTree>
+    <p:extLst>
+      <p:ext uri="{BB962C8B-B14F-4D97-AF65-F5344CB8AC3E}">
+        <p14:creationId xmlns:p14="http://schemas.microsoft.com/office/powerpoint/2010/main" val="1226716673"/>
+      </p:ext>
+    </p:extLst>
+  </p:cSld>
+  <p:clrMapOvr>
+    <a:masterClrMapping/>
+  </p:clrMapOvr>
+  <p:timing>
+    <p:tnLst>
+      <p:par>
+        <p:cTn id="1" dur="indefinite" restart="never" nodeType="tmRoot">
+          <p:childTnLst>
+            <p:seq concurrent="1" nextAc="seek">
+              <p:cTn id="2" dur="indefinite" nodeType="mainSeq">
+                <p:childTnLst>
+                  <p:par>
+                    <p:cTn id="3" fill="hold">
+                      <p:stCondLst>
+                        <p:cond delay="indefinite"/>
+                      </p:stCondLst>
+                      <p:childTnLst>
+                        <p:par>
+                          <p:cTn id="4" fill="hold">
+                            <p:stCondLst>
+                              <p:cond delay="0"/>
+                            </p:stCondLst>
+                            <p:childTnLst>
+                              <p:par>
+                                <p:cTn id="5" presetID="1" presetClass="mediacall" presetSubtype="0" fill="hold" nodeType="clickEffect">
+                                  <p:stCondLst>
+                                    <p:cond delay="0"/>
+                                  </p:stCondLst>
+                                  <p:childTnLst>
+                                    <p:cmd type="call" cmd="playFrom(0.0)">
+                                      <p:cBhvr>
+                                        <p:cTn id="6" dur="1200" fill="hold"/>
+                                        <p:tgtEl>
+                                          <p:spTgt spid="7"/>
+                                        </p:tgtEl>
+                                      </p:cBhvr>
+                                    </p:cmd>
+                                  </p:childTnLst>
+                                </p:cTn>
+                              </p:par>
+                            </p:childTnLst>
+                          </p:cTn>
+                        </p:par>
+                      </p:childTnLst>
+                    </p:cTn>
+                  </p:par>
+                </p:childTnLst>
+              </p:cTn>
+              <p:prevCondLst>
+                <p:cond evt="onPrev" delay="0">
+                  <p:tgtEl>
+                    <p:sldTgt/>
+                  </p:tgtEl>
+                </p:cond>
+              </p:prevCondLst>
+              <p:nextCondLst>
+                <p:cond evt="onNext" delay="0">
+                  <p:tgtEl>
+                    <p:sldTgt/>
+                  </p:tgtEl>
+                </p:cond>
+              </p:nextCondLst>
+            </p:seq>
+            <p:video>
+              <p:cMediaNode vol="80000">
+                <p:cTn id="7" fill="hold" display="0">
+                  <p:stCondLst>
+                    <p:cond delay="indefinite"/>
+                  </p:stCondLst>
+                </p:cTn>
+                <p:tgtEl>
+                  <p:spTgt spid="7"/>
+                </p:tgtEl>
+              </p:cMediaNode>
+            </p:video>
+            <p:seq concurrent="1" nextAc="seek">
+              <p:cTn id="8" restart="whenNotActive" fill="hold" evtFilter="cancelBubble" nodeType="interactiveSeq">
+                <p:stCondLst>
+                  <p:cond evt="onClick" delay="0">
+                    <p:tgtEl>
+                      <p:spTgt spid="7"/>
+                    </p:tgtEl>
+                  </p:cond>
+                </p:stCondLst>
+                <p:endSync evt="end" delay="0">
+                  <p:rtn val="all"/>
+                </p:endSync>
+                <p:childTnLst>
+                  <p:par>
+                    <p:cTn id="9" fill="hold">
+                      <p:stCondLst>
+                        <p:cond delay="0"/>
+                      </p:stCondLst>
+                      <p:childTnLst>
+                        <p:par>
+                          <p:cTn id="10" fill="hold">
+                            <p:stCondLst>
+                              <p:cond delay="0"/>
+                            </p:stCondLst>
+                            <p:childTnLst>
+                              <p:par>
+                                <p:cTn id="11" presetID="2" presetClass="mediacall" presetSubtype="0" fill="hold" nodeType="clickEffect">
+                                  <p:stCondLst>
+                                    <p:cond delay="0"/>
+                                  </p:stCondLst>
+                                  <p:childTnLst>
+                                    <p:cmd type="call" cmd="togglePause">
+                                      <p:cBhvr>
+                                        <p:cTn id="12" dur="1" fill="hold"/>
+                                        <p:tgtEl>
+                                          <p:spTgt spid="7"/>
+                                        </p:tgtEl>
+                                      </p:cBhvr>
+                                    </p:cmd>
+                                  </p:childTnLst>
+                                </p:cTn>
+                              </p:par>
+                            </p:childTnLst>
+                          </p:cTn>
+                        </p:par>
+                      </p:childTnLst>
+                    </p:cTn>
+                  </p:par>
+                </p:childTnLst>
+              </p:cTn>
+              <p:nextCondLst>
+                <p:cond evt="onClick" delay="0">
+                  <p:tgtEl>
+                    <p:spTgt spid="7"/>
+                  </p:tgtEl>
+                </p:cond>
+              </p:nextCondLst>
+            </p:seq>
+          </p:childTnLst>
+        </p:cTn>
+      </p:par>
+    </p:tnLst>
+  </p:timing>
+</p:sld>
+</file>
+
+<file path=ppt/slides/slide20.xml><?xml version="1.0" encoding="utf-8"?>
 <p:sld xmlns:a="http://schemas.openxmlformats.org/drawingml/2006/main" xmlns:r="http://schemas.openxmlformats.org/officeDocument/2006/relationships" xmlns:p="http://schemas.openxmlformats.org/presentationml/2006/main">
   <p:cSld>
     <p:spTree>
@@ -18782,7 +21473,7 @@
 </p:sld>
 </file>
 
-<file path=ppt/slides/slide23.xml><?xml version="1.0" encoding="utf-8"?>
+<file path=ppt/slides/slide21.xml><?xml version="1.0" encoding="utf-8"?>
 <p:sld xmlns:a="http://schemas.openxmlformats.org/drawingml/2006/main" xmlns:r="http://schemas.openxmlformats.org/officeDocument/2006/relationships" xmlns:p="http://schemas.openxmlformats.org/presentationml/2006/main">
   <p:cSld>
     <p:spTree>
@@ -19376,7 +22067,1201 @@
 </p:sld>
 </file>
 
+<file path=ppt/slides/slide22.xml><?xml version="1.0" encoding="utf-8"?>
+<p:sld xmlns:a="http://schemas.openxmlformats.org/drawingml/2006/main" xmlns:r="http://schemas.openxmlformats.org/officeDocument/2006/relationships" xmlns:p="http://schemas.openxmlformats.org/presentationml/2006/main">
+  <p:cSld>
+    <p:bg>
+      <p:bgPr>
+        <a:solidFill>
+          <a:schemeClr val="dk2"/>
+        </a:solidFill>
+        <a:effectLst/>
+      </p:bgPr>
+    </p:bg>
+    <p:spTree>
+      <p:nvGrpSpPr>
+        <p:cNvPr id="1" name="Shape 231"/>
+        <p:cNvGrpSpPr/>
+        <p:nvPr/>
+      </p:nvGrpSpPr>
+      <p:grpSpPr>
+        <a:xfrm>
+          <a:off x="0" y="0"/>
+          <a:ext cx="0" cy="0"/>
+          <a:chOff x="0" y="0"/>
+          <a:chExt cx="0" cy="0"/>
+        </a:xfrm>
+      </p:grpSpPr>
+      <p:sp>
+        <p:nvSpPr>
+          <p:cNvPr id="232" name="Google Shape;232;p37"/>
+          <p:cNvSpPr txBox="1">
+            <a:spLocks noGrp="1"/>
+          </p:cNvSpPr>
+          <p:nvPr>
+            <p:ph type="title"/>
+          </p:nvPr>
+        </p:nvSpPr>
+        <p:spPr>
+          <a:xfrm>
+            <a:off x="238000" y="1295400"/>
+            <a:ext cx="4334000" cy="3352800"/>
+          </a:xfrm>
+          <a:prstGeom prst="rect">
+            <a:avLst/>
+          </a:prstGeom>
+        </p:spPr>
+        <p:txBody>
+          <a:bodyPr spcFirstLastPara="1" wrap="square" lIns="91425" tIns="0" rIns="91425" bIns="0" anchor="ctr" anchorCtr="0">
+            <a:noAutofit/>
+          </a:bodyPr>
+          <a:lstStyle/>
+          <a:p>
+            <a:r>
+              <a:rPr lang="en-US" dirty="0"/>
+              <a:t>System</a:t>
+            </a:r>
+            <a:br>
+              <a:rPr lang="en-US" dirty="0"/>
+            </a:br>
+            <a:r>
+              <a:rPr lang="en-US" dirty="0"/>
+              <a:t>Performance Testing</a:t>
+            </a:r>
+            <a:r>
+              <a:rPr lang="en-US" sz="4000" dirty="0"/>
+              <a:t/>
+            </a:r>
+            <a:br>
+              <a:rPr lang="en-US" sz="4000" dirty="0"/>
+            </a:br>
+            <a:endParaRPr sz="3200" dirty="0"/>
+          </a:p>
+        </p:txBody>
+      </p:sp>
+      <p:sp>
+        <p:nvSpPr>
+          <p:cNvPr id="233" name="Google Shape;233;p37"/>
+          <p:cNvSpPr txBox="1">
+            <a:spLocks noGrp="1"/>
+          </p:cNvSpPr>
+          <p:nvPr>
+            <p:ph type="title" idx="2"/>
+          </p:nvPr>
+        </p:nvSpPr>
+        <p:spPr>
+          <a:xfrm>
+            <a:off x="4648200" y="1748375"/>
+            <a:ext cx="2286000" cy="1664100"/>
+          </a:xfrm>
+          <a:prstGeom prst="rect">
+            <a:avLst/>
+          </a:prstGeom>
+        </p:spPr>
+        <p:txBody>
+          <a:bodyPr spcFirstLastPara="1" wrap="square" lIns="91425" tIns="0" rIns="91425" bIns="0" anchor="ctr" anchorCtr="0">
+            <a:noAutofit/>
+          </a:bodyPr>
+          <a:lstStyle/>
+          <a:p>
+            <a:pPr marL="0" lvl="0" indent="0" algn="l" rtl="0">
+              <a:spcBef>
+                <a:spcPts val="0"/>
+              </a:spcBef>
+              <a:spcAft>
+                <a:spcPts val="0"/>
+              </a:spcAft>
+              <a:buNone/>
+            </a:pPr>
+            <a:r>
+              <a:rPr lang="en" dirty="0" smtClean="0"/>
+              <a:t>05</a:t>
+            </a:r>
+            <a:endParaRPr dirty="0"/>
+          </a:p>
+        </p:txBody>
+      </p:sp>
+    </p:spTree>
+    <p:extLst>
+      <p:ext uri="{BB962C8B-B14F-4D97-AF65-F5344CB8AC3E}">
+        <p14:creationId xmlns:p14="http://schemas.microsoft.com/office/powerpoint/2010/main" val="1893718626"/>
+      </p:ext>
+    </p:extLst>
+  </p:cSld>
+  <p:clrMapOvr>
+    <a:masterClrMapping/>
+  </p:clrMapOvr>
+</p:sld>
+</file>
+
+<file path=ppt/slides/slide23.xml><?xml version="1.0" encoding="utf-8"?>
+<p:sld xmlns:a="http://schemas.openxmlformats.org/drawingml/2006/main" xmlns:r="http://schemas.openxmlformats.org/officeDocument/2006/relationships" xmlns:p="http://schemas.openxmlformats.org/presentationml/2006/main">
+  <p:cSld>
+    <p:spTree>
+      <p:nvGrpSpPr>
+        <p:cNvPr id="1" name="Shape 1003"/>
+        <p:cNvGrpSpPr/>
+        <p:nvPr/>
+      </p:nvGrpSpPr>
+      <p:grpSpPr>
+        <a:xfrm>
+          <a:off x="0" y="0"/>
+          <a:ext cx="0" cy="0"/>
+          <a:chOff x="0" y="0"/>
+          <a:chExt cx="0" cy="0"/>
+        </a:xfrm>
+      </p:grpSpPr>
+      <p:sp>
+        <p:nvSpPr>
+          <p:cNvPr id="1007" name="Google Shape;1007;p66"/>
+          <p:cNvSpPr txBox="1">
+            <a:spLocks noGrp="1"/>
+          </p:cNvSpPr>
+          <p:nvPr>
+            <p:ph type="title"/>
+          </p:nvPr>
+        </p:nvSpPr>
+        <p:spPr>
+          <a:xfrm>
+            <a:off x="720000" y="255372"/>
+            <a:ext cx="7704000" cy="572700"/>
+          </a:xfrm>
+          <a:prstGeom prst="rect">
+            <a:avLst/>
+          </a:prstGeom>
+        </p:spPr>
+        <p:txBody>
+          <a:bodyPr spcFirstLastPara="1" wrap="square" lIns="91425" tIns="0" rIns="91425" bIns="0" anchor="b" anchorCtr="0">
+            <a:noAutofit/>
+          </a:bodyPr>
+          <a:lstStyle/>
+          <a:p>
+            <a:pPr marL="0" lvl="0" indent="0" algn="ctr" rtl="0">
+              <a:spcBef>
+                <a:spcPts val="0"/>
+              </a:spcBef>
+              <a:spcAft>
+                <a:spcPts val="0"/>
+              </a:spcAft>
+              <a:buNone/>
+            </a:pPr>
+            <a:r>
+              <a:rPr lang="en" sz="4000" dirty="0"/>
+              <a:t>PREDICTED GROWTH</a:t>
+            </a:r>
+            <a:endParaRPr sz="4000" dirty="0"/>
+          </a:p>
+        </p:txBody>
+      </p:sp>
+      <p:pic>
+        <p:nvPicPr>
+          <p:cNvPr id="2" name="Picture 1"/>
+          <p:cNvPicPr>
+            <a:picLocks noChangeAspect="1"/>
+          </p:cNvPicPr>
+          <p:nvPr/>
+        </p:nvPicPr>
+        <p:blipFill>
+          <a:blip r:embed="rId3">
+            <a:extLst>
+              <a:ext uri="{28A0092B-C50C-407E-A947-70E740481C1C}">
+                <a14:useLocalDpi xmlns:a14="http://schemas.microsoft.com/office/drawing/2010/main" val="0"/>
+              </a:ext>
+            </a:extLst>
+          </a:blip>
+          <a:stretch>
+            <a:fillRect/>
+          </a:stretch>
+        </p:blipFill>
+        <p:spPr>
+          <a:xfrm>
+            <a:off x="541020" y="828072"/>
+            <a:ext cx="8061960" cy="3976508"/>
+          </a:xfrm>
+          <a:prstGeom prst="rect">
+            <a:avLst/>
+          </a:prstGeom>
+          <a:ln w="38100" cap="sq">
+            <a:solidFill>
+              <a:srgbClr val="000000"/>
+            </a:solidFill>
+            <a:prstDash val="solid"/>
+            <a:miter lim="800000"/>
+          </a:ln>
+          <a:effectLst>
+            <a:outerShdw blurRad="50800" dist="38100" dir="2700000" algn="tl" rotWithShape="0">
+              <a:srgbClr val="000000">
+                <a:alpha val="43000"/>
+              </a:srgbClr>
+            </a:outerShdw>
+          </a:effectLst>
+        </p:spPr>
+      </p:pic>
+    </p:spTree>
+  </p:cSld>
+  <p:clrMapOvr>
+    <a:masterClrMapping/>
+  </p:clrMapOvr>
+</p:sld>
+</file>
+
+<file path=ppt/slides/slide24.xml><?xml version="1.0" encoding="utf-8"?>
+<p:sld xmlns:a="http://schemas.openxmlformats.org/drawingml/2006/main" xmlns:r="http://schemas.openxmlformats.org/officeDocument/2006/relationships" xmlns:p="http://schemas.openxmlformats.org/presentationml/2006/main">
+  <p:cSld>
+    <p:spTree>
+      <p:nvGrpSpPr>
+        <p:cNvPr id="1" name="Shape 1003"/>
+        <p:cNvGrpSpPr/>
+        <p:nvPr/>
+      </p:nvGrpSpPr>
+      <p:grpSpPr>
+        <a:xfrm>
+          <a:off x="0" y="0"/>
+          <a:ext cx="0" cy="0"/>
+          <a:chOff x="0" y="0"/>
+          <a:chExt cx="0" cy="0"/>
+        </a:xfrm>
+      </p:grpSpPr>
+      <p:sp>
+        <p:nvSpPr>
+          <p:cNvPr id="1007" name="Google Shape;1007;p66"/>
+          <p:cNvSpPr txBox="1">
+            <a:spLocks noGrp="1"/>
+          </p:cNvSpPr>
+          <p:nvPr>
+            <p:ph type="title"/>
+          </p:nvPr>
+        </p:nvSpPr>
+        <p:spPr>
+          <a:xfrm>
+            <a:off x="720000" y="255372"/>
+            <a:ext cx="7704000" cy="572700"/>
+          </a:xfrm>
+          <a:prstGeom prst="rect">
+            <a:avLst/>
+          </a:prstGeom>
+        </p:spPr>
+        <p:txBody>
+          <a:bodyPr spcFirstLastPara="1" wrap="square" lIns="91425" tIns="0" rIns="91425" bIns="0" anchor="b" anchorCtr="0">
+            <a:noAutofit/>
+          </a:bodyPr>
+          <a:lstStyle/>
+          <a:p>
+            <a:pPr marL="0" lvl="0" indent="0" algn="ctr" rtl="0">
+              <a:spcBef>
+                <a:spcPts val="0"/>
+              </a:spcBef>
+              <a:spcAft>
+                <a:spcPts val="0"/>
+              </a:spcAft>
+              <a:buNone/>
+            </a:pPr>
+            <a:r>
+              <a:rPr lang="en" sz="4000" dirty="0"/>
+              <a:t>PREDICTED GROWTH</a:t>
+            </a:r>
+            <a:endParaRPr sz="4000" dirty="0"/>
+          </a:p>
+        </p:txBody>
+      </p:sp>
+      <p:pic>
+        <p:nvPicPr>
+          <p:cNvPr id="3" name="Picture 2"/>
+          <p:cNvPicPr>
+            <a:picLocks noChangeAspect="1"/>
+          </p:cNvPicPr>
+          <p:nvPr/>
+        </p:nvPicPr>
+        <p:blipFill>
+          <a:blip r:embed="rId3">
+            <a:extLst>
+              <a:ext uri="{28A0092B-C50C-407E-A947-70E740481C1C}">
+                <a14:useLocalDpi xmlns:a14="http://schemas.microsoft.com/office/drawing/2010/main" val="0"/>
+              </a:ext>
+            </a:extLst>
+          </a:blip>
+          <a:stretch>
+            <a:fillRect/>
+          </a:stretch>
+        </p:blipFill>
+        <p:spPr>
+          <a:xfrm>
+            <a:off x="1215389" y="934751"/>
+            <a:ext cx="6831331" cy="3789903"/>
+          </a:xfrm>
+          <a:prstGeom prst="rect">
+            <a:avLst/>
+          </a:prstGeom>
+        </p:spPr>
+      </p:pic>
+    </p:spTree>
+    <p:extLst>
+      <p:ext uri="{BB962C8B-B14F-4D97-AF65-F5344CB8AC3E}">
+        <p14:creationId xmlns:p14="http://schemas.microsoft.com/office/powerpoint/2010/main" val="2924020551"/>
+      </p:ext>
+    </p:extLst>
+  </p:cSld>
+  <p:clrMapOvr>
+    <a:masterClrMapping/>
+  </p:clrMapOvr>
+</p:sld>
+</file>
+
+<file path=ppt/slides/slide25.xml><?xml version="1.0" encoding="utf-8"?>
+<p:sld xmlns:a="http://schemas.openxmlformats.org/drawingml/2006/main" xmlns:r="http://schemas.openxmlformats.org/officeDocument/2006/relationships" xmlns:p="http://schemas.openxmlformats.org/presentationml/2006/main">
+  <p:cSld>
+    <p:spTree>
+      <p:nvGrpSpPr>
+        <p:cNvPr id="1" name="Shape 1003"/>
+        <p:cNvGrpSpPr/>
+        <p:nvPr/>
+      </p:nvGrpSpPr>
+      <p:grpSpPr>
+        <a:xfrm>
+          <a:off x="0" y="0"/>
+          <a:ext cx="0" cy="0"/>
+          <a:chOff x="0" y="0"/>
+          <a:chExt cx="0" cy="0"/>
+        </a:xfrm>
+      </p:grpSpPr>
+      <p:sp>
+        <p:nvSpPr>
+          <p:cNvPr id="1007" name="Google Shape;1007;p66"/>
+          <p:cNvSpPr txBox="1">
+            <a:spLocks noGrp="1"/>
+          </p:cNvSpPr>
+          <p:nvPr>
+            <p:ph type="title"/>
+          </p:nvPr>
+        </p:nvSpPr>
+        <p:spPr>
+          <a:xfrm>
+            <a:off x="720000" y="255372"/>
+            <a:ext cx="7704000" cy="572700"/>
+          </a:xfrm>
+          <a:prstGeom prst="rect">
+            <a:avLst/>
+          </a:prstGeom>
+        </p:spPr>
+        <p:txBody>
+          <a:bodyPr spcFirstLastPara="1" wrap="square" lIns="91425" tIns="0" rIns="91425" bIns="0" anchor="b" anchorCtr="0">
+            <a:noAutofit/>
+          </a:bodyPr>
+          <a:lstStyle/>
+          <a:p>
+            <a:pPr marL="0" lvl="0" indent="0" algn="ctr" rtl="0">
+              <a:spcBef>
+                <a:spcPts val="0"/>
+              </a:spcBef>
+              <a:spcAft>
+                <a:spcPts val="0"/>
+              </a:spcAft>
+              <a:buNone/>
+            </a:pPr>
+            <a:r>
+              <a:rPr lang="en" sz="4000" dirty="0"/>
+              <a:t>PREDICTED GROWTH</a:t>
+            </a:r>
+            <a:endParaRPr sz="4000" dirty="0"/>
+          </a:p>
+        </p:txBody>
+      </p:sp>
+      <p:pic>
+        <p:nvPicPr>
+          <p:cNvPr id="2" name="Picture 1"/>
+          <p:cNvPicPr>
+            <a:picLocks noChangeAspect="1"/>
+          </p:cNvPicPr>
+          <p:nvPr/>
+        </p:nvPicPr>
+        <p:blipFill>
+          <a:blip r:embed="rId3">
+            <a:extLst>
+              <a:ext uri="{28A0092B-C50C-407E-A947-70E740481C1C}">
+                <a14:useLocalDpi xmlns:a14="http://schemas.microsoft.com/office/drawing/2010/main" val="0"/>
+              </a:ext>
+            </a:extLst>
+          </a:blip>
+          <a:stretch>
+            <a:fillRect/>
+          </a:stretch>
+        </p:blipFill>
+        <p:spPr>
+          <a:xfrm>
+            <a:off x="2099786" y="828072"/>
+            <a:ext cx="4944427" cy="3955542"/>
+          </a:xfrm>
+          <a:prstGeom prst="rect">
+            <a:avLst/>
+          </a:prstGeom>
+          <a:ln w="38100" cap="sq">
+            <a:solidFill>
+              <a:srgbClr val="000000"/>
+            </a:solidFill>
+            <a:prstDash val="solid"/>
+            <a:miter lim="800000"/>
+          </a:ln>
+          <a:effectLst>
+            <a:outerShdw blurRad="50800" dist="38100" dir="2700000" algn="tl" rotWithShape="0">
+              <a:srgbClr val="000000">
+                <a:alpha val="43000"/>
+              </a:srgbClr>
+            </a:outerShdw>
+          </a:effectLst>
+        </p:spPr>
+      </p:pic>
+    </p:spTree>
+    <p:extLst>
+      <p:ext uri="{BB962C8B-B14F-4D97-AF65-F5344CB8AC3E}">
+        <p14:creationId xmlns:p14="http://schemas.microsoft.com/office/powerpoint/2010/main" val="324543133"/>
+      </p:ext>
+    </p:extLst>
+  </p:cSld>
+  <p:clrMapOvr>
+    <a:masterClrMapping/>
+  </p:clrMapOvr>
+</p:sld>
+</file>
+
 <file path=ppt/slides/slide3.xml><?xml version="1.0" encoding="utf-8"?>
+<p:sld xmlns:a="http://schemas.openxmlformats.org/drawingml/2006/main" xmlns:r="http://schemas.openxmlformats.org/officeDocument/2006/relationships" xmlns:p="http://schemas.openxmlformats.org/presentationml/2006/main">
+  <p:cSld>
+    <p:spTree>
+      <p:nvGrpSpPr>
+        <p:cNvPr id="1" name=""/>
+        <p:cNvGrpSpPr/>
+        <p:nvPr/>
+      </p:nvGrpSpPr>
+      <p:grpSpPr>
+        <a:xfrm>
+          <a:off x="0" y="0"/>
+          <a:ext cx="0" cy="0"/>
+          <a:chOff x="0" y="0"/>
+          <a:chExt cx="0" cy="0"/>
+        </a:xfrm>
+      </p:grpSpPr>
+      <p:sp>
+        <p:nvSpPr>
+          <p:cNvPr id="2" name="Title 1">
+            <a:extLst>
+              <a:ext uri="{FF2B5EF4-FFF2-40B4-BE49-F238E27FC236}">
+                <a16:creationId xmlns:a16="http://schemas.microsoft.com/office/drawing/2014/main" id="{965EB0F1-DA2F-1F4D-D1B1-CDD25356E860}"/>
+              </a:ext>
+            </a:extLst>
+          </p:cNvPr>
+          <p:cNvSpPr>
+            <a:spLocks noGrp="1"/>
+          </p:cNvSpPr>
+          <p:nvPr>
+            <p:ph type="title"/>
+          </p:nvPr>
+        </p:nvSpPr>
+        <p:spPr>
+          <a:xfrm>
+            <a:off x="720000" y="231306"/>
+            <a:ext cx="7704000" cy="572700"/>
+          </a:xfrm>
+        </p:spPr>
+        <p:txBody>
+          <a:bodyPr/>
+          <a:lstStyle/>
+          <a:p>
+            <a:r>
+              <a:rPr lang="en-US" sz="4000" dirty="0"/>
+              <a:t>Challenges Addressed by the System</a:t>
+            </a:r>
+            <a:endParaRPr lang="en-EG" sz="4000" dirty="0"/>
+          </a:p>
+        </p:txBody>
+      </p:sp>
+      <p:sp>
+        <p:nvSpPr>
+          <p:cNvPr id="6" name="Rectangle 3">
+            <a:extLst>
+              <a:ext uri="{FF2B5EF4-FFF2-40B4-BE49-F238E27FC236}">
+                <a16:creationId xmlns:a16="http://schemas.microsoft.com/office/drawing/2014/main" id="{C06FE748-E904-73CE-B52F-6DD057C9A6EE}"/>
+              </a:ext>
+            </a:extLst>
+          </p:cNvPr>
+          <p:cNvSpPr>
+            <a:spLocks noGrp="1" noChangeArrowheads="1"/>
+          </p:cNvSpPr>
+          <p:nvPr>
+            <p:ph type="body" idx="1"/>
+          </p:nvPr>
+        </p:nvSpPr>
+        <p:spPr bwMode="auto">
+          <a:xfrm>
+            <a:off x="238387" y="740525"/>
+            <a:ext cx="8667226" cy="1954381"/>
+          </a:xfrm>
+          <a:prstGeom prst="rect">
+            <a:avLst/>
+          </a:prstGeom>
+          <a:noFill/>
+          <a:ln>
+            <a:noFill/>
+          </a:ln>
+          <a:effectLst/>
+          <a:extLst>
+            <a:ext uri="{909E8E84-426E-40DD-AFC4-6F175D3DCCD1}">
+              <a14:hiddenFill xmlns:a14="http://schemas.microsoft.com/office/drawing/2010/main">
+                <a:solidFill>
+                  <a:schemeClr val="accent1"/>
+                </a:solidFill>
+              </a14:hiddenFill>
+            </a:ext>
+            <a:ext uri="{91240B29-F687-4F45-9708-019B960494DF}">
+              <a14:hiddenLine xmlns:a14="http://schemas.microsoft.com/office/drawing/2010/main" w="9525">
+                <a:solidFill>
+                  <a:schemeClr val="tx1"/>
+                </a:solidFill>
+                <a:miter lim="800000"/>
+                <a:headEnd/>
+                <a:tailEnd/>
+              </a14:hiddenLine>
+            </a:ext>
+            <a:ext uri="{AF507438-7753-43E0-B8FC-AC1667EBCBE1}">
+              <a14:hiddenEffects xmlns:a14="http://schemas.microsoft.com/office/drawing/2010/main">
+                <a:effectLst>
+                  <a:outerShdw dist="35921" dir="2700000" algn="ctr" rotWithShape="0">
+                    <a:schemeClr val="bg2"/>
+                  </a:outerShdw>
+                </a:effectLst>
+              </a14:hiddenEffects>
+            </a:ext>
+          </a:extLst>
+        </p:spPr>
+        <p:txBody>
+          <a:bodyPr vert="horz" wrap="square" lIns="91440" tIns="45720" rIns="91440" bIns="45720" numCol="1" anchor="ctr" anchorCtr="0" compatLnSpc="1">
+            <a:prstTxWarp prst="textNoShape">
+              <a:avLst/>
+            </a:prstTxWarp>
+            <a:spAutoFit/>
+          </a:bodyPr>
+          <a:lstStyle>
+            <a:lvl1pPr eaLnBrk="0" fontAlgn="base" hangingPunct="0">
+              <a:spcBef>
+                <a:spcPct val="0"/>
+              </a:spcBef>
+              <a:spcAft>
+                <a:spcPct val="0"/>
+              </a:spcAft>
+              <a:defRPr>
+                <a:solidFill>
+                  <a:schemeClr val="tx1"/>
+                </a:solidFill>
+                <a:latin typeface="Arial" panose="020B0604020202020204" pitchFamily="34" charset="0"/>
+              </a:defRPr>
+            </a:lvl1pPr>
+            <a:lvl2pPr marL="457200" eaLnBrk="0" fontAlgn="base" hangingPunct="0">
+              <a:spcBef>
+                <a:spcPct val="0"/>
+              </a:spcBef>
+              <a:spcAft>
+                <a:spcPct val="0"/>
+              </a:spcAft>
+              <a:defRPr>
+                <a:solidFill>
+                  <a:schemeClr val="tx1"/>
+                </a:solidFill>
+                <a:latin typeface="Arial" panose="020B0604020202020204" pitchFamily="34" charset="0"/>
+              </a:defRPr>
+            </a:lvl2pPr>
+            <a:lvl3pPr marL="914400" eaLnBrk="0" fontAlgn="base" hangingPunct="0">
+              <a:spcBef>
+                <a:spcPct val="0"/>
+              </a:spcBef>
+              <a:spcAft>
+                <a:spcPct val="0"/>
+              </a:spcAft>
+              <a:defRPr>
+                <a:solidFill>
+                  <a:schemeClr val="tx1"/>
+                </a:solidFill>
+                <a:latin typeface="Arial" panose="020B0604020202020204" pitchFamily="34" charset="0"/>
+              </a:defRPr>
+            </a:lvl3pPr>
+            <a:lvl4pPr marL="1371600" eaLnBrk="0" fontAlgn="base" hangingPunct="0">
+              <a:spcBef>
+                <a:spcPct val="0"/>
+              </a:spcBef>
+              <a:spcAft>
+                <a:spcPct val="0"/>
+              </a:spcAft>
+              <a:defRPr>
+                <a:solidFill>
+                  <a:schemeClr val="tx1"/>
+                </a:solidFill>
+                <a:latin typeface="Arial" panose="020B0604020202020204" pitchFamily="34" charset="0"/>
+              </a:defRPr>
+            </a:lvl4pPr>
+            <a:lvl5pPr marL="1828800" eaLnBrk="0" fontAlgn="base" hangingPunct="0">
+              <a:spcBef>
+                <a:spcPct val="0"/>
+              </a:spcBef>
+              <a:spcAft>
+                <a:spcPct val="0"/>
+              </a:spcAft>
+              <a:defRPr>
+                <a:solidFill>
+                  <a:schemeClr val="tx1"/>
+                </a:solidFill>
+                <a:latin typeface="Arial" panose="020B0604020202020204" pitchFamily="34" charset="0"/>
+              </a:defRPr>
+            </a:lvl5pPr>
+            <a:lvl6pPr marL="2286000" eaLnBrk="0" fontAlgn="base" hangingPunct="0">
+              <a:spcBef>
+                <a:spcPct val="0"/>
+              </a:spcBef>
+              <a:spcAft>
+                <a:spcPct val="0"/>
+              </a:spcAft>
+              <a:defRPr>
+                <a:solidFill>
+                  <a:schemeClr val="tx1"/>
+                </a:solidFill>
+                <a:latin typeface="Arial" panose="020B0604020202020204" pitchFamily="34" charset="0"/>
+              </a:defRPr>
+            </a:lvl6pPr>
+            <a:lvl7pPr marL="2743200" eaLnBrk="0" fontAlgn="base" hangingPunct="0">
+              <a:spcBef>
+                <a:spcPct val="0"/>
+              </a:spcBef>
+              <a:spcAft>
+                <a:spcPct val="0"/>
+              </a:spcAft>
+              <a:defRPr>
+                <a:solidFill>
+                  <a:schemeClr val="tx1"/>
+                </a:solidFill>
+                <a:latin typeface="Arial" panose="020B0604020202020204" pitchFamily="34" charset="0"/>
+              </a:defRPr>
+            </a:lvl7pPr>
+            <a:lvl8pPr marL="3200400" eaLnBrk="0" fontAlgn="base" hangingPunct="0">
+              <a:spcBef>
+                <a:spcPct val="0"/>
+              </a:spcBef>
+              <a:spcAft>
+                <a:spcPct val="0"/>
+              </a:spcAft>
+              <a:defRPr>
+                <a:solidFill>
+                  <a:schemeClr val="tx1"/>
+                </a:solidFill>
+                <a:latin typeface="Arial" panose="020B0604020202020204" pitchFamily="34" charset="0"/>
+              </a:defRPr>
+            </a:lvl8pPr>
+            <a:lvl9pPr marL="3657600" eaLnBrk="0" fontAlgn="base" hangingPunct="0">
+              <a:spcBef>
+                <a:spcPct val="0"/>
+              </a:spcBef>
+              <a:spcAft>
+                <a:spcPct val="0"/>
+              </a:spcAft>
+              <a:defRPr>
+                <a:solidFill>
+                  <a:schemeClr val="tx1"/>
+                </a:solidFill>
+                <a:latin typeface="Arial" panose="020B0604020202020204" pitchFamily="34" charset="0"/>
+              </a:defRPr>
+            </a:lvl9pPr>
+          </a:lstStyle>
+          <a:p>
+            <a:pPr marL="285750" indent="-285750">
+              <a:lnSpc>
+                <a:spcPct val="100000"/>
+              </a:lnSpc>
+              <a:buClrTx/>
+              <a:buSzTx/>
+            </a:pPr>
+            <a:r>
+              <a:rPr kumimoji="0" lang="en-EG" altLang="en-EG" sz="1100" b="0" i="0" u="none" strike="noStrike" cap="none" normalizeH="0" baseline="0" dirty="0">
+                <a:ln>
+                  <a:noFill/>
+                </a:ln>
+                <a:solidFill>
+                  <a:srgbClr val="000000"/>
+                </a:solidFill>
+                <a:effectLst/>
+              </a:rPr>
+              <a:t>Traditional acting evaluation relies heavily on human judgment, which introduces several challenges</a:t>
+            </a:r>
+            <a:r>
+              <a:rPr kumimoji="0" lang="en-EG" altLang="en-EG" sz="1100" b="0" i="0" u="none" strike="noStrike" cap="none" normalizeH="0" baseline="0" dirty="0" smtClean="0">
+                <a:ln>
+                  <a:noFill/>
+                </a:ln>
+                <a:solidFill>
+                  <a:srgbClr val="000000"/>
+                </a:solidFill>
+                <a:effectLst/>
+              </a:rPr>
+              <a:t>.</a:t>
+            </a:r>
+            <a:endParaRPr kumimoji="0" lang="en-EG" altLang="en-EG" sz="1100" b="0" i="0" u="none" strike="noStrike" cap="none" normalizeH="0" baseline="0" dirty="0" smtClean="0">
+              <a:ln>
+                <a:noFill/>
+              </a:ln>
+              <a:solidFill>
+                <a:schemeClr val="tx1"/>
+              </a:solidFill>
+              <a:effectLst/>
+            </a:endParaRPr>
+          </a:p>
+          <a:p>
+            <a:pPr marL="285750" indent="-285750">
+              <a:lnSpc>
+                <a:spcPct val="100000"/>
+              </a:lnSpc>
+              <a:buClrTx/>
+              <a:buSzTx/>
+            </a:pPr>
+            <a:r>
+              <a:rPr kumimoji="0" lang="en-EG" altLang="en-EG" sz="1100" b="0" i="0" u="none" strike="noStrike" cap="none" normalizeH="0" baseline="0" dirty="0" smtClean="0">
+                <a:ln>
+                  <a:noFill/>
+                </a:ln>
+                <a:solidFill>
+                  <a:srgbClr val="000000"/>
+                </a:solidFill>
+                <a:effectLst/>
+              </a:rPr>
+              <a:t>First</a:t>
+            </a:r>
+            <a:r>
+              <a:rPr kumimoji="0" lang="en-EG" altLang="en-EG" sz="1100" b="0" i="0" u="none" strike="noStrike" cap="none" normalizeH="0" baseline="0" dirty="0">
+                <a:ln>
+                  <a:noFill/>
+                </a:ln>
+                <a:solidFill>
+                  <a:srgbClr val="000000"/>
+                </a:solidFill>
+                <a:effectLst/>
+              </a:rPr>
+              <a:t>, evaluations are often subjective and depend on the evaluator’s mood, experience, and attention level, leading to inconsistent results</a:t>
+            </a:r>
+            <a:r>
+              <a:rPr kumimoji="0" lang="en-EG" altLang="en-EG" sz="1100" b="0" i="0" u="none" strike="noStrike" cap="none" normalizeH="0" baseline="0" dirty="0" smtClean="0">
+                <a:ln>
+                  <a:noFill/>
+                </a:ln>
+                <a:solidFill>
+                  <a:srgbClr val="000000"/>
+                </a:solidFill>
+                <a:effectLst/>
+              </a:rPr>
+              <a:t>.</a:t>
+            </a:r>
+            <a:endParaRPr kumimoji="0" lang="en-EG" altLang="en-EG" sz="1100" b="0" i="0" u="none" strike="noStrike" cap="none" normalizeH="0" baseline="0" dirty="0" smtClean="0">
+              <a:ln>
+                <a:noFill/>
+              </a:ln>
+              <a:solidFill>
+                <a:schemeClr val="tx1"/>
+              </a:solidFill>
+              <a:effectLst/>
+            </a:endParaRPr>
+          </a:p>
+          <a:p>
+            <a:pPr marL="285750" indent="-285750">
+              <a:lnSpc>
+                <a:spcPct val="100000"/>
+              </a:lnSpc>
+              <a:buClrTx/>
+              <a:buSzTx/>
+            </a:pPr>
+            <a:r>
+              <a:rPr kumimoji="0" lang="en-EG" altLang="en-EG" sz="1100" b="0" i="0" u="none" strike="noStrike" cap="none" normalizeH="0" baseline="0" dirty="0" smtClean="0">
+                <a:ln>
+                  <a:noFill/>
+                </a:ln>
+                <a:solidFill>
+                  <a:srgbClr val="000000"/>
+                </a:solidFill>
+                <a:effectLst/>
+              </a:rPr>
+              <a:t>Second</a:t>
+            </a:r>
+            <a:r>
+              <a:rPr kumimoji="0" lang="en-EG" altLang="en-EG" sz="1100" b="0" i="0" u="none" strike="noStrike" cap="none" normalizeH="0" baseline="0" dirty="0">
+                <a:ln>
+                  <a:noFill/>
+                </a:ln>
+                <a:solidFill>
+                  <a:srgbClr val="000000"/>
+                </a:solidFill>
+                <a:effectLst/>
+              </a:rPr>
+              <a:t>, directors must assess multiple performance aspects simultaneously, such as emotions, gestures, and voice, which is difficult to do accurately in real time</a:t>
+            </a:r>
+            <a:r>
+              <a:rPr kumimoji="0" lang="en-EG" altLang="en-EG" sz="1100" b="0" i="0" u="none" strike="noStrike" cap="none" normalizeH="0" baseline="0" dirty="0" smtClean="0">
+                <a:ln>
+                  <a:noFill/>
+                </a:ln>
+                <a:solidFill>
+                  <a:srgbClr val="000000"/>
+                </a:solidFill>
+                <a:effectLst/>
+              </a:rPr>
+              <a:t>.</a:t>
+            </a:r>
+            <a:endParaRPr kumimoji="0" lang="en-EG" altLang="en-EG" sz="1100" b="0" i="0" u="none" strike="noStrike" cap="none" normalizeH="0" baseline="0" dirty="0" smtClean="0">
+              <a:ln>
+                <a:noFill/>
+              </a:ln>
+              <a:solidFill>
+                <a:schemeClr val="tx1"/>
+              </a:solidFill>
+              <a:effectLst/>
+            </a:endParaRPr>
+          </a:p>
+          <a:p>
+            <a:pPr marL="285750" indent="-285750">
+              <a:lnSpc>
+                <a:spcPct val="100000"/>
+              </a:lnSpc>
+              <a:buClrTx/>
+              <a:buSzTx/>
+            </a:pPr>
+            <a:r>
+              <a:rPr kumimoji="0" lang="en-EG" altLang="en-EG" sz="1100" b="0" i="0" u="none" strike="noStrike" cap="none" normalizeH="0" baseline="0" dirty="0" smtClean="0">
+                <a:ln>
+                  <a:noFill/>
+                </a:ln>
+                <a:solidFill>
+                  <a:srgbClr val="000000"/>
+                </a:solidFill>
+                <a:effectLst/>
+              </a:rPr>
+              <a:t>Third</a:t>
+            </a:r>
+            <a:r>
+              <a:rPr kumimoji="0" lang="en-EG" altLang="en-EG" sz="1100" b="0" i="0" u="none" strike="noStrike" cap="none" normalizeH="0" baseline="0" dirty="0">
+                <a:ln>
+                  <a:noFill/>
+                </a:ln>
+                <a:solidFill>
+                  <a:srgbClr val="000000"/>
+                </a:solidFill>
+                <a:effectLst/>
+              </a:rPr>
+              <a:t>, handling a large number of audition candidates becomes time-consuming and inefficient, especially in professional casting environments</a:t>
+            </a:r>
+            <a:r>
+              <a:rPr kumimoji="0" lang="en-EG" altLang="en-EG" sz="1100" b="0" i="0" u="none" strike="noStrike" cap="none" normalizeH="0" baseline="0" dirty="0" smtClean="0">
+                <a:ln>
+                  <a:noFill/>
+                </a:ln>
+                <a:solidFill>
+                  <a:srgbClr val="000000"/>
+                </a:solidFill>
+                <a:effectLst/>
+              </a:rPr>
+              <a:t>.</a:t>
+            </a:r>
+            <a:endParaRPr kumimoji="0" lang="en-EG" altLang="en-EG" sz="1100" b="0" i="0" u="none" strike="noStrike" cap="none" normalizeH="0" baseline="0" dirty="0" smtClean="0">
+              <a:ln>
+                <a:noFill/>
+              </a:ln>
+              <a:solidFill>
+                <a:schemeClr val="tx1"/>
+              </a:solidFill>
+              <a:effectLst/>
+            </a:endParaRPr>
+          </a:p>
+          <a:p>
+            <a:pPr marL="285750" indent="-285750">
+              <a:lnSpc>
+                <a:spcPct val="100000"/>
+              </a:lnSpc>
+              <a:buClrTx/>
+              <a:buSzTx/>
+            </a:pPr>
+            <a:r>
+              <a:rPr kumimoji="0" lang="en-EG" altLang="en-EG" sz="1100" b="0" i="0" u="none" strike="noStrike" cap="none" normalizeH="0" baseline="0" dirty="0" smtClean="0">
+                <a:ln>
+                  <a:noFill/>
+                </a:ln>
+                <a:solidFill>
+                  <a:srgbClr val="000000"/>
+                </a:solidFill>
+                <a:effectLst/>
+              </a:rPr>
+              <a:t>Finally</a:t>
+            </a:r>
+            <a:r>
+              <a:rPr kumimoji="0" lang="en-EG" altLang="en-EG" sz="1100" b="0" i="0" u="none" strike="noStrike" cap="none" normalizeH="0" baseline="0" dirty="0">
+                <a:ln>
+                  <a:noFill/>
+                </a:ln>
+                <a:solidFill>
+                  <a:srgbClr val="000000"/>
+                </a:solidFill>
+                <a:effectLst/>
+              </a:rPr>
+              <a:t>, analyzing continuous video data and identifying meaningful actions requires advanced processing techniques, such as action segmentation and classification</a:t>
+            </a:r>
+            <a:r>
+              <a:rPr kumimoji="0" lang="en-EG" altLang="en-EG" sz="1100" b="0" i="0" u="none" strike="noStrike" cap="none" normalizeH="0" baseline="0" dirty="0" smtClean="0">
+                <a:ln>
+                  <a:noFill/>
+                </a:ln>
+                <a:solidFill>
+                  <a:srgbClr val="000000"/>
+                </a:solidFill>
+                <a:effectLst/>
+              </a:rPr>
+              <a:t>.</a:t>
+            </a:r>
+            <a:endParaRPr kumimoji="0" lang="en-EG" altLang="en-EG" sz="1100" b="0" i="0" u="none" strike="noStrike" cap="none" normalizeH="0" baseline="0" dirty="0" smtClean="0">
+              <a:ln>
+                <a:noFill/>
+              </a:ln>
+              <a:solidFill>
+                <a:schemeClr val="tx1"/>
+              </a:solidFill>
+              <a:effectLst/>
+            </a:endParaRPr>
+          </a:p>
+          <a:p>
+            <a:pPr marL="285750" indent="-285750">
+              <a:lnSpc>
+                <a:spcPct val="100000"/>
+              </a:lnSpc>
+              <a:buClrTx/>
+              <a:buSzTx/>
+            </a:pPr>
+            <a:r>
+              <a:rPr kumimoji="0" lang="en-US" altLang="en-EG" sz="1100" b="0" i="0" u="none" strike="noStrike" cap="none" normalizeH="0" baseline="0" dirty="0" smtClean="0">
+                <a:ln>
+                  <a:noFill/>
+                </a:ln>
+                <a:solidFill>
+                  <a:srgbClr val="000000"/>
+                </a:solidFill>
+                <a:effectLst/>
+              </a:rPr>
+              <a:t>A</a:t>
+            </a:r>
+            <a:r>
+              <a:rPr kumimoji="0" lang="en-EG" altLang="en-EG" sz="1100" b="0" i="0" u="none" strike="noStrike" cap="none" normalizeH="0" baseline="0" dirty="0" smtClean="0">
+                <a:ln>
+                  <a:noFill/>
+                </a:ln>
+                <a:solidFill>
+                  <a:srgbClr val="000000"/>
+                </a:solidFill>
+                <a:effectLst/>
+              </a:rPr>
+              <a:t>ddress</a:t>
+            </a:r>
+            <a:r>
+              <a:rPr lang="en-US" altLang="en-EG" sz="1100" dirty="0" err="1" smtClean="0">
+                <a:solidFill>
+                  <a:srgbClr val="000000"/>
+                </a:solidFill>
+              </a:rPr>
+              <a:t>ing</a:t>
+            </a:r>
+            <a:r>
+              <a:rPr kumimoji="0" lang="en-EG" altLang="en-EG" sz="1100" b="0" i="0" u="none" strike="noStrike" cap="none" normalizeH="0" baseline="0" dirty="0" smtClean="0">
+                <a:ln>
+                  <a:noFill/>
+                </a:ln>
+                <a:solidFill>
+                  <a:srgbClr val="000000"/>
+                </a:solidFill>
+                <a:effectLst/>
+              </a:rPr>
+              <a:t> </a:t>
+            </a:r>
+            <a:r>
+              <a:rPr kumimoji="0" lang="en-EG" altLang="en-EG" sz="1100" b="0" i="0" u="none" strike="noStrike" cap="none" normalizeH="0" baseline="0" dirty="0">
+                <a:ln>
+                  <a:noFill/>
+                </a:ln>
+                <a:solidFill>
+                  <a:srgbClr val="000000"/>
+                </a:solidFill>
+                <a:effectLst/>
+              </a:rPr>
+              <a:t>these challenges by automating the evaluation process, analyzing multiple modalities simultaneously, and providing standardized and reliable performance assessments.</a:t>
+            </a:r>
+            <a:endParaRPr kumimoji="0" lang="en-EG" altLang="en-EG" sz="1100" b="0" i="0" u="none" strike="noStrike" cap="none" normalizeH="0" baseline="0" dirty="0">
+              <a:ln>
+                <a:noFill/>
+              </a:ln>
+              <a:solidFill>
+                <a:schemeClr val="tx1"/>
+              </a:solidFill>
+              <a:effectLst/>
+            </a:endParaRPr>
+          </a:p>
+        </p:txBody>
+      </p:sp>
+      <p:pic>
+        <p:nvPicPr>
+          <p:cNvPr id="3" name="Picture 2"/>
+          <p:cNvPicPr>
+            <a:picLocks noChangeAspect="1"/>
+          </p:cNvPicPr>
+          <p:nvPr/>
+        </p:nvPicPr>
+        <p:blipFill>
+          <a:blip r:embed="rId2">
+            <a:extLst>
+              <a:ext uri="{28A0092B-C50C-407E-A947-70E740481C1C}">
+                <a14:useLocalDpi xmlns:a14="http://schemas.microsoft.com/office/drawing/2010/main" val="0"/>
+              </a:ext>
+            </a:extLst>
+          </a:blip>
+          <a:stretch>
+            <a:fillRect/>
+          </a:stretch>
+        </p:blipFill>
+        <p:spPr>
+          <a:xfrm>
+            <a:off x="2124941" y="2694906"/>
+            <a:ext cx="4894118" cy="2100801"/>
+          </a:xfrm>
+          <a:prstGeom prst="rect">
+            <a:avLst/>
+          </a:prstGeom>
+          <a:ln w="38100" cap="sq">
+            <a:solidFill>
+              <a:srgbClr val="000000"/>
+            </a:solidFill>
+            <a:prstDash val="solid"/>
+            <a:miter lim="800000"/>
+          </a:ln>
+          <a:effectLst>
+            <a:outerShdw blurRad="50800" dist="38100" dir="2700000" algn="tl" rotWithShape="0">
+              <a:srgbClr val="000000">
+                <a:alpha val="43000"/>
+              </a:srgbClr>
+            </a:outerShdw>
+          </a:effectLst>
+        </p:spPr>
+      </p:pic>
+    </p:spTree>
+    <p:extLst>
+      <p:ext uri="{BB962C8B-B14F-4D97-AF65-F5344CB8AC3E}">
+        <p14:creationId xmlns:p14="http://schemas.microsoft.com/office/powerpoint/2010/main" val="819633493"/>
+      </p:ext>
+    </p:extLst>
+  </p:cSld>
+  <p:clrMapOvr>
+    <a:masterClrMapping/>
+  </p:clrMapOvr>
+</p:sld>
+</file>
+
+<file path=ppt/slides/slide4.xml><?xml version="1.0" encoding="utf-8"?>
+<p:sld xmlns:a="http://schemas.openxmlformats.org/drawingml/2006/main" xmlns:r="http://schemas.openxmlformats.org/officeDocument/2006/relationships" xmlns:p="http://schemas.openxmlformats.org/presentationml/2006/main">
+  <p:cSld>
+    <p:spTree>
+      <p:nvGrpSpPr>
+        <p:cNvPr id="1" name="Shape 333"/>
+        <p:cNvGrpSpPr/>
+        <p:nvPr/>
+      </p:nvGrpSpPr>
+      <p:grpSpPr>
+        <a:xfrm>
+          <a:off x="0" y="0"/>
+          <a:ext cx="0" cy="0"/>
+          <a:chOff x="0" y="0"/>
+          <a:chExt cx="0" cy="0"/>
+        </a:xfrm>
+      </p:grpSpPr>
+      <p:sp>
+        <p:nvSpPr>
+          <p:cNvPr id="347" name="Google Shape;347;p36"/>
+          <p:cNvSpPr txBox="1">
+            <a:spLocks noGrp="1"/>
+          </p:cNvSpPr>
+          <p:nvPr>
+            <p:ph type="title" idx="4294967295"/>
+          </p:nvPr>
+        </p:nvSpPr>
+        <p:spPr>
+          <a:xfrm>
+            <a:off x="720000" y="352713"/>
+            <a:ext cx="7702550" cy="676275"/>
+          </a:xfrm>
+          <a:prstGeom prst="rect">
+            <a:avLst/>
+          </a:prstGeom>
+        </p:spPr>
+        <p:txBody>
+          <a:bodyPr spcFirstLastPara="1" wrap="square" lIns="90000" tIns="91425" rIns="90000" bIns="91425" anchor="t" anchorCtr="0">
+            <a:noAutofit/>
+          </a:bodyPr>
+          <a:lstStyle/>
+          <a:p>
+            <a:pPr marL="0" lvl="0" indent="0" algn="ctr" rtl="0">
+              <a:spcBef>
+                <a:spcPts val="0"/>
+              </a:spcBef>
+              <a:spcAft>
+                <a:spcPts val="0"/>
+              </a:spcAft>
+              <a:buNone/>
+            </a:pPr>
+            <a:r>
+              <a:rPr lang="en" dirty="0" smtClean="0"/>
+              <a:t>TESTING STRATEGY</a:t>
+            </a:r>
+            <a:endParaRPr dirty="0"/>
+          </a:p>
+        </p:txBody>
+      </p:sp>
+      <p:pic>
+        <p:nvPicPr>
+          <p:cNvPr id="16" name="Picture 15"/>
+          <p:cNvPicPr>
+            <a:picLocks noChangeAspect="1"/>
+          </p:cNvPicPr>
+          <p:nvPr/>
+        </p:nvPicPr>
+        <p:blipFill>
+          <a:blip r:embed="rId3"/>
+          <a:stretch>
+            <a:fillRect/>
+          </a:stretch>
+        </p:blipFill>
+        <p:spPr>
+          <a:xfrm>
+            <a:off x="953397" y="1311672"/>
+            <a:ext cx="8096190" cy="3365284"/>
+          </a:xfrm>
+          <a:prstGeom prst="rect">
+            <a:avLst/>
+          </a:prstGeom>
+        </p:spPr>
+      </p:pic>
+    </p:spTree>
+    <p:extLst>
+      <p:ext uri="{BB962C8B-B14F-4D97-AF65-F5344CB8AC3E}">
+        <p14:creationId xmlns:p14="http://schemas.microsoft.com/office/powerpoint/2010/main" val="2317547124"/>
+      </p:ext>
+    </p:extLst>
+  </p:cSld>
+  <p:clrMapOvr>
+    <a:masterClrMapping/>
+  </p:clrMapOvr>
+  <p:timing>
+    <p:tnLst>
+      <p:par>
+        <p:cTn id="1" dur="indefinite" restart="never" nodeType="tmRoot"/>
+      </p:par>
+    </p:tnLst>
+  </p:timing>
+</p:sld>
+</file>
+
+<file path=ppt/slides/slide5.xml><?xml version="1.0" encoding="utf-8"?>
 <p:sld xmlns:a="http://schemas.openxmlformats.org/drawingml/2006/main" xmlns:r="http://schemas.openxmlformats.org/officeDocument/2006/relationships" xmlns:p="http://schemas.openxmlformats.org/presentationml/2006/main">
   <p:cSld>
     <p:spTree>
@@ -21256,7 +25141,7 @@
 </p:sld>
 </file>
 
-<file path=ppt/slides/slide4.xml><?xml version="1.0" encoding="utf-8"?>
+<file path=ppt/slides/slide6.xml><?xml version="1.0" encoding="utf-8"?>
 <p:sld xmlns:a="http://schemas.openxmlformats.org/drawingml/2006/main" xmlns:r="http://schemas.openxmlformats.org/officeDocument/2006/relationships" xmlns:p="http://schemas.openxmlformats.org/presentationml/2006/main">
   <p:cSld>
     <p:spTree>
@@ -22703,7 +26588,7 @@
 </p:sld>
 </file>
 
-<file path=ppt/slides/slide5.xml><?xml version="1.0" encoding="utf-8"?>
+<file path=ppt/slides/slide7.xml><?xml version="1.0" encoding="utf-8"?>
 <p:sld xmlns:a="http://schemas.openxmlformats.org/drawingml/2006/main" xmlns:r="http://schemas.openxmlformats.org/officeDocument/2006/relationships" xmlns:p="http://schemas.openxmlformats.org/presentationml/2006/main">
   <p:cSld>
     <p:spTree>
@@ -24198,7 +28083,7 @@
 </p:sld>
 </file>
 
-<file path=ppt/slides/slide6.xml><?xml version="1.0" encoding="utf-8"?>
+<file path=ppt/slides/slide8.xml><?xml version="1.0" encoding="utf-8"?>
 <p:sld xmlns:a="http://schemas.openxmlformats.org/drawingml/2006/main" xmlns:r="http://schemas.openxmlformats.org/officeDocument/2006/relationships" xmlns:p="http://schemas.openxmlformats.org/presentationml/2006/main">
   <p:cSld>
     <p:bg>
@@ -25653,7 +29538,7 @@
 </p:sld>
 </file>
 
-<file path=ppt/slides/slide7.xml><?xml version="1.0" encoding="utf-8"?>
+<file path=ppt/slides/slide9.xml><?xml version="1.0" encoding="utf-8"?>
 <p:sld xmlns:a="http://schemas.openxmlformats.org/drawingml/2006/main" xmlns:r="http://schemas.openxmlformats.org/officeDocument/2006/relationships" xmlns:p="http://schemas.openxmlformats.org/presentationml/2006/main">
   <p:cSld>
     <p:bg>
@@ -28060,2932 +31945,6 @@
     <p:extLst>
       <p:ext uri="{BB962C8B-B14F-4D97-AF65-F5344CB8AC3E}">
         <p14:creationId xmlns:p14="http://schemas.microsoft.com/office/powerpoint/2010/main" val="840299090"/>
-      </p:ext>
-    </p:extLst>
-  </p:cSld>
-  <p:clrMapOvr>
-    <a:masterClrMapping/>
-  </p:clrMapOvr>
-</p:sld>
-</file>
-
-<file path=ppt/slides/slide8.xml><?xml version="1.0" encoding="utf-8"?>
-<p:sld xmlns:a="http://schemas.openxmlformats.org/drawingml/2006/main" xmlns:r="http://schemas.openxmlformats.org/officeDocument/2006/relationships" xmlns:p="http://schemas.openxmlformats.org/presentationml/2006/main">
-  <p:cSld>
-    <p:spTree>
-      <p:nvGrpSpPr>
-        <p:cNvPr id="1" name="Shape 1612"/>
-        <p:cNvGrpSpPr/>
-        <p:nvPr/>
-      </p:nvGrpSpPr>
-      <p:grpSpPr>
-        <a:xfrm>
-          <a:off x="0" y="0"/>
-          <a:ext cx="0" cy="0"/>
-          <a:chOff x="0" y="0"/>
-          <a:chExt cx="0" cy="0"/>
-        </a:xfrm>
-      </p:grpSpPr>
-      <p:sp>
-        <p:nvSpPr>
-          <p:cNvPr id="1613" name="Google Shape;1613;p57"/>
-          <p:cNvSpPr txBox="1">
-            <a:spLocks noGrp="1"/>
-          </p:cNvSpPr>
-          <p:nvPr>
-            <p:ph type="title"/>
-          </p:nvPr>
-        </p:nvSpPr>
-        <p:spPr>
-          <a:xfrm>
-            <a:off x="1478140" y="159129"/>
-            <a:ext cx="6162501" cy="836928"/>
-          </a:xfrm>
-          <a:prstGeom prst="rect">
-            <a:avLst/>
-          </a:prstGeom>
-        </p:spPr>
-        <p:txBody>
-          <a:bodyPr spcFirstLastPara="1" wrap="square" lIns="90000" tIns="91425" rIns="90000" bIns="91425" anchor="ctr" anchorCtr="0">
-            <a:noAutofit/>
-          </a:bodyPr>
-          <a:lstStyle/>
-          <a:p>
-            <a:pPr marL="0" lvl="0" indent="0" algn="ctr" rtl="0">
-              <a:spcBef>
-                <a:spcPts val="0"/>
-              </a:spcBef>
-              <a:spcAft>
-                <a:spcPts val="0"/>
-              </a:spcAft>
-              <a:buNone/>
-            </a:pPr>
-            <a:r>
-              <a:rPr lang="en" sz="3600" dirty="0"/>
-              <a:t>B</a:t>
-            </a:r>
-            <a:r>
-              <a:rPr lang="en" sz="3600" dirty="0" smtClean="0"/>
-              <a:t>. Non-Functional Cases</a:t>
-            </a:r>
-            <a:endParaRPr sz="3600" dirty="0"/>
-          </a:p>
-        </p:txBody>
-      </p:sp>
-      <p:graphicFrame>
-        <p:nvGraphicFramePr>
-          <p:cNvPr id="89" name="Google Shape;698;p43"/>
-          <p:cNvGraphicFramePr/>
-          <p:nvPr>
-            <p:extLst>
-              <p:ext uri="{D42A27DB-BD31-4B8C-83A1-F6EECF244321}">
-                <p14:modId xmlns:p14="http://schemas.microsoft.com/office/powerpoint/2010/main" val="2591724647"/>
-              </p:ext>
-            </p:extLst>
-          </p:nvPr>
-        </p:nvGraphicFramePr>
-        <p:xfrm>
-          <a:off x="910670" y="1248229"/>
-          <a:ext cx="7447428" cy="3489054"/>
-        </p:xfrm>
-        <a:graphic>
-          <a:graphicData uri="http://schemas.openxmlformats.org/drawingml/2006/table">
-            <a:tbl>
-              <a:tblPr>
-                <a:noFill/>
-              </a:tblPr>
-              <a:tblGrid>
-                <a:gridCol w="2482476">
-                  <a:extLst>
-                    <a:ext uri="{9D8B030D-6E8A-4147-A177-3AD203B41FA5}">
-                      <a16:colId xmlns:a16="http://schemas.microsoft.com/office/drawing/2014/main" val="20000"/>
-                    </a:ext>
-                  </a:extLst>
-                </a:gridCol>
-                <a:gridCol w="2482476">
-                  <a:extLst>
-                    <a:ext uri="{9D8B030D-6E8A-4147-A177-3AD203B41FA5}">
-                      <a16:colId xmlns:a16="http://schemas.microsoft.com/office/drawing/2014/main" val="1186318376"/>
-                    </a:ext>
-                  </a:extLst>
-                </a:gridCol>
-                <a:gridCol w="2482476">
-                  <a:extLst>
-                    <a:ext uri="{9D8B030D-6E8A-4147-A177-3AD203B41FA5}">
-                      <a16:colId xmlns:a16="http://schemas.microsoft.com/office/drawing/2014/main" val="3049769508"/>
-                    </a:ext>
-                  </a:extLst>
-                </a:gridCol>
-              </a:tblGrid>
-              <a:tr h="588889">
-                <a:tc gridSpan="3">
-                  <a:txBody>
-                    <a:bodyPr/>
-                    <a:lstStyle/>
-                    <a:p>
-                      <a:pPr marL="0" lvl="0" indent="0" algn="ctr" rtl="0">
-                        <a:spcBef>
-                          <a:spcPts val="0"/>
-                        </a:spcBef>
-                        <a:spcAft>
-                          <a:spcPts val="0"/>
-                        </a:spcAft>
-                        <a:buNone/>
-                      </a:pPr>
-                      <a:r>
-                        <a:rPr lang="en" sz="2400" b="1" dirty="0" smtClean="0">
-                          <a:solidFill>
-                            <a:schemeClr val="tx1"/>
-                          </a:solidFill>
-                          <a:latin typeface="Montserrat Black"/>
-                          <a:ea typeface="Montserrat Black"/>
-                          <a:cs typeface="Montserrat Black"/>
-                          <a:sym typeface="Montserrat Black"/>
-                        </a:rPr>
-                        <a:t>B1. </a:t>
-                      </a:r>
-                      <a:r>
-                        <a:rPr lang="en-US" sz="2400" b="1" dirty="0" smtClean="0">
-                          <a:solidFill>
-                            <a:schemeClr val="tx1"/>
-                          </a:solidFill>
-                          <a:latin typeface="Montserrat Black"/>
-                          <a:ea typeface="Montserrat Black"/>
-                          <a:cs typeface="Montserrat Black"/>
-                          <a:sym typeface="Montserrat Black"/>
-                        </a:rPr>
-                        <a:t>Performance Testing</a:t>
-                      </a:r>
-                      <a:endParaRPr sz="2400" b="1" dirty="0">
-                        <a:solidFill>
-                          <a:schemeClr val="tx1"/>
-                        </a:solidFill>
-                        <a:latin typeface="Montserrat Black"/>
-                        <a:ea typeface="Montserrat Black"/>
-                        <a:cs typeface="Montserrat Black"/>
-                        <a:sym typeface="Montserrat Black"/>
-                      </a:endParaRPr>
-                    </a:p>
-                  </a:txBody>
-                  <a:tcPr marL="90000" marR="90000" marT="91425" marB="91425" anchor="ctr">
-                    <a:lnL w="12700" cap="flat" cmpd="sng" algn="ctr">
-                      <a:solidFill>
-                        <a:schemeClr val="tx1"/>
-                      </a:solidFill>
-                      <a:prstDash val="solid"/>
-                      <a:round/>
-                      <a:headEnd type="none" w="med" len="med"/>
-                      <a:tailEnd type="none" w="med" len="med"/>
-                    </a:lnL>
-                    <a:lnR w="12700" cap="flat" cmpd="sng" algn="ctr">
-                      <a:solidFill>
-                        <a:schemeClr val="tx1"/>
-                      </a:solidFill>
-                      <a:prstDash val="solid"/>
-                      <a:round/>
-                      <a:headEnd type="none" w="med" len="med"/>
-                      <a:tailEnd type="none" w="med" len="med"/>
-                    </a:lnR>
-                    <a:lnT w="12700" cap="flat" cmpd="sng" algn="ctr">
-                      <a:solidFill>
-                        <a:schemeClr val="tx1"/>
-                      </a:solidFill>
-                      <a:prstDash val="solid"/>
-                      <a:round/>
-                      <a:headEnd type="none" w="med" len="med"/>
-                      <a:tailEnd type="none" w="med" len="med"/>
-                    </a:lnT>
-                    <a:lnB w="12700" cap="flat" cmpd="sng" algn="ctr">
-                      <a:solidFill>
-                        <a:schemeClr val="tx1"/>
-                      </a:solidFill>
-                      <a:prstDash val="solid"/>
-                      <a:round/>
-                      <a:headEnd type="none" w="med" len="med"/>
-                      <a:tailEnd type="none" w="med" len="med"/>
-                    </a:lnB>
-                  </a:tcPr>
-                </a:tc>
-                <a:tc hMerge="1">
-                  <a:txBody>
-                    <a:bodyPr/>
-                    <a:lstStyle/>
-                    <a:p>
-                      <a:endParaRPr lang="en-US"/>
-                    </a:p>
-                  </a:txBody>
-                  <a:tcPr/>
-                </a:tc>
-                <a:tc hMerge="1">
-                  <a:txBody>
-                    <a:bodyPr/>
-                    <a:lstStyle/>
-                    <a:p>
-                      <a:endParaRPr lang="en-US"/>
-                    </a:p>
-                  </a:txBody>
-                  <a:tcPr/>
-                </a:tc>
-                <a:extLst>
-                  <a:ext uri="{0D108BD9-81ED-4DB2-BD59-A6C34878D82A}">
-                    <a16:rowId xmlns:a16="http://schemas.microsoft.com/office/drawing/2014/main" val="10000"/>
-                  </a:ext>
-                </a:extLst>
-              </a:tr>
-              <a:tr h="654335">
-                <a:tc>
-                  <a:txBody>
-                    <a:bodyPr/>
-                    <a:lstStyle/>
-                    <a:p>
-                      <a:pPr marL="0" lvl="0" indent="0" algn="ctr" rtl="0">
-                        <a:spcBef>
-                          <a:spcPts val="0"/>
-                        </a:spcBef>
-                        <a:spcAft>
-                          <a:spcPts val="0"/>
-                        </a:spcAft>
-                        <a:buNone/>
-                      </a:pPr>
-                      <a:r>
-                        <a:rPr lang="en" b="1" dirty="0" smtClean="0">
-                          <a:solidFill>
-                            <a:schemeClr val="tx1"/>
-                          </a:solidFill>
-                          <a:latin typeface="Montserrat Medium"/>
-                          <a:ea typeface="Montserrat Medium"/>
-                          <a:cs typeface="Montserrat Medium"/>
-                          <a:sym typeface="Montserrat Medium"/>
-                        </a:rPr>
-                        <a:t>TEST</a:t>
-                      </a:r>
-                      <a:r>
-                        <a:rPr lang="en" b="1" baseline="0" dirty="0" smtClean="0">
-                          <a:solidFill>
-                            <a:schemeClr val="tx1"/>
-                          </a:solidFill>
-                          <a:latin typeface="Montserrat Medium"/>
-                          <a:ea typeface="Montserrat Medium"/>
-                          <a:cs typeface="Montserrat Medium"/>
-                          <a:sym typeface="Montserrat Medium"/>
-                        </a:rPr>
-                        <a:t> ID</a:t>
-                      </a:r>
-                      <a:endParaRPr b="1" dirty="0">
-                        <a:solidFill>
-                          <a:schemeClr val="tx1"/>
-                        </a:solidFill>
-                        <a:latin typeface="Montserrat Medium"/>
-                        <a:ea typeface="Montserrat Medium"/>
-                        <a:cs typeface="Montserrat Medium"/>
-                        <a:sym typeface="Montserrat Medium"/>
-                      </a:endParaRPr>
-                    </a:p>
-                  </a:txBody>
-                  <a:tcPr marL="90000" marR="90000" marT="91425" marB="91425" anchor="ctr">
-                    <a:lnL w="12700" cap="flat" cmpd="sng" algn="ctr">
-                      <a:solidFill>
-                        <a:schemeClr val="tx1"/>
-                      </a:solidFill>
-                      <a:prstDash val="solid"/>
-                      <a:round/>
-                      <a:headEnd type="none" w="med" len="med"/>
-                      <a:tailEnd type="none" w="med" len="med"/>
-                    </a:lnL>
-                    <a:lnR w="12700" cap="flat" cmpd="sng" algn="ctr">
-                      <a:solidFill>
-                        <a:schemeClr val="tx1"/>
-                      </a:solidFill>
-                      <a:prstDash val="solid"/>
-                      <a:round/>
-                      <a:headEnd type="none" w="med" len="med"/>
-                      <a:tailEnd type="none" w="med" len="med"/>
-                    </a:lnR>
-                    <a:lnT w="12700" cap="flat" cmpd="sng" algn="ctr">
-                      <a:solidFill>
-                        <a:schemeClr val="tx1"/>
-                      </a:solidFill>
-                      <a:prstDash val="solid"/>
-                      <a:round/>
-                      <a:headEnd type="none" w="med" len="med"/>
-                      <a:tailEnd type="none" w="med" len="med"/>
-                    </a:lnT>
-                    <a:lnB w="12700" cap="flat" cmpd="sng" algn="ctr">
-                      <a:solidFill>
-                        <a:schemeClr val="tx1"/>
-                      </a:solidFill>
-                      <a:prstDash val="solid"/>
-                      <a:round/>
-                      <a:headEnd type="none" w="med" len="med"/>
-                      <a:tailEnd type="none" w="med" len="med"/>
-                    </a:lnB>
-                  </a:tcPr>
-                </a:tc>
-                <a:tc>
-                  <a:txBody>
-                    <a:bodyPr/>
-                    <a:lstStyle/>
-                    <a:p>
-                      <a:pPr marL="0" lvl="0" indent="0" algn="ctr" rtl="0">
-                        <a:spcBef>
-                          <a:spcPts val="0"/>
-                        </a:spcBef>
-                        <a:spcAft>
-                          <a:spcPts val="0"/>
-                        </a:spcAft>
-                        <a:buNone/>
-                      </a:pPr>
-                      <a:r>
-                        <a:rPr lang="en" b="1" dirty="0" smtClean="0">
-                          <a:solidFill>
-                            <a:schemeClr val="tx1"/>
-                          </a:solidFill>
-                          <a:latin typeface="Montserrat Medium"/>
-                          <a:ea typeface="Montserrat Medium"/>
-                          <a:cs typeface="Montserrat Medium"/>
-                          <a:sym typeface="Montserrat Medium"/>
-                        </a:rPr>
-                        <a:t>TEST</a:t>
-                      </a:r>
-                      <a:r>
-                        <a:rPr lang="en" b="1" baseline="0" dirty="0" smtClean="0">
-                          <a:solidFill>
-                            <a:schemeClr val="tx1"/>
-                          </a:solidFill>
-                          <a:latin typeface="Montserrat Medium"/>
-                          <a:ea typeface="Montserrat Medium"/>
-                          <a:cs typeface="Montserrat Medium"/>
-                          <a:sym typeface="Montserrat Medium"/>
-                        </a:rPr>
-                        <a:t> CASE</a:t>
-                      </a:r>
-                      <a:endParaRPr b="1" dirty="0">
-                        <a:solidFill>
-                          <a:schemeClr val="tx1"/>
-                        </a:solidFill>
-                        <a:latin typeface="Montserrat Medium"/>
-                        <a:ea typeface="Montserrat Medium"/>
-                        <a:cs typeface="Montserrat Medium"/>
-                        <a:sym typeface="Montserrat Medium"/>
-                      </a:endParaRPr>
-                    </a:p>
-                  </a:txBody>
-                  <a:tcPr marL="90000" marR="90000" marT="91425" marB="91425" anchor="ctr">
-                    <a:lnL w="12700" cap="flat" cmpd="sng" algn="ctr">
-                      <a:solidFill>
-                        <a:schemeClr val="tx1"/>
-                      </a:solidFill>
-                      <a:prstDash val="solid"/>
-                      <a:round/>
-                      <a:headEnd type="none" w="med" len="med"/>
-                      <a:tailEnd type="none" w="med" len="med"/>
-                    </a:lnL>
-                    <a:lnR w="12700" cap="flat" cmpd="sng" algn="ctr">
-                      <a:solidFill>
-                        <a:schemeClr val="tx1"/>
-                      </a:solidFill>
-                      <a:prstDash val="solid"/>
-                      <a:round/>
-                      <a:headEnd type="none" w="med" len="med"/>
-                      <a:tailEnd type="none" w="med" len="med"/>
-                    </a:lnR>
-                    <a:lnT w="12700" cap="flat" cmpd="sng" algn="ctr">
-                      <a:solidFill>
-                        <a:schemeClr val="tx1"/>
-                      </a:solidFill>
-                      <a:prstDash val="solid"/>
-                      <a:round/>
-                      <a:headEnd type="none" w="med" len="med"/>
-                      <a:tailEnd type="none" w="med" len="med"/>
-                    </a:lnT>
-                    <a:lnB w="12700" cap="flat" cmpd="sng" algn="ctr">
-                      <a:solidFill>
-                        <a:schemeClr val="tx1"/>
-                      </a:solidFill>
-                      <a:prstDash val="solid"/>
-                      <a:round/>
-                      <a:headEnd type="none" w="med" len="med"/>
-                      <a:tailEnd type="none" w="med" len="med"/>
-                    </a:lnB>
-                  </a:tcPr>
-                </a:tc>
-                <a:tc>
-                  <a:txBody>
-                    <a:bodyPr/>
-                    <a:lstStyle/>
-                    <a:p>
-                      <a:pPr marL="0" lvl="0" indent="0" algn="ctr" rtl="0">
-                        <a:spcBef>
-                          <a:spcPts val="0"/>
-                        </a:spcBef>
-                        <a:spcAft>
-                          <a:spcPts val="0"/>
-                        </a:spcAft>
-                        <a:buNone/>
-                      </a:pPr>
-                      <a:r>
-                        <a:rPr lang="en" b="1" dirty="0" smtClean="0">
-                          <a:solidFill>
-                            <a:schemeClr val="tx1"/>
-                          </a:solidFill>
-                          <a:latin typeface="Montserrat Medium"/>
-                          <a:ea typeface="Montserrat Medium"/>
-                          <a:cs typeface="Montserrat Medium"/>
-                          <a:sym typeface="Montserrat Medium"/>
-                        </a:rPr>
-                        <a:t>EXPECTED</a:t>
-                      </a:r>
-                      <a:r>
-                        <a:rPr lang="en" b="1" baseline="0" dirty="0" smtClean="0">
-                          <a:solidFill>
-                            <a:schemeClr val="tx1"/>
-                          </a:solidFill>
-                          <a:latin typeface="Montserrat Medium"/>
-                          <a:ea typeface="Montserrat Medium"/>
-                          <a:cs typeface="Montserrat Medium"/>
-                          <a:sym typeface="Montserrat Medium"/>
-                        </a:rPr>
-                        <a:t> RESULT</a:t>
-                      </a:r>
-                      <a:endParaRPr b="1" dirty="0">
-                        <a:solidFill>
-                          <a:schemeClr val="tx1"/>
-                        </a:solidFill>
-                        <a:latin typeface="Montserrat Medium"/>
-                        <a:ea typeface="Montserrat Medium"/>
-                        <a:cs typeface="Montserrat Medium"/>
-                        <a:sym typeface="Montserrat Medium"/>
-                      </a:endParaRPr>
-                    </a:p>
-                  </a:txBody>
-                  <a:tcPr marL="90000" marR="90000" marT="91425" marB="91425" anchor="ctr">
-                    <a:lnL w="12700" cap="flat" cmpd="sng" algn="ctr">
-                      <a:solidFill>
-                        <a:schemeClr val="tx1"/>
-                      </a:solidFill>
-                      <a:prstDash val="solid"/>
-                      <a:round/>
-                      <a:headEnd type="none" w="med" len="med"/>
-                      <a:tailEnd type="none" w="med" len="med"/>
-                    </a:lnL>
-                    <a:lnR w="12700" cap="flat" cmpd="sng" algn="ctr">
-                      <a:solidFill>
-                        <a:schemeClr val="tx1"/>
-                      </a:solidFill>
-                      <a:prstDash val="solid"/>
-                      <a:round/>
-                      <a:headEnd type="none" w="med" len="med"/>
-                      <a:tailEnd type="none" w="med" len="med"/>
-                    </a:lnR>
-                    <a:lnT w="12700" cap="flat" cmpd="sng" algn="ctr">
-                      <a:solidFill>
-                        <a:schemeClr val="tx1"/>
-                      </a:solidFill>
-                      <a:prstDash val="solid"/>
-                      <a:round/>
-                      <a:headEnd type="none" w="med" len="med"/>
-                      <a:tailEnd type="none" w="med" len="med"/>
-                    </a:lnT>
-                    <a:lnB w="12700" cap="flat" cmpd="sng" algn="ctr">
-                      <a:solidFill>
-                        <a:schemeClr val="tx1"/>
-                      </a:solidFill>
-                      <a:prstDash val="solid"/>
-                      <a:round/>
-                      <a:headEnd type="none" w="med" len="med"/>
-                      <a:tailEnd type="none" w="med" len="med"/>
-                    </a:lnB>
-                  </a:tcPr>
-                </a:tc>
-                <a:extLst>
-                  <a:ext uri="{0D108BD9-81ED-4DB2-BD59-A6C34878D82A}">
-                    <a16:rowId xmlns:a16="http://schemas.microsoft.com/office/drawing/2014/main" val="10001"/>
-                  </a:ext>
-                </a:extLst>
-              </a:tr>
-              <a:tr h="538803">
-                <a:tc>
-                  <a:txBody>
-                    <a:bodyPr/>
-                    <a:lstStyle/>
-                    <a:p>
-                      <a:pPr marL="0" lvl="0" indent="0" algn="ctr" rtl="0">
-                        <a:spcBef>
-                          <a:spcPts val="0"/>
-                        </a:spcBef>
-                        <a:spcAft>
-                          <a:spcPts val="0"/>
-                        </a:spcAft>
-                        <a:buNone/>
-                      </a:pPr>
-                      <a:r>
-                        <a:rPr lang="en" sz="1600" b="1" dirty="0" smtClean="0">
-                          <a:solidFill>
-                            <a:schemeClr val="tx1"/>
-                          </a:solidFill>
-                          <a:latin typeface="Montserrat Black"/>
-                          <a:ea typeface="Montserrat Black"/>
-                          <a:cs typeface="Montserrat Black"/>
-                          <a:sym typeface="Montserrat Black"/>
-                        </a:rPr>
-                        <a:t>TC-25</a:t>
-                      </a:r>
-                      <a:endParaRPr sz="1600" b="1" dirty="0">
-                        <a:solidFill>
-                          <a:schemeClr val="tx1"/>
-                        </a:solidFill>
-                        <a:latin typeface="Montserrat Black"/>
-                        <a:ea typeface="Montserrat Black"/>
-                        <a:cs typeface="Montserrat Black"/>
-                        <a:sym typeface="Montserrat Black"/>
-                      </a:endParaRPr>
-                    </a:p>
-                  </a:txBody>
-                  <a:tcPr marL="90000" marR="90000" marT="91425" marB="91425" anchor="ctr">
-                    <a:lnL w="12700" cap="flat" cmpd="sng" algn="ctr">
-                      <a:solidFill>
-                        <a:schemeClr val="tx1"/>
-                      </a:solidFill>
-                      <a:prstDash val="solid"/>
-                      <a:round/>
-                      <a:headEnd type="none" w="med" len="med"/>
-                      <a:tailEnd type="none" w="med" len="med"/>
-                    </a:lnL>
-                    <a:lnR w="12700" cap="flat" cmpd="sng" algn="ctr">
-                      <a:solidFill>
-                        <a:schemeClr val="tx1"/>
-                      </a:solidFill>
-                      <a:prstDash val="solid"/>
-                      <a:round/>
-                      <a:headEnd type="none" w="med" len="med"/>
-                      <a:tailEnd type="none" w="med" len="med"/>
-                    </a:lnR>
-                    <a:lnT w="12700" cap="flat" cmpd="sng" algn="ctr">
-                      <a:solidFill>
-                        <a:schemeClr val="tx1"/>
-                      </a:solidFill>
-                      <a:prstDash val="solid"/>
-                      <a:round/>
-                      <a:headEnd type="none" w="med" len="med"/>
-                      <a:tailEnd type="none" w="med" len="med"/>
-                    </a:lnT>
-                    <a:lnB w="12700" cap="flat" cmpd="sng" algn="ctr">
-                      <a:solidFill>
-                        <a:schemeClr val="tx1"/>
-                      </a:solidFill>
-                      <a:prstDash val="solid"/>
-                      <a:round/>
-                      <a:headEnd type="none" w="med" len="med"/>
-                      <a:tailEnd type="none" w="med" len="med"/>
-                    </a:lnB>
-                  </a:tcPr>
-                </a:tc>
-                <a:tc>
-                  <a:txBody>
-                    <a:bodyPr/>
-                    <a:lstStyle/>
-                    <a:p>
-                      <a:pPr marL="0" lvl="0" indent="0" algn="ctr" rtl="0">
-                        <a:spcBef>
-                          <a:spcPts val="0"/>
-                        </a:spcBef>
-                        <a:spcAft>
-                          <a:spcPts val="0"/>
-                        </a:spcAft>
-                        <a:buNone/>
-                      </a:pPr>
-                      <a:r>
-                        <a:rPr lang="en-US" sz="1200" b="1" dirty="0" smtClean="0">
-                          <a:solidFill>
-                            <a:schemeClr val="tx1"/>
-                          </a:solidFill>
-                          <a:latin typeface="Montserrat Medium"/>
-                          <a:ea typeface="Montserrat Medium"/>
-                          <a:cs typeface="Montserrat Medium"/>
-                          <a:sym typeface="Montserrat Medium"/>
-                        </a:rPr>
-                        <a:t>FPS (real-time)</a:t>
-                      </a:r>
-                      <a:endParaRPr sz="1200" b="1" dirty="0">
-                        <a:solidFill>
-                          <a:schemeClr val="tx1"/>
-                        </a:solidFill>
-                        <a:latin typeface="Montserrat Medium"/>
-                        <a:ea typeface="Montserrat Medium"/>
-                        <a:cs typeface="Montserrat Medium"/>
-                        <a:sym typeface="Montserrat Medium"/>
-                      </a:endParaRPr>
-                    </a:p>
-                  </a:txBody>
-                  <a:tcPr marL="90000" marR="90000" marT="91425" marB="91425" anchor="ctr">
-                    <a:lnL w="12700" cap="flat" cmpd="sng" algn="ctr">
-                      <a:solidFill>
-                        <a:schemeClr val="tx1"/>
-                      </a:solidFill>
-                      <a:prstDash val="solid"/>
-                      <a:round/>
-                      <a:headEnd type="none" w="med" len="med"/>
-                      <a:tailEnd type="none" w="med" len="med"/>
-                    </a:lnL>
-                    <a:lnR w="12700" cap="flat" cmpd="sng" algn="ctr">
-                      <a:solidFill>
-                        <a:schemeClr val="tx1"/>
-                      </a:solidFill>
-                      <a:prstDash val="solid"/>
-                      <a:round/>
-                      <a:headEnd type="none" w="med" len="med"/>
-                      <a:tailEnd type="none" w="med" len="med"/>
-                    </a:lnR>
-                    <a:lnT w="12700" cap="flat" cmpd="sng" algn="ctr">
-                      <a:solidFill>
-                        <a:schemeClr val="tx1"/>
-                      </a:solidFill>
-                      <a:prstDash val="solid"/>
-                      <a:round/>
-                      <a:headEnd type="none" w="med" len="med"/>
-                      <a:tailEnd type="none" w="med" len="med"/>
-                    </a:lnT>
-                    <a:lnB w="12700" cap="flat" cmpd="sng" algn="ctr">
-                      <a:solidFill>
-                        <a:schemeClr val="tx1"/>
-                      </a:solidFill>
-                      <a:prstDash val="solid"/>
-                      <a:round/>
-                      <a:headEnd type="none" w="med" len="med"/>
-                      <a:tailEnd type="none" w="med" len="med"/>
-                    </a:lnB>
-                  </a:tcPr>
-                </a:tc>
-                <a:tc>
-                  <a:txBody>
-                    <a:bodyPr/>
-                    <a:lstStyle/>
-                    <a:p>
-                      <a:pPr marL="0" lvl="0" indent="0" algn="ctr" rtl="0">
-                        <a:spcBef>
-                          <a:spcPts val="0"/>
-                        </a:spcBef>
-                        <a:spcAft>
-                          <a:spcPts val="0"/>
-                        </a:spcAft>
-                        <a:buNone/>
-                      </a:pPr>
-                      <a:r>
-                        <a:rPr lang="en-US" sz="1200" b="1" dirty="0" smtClean="0">
-                          <a:solidFill>
-                            <a:schemeClr val="tx1"/>
-                          </a:solidFill>
-                          <a:latin typeface="Montserrat Medium"/>
-                          <a:ea typeface="Montserrat Medium"/>
-                          <a:cs typeface="Montserrat Medium"/>
-                          <a:sym typeface="Montserrat Medium"/>
-                        </a:rPr>
-                        <a:t>≥ 15 FPS</a:t>
-                      </a:r>
-                      <a:endParaRPr sz="1200" b="1" dirty="0">
-                        <a:solidFill>
-                          <a:schemeClr val="tx1"/>
-                        </a:solidFill>
-                        <a:latin typeface="Montserrat Medium"/>
-                        <a:ea typeface="Montserrat Medium"/>
-                        <a:cs typeface="Montserrat Medium"/>
-                        <a:sym typeface="Montserrat Medium"/>
-                      </a:endParaRPr>
-                    </a:p>
-                  </a:txBody>
-                  <a:tcPr marL="90000" marR="90000" marT="91425" marB="91425" anchor="ctr">
-                    <a:lnL w="12700" cap="flat" cmpd="sng" algn="ctr">
-                      <a:solidFill>
-                        <a:schemeClr val="tx1"/>
-                      </a:solidFill>
-                      <a:prstDash val="solid"/>
-                      <a:round/>
-                      <a:headEnd type="none" w="med" len="med"/>
-                      <a:tailEnd type="none" w="med" len="med"/>
-                    </a:lnL>
-                    <a:lnR w="12700" cap="flat" cmpd="sng" algn="ctr">
-                      <a:solidFill>
-                        <a:schemeClr val="tx1"/>
-                      </a:solidFill>
-                      <a:prstDash val="solid"/>
-                      <a:round/>
-                      <a:headEnd type="none" w="med" len="med"/>
-                      <a:tailEnd type="none" w="med" len="med"/>
-                    </a:lnR>
-                    <a:lnT w="12700" cap="flat" cmpd="sng" algn="ctr">
-                      <a:solidFill>
-                        <a:schemeClr val="tx1"/>
-                      </a:solidFill>
-                      <a:prstDash val="solid"/>
-                      <a:round/>
-                      <a:headEnd type="none" w="med" len="med"/>
-                      <a:tailEnd type="none" w="med" len="med"/>
-                    </a:lnT>
-                    <a:lnB w="12700" cap="flat" cmpd="sng" algn="ctr">
-                      <a:solidFill>
-                        <a:schemeClr val="tx1"/>
-                      </a:solidFill>
-                      <a:prstDash val="solid"/>
-                      <a:round/>
-                      <a:headEnd type="none" w="med" len="med"/>
-                      <a:tailEnd type="none" w="med" len="med"/>
-                    </a:lnB>
-                  </a:tcPr>
-                </a:tc>
-                <a:extLst>
-                  <a:ext uri="{0D108BD9-81ED-4DB2-BD59-A6C34878D82A}">
-                    <a16:rowId xmlns:a16="http://schemas.microsoft.com/office/drawing/2014/main" val="10002"/>
-                  </a:ext>
-                </a:extLst>
-              </a:tr>
-              <a:tr h="569009">
-                <a:tc>
-                  <a:txBody>
-                    <a:bodyPr/>
-                    <a:lstStyle/>
-                    <a:p>
-                      <a:pPr marL="0" lvl="0" indent="0" algn="ctr" rtl="0">
-                        <a:spcBef>
-                          <a:spcPts val="0"/>
-                        </a:spcBef>
-                        <a:spcAft>
-                          <a:spcPts val="0"/>
-                        </a:spcAft>
-                        <a:buNone/>
-                      </a:pPr>
-                      <a:r>
-                        <a:rPr lang="en" sz="1600" b="1" dirty="0" smtClean="0">
-                          <a:solidFill>
-                            <a:schemeClr val="tx1"/>
-                          </a:solidFill>
-                          <a:latin typeface="Montserrat Black"/>
-                          <a:ea typeface="Montserrat Black"/>
-                          <a:cs typeface="Montserrat Black"/>
-                          <a:sym typeface="Montserrat Black"/>
-                        </a:rPr>
-                        <a:t>TC-26</a:t>
-                      </a:r>
-                      <a:endParaRPr sz="1600" b="1" dirty="0">
-                        <a:solidFill>
-                          <a:schemeClr val="tx1"/>
-                        </a:solidFill>
-                        <a:latin typeface="Montserrat Black"/>
-                        <a:ea typeface="Montserrat Black"/>
-                        <a:cs typeface="Montserrat Black"/>
-                        <a:sym typeface="Montserrat Black"/>
-                      </a:endParaRPr>
-                    </a:p>
-                  </a:txBody>
-                  <a:tcPr marL="90000" marR="90000" marT="91425" marB="91425" anchor="ctr">
-                    <a:lnL w="12700" cap="flat" cmpd="sng" algn="ctr">
-                      <a:solidFill>
-                        <a:schemeClr val="tx1"/>
-                      </a:solidFill>
-                      <a:prstDash val="solid"/>
-                      <a:round/>
-                      <a:headEnd type="none" w="med" len="med"/>
-                      <a:tailEnd type="none" w="med" len="med"/>
-                    </a:lnL>
-                    <a:lnR w="12700" cap="flat" cmpd="sng" algn="ctr">
-                      <a:solidFill>
-                        <a:schemeClr val="tx1"/>
-                      </a:solidFill>
-                      <a:prstDash val="solid"/>
-                      <a:round/>
-                      <a:headEnd type="none" w="med" len="med"/>
-                      <a:tailEnd type="none" w="med" len="med"/>
-                    </a:lnR>
-                    <a:lnT w="12700" cap="flat" cmpd="sng" algn="ctr">
-                      <a:solidFill>
-                        <a:schemeClr val="tx1"/>
-                      </a:solidFill>
-                      <a:prstDash val="solid"/>
-                      <a:round/>
-                      <a:headEnd type="none" w="med" len="med"/>
-                      <a:tailEnd type="none" w="med" len="med"/>
-                    </a:lnT>
-                    <a:lnB w="12700" cap="flat" cmpd="sng" algn="ctr">
-                      <a:solidFill>
-                        <a:schemeClr val="tx1"/>
-                      </a:solidFill>
-                      <a:prstDash val="solid"/>
-                      <a:round/>
-                      <a:headEnd type="none" w="med" len="med"/>
-                      <a:tailEnd type="none" w="med" len="med"/>
-                    </a:lnB>
-                  </a:tcPr>
-                </a:tc>
-                <a:tc>
-                  <a:txBody>
-                    <a:bodyPr/>
-                    <a:lstStyle/>
-                    <a:p>
-                      <a:pPr marL="0" lvl="0" indent="0" algn="ctr" rtl="0">
-                        <a:spcBef>
-                          <a:spcPts val="0"/>
-                        </a:spcBef>
-                        <a:spcAft>
-                          <a:spcPts val="0"/>
-                        </a:spcAft>
-                        <a:buNone/>
-                      </a:pPr>
-                      <a:r>
-                        <a:rPr lang="en-US" sz="1200" b="1" dirty="0" smtClean="0">
-                          <a:solidFill>
-                            <a:schemeClr val="tx1"/>
-                          </a:solidFill>
-                          <a:latin typeface="Montserrat Medium"/>
-                          <a:ea typeface="Montserrat Medium"/>
-                          <a:cs typeface="Montserrat Medium"/>
-                          <a:sym typeface="Montserrat Medium"/>
-                        </a:rPr>
-                        <a:t>Processing delay</a:t>
-                      </a:r>
-                      <a:endParaRPr sz="1200" b="1" dirty="0">
-                        <a:solidFill>
-                          <a:schemeClr val="tx1"/>
-                        </a:solidFill>
-                        <a:latin typeface="Montserrat Medium"/>
-                        <a:ea typeface="Montserrat Medium"/>
-                        <a:cs typeface="Montserrat Medium"/>
-                        <a:sym typeface="Montserrat Medium"/>
-                      </a:endParaRPr>
-                    </a:p>
-                  </a:txBody>
-                  <a:tcPr marL="90000" marR="90000" marT="91425" marB="91425" anchor="ctr">
-                    <a:lnL w="12700" cap="flat" cmpd="sng" algn="ctr">
-                      <a:solidFill>
-                        <a:schemeClr val="tx1"/>
-                      </a:solidFill>
-                      <a:prstDash val="solid"/>
-                      <a:round/>
-                      <a:headEnd type="none" w="med" len="med"/>
-                      <a:tailEnd type="none" w="med" len="med"/>
-                    </a:lnL>
-                    <a:lnR w="12700" cap="flat" cmpd="sng" algn="ctr">
-                      <a:solidFill>
-                        <a:schemeClr val="tx1"/>
-                      </a:solidFill>
-                      <a:prstDash val="solid"/>
-                      <a:round/>
-                      <a:headEnd type="none" w="med" len="med"/>
-                      <a:tailEnd type="none" w="med" len="med"/>
-                    </a:lnR>
-                    <a:lnT w="12700" cap="flat" cmpd="sng" algn="ctr">
-                      <a:solidFill>
-                        <a:schemeClr val="tx1"/>
-                      </a:solidFill>
-                      <a:prstDash val="solid"/>
-                      <a:round/>
-                      <a:headEnd type="none" w="med" len="med"/>
-                      <a:tailEnd type="none" w="med" len="med"/>
-                    </a:lnT>
-                    <a:lnB w="12700" cap="flat" cmpd="sng" algn="ctr">
-                      <a:solidFill>
-                        <a:schemeClr val="tx1"/>
-                      </a:solidFill>
-                      <a:prstDash val="solid"/>
-                      <a:round/>
-                      <a:headEnd type="none" w="med" len="med"/>
-                      <a:tailEnd type="none" w="med" len="med"/>
-                    </a:lnB>
-                  </a:tcPr>
-                </a:tc>
-                <a:tc>
-                  <a:txBody>
-                    <a:bodyPr/>
-                    <a:lstStyle/>
-                    <a:p>
-                      <a:pPr marL="0" lvl="0" indent="0" algn="ctr" rtl="0">
-                        <a:spcBef>
-                          <a:spcPts val="0"/>
-                        </a:spcBef>
-                        <a:spcAft>
-                          <a:spcPts val="0"/>
-                        </a:spcAft>
-                        <a:buNone/>
-                      </a:pPr>
-                      <a:r>
-                        <a:rPr lang="en-US" sz="1200" b="1" dirty="0" smtClean="0">
-                          <a:solidFill>
-                            <a:schemeClr val="tx1"/>
-                          </a:solidFill>
-                          <a:latin typeface="Montserrat Medium"/>
-                          <a:ea typeface="Montserrat Medium"/>
-                          <a:cs typeface="Montserrat Medium"/>
-                          <a:sym typeface="Montserrat Medium"/>
-                        </a:rPr>
-                        <a:t>&lt; </a:t>
-                      </a:r>
-                      <a:r>
-                        <a:rPr lang="en-US" sz="1200" b="1" dirty="0" smtClean="0">
-                          <a:solidFill>
-                            <a:schemeClr val="tx1"/>
-                          </a:solidFill>
-                          <a:latin typeface="Montserrat Medium"/>
-                          <a:ea typeface="Montserrat Medium"/>
-                          <a:cs typeface="Montserrat Medium"/>
-                          <a:sym typeface="Montserrat Medium"/>
-                        </a:rPr>
-                        <a:t>5000 </a:t>
-                      </a:r>
-                      <a:r>
-                        <a:rPr lang="en-US" sz="1200" b="1" dirty="0" err="1" smtClean="0">
-                          <a:solidFill>
-                            <a:schemeClr val="tx1"/>
-                          </a:solidFill>
-                          <a:latin typeface="Montserrat Medium"/>
-                          <a:ea typeface="Montserrat Medium"/>
-                          <a:cs typeface="Montserrat Medium"/>
-                          <a:sym typeface="Montserrat Medium"/>
-                        </a:rPr>
-                        <a:t>ms</a:t>
-                      </a:r>
-                      <a:endParaRPr sz="1200" b="1" dirty="0">
-                        <a:solidFill>
-                          <a:schemeClr val="tx1"/>
-                        </a:solidFill>
-                        <a:latin typeface="Montserrat Medium"/>
-                        <a:ea typeface="Montserrat Medium"/>
-                        <a:cs typeface="Montserrat Medium"/>
-                        <a:sym typeface="Montserrat Medium"/>
-                      </a:endParaRPr>
-                    </a:p>
-                  </a:txBody>
-                  <a:tcPr marL="90000" marR="90000" marT="91425" marB="91425" anchor="ctr">
-                    <a:lnL w="12700" cap="flat" cmpd="sng" algn="ctr">
-                      <a:solidFill>
-                        <a:schemeClr val="tx1"/>
-                      </a:solidFill>
-                      <a:prstDash val="solid"/>
-                      <a:round/>
-                      <a:headEnd type="none" w="med" len="med"/>
-                      <a:tailEnd type="none" w="med" len="med"/>
-                    </a:lnL>
-                    <a:lnR w="12700" cap="flat" cmpd="sng" algn="ctr">
-                      <a:solidFill>
-                        <a:schemeClr val="tx1"/>
-                      </a:solidFill>
-                      <a:prstDash val="solid"/>
-                      <a:round/>
-                      <a:headEnd type="none" w="med" len="med"/>
-                      <a:tailEnd type="none" w="med" len="med"/>
-                    </a:lnR>
-                    <a:lnT w="12700" cap="flat" cmpd="sng" algn="ctr">
-                      <a:solidFill>
-                        <a:schemeClr val="tx1"/>
-                      </a:solidFill>
-                      <a:prstDash val="solid"/>
-                      <a:round/>
-                      <a:headEnd type="none" w="med" len="med"/>
-                      <a:tailEnd type="none" w="med" len="med"/>
-                    </a:lnT>
-                    <a:lnB w="12700" cap="flat" cmpd="sng" algn="ctr">
-                      <a:solidFill>
-                        <a:schemeClr val="tx1"/>
-                      </a:solidFill>
-                      <a:prstDash val="solid"/>
-                      <a:round/>
-                      <a:headEnd type="none" w="med" len="med"/>
-                      <a:tailEnd type="none" w="med" len="med"/>
-                    </a:lnB>
-                  </a:tcPr>
-                </a:tc>
-                <a:extLst>
-                  <a:ext uri="{0D108BD9-81ED-4DB2-BD59-A6C34878D82A}">
-                    <a16:rowId xmlns:a16="http://schemas.microsoft.com/office/drawing/2014/main" val="10003"/>
-                  </a:ext>
-                </a:extLst>
-              </a:tr>
-              <a:tr h="569009">
-                <a:tc>
-                  <a:txBody>
-                    <a:bodyPr/>
-                    <a:lstStyle/>
-                    <a:p>
-                      <a:pPr marL="0" lvl="0" indent="0" algn="ctr" rtl="0">
-                        <a:spcBef>
-                          <a:spcPts val="0"/>
-                        </a:spcBef>
-                        <a:spcAft>
-                          <a:spcPts val="0"/>
-                        </a:spcAft>
-                        <a:buNone/>
-                      </a:pPr>
-                      <a:r>
-                        <a:rPr lang="en" sz="1600" b="1" dirty="0" smtClean="0">
-                          <a:solidFill>
-                            <a:schemeClr val="tx1"/>
-                          </a:solidFill>
-                          <a:latin typeface="Montserrat Black"/>
-                          <a:ea typeface="Montserrat Black"/>
-                          <a:cs typeface="Montserrat Black"/>
-                          <a:sym typeface="Montserrat Black"/>
-                        </a:rPr>
-                        <a:t>TC-27</a:t>
-                      </a:r>
-                      <a:endParaRPr sz="1600" b="1" dirty="0">
-                        <a:solidFill>
-                          <a:schemeClr val="tx1"/>
-                        </a:solidFill>
-                        <a:latin typeface="Montserrat Black"/>
-                        <a:ea typeface="Montserrat Black"/>
-                        <a:cs typeface="Montserrat Black"/>
-                        <a:sym typeface="Montserrat Black"/>
-                      </a:endParaRPr>
-                    </a:p>
-                  </a:txBody>
-                  <a:tcPr marL="90000" marR="90000" marT="91425" marB="91425" anchor="ctr">
-                    <a:lnL w="12700" cap="flat" cmpd="sng" algn="ctr">
-                      <a:solidFill>
-                        <a:schemeClr val="tx1"/>
-                      </a:solidFill>
-                      <a:prstDash val="solid"/>
-                      <a:round/>
-                      <a:headEnd type="none" w="med" len="med"/>
-                      <a:tailEnd type="none" w="med" len="med"/>
-                    </a:lnL>
-                    <a:lnR w="12700" cap="flat" cmpd="sng" algn="ctr">
-                      <a:solidFill>
-                        <a:schemeClr val="tx1"/>
-                      </a:solidFill>
-                      <a:prstDash val="solid"/>
-                      <a:round/>
-                      <a:headEnd type="none" w="med" len="med"/>
-                      <a:tailEnd type="none" w="med" len="med"/>
-                    </a:lnR>
-                    <a:lnT w="12700" cap="flat" cmpd="sng" algn="ctr">
-                      <a:solidFill>
-                        <a:schemeClr val="tx1"/>
-                      </a:solidFill>
-                      <a:prstDash val="solid"/>
-                      <a:round/>
-                      <a:headEnd type="none" w="med" len="med"/>
-                      <a:tailEnd type="none" w="med" len="med"/>
-                    </a:lnT>
-                    <a:lnB w="12700" cap="flat" cmpd="sng" algn="ctr">
-                      <a:solidFill>
-                        <a:schemeClr val="tx1"/>
-                      </a:solidFill>
-                      <a:prstDash val="solid"/>
-                      <a:round/>
-                      <a:headEnd type="none" w="med" len="med"/>
-                      <a:tailEnd type="none" w="med" len="med"/>
-                    </a:lnB>
-                  </a:tcPr>
-                </a:tc>
-                <a:tc>
-                  <a:txBody>
-                    <a:bodyPr/>
-                    <a:lstStyle/>
-                    <a:p>
-                      <a:pPr marL="0" lvl="0" indent="0" algn="ctr" rtl="0">
-                        <a:spcBef>
-                          <a:spcPts val="0"/>
-                        </a:spcBef>
-                        <a:spcAft>
-                          <a:spcPts val="0"/>
-                        </a:spcAft>
-                        <a:buNone/>
-                      </a:pPr>
-                      <a:r>
-                        <a:rPr lang="en-US" sz="1200" b="1" dirty="0" smtClean="0">
-                          <a:solidFill>
-                            <a:schemeClr val="tx1"/>
-                          </a:solidFill>
-                          <a:latin typeface="Montserrat Medium"/>
-                          <a:ea typeface="Montserrat Medium"/>
-                          <a:cs typeface="Montserrat Medium"/>
-                          <a:sym typeface="Montserrat Medium"/>
-                        </a:rPr>
-                        <a:t>CPU usage</a:t>
-                      </a:r>
-                      <a:endParaRPr sz="1200" b="1" dirty="0">
-                        <a:solidFill>
-                          <a:schemeClr val="tx1"/>
-                        </a:solidFill>
-                        <a:latin typeface="Montserrat Medium"/>
-                        <a:ea typeface="Montserrat Medium"/>
-                        <a:cs typeface="Montserrat Medium"/>
-                        <a:sym typeface="Montserrat Medium"/>
-                      </a:endParaRPr>
-                    </a:p>
-                  </a:txBody>
-                  <a:tcPr marL="90000" marR="90000" marT="91425" marB="91425" anchor="ctr">
-                    <a:lnL w="12700" cap="flat" cmpd="sng" algn="ctr">
-                      <a:solidFill>
-                        <a:schemeClr val="tx1"/>
-                      </a:solidFill>
-                      <a:prstDash val="solid"/>
-                      <a:round/>
-                      <a:headEnd type="none" w="med" len="med"/>
-                      <a:tailEnd type="none" w="med" len="med"/>
-                    </a:lnL>
-                    <a:lnR w="12700" cap="flat" cmpd="sng" algn="ctr">
-                      <a:solidFill>
-                        <a:schemeClr val="tx1"/>
-                      </a:solidFill>
-                      <a:prstDash val="solid"/>
-                      <a:round/>
-                      <a:headEnd type="none" w="med" len="med"/>
-                      <a:tailEnd type="none" w="med" len="med"/>
-                    </a:lnR>
-                    <a:lnT w="12700" cap="flat" cmpd="sng" algn="ctr">
-                      <a:solidFill>
-                        <a:schemeClr val="tx1"/>
-                      </a:solidFill>
-                      <a:prstDash val="solid"/>
-                      <a:round/>
-                      <a:headEnd type="none" w="med" len="med"/>
-                      <a:tailEnd type="none" w="med" len="med"/>
-                    </a:lnT>
-                    <a:lnB w="12700" cap="flat" cmpd="sng" algn="ctr">
-                      <a:solidFill>
-                        <a:schemeClr val="tx1"/>
-                      </a:solidFill>
-                      <a:prstDash val="solid"/>
-                      <a:round/>
-                      <a:headEnd type="none" w="med" len="med"/>
-                      <a:tailEnd type="none" w="med" len="med"/>
-                    </a:lnB>
-                  </a:tcPr>
-                </a:tc>
-                <a:tc>
-                  <a:txBody>
-                    <a:bodyPr/>
-                    <a:lstStyle/>
-                    <a:p>
-                      <a:pPr marL="0" lvl="0" indent="0" algn="ctr" rtl="0">
-                        <a:spcBef>
-                          <a:spcPts val="0"/>
-                        </a:spcBef>
-                        <a:spcAft>
-                          <a:spcPts val="0"/>
-                        </a:spcAft>
-                        <a:buNone/>
-                      </a:pPr>
-                      <a:r>
-                        <a:rPr lang="en-US" sz="1200" b="1" dirty="0" smtClean="0">
-                          <a:solidFill>
-                            <a:schemeClr val="tx1"/>
-                          </a:solidFill>
-                          <a:latin typeface="Montserrat Medium"/>
-                          <a:ea typeface="Montserrat Medium"/>
-                          <a:cs typeface="Montserrat Medium"/>
-                          <a:sym typeface="Montserrat Medium"/>
-                        </a:rPr>
-                        <a:t>&lt; 80%</a:t>
-                      </a:r>
-                      <a:endParaRPr sz="1200" b="1" dirty="0">
-                        <a:solidFill>
-                          <a:schemeClr val="tx1"/>
-                        </a:solidFill>
-                        <a:latin typeface="Montserrat Medium"/>
-                        <a:ea typeface="Montserrat Medium"/>
-                        <a:cs typeface="Montserrat Medium"/>
-                        <a:sym typeface="Montserrat Medium"/>
-                      </a:endParaRPr>
-                    </a:p>
-                  </a:txBody>
-                  <a:tcPr marL="90000" marR="90000" marT="91425" marB="91425" anchor="ctr">
-                    <a:lnL w="12700" cap="flat" cmpd="sng" algn="ctr">
-                      <a:solidFill>
-                        <a:schemeClr val="tx1"/>
-                      </a:solidFill>
-                      <a:prstDash val="solid"/>
-                      <a:round/>
-                      <a:headEnd type="none" w="med" len="med"/>
-                      <a:tailEnd type="none" w="med" len="med"/>
-                    </a:lnL>
-                    <a:lnR w="12700" cap="flat" cmpd="sng" algn="ctr">
-                      <a:solidFill>
-                        <a:schemeClr val="tx1"/>
-                      </a:solidFill>
-                      <a:prstDash val="solid"/>
-                      <a:round/>
-                      <a:headEnd type="none" w="med" len="med"/>
-                      <a:tailEnd type="none" w="med" len="med"/>
-                    </a:lnR>
-                    <a:lnT w="12700" cap="flat" cmpd="sng" algn="ctr">
-                      <a:solidFill>
-                        <a:schemeClr val="tx1"/>
-                      </a:solidFill>
-                      <a:prstDash val="solid"/>
-                      <a:round/>
-                      <a:headEnd type="none" w="med" len="med"/>
-                      <a:tailEnd type="none" w="med" len="med"/>
-                    </a:lnT>
-                    <a:lnB w="12700" cap="flat" cmpd="sng" algn="ctr">
-                      <a:solidFill>
-                        <a:schemeClr val="tx1"/>
-                      </a:solidFill>
-                      <a:prstDash val="solid"/>
-                      <a:round/>
-                      <a:headEnd type="none" w="med" len="med"/>
-                      <a:tailEnd type="none" w="med" len="med"/>
-                    </a:lnB>
-                  </a:tcPr>
-                </a:tc>
-                <a:extLst>
-                  <a:ext uri="{0D108BD9-81ED-4DB2-BD59-A6C34878D82A}">
-                    <a16:rowId xmlns:a16="http://schemas.microsoft.com/office/drawing/2014/main" val="10004"/>
-                  </a:ext>
-                </a:extLst>
-              </a:tr>
-              <a:tr h="569009">
-                <a:tc>
-                  <a:txBody>
-                    <a:bodyPr/>
-                    <a:lstStyle/>
-                    <a:p>
-                      <a:pPr marL="0" lvl="0" indent="0" algn="ctr" rtl="0">
-                        <a:spcBef>
-                          <a:spcPts val="0"/>
-                        </a:spcBef>
-                        <a:spcAft>
-                          <a:spcPts val="0"/>
-                        </a:spcAft>
-                        <a:buNone/>
-                      </a:pPr>
-                      <a:r>
-                        <a:rPr lang="en" sz="1600" b="1" dirty="0" smtClean="0">
-                          <a:solidFill>
-                            <a:schemeClr val="tx1"/>
-                          </a:solidFill>
-                          <a:latin typeface="Montserrat Black"/>
-                          <a:ea typeface="Montserrat Black"/>
-                          <a:cs typeface="Montserrat Black"/>
-                          <a:sym typeface="Montserrat Black"/>
-                        </a:rPr>
-                        <a:t>TC-28</a:t>
-                      </a:r>
-                      <a:endParaRPr lang="en" sz="1600" b="1" dirty="0" smtClean="0">
-                        <a:solidFill>
-                          <a:schemeClr val="tx1"/>
-                        </a:solidFill>
-                        <a:latin typeface="Montserrat Black"/>
-                        <a:ea typeface="Montserrat Black"/>
-                        <a:cs typeface="Montserrat Black"/>
-                        <a:sym typeface="Montserrat Black"/>
-                      </a:endParaRPr>
-                    </a:p>
-                  </a:txBody>
-                  <a:tcPr marL="90000" marR="90000" marT="91425" marB="91425" anchor="ctr">
-                    <a:lnL w="12700" cap="flat" cmpd="sng" algn="ctr">
-                      <a:solidFill>
-                        <a:schemeClr val="tx1"/>
-                      </a:solidFill>
-                      <a:prstDash val="solid"/>
-                      <a:round/>
-                      <a:headEnd type="none" w="med" len="med"/>
-                      <a:tailEnd type="none" w="med" len="med"/>
-                    </a:lnL>
-                    <a:lnR w="12700" cap="flat" cmpd="sng" algn="ctr">
-                      <a:solidFill>
-                        <a:schemeClr val="tx1"/>
-                      </a:solidFill>
-                      <a:prstDash val="solid"/>
-                      <a:round/>
-                      <a:headEnd type="none" w="med" len="med"/>
-                      <a:tailEnd type="none" w="med" len="med"/>
-                    </a:lnR>
-                    <a:lnT w="12700" cap="flat" cmpd="sng" algn="ctr">
-                      <a:solidFill>
-                        <a:schemeClr val="tx1"/>
-                      </a:solidFill>
-                      <a:prstDash val="solid"/>
-                      <a:round/>
-                      <a:headEnd type="none" w="med" len="med"/>
-                      <a:tailEnd type="none" w="med" len="med"/>
-                    </a:lnT>
-                    <a:lnB w="12700" cap="flat" cmpd="sng" algn="ctr">
-                      <a:solidFill>
-                        <a:schemeClr val="tx1"/>
-                      </a:solidFill>
-                      <a:prstDash val="solid"/>
-                      <a:round/>
-                      <a:headEnd type="none" w="med" len="med"/>
-                      <a:tailEnd type="none" w="med" len="med"/>
-                    </a:lnB>
-                  </a:tcPr>
-                </a:tc>
-                <a:tc>
-                  <a:txBody>
-                    <a:bodyPr/>
-                    <a:lstStyle/>
-                    <a:p>
-                      <a:pPr marL="0" lvl="0" indent="0" algn="ctr" rtl="0">
-                        <a:spcBef>
-                          <a:spcPts val="0"/>
-                        </a:spcBef>
-                        <a:spcAft>
-                          <a:spcPts val="0"/>
-                        </a:spcAft>
-                        <a:buNone/>
-                      </a:pPr>
-                      <a:r>
-                        <a:rPr lang="en-US" sz="1200" b="1" dirty="0" smtClean="0">
-                          <a:solidFill>
-                            <a:schemeClr val="tx1"/>
-                          </a:solidFill>
-                          <a:latin typeface="Montserrat Medium"/>
-                          <a:ea typeface="Montserrat Medium"/>
-                          <a:cs typeface="Montserrat Medium"/>
-                          <a:sym typeface="Montserrat Medium"/>
-                        </a:rPr>
-                        <a:t>Memory usage</a:t>
-                      </a:r>
-                      <a:endParaRPr sz="1200" b="1" dirty="0">
-                        <a:solidFill>
-                          <a:schemeClr val="tx1"/>
-                        </a:solidFill>
-                        <a:latin typeface="Montserrat Medium"/>
-                        <a:ea typeface="Montserrat Medium"/>
-                        <a:cs typeface="Montserrat Medium"/>
-                        <a:sym typeface="Montserrat Medium"/>
-                      </a:endParaRPr>
-                    </a:p>
-                  </a:txBody>
-                  <a:tcPr marL="90000" marR="90000" marT="91425" marB="91425" anchor="ctr">
-                    <a:lnL w="12700" cap="flat" cmpd="sng" algn="ctr">
-                      <a:solidFill>
-                        <a:schemeClr val="tx1"/>
-                      </a:solidFill>
-                      <a:prstDash val="solid"/>
-                      <a:round/>
-                      <a:headEnd type="none" w="med" len="med"/>
-                      <a:tailEnd type="none" w="med" len="med"/>
-                    </a:lnL>
-                    <a:lnR w="12700" cap="flat" cmpd="sng" algn="ctr">
-                      <a:solidFill>
-                        <a:schemeClr val="tx1"/>
-                      </a:solidFill>
-                      <a:prstDash val="solid"/>
-                      <a:round/>
-                      <a:headEnd type="none" w="med" len="med"/>
-                      <a:tailEnd type="none" w="med" len="med"/>
-                    </a:lnR>
-                    <a:lnT w="12700" cap="flat" cmpd="sng" algn="ctr">
-                      <a:solidFill>
-                        <a:schemeClr val="tx1"/>
-                      </a:solidFill>
-                      <a:prstDash val="solid"/>
-                      <a:round/>
-                      <a:headEnd type="none" w="med" len="med"/>
-                      <a:tailEnd type="none" w="med" len="med"/>
-                    </a:lnT>
-                    <a:lnB w="12700" cap="flat" cmpd="sng" algn="ctr">
-                      <a:solidFill>
-                        <a:schemeClr val="tx1"/>
-                      </a:solidFill>
-                      <a:prstDash val="solid"/>
-                      <a:round/>
-                      <a:headEnd type="none" w="med" len="med"/>
-                      <a:tailEnd type="none" w="med" len="med"/>
-                    </a:lnB>
-                  </a:tcPr>
-                </a:tc>
-                <a:tc>
-                  <a:txBody>
-                    <a:bodyPr/>
-                    <a:lstStyle/>
-                    <a:p>
-                      <a:pPr marL="0" lvl="0" indent="0" algn="ctr" rtl="0">
-                        <a:spcBef>
-                          <a:spcPts val="0"/>
-                        </a:spcBef>
-                        <a:spcAft>
-                          <a:spcPts val="0"/>
-                        </a:spcAft>
-                        <a:buNone/>
-                      </a:pPr>
-                      <a:r>
-                        <a:rPr lang="en-US" sz="1200" b="1" dirty="0" smtClean="0">
-                          <a:solidFill>
-                            <a:schemeClr val="tx1"/>
-                          </a:solidFill>
-                          <a:latin typeface="Montserrat Medium"/>
-                          <a:ea typeface="Montserrat Medium"/>
-                          <a:cs typeface="Montserrat Medium"/>
-                          <a:sym typeface="Montserrat Medium"/>
-                        </a:rPr>
-                        <a:t>Stable</a:t>
-                      </a:r>
-                      <a:endParaRPr sz="1200" b="1" dirty="0">
-                        <a:solidFill>
-                          <a:schemeClr val="tx1"/>
-                        </a:solidFill>
-                        <a:latin typeface="Montserrat Medium"/>
-                        <a:ea typeface="Montserrat Medium"/>
-                        <a:cs typeface="Montserrat Medium"/>
-                        <a:sym typeface="Montserrat Medium"/>
-                      </a:endParaRPr>
-                    </a:p>
-                  </a:txBody>
-                  <a:tcPr marL="90000" marR="90000" marT="91425" marB="91425" anchor="ctr">
-                    <a:lnL w="12700" cap="flat" cmpd="sng" algn="ctr">
-                      <a:solidFill>
-                        <a:schemeClr val="tx1"/>
-                      </a:solidFill>
-                      <a:prstDash val="solid"/>
-                      <a:round/>
-                      <a:headEnd type="none" w="med" len="med"/>
-                      <a:tailEnd type="none" w="med" len="med"/>
-                    </a:lnL>
-                    <a:lnR w="12700" cap="flat" cmpd="sng" algn="ctr">
-                      <a:solidFill>
-                        <a:schemeClr val="tx1"/>
-                      </a:solidFill>
-                      <a:prstDash val="solid"/>
-                      <a:round/>
-                      <a:headEnd type="none" w="med" len="med"/>
-                      <a:tailEnd type="none" w="med" len="med"/>
-                    </a:lnR>
-                    <a:lnT w="12700" cap="flat" cmpd="sng" algn="ctr">
-                      <a:solidFill>
-                        <a:schemeClr val="tx1"/>
-                      </a:solidFill>
-                      <a:prstDash val="solid"/>
-                      <a:round/>
-                      <a:headEnd type="none" w="med" len="med"/>
-                      <a:tailEnd type="none" w="med" len="med"/>
-                    </a:lnT>
-                    <a:lnB w="12700" cap="flat" cmpd="sng" algn="ctr">
-                      <a:solidFill>
-                        <a:schemeClr val="tx1"/>
-                      </a:solidFill>
-                      <a:prstDash val="solid"/>
-                      <a:round/>
-                      <a:headEnd type="none" w="med" len="med"/>
-                      <a:tailEnd type="none" w="med" len="med"/>
-                    </a:lnB>
-                  </a:tcPr>
-                </a:tc>
-                <a:extLst>
-                  <a:ext uri="{0D108BD9-81ED-4DB2-BD59-A6C34878D82A}">
-                    <a16:rowId xmlns:a16="http://schemas.microsoft.com/office/drawing/2014/main" val="10005"/>
-                  </a:ext>
-                </a:extLst>
-              </a:tr>
-            </a:tbl>
-          </a:graphicData>
-        </a:graphic>
-      </p:graphicFrame>
-    </p:spTree>
-    <p:extLst>
-      <p:ext uri="{BB962C8B-B14F-4D97-AF65-F5344CB8AC3E}">
-        <p14:creationId xmlns:p14="http://schemas.microsoft.com/office/powerpoint/2010/main" val="3897021202"/>
-      </p:ext>
-    </p:extLst>
-  </p:cSld>
-  <p:clrMapOvr>
-    <a:masterClrMapping/>
-  </p:clrMapOvr>
-</p:sld>
-</file>
-
-<file path=ppt/slides/slide9.xml><?xml version="1.0" encoding="utf-8"?>
-<p:sld xmlns:a="http://schemas.openxmlformats.org/drawingml/2006/main" xmlns:r="http://schemas.openxmlformats.org/officeDocument/2006/relationships" xmlns:p="http://schemas.openxmlformats.org/presentationml/2006/main">
-  <p:cSld>
-    <p:spTree>
-      <p:nvGrpSpPr>
-        <p:cNvPr id="1" name="Shape 1612"/>
-        <p:cNvGrpSpPr/>
-        <p:nvPr/>
-      </p:nvGrpSpPr>
-      <p:grpSpPr>
-        <a:xfrm>
-          <a:off x="0" y="0"/>
-          <a:ext cx="0" cy="0"/>
-          <a:chOff x="0" y="0"/>
-          <a:chExt cx="0" cy="0"/>
-        </a:xfrm>
-      </p:grpSpPr>
-      <p:sp>
-        <p:nvSpPr>
-          <p:cNvPr id="1613" name="Google Shape;1613;p57"/>
-          <p:cNvSpPr txBox="1">
-            <a:spLocks noGrp="1"/>
-          </p:cNvSpPr>
-          <p:nvPr>
-            <p:ph type="title"/>
-          </p:nvPr>
-        </p:nvSpPr>
-        <p:spPr>
-          <a:xfrm>
-            <a:off x="1478140" y="159129"/>
-            <a:ext cx="6162501" cy="836928"/>
-          </a:xfrm>
-          <a:prstGeom prst="rect">
-            <a:avLst/>
-          </a:prstGeom>
-        </p:spPr>
-        <p:txBody>
-          <a:bodyPr spcFirstLastPara="1" wrap="square" lIns="90000" tIns="91425" rIns="90000" bIns="91425" anchor="ctr" anchorCtr="0">
-            <a:noAutofit/>
-          </a:bodyPr>
-          <a:lstStyle/>
-          <a:p>
-            <a:pPr marL="0" lvl="0" indent="0" algn="ctr" rtl="0">
-              <a:spcBef>
-                <a:spcPts val="0"/>
-              </a:spcBef>
-              <a:spcAft>
-                <a:spcPts val="0"/>
-              </a:spcAft>
-              <a:buNone/>
-            </a:pPr>
-            <a:r>
-              <a:rPr lang="en" sz="3600" dirty="0"/>
-              <a:t>B</a:t>
-            </a:r>
-            <a:r>
-              <a:rPr lang="en" sz="3600" dirty="0" smtClean="0"/>
-              <a:t>. Non-Functional Cases</a:t>
-            </a:r>
-            <a:endParaRPr sz="3600" dirty="0"/>
-          </a:p>
-        </p:txBody>
-      </p:sp>
-      <p:graphicFrame>
-        <p:nvGraphicFramePr>
-          <p:cNvPr id="89" name="Google Shape;698;p43"/>
-          <p:cNvGraphicFramePr/>
-          <p:nvPr>
-            <p:extLst>
-              <p:ext uri="{D42A27DB-BD31-4B8C-83A1-F6EECF244321}">
-                <p14:modId xmlns:p14="http://schemas.microsoft.com/office/powerpoint/2010/main" val="3530948272"/>
-              </p:ext>
-            </p:extLst>
-          </p:nvPr>
-        </p:nvGraphicFramePr>
-        <p:xfrm>
-          <a:off x="910670" y="1248229"/>
-          <a:ext cx="7447428" cy="3489054"/>
-        </p:xfrm>
-        <a:graphic>
-          <a:graphicData uri="http://schemas.openxmlformats.org/drawingml/2006/table">
-            <a:tbl>
-              <a:tblPr>
-                <a:noFill/>
-              </a:tblPr>
-              <a:tblGrid>
-                <a:gridCol w="2482476">
-                  <a:extLst>
-                    <a:ext uri="{9D8B030D-6E8A-4147-A177-3AD203B41FA5}">
-                      <a16:colId xmlns:a16="http://schemas.microsoft.com/office/drawing/2014/main" val="20000"/>
-                    </a:ext>
-                  </a:extLst>
-                </a:gridCol>
-                <a:gridCol w="2482476">
-                  <a:extLst>
-                    <a:ext uri="{9D8B030D-6E8A-4147-A177-3AD203B41FA5}">
-                      <a16:colId xmlns:a16="http://schemas.microsoft.com/office/drawing/2014/main" val="1186318376"/>
-                    </a:ext>
-                  </a:extLst>
-                </a:gridCol>
-                <a:gridCol w="2482476">
-                  <a:extLst>
-                    <a:ext uri="{9D8B030D-6E8A-4147-A177-3AD203B41FA5}">
-                      <a16:colId xmlns:a16="http://schemas.microsoft.com/office/drawing/2014/main" val="3049769508"/>
-                    </a:ext>
-                  </a:extLst>
-                </a:gridCol>
-              </a:tblGrid>
-              <a:tr h="588889">
-                <a:tc gridSpan="3">
-                  <a:txBody>
-                    <a:bodyPr/>
-                    <a:lstStyle/>
-                    <a:p>
-                      <a:pPr marL="0" lvl="0" indent="0" algn="ctr" rtl="0">
-                        <a:spcBef>
-                          <a:spcPts val="0"/>
-                        </a:spcBef>
-                        <a:spcAft>
-                          <a:spcPts val="0"/>
-                        </a:spcAft>
-                        <a:buNone/>
-                      </a:pPr>
-                      <a:r>
-                        <a:rPr lang="en" sz="2400" b="1" dirty="0" smtClean="0">
-                          <a:solidFill>
-                            <a:schemeClr val="tx1"/>
-                          </a:solidFill>
-                          <a:latin typeface="Montserrat Black"/>
-                          <a:ea typeface="Montserrat Black"/>
-                          <a:cs typeface="Montserrat Black"/>
-                          <a:sym typeface="Montserrat Black"/>
-                        </a:rPr>
-                        <a:t>B2. </a:t>
-                      </a:r>
-                      <a:r>
-                        <a:rPr lang="en-US" sz="2400" b="1" dirty="0" smtClean="0">
-                          <a:solidFill>
-                            <a:schemeClr val="tx1"/>
-                          </a:solidFill>
-                          <a:latin typeface="Montserrat Black"/>
-                          <a:ea typeface="Montserrat Black"/>
-                          <a:cs typeface="Montserrat Black"/>
-                          <a:sym typeface="Montserrat Black"/>
-                        </a:rPr>
-                        <a:t>Usability Testing</a:t>
-                      </a:r>
-                      <a:endParaRPr sz="2400" b="1" dirty="0">
-                        <a:solidFill>
-                          <a:schemeClr val="tx1"/>
-                        </a:solidFill>
-                        <a:latin typeface="Montserrat Black"/>
-                        <a:ea typeface="Montserrat Black"/>
-                        <a:cs typeface="Montserrat Black"/>
-                        <a:sym typeface="Montserrat Black"/>
-                      </a:endParaRPr>
-                    </a:p>
-                  </a:txBody>
-                  <a:tcPr marL="90000" marR="90000" marT="91425" marB="91425" anchor="ctr">
-                    <a:lnL w="12700" cap="flat" cmpd="sng" algn="ctr">
-                      <a:solidFill>
-                        <a:schemeClr val="tx1"/>
-                      </a:solidFill>
-                      <a:prstDash val="solid"/>
-                      <a:round/>
-                      <a:headEnd type="none" w="med" len="med"/>
-                      <a:tailEnd type="none" w="med" len="med"/>
-                    </a:lnL>
-                    <a:lnR w="12700" cap="flat" cmpd="sng" algn="ctr">
-                      <a:solidFill>
-                        <a:schemeClr val="tx1"/>
-                      </a:solidFill>
-                      <a:prstDash val="solid"/>
-                      <a:round/>
-                      <a:headEnd type="none" w="med" len="med"/>
-                      <a:tailEnd type="none" w="med" len="med"/>
-                    </a:lnR>
-                    <a:lnT w="12700" cap="flat" cmpd="sng" algn="ctr">
-                      <a:solidFill>
-                        <a:schemeClr val="tx1"/>
-                      </a:solidFill>
-                      <a:prstDash val="solid"/>
-                      <a:round/>
-                      <a:headEnd type="none" w="med" len="med"/>
-                      <a:tailEnd type="none" w="med" len="med"/>
-                    </a:lnT>
-                    <a:lnB w="12700" cap="flat" cmpd="sng" algn="ctr">
-                      <a:solidFill>
-                        <a:schemeClr val="tx1"/>
-                      </a:solidFill>
-                      <a:prstDash val="solid"/>
-                      <a:round/>
-                      <a:headEnd type="none" w="med" len="med"/>
-                      <a:tailEnd type="none" w="med" len="med"/>
-                    </a:lnB>
-                  </a:tcPr>
-                </a:tc>
-                <a:tc hMerge="1">
-                  <a:txBody>
-                    <a:bodyPr/>
-                    <a:lstStyle/>
-                    <a:p>
-                      <a:endParaRPr lang="en-US"/>
-                    </a:p>
-                  </a:txBody>
-                  <a:tcPr/>
-                </a:tc>
-                <a:tc hMerge="1">
-                  <a:txBody>
-                    <a:bodyPr/>
-                    <a:lstStyle/>
-                    <a:p>
-                      <a:endParaRPr lang="en-US"/>
-                    </a:p>
-                  </a:txBody>
-                  <a:tcPr/>
-                </a:tc>
-                <a:extLst>
-                  <a:ext uri="{0D108BD9-81ED-4DB2-BD59-A6C34878D82A}">
-                    <a16:rowId xmlns:a16="http://schemas.microsoft.com/office/drawing/2014/main" val="10000"/>
-                  </a:ext>
-                </a:extLst>
-              </a:tr>
-              <a:tr h="654335">
-                <a:tc>
-                  <a:txBody>
-                    <a:bodyPr/>
-                    <a:lstStyle/>
-                    <a:p>
-                      <a:pPr marL="0" lvl="0" indent="0" algn="ctr" rtl="0">
-                        <a:spcBef>
-                          <a:spcPts val="0"/>
-                        </a:spcBef>
-                        <a:spcAft>
-                          <a:spcPts val="0"/>
-                        </a:spcAft>
-                        <a:buNone/>
-                      </a:pPr>
-                      <a:r>
-                        <a:rPr lang="en" b="1" dirty="0" smtClean="0">
-                          <a:solidFill>
-                            <a:schemeClr val="tx1"/>
-                          </a:solidFill>
-                          <a:latin typeface="Montserrat Medium"/>
-                          <a:ea typeface="Montserrat Medium"/>
-                          <a:cs typeface="Montserrat Medium"/>
-                          <a:sym typeface="Montserrat Medium"/>
-                        </a:rPr>
-                        <a:t>TEST</a:t>
-                      </a:r>
-                      <a:r>
-                        <a:rPr lang="en" b="1" baseline="0" dirty="0" smtClean="0">
-                          <a:solidFill>
-                            <a:schemeClr val="tx1"/>
-                          </a:solidFill>
-                          <a:latin typeface="Montserrat Medium"/>
-                          <a:ea typeface="Montserrat Medium"/>
-                          <a:cs typeface="Montserrat Medium"/>
-                          <a:sym typeface="Montserrat Medium"/>
-                        </a:rPr>
-                        <a:t> ID</a:t>
-                      </a:r>
-                      <a:endParaRPr b="1" dirty="0">
-                        <a:solidFill>
-                          <a:schemeClr val="tx1"/>
-                        </a:solidFill>
-                        <a:latin typeface="Montserrat Medium"/>
-                        <a:ea typeface="Montserrat Medium"/>
-                        <a:cs typeface="Montserrat Medium"/>
-                        <a:sym typeface="Montserrat Medium"/>
-                      </a:endParaRPr>
-                    </a:p>
-                  </a:txBody>
-                  <a:tcPr marL="90000" marR="90000" marT="91425" marB="91425" anchor="ctr">
-                    <a:lnL w="12700" cap="flat" cmpd="sng" algn="ctr">
-                      <a:solidFill>
-                        <a:schemeClr val="tx1"/>
-                      </a:solidFill>
-                      <a:prstDash val="solid"/>
-                      <a:round/>
-                      <a:headEnd type="none" w="med" len="med"/>
-                      <a:tailEnd type="none" w="med" len="med"/>
-                    </a:lnL>
-                    <a:lnR w="12700" cap="flat" cmpd="sng" algn="ctr">
-                      <a:solidFill>
-                        <a:schemeClr val="tx1"/>
-                      </a:solidFill>
-                      <a:prstDash val="solid"/>
-                      <a:round/>
-                      <a:headEnd type="none" w="med" len="med"/>
-                      <a:tailEnd type="none" w="med" len="med"/>
-                    </a:lnR>
-                    <a:lnT w="12700" cap="flat" cmpd="sng" algn="ctr">
-                      <a:solidFill>
-                        <a:schemeClr val="tx1"/>
-                      </a:solidFill>
-                      <a:prstDash val="solid"/>
-                      <a:round/>
-                      <a:headEnd type="none" w="med" len="med"/>
-                      <a:tailEnd type="none" w="med" len="med"/>
-                    </a:lnT>
-                    <a:lnB w="12700" cap="flat" cmpd="sng" algn="ctr">
-                      <a:solidFill>
-                        <a:schemeClr val="tx1"/>
-                      </a:solidFill>
-                      <a:prstDash val="solid"/>
-                      <a:round/>
-                      <a:headEnd type="none" w="med" len="med"/>
-                      <a:tailEnd type="none" w="med" len="med"/>
-                    </a:lnB>
-                  </a:tcPr>
-                </a:tc>
-                <a:tc>
-                  <a:txBody>
-                    <a:bodyPr/>
-                    <a:lstStyle/>
-                    <a:p>
-                      <a:pPr marL="0" lvl="0" indent="0" algn="ctr" rtl="0">
-                        <a:spcBef>
-                          <a:spcPts val="0"/>
-                        </a:spcBef>
-                        <a:spcAft>
-                          <a:spcPts val="0"/>
-                        </a:spcAft>
-                        <a:buNone/>
-                      </a:pPr>
-                      <a:r>
-                        <a:rPr lang="en" b="1" dirty="0" smtClean="0">
-                          <a:solidFill>
-                            <a:schemeClr val="tx1"/>
-                          </a:solidFill>
-                          <a:latin typeface="Montserrat Medium"/>
-                          <a:ea typeface="Montserrat Medium"/>
-                          <a:cs typeface="Montserrat Medium"/>
-                          <a:sym typeface="Montserrat Medium"/>
-                        </a:rPr>
-                        <a:t>TEST</a:t>
-                      </a:r>
-                      <a:r>
-                        <a:rPr lang="en" b="1" baseline="0" dirty="0" smtClean="0">
-                          <a:solidFill>
-                            <a:schemeClr val="tx1"/>
-                          </a:solidFill>
-                          <a:latin typeface="Montserrat Medium"/>
-                          <a:ea typeface="Montserrat Medium"/>
-                          <a:cs typeface="Montserrat Medium"/>
-                          <a:sym typeface="Montserrat Medium"/>
-                        </a:rPr>
-                        <a:t> CASE</a:t>
-                      </a:r>
-                      <a:endParaRPr b="1" dirty="0">
-                        <a:solidFill>
-                          <a:schemeClr val="tx1"/>
-                        </a:solidFill>
-                        <a:latin typeface="Montserrat Medium"/>
-                        <a:ea typeface="Montserrat Medium"/>
-                        <a:cs typeface="Montserrat Medium"/>
-                        <a:sym typeface="Montserrat Medium"/>
-                      </a:endParaRPr>
-                    </a:p>
-                  </a:txBody>
-                  <a:tcPr marL="90000" marR="90000" marT="91425" marB="91425" anchor="ctr">
-                    <a:lnL w="12700" cap="flat" cmpd="sng" algn="ctr">
-                      <a:solidFill>
-                        <a:schemeClr val="tx1"/>
-                      </a:solidFill>
-                      <a:prstDash val="solid"/>
-                      <a:round/>
-                      <a:headEnd type="none" w="med" len="med"/>
-                      <a:tailEnd type="none" w="med" len="med"/>
-                    </a:lnL>
-                    <a:lnR w="12700" cap="flat" cmpd="sng" algn="ctr">
-                      <a:solidFill>
-                        <a:schemeClr val="tx1"/>
-                      </a:solidFill>
-                      <a:prstDash val="solid"/>
-                      <a:round/>
-                      <a:headEnd type="none" w="med" len="med"/>
-                      <a:tailEnd type="none" w="med" len="med"/>
-                    </a:lnR>
-                    <a:lnT w="12700" cap="flat" cmpd="sng" algn="ctr">
-                      <a:solidFill>
-                        <a:schemeClr val="tx1"/>
-                      </a:solidFill>
-                      <a:prstDash val="solid"/>
-                      <a:round/>
-                      <a:headEnd type="none" w="med" len="med"/>
-                      <a:tailEnd type="none" w="med" len="med"/>
-                    </a:lnT>
-                    <a:lnB w="12700" cap="flat" cmpd="sng" algn="ctr">
-                      <a:solidFill>
-                        <a:schemeClr val="tx1"/>
-                      </a:solidFill>
-                      <a:prstDash val="solid"/>
-                      <a:round/>
-                      <a:headEnd type="none" w="med" len="med"/>
-                      <a:tailEnd type="none" w="med" len="med"/>
-                    </a:lnB>
-                  </a:tcPr>
-                </a:tc>
-                <a:tc>
-                  <a:txBody>
-                    <a:bodyPr/>
-                    <a:lstStyle/>
-                    <a:p>
-                      <a:pPr marL="0" lvl="0" indent="0" algn="ctr" rtl="0">
-                        <a:spcBef>
-                          <a:spcPts val="0"/>
-                        </a:spcBef>
-                        <a:spcAft>
-                          <a:spcPts val="0"/>
-                        </a:spcAft>
-                        <a:buNone/>
-                      </a:pPr>
-                      <a:r>
-                        <a:rPr lang="en" b="1" dirty="0" smtClean="0">
-                          <a:solidFill>
-                            <a:schemeClr val="tx1"/>
-                          </a:solidFill>
-                          <a:latin typeface="Montserrat Medium"/>
-                          <a:ea typeface="Montserrat Medium"/>
-                          <a:cs typeface="Montserrat Medium"/>
-                          <a:sym typeface="Montserrat Medium"/>
-                        </a:rPr>
-                        <a:t>EXPECTED</a:t>
-                      </a:r>
-                      <a:r>
-                        <a:rPr lang="en" b="1" baseline="0" dirty="0" smtClean="0">
-                          <a:solidFill>
-                            <a:schemeClr val="tx1"/>
-                          </a:solidFill>
-                          <a:latin typeface="Montserrat Medium"/>
-                          <a:ea typeface="Montserrat Medium"/>
-                          <a:cs typeface="Montserrat Medium"/>
-                          <a:sym typeface="Montserrat Medium"/>
-                        </a:rPr>
-                        <a:t> RESULT</a:t>
-                      </a:r>
-                      <a:endParaRPr b="1" dirty="0">
-                        <a:solidFill>
-                          <a:schemeClr val="tx1"/>
-                        </a:solidFill>
-                        <a:latin typeface="Montserrat Medium"/>
-                        <a:ea typeface="Montserrat Medium"/>
-                        <a:cs typeface="Montserrat Medium"/>
-                        <a:sym typeface="Montserrat Medium"/>
-                      </a:endParaRPr>
-                    </a:p>
-                  </a:txBody>
-                  <a:tcPr marL="90000" marR="90000" marT="91425" marB="91425" anchor="ctr">
-                    <a:lnL w="12700" cap="flat" cmpd="sng" algn="ctr">
-                      <a:solidFill>
-                        <a:schemeClr val="tx1"/>
-                      </a:solidFill>
-                      <a:prstDash val="solid"/>
-                      <a:round/>
-                      <a:headEnd type="none" w="med" len="med"/>
-                      <a:tailEnd type="none" w="med" len="med"/>
-                    </a:lnL>
-                    <a:lnR w="12700" cap="flat" cmpd="sng" algn="ctr">
-                      <a:solidFill>
-                        <a:schemeClr val="tx1"/>
-                      </a:solidFill>
-                      <a:prstDash val="solid"/>
-                      <a:round/>
-                      <a:headEnd type="none" w="med" len="med"/>
-                      <a:tailEnd type="none" w="med" len="med"/>
-                    </a:lnR>
-                    <a:lnT w="12700" cap="flat" cmpd="sng" algn="ctr">
-                      <a:solidFill>
-                        <a:schemeClr val="tx1"/>
-                      </a:solidFill>
-                      <a:prstDash val="solid"/>
-                      <a:round/>
-                      <a:headEnd type="none" w="med" len="med"/>
-                      <a:tailEnd type="none" w="med" len="med"/>
-                    </a:lnT>
-                    <a:lnB w="12700" cap="flat" cmpd="sng" algn="ctr">
-                      <a:solidFill>
-                        <a:schemeClr val="tx1"/>
-                      </a:solidFill>
-                      <a:prstDash val="solid"/>
-                      <a:round/>
-                      <a:headEnd type="none" w="med" len="med"/>
-                      <a:tailEnd type="none" w="med" len="med"/>
-                    </a:lnB>
-                  </a:tcPr>
-                </a:tc>
-                <a:extLst>
-                  <a:ext uri="{0D108BD9-81ED-4DB2-BD59-A6C34878D82A}">
-                    <a16:rowId xmlns:a16="http://schemas.microsoft.com/office/drawing/2014/main" val="10001"/>
-                  </a:ext>
-                </a:extLst>
-              </a:tr>
-              <a:tr h="538803">
-                <a:tc>
-                  <a:txBody>
-                    <a:bodyPr/>
-                    <a:lstStyle/>
-                    <a:p>
-                      <a:pPr marL="0" lvl="0" indent="0" algn="ctr" rtl="0">
-                        <a:spcBef>
-                          <a:spcPts val="0"/>
-                        </a:spcBef>
-                        <a:spcAft>
-                          <a:spcPts val="0"/>
-                        </a:spcAft>
-                        <a:buNone/>
-                      </a:pPr>
-                      <a:r>
-                        <a:rPr lang="en" sz="1600" b="1" dirty="0" smtClean="0">
-                          <a:solidFill>
-                            <a:schemeClr val="tx1"/>
-                          </a:solidFill>
-                          <a:latin typeface="Montserrat Black"/>
-                          <a:ea typeface="Montserrat Black"/>
-                          <a:cs typeface="Montserrat Black"/>
-                          <a:sym typeface="Montserrat Black"/>
-                        </a:rPr>
-                        <a:t>TC-29</a:t>
-                      </a:r>
-                      <a:endParaRPr sz="1600" b="1" dirty="0">
-                        <a:solidFill>
-                          <a:schemeClr val="tx1"/>
-                        </a:solidFill>
-                        <a:latin typeface="Montserrat Black"/>
-                        <a:ea typeface="Montserrat Black"/>
-                        <a:cs typeface="Montserrat Black"/>
-                        <a:sym typeface="Montserrat Black"/>
-                      </a:endParaRPr>
-                    </a:p>
-                  </a:txBody>
-                  <a:tcPr marL="90000" marR="90000" marT="91425" marB="91425" anchor="ctr">
-                    <a:lnL w="12700" cap="flat" cmpd="sng" algn="ctr">
-                      <a:solidFill>
-                        <a:schemeClr val="tx1"/>
-                      </a:solidFill>
-                      <a:prstDash val="solid"/>
-                      <a:round/>
-                      <a:headEnd type="none" w="med" len="med"/>
-                      <a:tailEnd type="none" w="med" len="med"/>
-                    </a:lnL>
-                    <a:lnR w="12700" cap="flat" cmpd="sng" algn="ctr">
-                      <a:solidFill>
-                        <a:schemeClr val="tx1"/>
-                      </a:solidFill>
-                      <a:prstDash val="solid"/>
-                      <a:round/>
-                      <a:headEnd type="none" w="med" len="med"/>
-                      <a:tailEnd type="none" w="med" len="med"/>
-                    </a:lnR>
-                    <a:lnT w="12700" cap="flat" cmpd="sng" algn="ctr">
-                      <a:solidFill>
-                        <a:schemeClr val="tx1"/>
-                      </a:solidFill>
-                      <a:prstDash val="solid"/>
-                      <a:round/>
-                      <a:headEnd type="none" w="med" len="med"/>
-                      <a:tailEnd type="none" w="med" len="med"/>
-                    </a:lnT>
-                    <a:lnB w="12700" cap="flat" cmpd="sng" algn="ctr">
-                      <a:solidFill>
-                        <a:schemeClr val="tx1"/>
-                      </a:solidFill>
-                      <a:prstDash val="solid"/>
-                      <a:round/>
-                      <a:headEnd type="none" w="med" len="med"/>
-                      <a:tailEnd type="none" w="med" len="med"/>
-                    </a:lnB>
-                  </a:tcPr>
-                </a:tc>
-                <a:tc>
-                  <a:txBody>
-                    <a:bodyPr/>
-                    <a:lstStyle/>
-                    <a:p>
-                      <a:pPr marL="0" lvl="0" indent="0" algn="ctr" rtl="0">
-                        <a:spcBef>
-                          <a:spcPts val="0"/>
-                        </a:spcBef>
-                        <a:spcAft>
-                          <a:spcPts val="0"/>
-                        </a:spcAft>
-                        <a:buNone/>
-                      </a:pPr>
-                      <a:r>
-                        <a:rPr lang="en-US" sz="1200" b="1" dirty="0" smtClean="0">
-                          <a:solidFill>
-                            <a:schemeClr val="tx1"/>
-                          </a:solidFill>
-                          <a:latin typeface="Montserrat Medium"/>
-                          <a:ea typeface="Montserrat Medium"/>
-                          <a:cs typeface="Montserrat Medium"/>
-                          <a:sym typeface="Montserrat Medium"/>
-                        </a:rPr>
-                        <a:t>First-time user</a:t>
-                      </a:r>
-                      <a:endParaRPr sz="1200" b="1" dirty="0">
-                        <a:solidFill>
-                          <a:schemeClr val="tx1"/>
-                        </a:solidFill>
-                        <a:latin typeface="Montserrat Medium"/>
-                        <a:ea typeface="Montserrat Medium"/>
-                        <a:cs typeface="Montserrat Medium"/>
-                        <a:sym typeface="Montserrat Medium"/>
-                      </a:endParaRPr>
-                    </a:p>
-                  </a:txBody>
-                  <a:tcPr marL="90000" marR="90000" marT="91425" marB="91425" anchor="ctr">
-                    <a:lnL w="12700" cap="flat" cmpd="sng" algn="ctr">
-                      <a:solidFill>
-                        <a:schemeClr val="tx1"/>
-                      </a:solidFill>
-                      <a:prstDash val="solid"/>
-                      <a:round/>
-                      <a:headEnd type="none" w="med" len="med"/>
-                      <a:tailEnd type="none" w="med" len="med"/>
-                    </a:lnL>
-                    <a:lnR w="12700" cap="flat" cmpd="sng" algn="ctr">
-                      <a:solidFill>
-                        <a:schemeClr val="tx1"/>
-                      </a:solidFill>
-                      <a:prstDash val="solid"/>
-                      <a:round/>
-                      <a:headEnd type="none" w="med" len="med"/>
-                      <a:tailEnd type="none" w="med" len="med"/>
-                    </a:lnR>
-                    <a:lnT w="12700" cap="flat" cmpd="sng" algn="ctr">
-                      <a:solidFill>
-                        <a:schemeClr val="tx1"/>
-                      </a:solidFill>
-                      <a:prstDash val="solid"/>
-                      <a:round/>
-                      <a:headEnd type="none" w="med" len="med"/>
-                      <a:tailEnd type="none" w="med" len="med"/>
-                    </a:lnT>
-                    <a:lnB w="12700" cap="flat" cmpd="sng" algn="ctr">
-                      <a:solidFill>
-                        <a:schemeClr val="tx1"/>
-                      </a:solidFill>
-                      <a:prstDash val="solid"/>
-                      <a:round/>
-                      <a:headEnd type="none" w="med" len="med"/>
-                      <a:tailEnd type="none" w="med" len="med"/>
-                    </a:lnB>
-                  </a:tcPr>
-                </a:tc>
-                <a:tc>
-                  <a:txBody>
-                    <a:bodyPr/>
-                    <a:lstStyle/>
-                    <a:p>
-                      <a:pPr marL="0" lvl="0" indent="0" algn="ctr" rtl="0">
-                        <a:spcBef>
-                          <a:spcPts val="0"/>
-                        </a:spcBef>
-                        <a:spcAft>
-                          <a:spcPts val="0"/>
-                        </a:spcAft>
-                        <a:buNone/>
-                      </a:pPr>
-                      <a:r>
-                        <a:rPr lang="en-US" sz="1200" b="1" dirty="0" smtClean="0">
-                          <a:solidFill>
-                            <a:schemeClr val="tx1"/>
-                          </a:solidFill>
-                          <a:latin typeface="Montserrat Medium"/>
-                          <a:ea typeface="Montserrat Medium"/>
-                          <a:cs typeface="Montserrat Medium"/>
-                          <a:sym typeface="Montserrat Medium"/>
-                        </a:rPr>
-                        <a:t>Can run without help</a:t>
-                      </a:r>
-                      <a:endParaRPr sz="1200" b="1" dirty="0">
-                        <a:solidFill>
-                          <a:schemeClr val="tx1"/>
-                        </a:solidFill>
-                        <a:latin typeface="Montserrat Medium"/>
-                        <a:ea typeface="Montserrat Medium"/>
-                        <a:cs typeface="Montserrat Medium"/>
-                        <a:sym typeface="Montserrat Medium"/>
-                      </a:endParaRPr>
-                    </a:p>
-                  </a:txBody>
-                  <a:tcPr marL="90000" marR="90000" marT="91425" marB="91425" anchor="ctr">
-                    <a:lnL w="12700" cap="flat" cmpd="sng" algn="ctr">
-                      <a:solidFill>
-                        <a:schemeClr val="tx1"/>
-                      </a:solidFill>
-                      <a:prstDash val="solid"/>
-                      <a:round/>
-                      <a:headEnd type="none" w="med" len="med"/>
-                      <a:tailEnd type="none" w="med" len="med"/>
-                    </a:lnL>
-                    <a:lnR w="12700" cap="flat" cmpd="sng" algn="ctr">
-                      <a:solidFill>
-                        <a:schemeClr val="tx1"/>
-                      </a:solidFill>
-                      <a:prstDash val="solid"/>
-                      <a:round/>
-                      <a:headEnd type="none" w="med" len="med"/>
-                      <a:tailEnd type="none" w="med" len="med"/>
-                    </a:lnR>
-                    <a:lnT w="12700" cap="flat" cmpd="sng" algn="ctr">
-                      <a:solidFill>
-                        <a:schemeClr val="tx1"/>
-                      </a:solidFill>
-                      <a:prstDash val="solid"/>
-                      <a:round/>
-                      <a:headEnd type="none" w="med" len="med"/>
-                      <a:tailEnd type="none" w="med" len="med"/>
-                    </a:lnT>
-                    <a:lnB w="12700" cap="flat" cmpd="sng" algn="ctr">
-                      <a:solidFill>
-                        <a:schemeClr val="tx1"/>
-                      </a:solidFill>
-                      <a:prstDash val="solid"/>
-                      <a:round/>
-                      <a:headEnd type="none" w="med" len="med"/>
-                      <a:tailEnd type="none" w="med" len="med"/>
-                    </a:lnB>
-                  </a:tcPr>
-                </a:tc>
-                <a:extLst>
-                  <a:ext uri="{0D108BD9-81ED-4DB2-BD59-A6C34878D82A}">
-                    <a16:rowId xmlns:a16="http://schemas.microsoft.com/office/drawing/2014/main" val="10002"/>
-                  </a:ext>
-                </a:extLst>
-              </a:tr>
-              <a:tr h="569009">
-                <a:tc>
-                  <a:txBody>
-                    <a:bodyPr/>
-                    <a:lstStyle/>
-                    <a:p>
-                      <a:pPr marL="0" lvl="0" indent="0" algn="ctr" rtl="0">
-                        <a:spcBef>
-                          <a:spcPts val="0"/>
-                        </a:spcBef>
-                        <a:spcAft>
-                          <a:spcPts val="0"/>
-                        </a:spcAft>
-                        <a:buNone/>
-                      </a:pPr>
-                      <a:r>
-                        <a:rPr lang="en" sz="1600" b="1" dirty="0" smtClean="0">
-                          <a:solidFill>
-                            <a:schemeClr val="tx1"/>
-                          </a:solidFill>
-                          <a:latin typeface="Montserrat Black"/>
-                          <a:ea typeface="Montserrat Black"/>
-                          <a:cs typeface="Montserrat Black"/>
-                          <a:sym typeface="Montserrat Black"/>
-                        </a:rPr>
-                        <a:t>TC-30</a:t>
-                      </a:r>
-                      <a:endParaRPr sz="1600" b="1" dirty="0">
-                        <a:solidFill>
-                          <a:schemeClr val="tx1"/>
-                        </a:solidFill>
-                        <a:latin typeface="Montserrat Black"/>
-                        <a:ea typeface="Montserrat Black"/>
-                        <a:cs typeface="Montserrat Black"/>
-                        <a:sym typeface="Montserrat Black"/>
-                      </a:endParaRPr>
-                    </a:p>
-                  </a:txBody>
-                  <a:tcPr marL="90000" marR="90000" marT="91425" marB="91425" anchor="ctr">
-                    <a:lnL w="12700" cap="flat" cmpd="sng" algn="ctr">
-                      <a:solidFill>
-                        <a:schemeClr val="tx1"/>
-                      </a:solidFill>
-                      <a:prstDash val="solid"/>
-                      <a:round/>
-                      <a:headEnd type="none" w="med" len="med"/>
-                      <a:tailEnd type="none" w="med" len="med"/>
-                    </a:lnL>
-                    <a:lnR w="12700" cap="flat" cmpd="sng" algn="ctr">
-                      <a:solidFill>
-                        <a:schemeClr val="tx1"/>
-                      </a:solidFill>
-                      <a:prstDash val="solid"/>
-                      <a:round/>
-                      <a:headEnd type="none" w="med" len="med"/>
-                      <a:tailEnd type="none" w="med" len="med"/>
-                    </a:lnR>
-                    <a:lnT w="12700" cap="flat" cmpd="sng" algn="ctr">
-                      <a:solidFill>
-                        <a:schemeClr val="tx1"/>
-                      </a:solidFill>
-                      <a:prstDash val="solid"/>
-                      <a:round/>
-                      <a:headEnd type="none" w="med" len="med"/>
-                      <a:tailEnd type="none" w="med" len="med"/>
-                    </a:lnT>
-                    <a:lnB w="12700" cap="flat" cmpd="sng" algn="ctr">
-                      <a:solidFill>
-                        <a:schemeClr val="tx1"/>
-                      </a:solidFill>
-                      <a:prstDash val="solid"/>
-                      <a:round/>
-                      <a:headEnd type="none" w="med" len="med"/>
-                      <a:tailEnd type="none" w="med" len="med"/>
-                    </a:lnB>
-                  </a:tcPr>
-                </a:tc>
-                <a:tc>
-                  <a:txBody>
-                    <a:bodyPr/>
-                    <a:lstStyle/>
-                    <a:p>
-                      <a:pPr marL="0" lvl="0" indent="0" algn="ctr" rtl="0">
-                        <a:spcBef>
-                          <a:spcPts val="0"/>
-                        </a:spcBef>
-                        <a:spcAft>
-                          <a:spcPts val="0"/>
-                        </a:spcAft>
-                        <a:buNone/>
-                      </a:pPr>
-                      <a:r>
-                        <a:rPr lang="en-US" sz="1200" b="1" dirty="0" smtClean="0">
-                          <a:solidFill>
-                            <a:schemeClr val="tx1"/>
-                          </a:solidFill>
-                          <a:latin typeface="Montserrat Medium"/>
-                          <a:ea typeface="Montserrat Medium"/>
-                          <a:cs typeface="Montserrat Medium"/>
-                          <a:sym typeface="Montserrat Medium"/>
-                        </a:rPr>
-                        <a:t>UI clarity</a:t>
-                      </a:r>
-                      <a:endParaRPr sz="1200" b="1" dirty="0">
-                        <a:solidFill>
-                          <a:schemeClr val="tx1"/>
-                        </a:solidFill>
-                        <a:latin typeface="Montserrat Medium"/>
-                        <a:ea typeface="Montserrat Medium"/>
-                        <a:cs typeface="Montserrat Medium"/>
-                        <a:sym typeface="Montserrat Medium"/>
-                      </a:endParaRPr>
-                    </a:p>
-                  </a:txBody>
-                  <a:tcPr marL="90000" marR="90000" marT="91425" marB="91425" anchor="ctr">
-                    <a:lnL w="12700" cap="flat" cmpd="sng" algn="ctr">
-                      <a:solidFill>
-                        <a:schemeClr val="tx1"/>
-                      </a:solidFill>
-                      <a:prstDash val="solid"/>
-                      <a:round/>
-                      <a:headEnd type="none" w="med" len="med"/>
-                      <a:tailEnd type="none" w="med" len="med"/>
-                    </a:lnL>
-                    <a:lnR w="12700" cap="flat" cmpd="sng" algn="ctr">
-                      <a:solidFill>
-                        <a:schemeClr val="tx1"/>
-                      </a:solidFill>
-                      <a:prstDash val="solid"/>
-                      <a:round/>
-                      <a:headEnd type="none" w="med" len="med"/>
-                      <a:tailEnd type="none" w="med" len="med"/>
-                    </a:lnR>
-                    <a:lnT w="12700" cap="flat" cmpd="sng" algn="ctr">
-                      <a:solidFill>
-                        <a:schemeClr val="tx1"/>
-                      </a:solidFill>
-                      <a:prstDash val="solid"/>
-                      <a:round/>
-                      <a:headEnd type="none" w="med" len="med"/>
-                      <a:tailEnd type="none" w="med" len="med"/>
-                    </a:lnT>
-                    <a:lnB w="12700" cap="flat" cmpd="sng" algn="ctr">
-                      <a:solidFill>
-                        <a:schemeClr val="tx1"/>
-                      </a:solidFill>
-                      <a:prstDash val="solid"/>
-                      <a:round/>
-                      <a:headEnd type="none" w="med" len="med"/>
-                      <a:tailEnd type="none" w="med" len="med"/>
-                    </a:lnB>
-                  </a:tcPr>
-                </a:tc>
-                <a:tc>
-                  <a:txBody>
-                    <a:bodyPr/>
-                    <a:lstStyle/>
-                    <a:p>
-                      <a:pPr marL="0" lvl="0" indent="0" algn="ctr" rtl="0">
-                        <a:spcBef>
-                          <a:spcPts val="0"/>
-                        </a:spcBef>
-                        <a:spcAft>
-                          <a:spcPts val="0"/>
-                        </a:spcAft>
-                        <a:buNone/>
-                      </a:pPr>
-                      <a:r>
-                        <a:rPr lang="en-US" sz="1200" b="1" dirty="0" smtClean="0">
-                          <a:solidFill>
-                            <a:schemeClr val="tx1"/>
-                          </a:solidFill>
-                          <a:latin typeface="Montserrat Medium"/>
-                          <a:ea typeface="Montserrat Medium"/>
-                          <a:cs typeface="Montserrat Medium"/>
-                          <a:sym typeface="Montserrat Medium"/>
-                        </a:rPr>
-                        <a:t>Buttons understandable</a:t>
-                      </a:r>
-                      <a:endParaRPr sz="1200" b="1" dirty="0">
-                        <a:solidFill>
-                          <a:schemeClr val="tx1"/>
-                        </a:solidFill>
-                        <a:latin typeface="Montserrat Medium"/>
-                        <a:ea typeface="Montserrat Medium"/>
-                        <a:cs typeface="Montserrat Medium"/>
-                        <a:sym typeface="Montserrat Medium"/>
-                      </a:endParaRPr>
-                    </a:p>
-                  </a:txBody>
-                  <a:tcPr marL="90000" marR="90000" marT="91425" marB="91425" anchor="ctr">
-                    <a:lnL w="12700" cap="flat" cmpd="sng" algn="ctr">
-                      <a:solidFill>
-                        <a:schemeClr val="tx1"/>
-                      </a:solidFill>
-                      <a:prstDash val="solid"/>
-                      <a:round/>
-                      <a:headEnd type="none" w="med" len="med"/>
-                      <a:tailEnd type="none" w="med" len="med"/>
-                    </a:lnL>
-                    <a:lnR w="12700" cap="flat" cmpd="sng" algn="ctr">
-                      <a:solidFill>
-                        <a:schemeClr val="tx1"/>
-                      </a:solidFill>
-                      <a:prstDash val="solid"/>
-                      <a:round/>
-                      <a:headEnd type="none" w="med" len="med"/>
-                      <a:tailEnd type="none" w="med" len="med"/>
-                    </a:lnR>
-                    <a:lnT w="12700" cap="flat" cmpd="sng" algn="ctr">
-                      <a:solidFill>
-                        <a:schemeClr val="tx1"/>
-                      </a:solidFill>
-                      <a:prstDash val="solid"/>
-                      <a:round/>
-                      <a:headEnd type="none" w="med" len="med"/>
-                      <a:tailEnd type="none" w="med" len="med"/>
-                    </a:lnT>
-                    <a:lnB w="12700" cap="flat" cmpd="sng" algn="ctr">
-                      <a:solidFill>
-                        <a:schemeClr val="tx1"/>
-                      </a:solidFill>
-                      <a:prstDash val="solid"/>
-                      <a:round/>
-                      <a:headEnd type="none" w="med" len="med"/>
-                      <a:tailEnd type="none" w="med" len="med"/>
-                    </a:lnB>
-                  </a:tcPr>
-                </a:tc>
-                <a:extLst>
-                  <a:ext uri="{0D108BD9-81ED-4DB2-BD59-A6C34878D82A}">
-                    <a16:rowId xmlns:a16="http://schemas.microsoft.com/office/drawing/2014/main" val="10003"/>
-                  </a:ext>
-                </a:extLst>
-              </a:tr>
-              <a:tr h="569009">
-                <a:tc>
-                  <a:txBody>
-                    <a:bodyPr/>
-                    <a:lstStyle/>
-                    <a:p>
-                      <a:pPr marL="0" lvl="0" indent="0" algn="ctr" rtl="0">
-                        <a:spcBef>
-                          <a:spcPts val="0"/>
-                        </a:spcBef>
-                        <a:spcAft>
-                          <a:spcPts val="0"/>
-                        </a:spcAft>
-                        <a:buNone/>
-                      </a:pPr>
-                      <a:r>
-                        <a:rPr lang="en" sz="1600" b="1" dirty="0" smtClean="0">
-                          <a:solidFill>
-                            <a:schemeClr val="tx1"/>
-                          </a:solidFill>
-                          <a:latin typeface="Montserrat Black"/>
-                          <a:ea typeface="Montserrat Black"/>
-                          <a:cs typeface="Montserrat Black"/>
-                          <a:sym typeface="Montserrat Black"/>
-                        </a:rPr>
-                        <a:t>TC-31</a:t>
-                      </a:r>
-                      <a:endParaRPr sz="1600" b="1" dirty="0">
-                        <a:solidFill>
-                          <a:schemeClr val="tx1"/>
-                        </a:solidFill>
-                        <a:latin typeface="Montserrat Black"/>
-                        <a:ea typeface="Montserrat Black"/>
-                        <a:cs typeface="Montserrat Black"/>
-                        <a:sym typeface="Montserrat Black"/>
-                      </a:endParaRPr>
-                    </a:p>
-                  </a:txBody>
-                  <a:tcPr marL="90000" marR="90000" marT="91425" marB="91425" anchor="ctr">
-                    <a:lnL w="12700" cap="flat" cmpd="sng" algn="ctr">
-                      <a:solidFill>
-                        <a:schemeClr val="tx1"/>
-                      </a:solidFill>
-                      <a:prstDash val="solid"/>
-                      <a:round/>
-                      <a:headEnd type="none" w="med" len="med"/>
-                      <a:tailEnd type="none" w="med" len="med"/>
-                    </a:lnL>
-                    <a:lnR w="12700" cap="flat" cmpd="sng" algn="ctr">
-                      <a:solidFill>
-                        <a:schemeClr val="tx1"/>
-                      </a:solidFill>
-                      <a:prstDash val="solid"/>
-                      <a:round/>
-                      <a:headEnd type="none" w="med" len="med"/>
-                      <a:tailEnd type="none" w="med" len="med"/>
-                    </a:lnR>
-                    <a:lnT w="12700" cap="flat" cmpd="sng" algn="ctr">
-                      <a:solidFill>
-                        <a:schemeClr val="tx1"/>
-                      </a:solidFill>
-                      <a:prstDash val="solid"/>
-                      <a:round/>
-                      <a:headEnd type="none" w="med" len="med"/>
-                      <a:tailEnd type="none" w="med" len="med"/>
-                    </a:lnT>
-                    <a:lnB w="12700" cap="flat" cmpd="sng" algn="ctr">
-                      <a:solidFill>
-                        <a:schemeClr val="tx1"/>
-                      </a:solidFill>
-                      <a:prstDash val="solid"/>
-                      <a:round/>
-                      <a:headEnd type="none" w="med" len="med"/>
-                      <a:tailEnd type="none" w="med" len="med"/>
-                    </a:lnB>
-                  </a:tcPr>
-                </a:tc>
-                <a:tc>
-                  <a:txBody>
-                    <a:bodyPr/>
-                    <a:lstStyle/>
-                    <a:p>
-                      <a:pPr marL="0" lvl="0" indent="0" algn="ctr" rtl="0">
-                        <a:spcBef>
-                          <a:spcPts val="0"/>
-                        </a:spcBef>
-                        <a:spcAft>
-                          <a:spcPts val="0"/>
-                        </a:spcAft>
-                        <a:buNone/>
-                      </a:pPr>
-                      <a:r>
-                        <a:rPr lang="en-US" sz="1200" b="1" dirty="0" smtClean="0">
-                          <a:solidFill>
-                            <a:schemeClr val="tx1"/>
-                          </a:solidFill>
-                          <a:latin typeface="Montserrat Medium"/>
-                          <a:ea typeface="Montserrat Medium"/>
-                          <a:cs typeface="Montserrat Medium"/>
-                          <a:sym typeface="Montserrat Medium"/>
-                        </a:rPr>
-                        <a:t>Report readability</a:t>
-                      </a:r>
-                      <a:endParaRPr sz="1200" b="1" dirty="0">
-                        <a:solidFill>
-                          <a:schemeClr val="tx1"/>
-                        </a:solidFill>
-                        <a:latin typeface="Montserrat Medium"/>
-                        <a:ea typeface="Montserrat Medium"/>
-                        <a:cs typeface="Montserrat Medium"/>
-                        <a:sym typeface="Montserrat Medium"/>
-                      </a:endParaRPr>
-                    </a:p>
-                  </a:txBody>
-                  <a:tcPr marL="90000" marR="90000" marT="91425" marB="91425" anchor="ctr">
-                    <a:lnL w="12700" cap="flat" cmpd="sng" algn="ctr">
-                      <a:solidFill>
-                        <a:schemeClr val="tx1"/>
-                      </a:solidFill>
-                      <a:prstDash val="solid"/>
-                      <a:round/>
-                      <a:headEnd type="none" w="med" len="med"/>
-                      <a:tailEnd type="none" w="med" len="med"/>
-                    </a:lnL>
-                    <a:lnR w="12700" cap="flat" cmpd="sng" algn="ctr">
-                      <a:solidFill>
-                        <a:schemeClr val="tx1"/>
-                      </a:solidFill>
-                      <a:prstDash val="solid"/>
-                      <a:round/>
-                      <a:headEnd type="none" w="med" len="med"/>
-                      <a:tailEnd type="none" w="med" len="med"/>
-                    </a:lnR>
-                    <a:lnT w="12700" cap="flat" cmpd="sng" algn="ctr">
-                      <a:solidFill>
-                        <a:schemeClr val="tx1"/>
-                      </a:solidFill>
-                      <a:prstDash val="solid"/>
-                      <a:round/>
-                      <a:headEnd type="none" w="med" len="med"/>
-                      <a:tailEnd type="none" w="med" len="med"/>
-                    </a:lnT>
-                    <a:lnB w="12700" cap="flat" cmpd="sng" algn="ctr">
-                      <a:solidFill>
-                        <a:schemeClr val="tx1"/>
-                      </a:solidFill>
-                      <a:prstDash val="solid"/>
-                      <a:round/>
-                      <a:headEnd type="none" w="med" len="med"/>
-                      <a:tailEnd type="none" w="med" len="med"/>
-                    </a:lnB>
-                  </a:tcPr>
-                </a:tc>
-                <a:tc>
-                  <a:txBody>
-                    <a:bodyPr/>
-                    <a:lstStyle/>
-                    <a:p>
-                      <a:pPr marL="0" lvl="0" indent="0" algn="ctr" rtl="0">
-                        <a:spcBef>
-                          <a:spcPts val="0"/>
-                        </a:spcBef>
-                        <a:spcAft>
-                          <a:spcPts val="0"/>
-                        </a:spcAft>
-                        <a:buNone/>
-                      </a:pPr>
-                      <a:r>
-                        <a:rPr lang="en-US" sz="1200" b="1" dirty="0" smtClean="0">
-                          <a:solidFill>
-                            <a:schemeClr val="tx1"/>
-                          </a:solidFill>
-                          <a:latin typeface="Montserrat Medium"/>
-                          <a:ea typeface="Montserrat Medium"/>
-                          <a:cs typeface="Montserrat Medium"/>
-                          <a:sym typeface="Montserrat Medium"/>
-                        </a:rPr>
-                        <a:t>Easy to interpret</a:t>
-                      </a:r>
-                      <a:endParaRPr sz="1200" b="1" dirty="0">
-                        <a:solidFill>
-                          <a:schemeClr val="tx1"/>
-                        </a:solidFill>
-                        <a:latin typeface="Montserrat Medium"/>
-                        <a:ea typeface="Montserrat Medium"/>
-                        <a:cs typeface="Montserrat Medium"/>
-                        <a:sym typeface="Montserrat Medium"/>
-                      </a:endParaRPr>
-                    </a:p>
-                  </a:txBody>
-                  <a:tcPr marL="90000" marR="90000" marT="91425" marB="91425" anchor="ctr">
-                    <a:lnL w="12700" cap="flat" cmpd="sng" algn="ctr">
-                      <a:solidFill>
-                        <a:schemeClr val="tx1"/>
-                      </a:solidFill>
-                      <a:prstDash val="solid"/>
-                      <a:round/>
-                      <a:headEnd type="none" w="med" len="med"/>
-                      <a:tailEnd type="none" w="med" len="med"/>
-                    </a:lnL>
-                    <a:lnR w="12700" cap="flat" cmpd="sng" algn="ctr">
-                      <a:solidFill>
-                        <a:schemeClr val="tx1"/>
-                      </a:solidFill>
-                      <a:prstDash val="solid"/>
-                      <a:round/>
-                      <a:headEnd type="none" w="med" len="med"/>
-                      <a:tailEnd type="none" w="med" len="med"/>
-                    </a:lnR>
-                    <a:lnT w="12700" cap="flat" cmpd="sng" algn="ctr">
-                      <a:solidFill>
-                        <a:schemeClr val="tx1"/>
-                      </a:solidFill>
-                      <a:prstDash val="solid"/>
-                      <a:round/>
-                      <a:headEnd type="none" w="med" len="med"/>
-                      <a:tailEnd type="none" w="med" len="med"/>
-                    </a:lnT>
-                    <a:lnB w="12700" cap="flat" cmpd="sng" algn="ctr">
-                      <a:solidFill>
-                        <a:schemeClr val="tx1"/>
-                      </a:solidFill>
-                      <a:prstDash val="solid"/>
-                      <a:round/>
-                      <a:headEnd type="none" w="med" len="med"/>
-                      <a:tailEnd type="none" w="med" len="med"/>
-                    </a:lnB>
-                  </a:tcPr>
-                </a:tc>
-                <a:extLst>
-                  <a:ext uri="{0D108BD9-81ED-4DB2-BD59-A6C34878D82A}">
-                    <a16:rowId xmlns:a16="http://schemas.microsoft.com/office/drawing/2014/main" val="10004"/>
-                  </a:ext>
-                </a:extLst>
-              </a:tr>
-              <a:tr h="569009">
-                <a:tc>
-                  <a:txBody>
-                    <a:bodyPr/>
-                    <a:lstStyle/>
-                    <a:p>
-                      <a:pPr marL="0" lvl="0" indent="0" algn="ctr" rtl="0">
-                        <a:spcBef>
-                          <a:spcPts val="0"/>
-                        </a:spcBef>
-                        <a:spcAft>
-                          <a:spcPts val="0"/>
-                        </a:spcAft>
-                        <a:buNone/>
-                      </a:pPr>
-                      <a:r>
-                        <a:rPr lang="en" sz="1600" b="1" dirty="0" smtClean="0">
-                          <a:solidFill>
-                            <a:schemeClr val="tx1"/>
-                          </a:solidFill>
-                          <a:latin typeface="Montserrat Black"/>
-                          <a:ea typeface="Montserrat Black"/>
-                          <a:cs typeface="Montserrat Black"/>
-                          <a:sym typeface="Montserrat Black"/>
-                        </a:rPr>
-                        <a:t>TC-32</a:t>
-                      </a:r>
-                      <a:endParaRPr lang="en" sz="1600" b="1" dirty="0" smtClean="0">
-                        <a:solidFill>
-                          <a:schemeClr val="tx1"/>
-                        </a:solidFill>
-                        <a:latin typeface="Montserrat Black"/>
-                        <a:ea typeface="Montserrat Black"/>
-                        <a:cs typeface="Montserrat Black"/>
-                        <a:sym typeface="Montserrat Black"/>
-                      </a:endParaRPr>
-                    </a:p>
-                  </a:txBody>
-                  <a:tcPr marL="90000" marR="90000" marT="91425" marB="91425" anchor="ctr">
-                    <a:lnL w="12700" cap="flat" cmpd="sng" algn="ctr">
-                      <a:solidFill>
-                        <a:schemeClr val="tx1"/>
-                      </a:solidFill>
-                      <a:prstDash val="solid"/>
-                      <a:round/>
-                      <a:headEnd type="none" w="med" len="med"/>
-                      <a:tailEnd type="none" w="med" len="med"/>
-                    </a:lnL>
-                    <a:lnR w="12700" cap="flat" cmpd="sng" algn="ctr">
-                      <a:solidFill>
-                        <a:schemeClr val="tx1"/>
-                      </a:solidFill>
-                      <a:prstDash val="solid"/>
-                      <a:round/>
-                      <a:headEnd type="none" w="med" len="med"/>
-                      <a:tailEnd type="none" w="med" len="med"/>
-                    </a:lnR>
-                    <a:lnT w="12700" cap="flat" cmpd="sng" algn="ctr">
-                      <a:solidFill>
-                        <a:schemeClr val="tx1"/>
-                      </a:solidFill>
-                      <a:prstDash val="solid"/>
-                      <a:round/>
-                      <a:headEnd type="none" w="med" len="med"/>
-                      <a:tailEnd type="none" w="med" len="med"/>
-                    </a:lnT>
-                    <a:lnB w="12700" cap="flat" cmpd="sng" algn="ctr">
-                      <a:solidFill>
-                        <a:schemeClr val="tx1"/>
-                      </a:solidFill>
-                      <a:prstDash val="solid"/>
-                      <a:round/>
-                      <a:headEnd type="none" w="med" len="med"/>
-                      <a:tailEnd type="none" w="med" len="med"/>
-                    </a:lnB>
-                  </a:tcPr>
-                </a:tc>
-                <a:tc>
-                  <a:txBody>
-                    <a:bodyPr/>
-                    <a:lstStyle/>
-                    <a:p>
-                      <a:pPr marL="0" lvl="0" indent="0" algn="ctr" rtl="0">
-                        <a:spcBef>
-                          <a:spcPts val="0"/>
-                        </a:spcBef>
-                        <a:spcAft>
-                          <a:spcPts val="0"/>
-                        </a:spcAft>
-                        <a:buNone/>
-                      </a:pPr>
-                      <a:r>
-                        <a:rPr lang="en-US" sz="1200" b="1" dirty="0" smtClean="0">
-                          <a:solidFill>
-                            <a:schemeClr val="tx1"/>
-                          </a:solidFill>
-                          <a:latin typeface="Montserrat Medium"/>
-                          <a:ea typeface="Montserrat Medium"/>
-                          <a:cs typeface="Montserrat Medium"/>
-                          <a:sym typeface="Montserrat Medium"/>
-                        </a:rPr>
-                        <a:t>Error messages</a:t>
-                      </a:r>
-                      <a:endParaRPr sz="1200" b="1" dirty="0">
-                        <a:solidFill>
-                          <a:schemeClr val="tx1"/>
-                        </a:solidFill>
-                        <a:latin typeface="Montserrat Medium"/>
-                        <a:ea typeface="Montserrat Medium"/>
-                        <a:cs typeface="Montserrat Medium"/>
-                        <a:sym typeface="Montserrat Medium"/>
-                      </a:endParaRPr>
-                    </a:p>
-                  </a:txBody>
-                  <a:tcPr marL="90000" marR="90000" marT="91425" marB="91425" anchor="ctr">
-                    <a:lnL w="12700" cap="flat" cmpd="sng" algn="ctr">
-                      <a:solidFill>
-                        <a:schemeClr val="tx1"/>
-                      </a:solidFill>
-                      <a:prstDash val="solid"/>
-                      <a:round/>
-                      <a:headEnd type="none" w="med" len="med"/>
-                      <a:tailEnd type="none" w="med" len="med"/>
-                    </a:lnL>
-                    <a:lnR w="12700" cap="flat" cmpd="sng" algn="ctr">
-                      <a:solidFill>
-                        <a:schemeClr val="tx1"/>
-                      </a:solidFill>
-                      <a:prstDash val="solid"/>
-                      <a:round/>
-                      <a:headEnd type="none" w="med" len="med"/>
-                      <a:tailEnd type="none" w="med" len="med"/>
-                    </a:lnR>
-                    <a:lnT w="12700" cap="flat" cmpd="sng" algn="ctr">
-                      <a:solidFill>
-                        <a:schemeClr val="tx1"/>
-                      </a:solidFill>
-                      <a:prstDash val="solid"/>
-                      <a:round/>
-                      <a:headEnd type="none" w="med" len="med"/>
-                      <a:tailEnd type="none" w="med" len="med"/>
-                    </a:lnT>
-                    <a:lnB w="12700" cap="flat" cmpd="sng" algn="ctr">
-                      <a:solidFill>
-                        <a:schemeClr val="tx1"/>
-                      </a:solidFill>
-                      <a:prstDash val="solid"/>
-                      <a:round/>
-                      <a:headEnd type="none" w="med" len="med"/>
-                      <a:tailEnd type="none" w="med" len="med"/>
-                    </a:lnB>
-                  </a:tcPr>
-                </a:tc>
-                <a:tc>
-                  <a:txBody>
-                    <a:bodyPr/>
-                    <a:lstStyle/>
-                    <a:p>
-                      <a:pPr marL="0" lvl="0" indent="0" algn="ctr" rtl="0">
-                        <a:spcBef>
-                          <a:spcPts val="0"/>
-                        </a:spcBef>
-                        <a:spcAft>
-                          <a:spcPts val="0"/>
-                        </a:spcAft>
-                        <a:buNone/>
-                      </a:pPr>
-                      <a:r>
-                        <a:rPr lang="en-US" sz="1200" b="1" dirty="0" smtClean="0">
-                          <a:solidFill>
-                            <a:schemeClr val="tx1"/>
-                          </a:solidFill>
-                          <a:latin typeface="Montserrat Medium"/>
-                          <a:ea typeface="Montserrat Medium"/>
-                          <a:cs typeface="Montserrat Medium"/>
-                          <a:sym typeface="Montserrat Medium"/>
-                        </a:rPr>
-                        <a:t>Clear</a:t>
-                      </a:r>
-                      <a:endParaRPr sz="1200" b="1" dirty="0">
-                        <a:solidFill>
-                          <a:schemeClr val="tx1"/>
-                        </a:solidFill>
-                        <a:latin typeface="Montserrat Medium"/>
-                        <a:ea typeface="Montserrat Medium"/>
-                        <a:cs typeface="Montserrat Medium"/>
-                        <a:sym typeface="Montserrat Medium"/>
-                      </a:endParaRPr>
-                    </a:p>
-                  </a:txBody>
-                  <a:tcPr marL="90000" marR="90000" marT="91425" marB="91425" anchor="ctr">
-                    <a:lnL w="12700" cap="flat" cmpd="sng" algn="ctr">
-                      <a:solidFill>
-                        <a:schemeClr val="tx1"/>
-                      </a:solidFill>
-                      <a:prstDash val="solid"/>
-                      <a:round/>
-                      <a:headEnd type="none" w="med" len="med"/>
-                      <a:tailEnd type="none" w="med" len="med"/>
-                    </a:lnL>
-                    <a:lnR w="12700" cap="flat" cmpd="sng" algn="ctr">
-                      <a:solidFill>
-                        <a:schemeClr val="tx1"/>
-                      </a:solidFill>
-                      <a:prstDash val="solid"/>
-                      <a:round/>
-                      <a:headEnd type="none" w="med" len="med"/>
-                      <a:tailEnd type="none" w="med" len="med"/>
-                    </a:lnR>
-                    <a:lnT w="12700" cap="flat" cmpd="sng" algn="ctr">
-                      <a:solidFill>
-                        <a:schemeClr val="tx1"/>
-                      </a:solidFill>
-                      <a:prstDash val="solid"/>
-                      <a:round/>
-                      <a:headEnd type="none" w="med" len="med"/>
-                      <a:tailEnd type="none" w="med" len="med"/>
-                    </a:lnT>
-                    <a:lnB w="12700" cap="flat" cmpd="sng" algn="ctr">
-                      <a:solidFill>
-                        <a:schemeClr val="tx1"/>
-                      </a:solidFill>
-                      <a:prstDash val="solid"/>
-                      <a:round/>
-                      <a:headEnd type="none" w="med" len="med"/>
-                      <a:tailEnd type="none" w="med" len="med"/>
-                    </a:lnB>
-                  </a:tcPr>
-                </a:tc>
-                <a:extLst>
-                  <a:ext uri="{0D108BD9-81ED-4DB2-BD59-A6C34878D82A}">
-                    <a16:rowId xmlns:a16="http://schemas.microsoft.com/office/drawing/2014/main" val="10005"/>
-                  </a:ext>
-                </a:extLst>
-              </a:tr>
-            </a:tbl>
-          </a:graphicData>
-        </a:graphic>
-      </p:graphicFrame>
-    </p:spTree>
-    <p:extLst>
-      <p:ext uri="{BB962C8B-B14F-4D97-AF65-F5344CB8AC3E}">
-        <p14:creationId xmlns:p14="http://schemas.microsoft.com/office/powerpoint/2010/main" val="3489262634"/>
       </p:ext>
     </p:extLst>
   </p:cSld>

--- a/Milestone 5/Milestone5_Testing&Evaluation.pptx
+++ b/Milestone 5/Milestone5_Testing&Evaluation.pptx
@@ -5,7 +5,7 @@
     <p:sldMasterId id="2147483677" r:id="rId1"/>
   </p:sldMasterIdLst>
   <p:notesMasterIdLst>
-    <p:notesMasterId r:id="rId27"/>
+    <p:notesMasterId r:id="rId28"/>
   </p:notesMasterIdLst>
   <p:sldIdLst>
     <p:sldId id="256" r:id="rId2"/>
@@ -33,43 +33,44 @@
     <p:sldId id="290" r:id="rId24"/>
     <p:sldId id="312" r:id="rId25"/>
     <p:sldId id="313" r:id="rId26"/>
+    <p:sldId id="319" r:id="rId27"/>
   </p:sldIdLst>
   <p:sldSz cx="9144000" cy="5143500" type="screen16x9"/>
   <p:notesSz cx="6858000" cy="9144000"/>
   <p:embeddedFontLst>
     <p:embeddedFont>
-      <p:font typeface="Montserrat Black" panose="020B0604020202020204" charset="0"/>
-      <p:bold r:id="rId28"/>
-      <p:italic r:id="rId29"/>
-      <p:boldItalic r:id="rId30"/>
+      <p:font typeface="Quicksand Medium" panose="020B0604020202020204" charset="0"/>
+      <p:regular r:id="rId29"/>
+      <p:bold r:id="rId30"/>
+    </p:embeddedFont>
+    <p:embeddedFont>
+      <p:font typeface="Bebas Neue" panose="020B0604020202020204" charset="0"/>
+      <p:regular r:id="rId31"/>
+    </p:embeddedFont>
+    <p:embeddedFont>
+      <p:font typeface="Montserrat" panose="020B0604020202020204" charset="0"/>
+      <p:regular r:id="rId32"/>
+      <p:bold r:id="rId33"/>
+      <p:italic r:id="rId34"/>
+      <p:boldItalic r:id="rId35"/>
     </p:embeddedFont>
     <p:embeddedFont>
       <p:font typeface="Montserrat Medium" panose="020B0604020202020204" charset="0"/>
-      <p:regular r:id="rId31"/>
-      <p:bold r:id="rId32"/>
-      <p:italic r:id="rId33"/>
-      <p:boldItalic r:id="rId34"/>
-    </p:embeddedFont>
-    <p:embeddedFont>
-      <p:font typeface="Quicksand Medium" panose="020B0604020202020204" charset="0"/>
-      <p:regular r:id="rId35"/>
-      <p:bold r:id="rId36"/>
+      <p:regular r:id="rId36"/>
+      <p:bold r:id="rId37"/>
+      <p:italic r:id="rId38"/>
+      <p:boldItalic r:id="rId39"/>
     </p:embeddedFont>
     <p:embeddedFont>
       <p:font typeface="Quicksand" panose="020B0604020202020204" charset="0"/>
-      <p:regular r:id="rId37"/>
-      <p:bold r:id="rId38"/>
+      <p:regular r:id="rId40"/>
+      <p:bold r:id="rId41"/>
     </p:embeddedFont>
     <p:embeddedFont>
-      <p:font typeface="Montserrat" panose="020B0604020202020204" charset="0"/>
-      <p:regular r:id="rId39"/>
-      <p:bold r:id="rId40"/>
-      <p:italic r:id="rId41"/>
-      <p:boldItalic r:id="rId42"/>
-    </p:embeddedFont>
-    <p:embeddedFont>
-      <p:font typeface="Bebas Neue" panose="020B0604020202020204" charset="0"/>
-      <p:regular r:id="rId43"/>
+      <p:font typeface="Montserrat Black" panose="020B0604020202020204" charset="0"/>
+      <p:bold r:id="rId42"/>
+      <p:italic r:id="rId43"/>
+      <p:boldItalic r:id="rId44"/>
     </p:embeddedFont>
   </p:embeddedFontLst>
   <p:defaultTextStyle>
@@ -12071,19 +12072,7 @@
                           <a:cs typeface="Montserrat Medium"/>
                           <a:sym typeface="Montserrat Medium"/>
                         </a:rPr>
-                        <a:t>&lt; </a:t>
-                      </a:r>
-                      <a:r>
-                        <a:rPr lang="en-US" sz="1200" b="1" dirty="0" smtClean="0">
-                          <a:solidFill>
-                            <a:schemeClr val="tx1"/>
-                          </a:solidFill>
-                          <a:latin typeface="Montserrat Medium"/>
-                          <a:ea typeface="Montserrat Medium"/>
-                          <a:cs typeface="Montserrat Medium"/>
-                          <a:sym typeface="Montserrat Medium"/>
-                        </a:rPr>
-                        <a:t>5000 </a:t>
+                        <a:t>&lt; 5000 </a:t>
                       </a:r>
                       <a:r>
                         <a:rPr lang="en-US" sz="1200" b="1" dirty="0" err="1" smtClean="0">
@@ -12415,15 +12404,6 @@
                         </a:rPr>
                         <a:t>TC-28</a:t>
                       </a:r>
-                      <a:endParaRPr lang="en" sz="1600" b="1" dirty="0" smtClean="0">
-                        <a:solidFill>
-                          <a:schemeClr val="tx1"/>
-                        </a:solidFill>
-                        <a:latin typeface="Montserrat Black"/>
-                        <a:ea typeface="Montserrat Black"/>
-                        <a:cs typeface="Montserrat Black"/>
-                        <a:sym typeface="Montserrat Black"/>
-                      </a:endParaRPr>
                     </a:p>
                   </a:txBody>
                   <a:tcPr marL="90000" marR="90000" marT="91425" marB="91425" anchor="ctr">
@@ -12637,6 +12617,13 @@
   <p:clrMapOvr>
     <a:masterClrMapping/>
   </p:clrMapOvr>
+  <p:timing>
+    <p:tnLst>
+      <p:par>
+        <p:cTn id="1" dur="indefinite" restart="never" nodeType="tmRoot"/>
+      </p:par>
+    </p:tnLst>
+  </p:timing>
 </p:sld>
 </file>
 
@@ -13866,15 +13853,6 @@
                         </a:rPr>
                         <a:t>TC-32</a:t>
                       </a:r>
-                      <a:endParaRPr lang="en" sz="1600" b="1" dirty="0" smtClean="0">
-                        <a:solidFill>
-                          <a:schemeClr val="tx1"/>
-                        </a:solidFill>
-                        <a:latin typeface="Montserrat Black"/>
-                        <a:ea typeface="Montserrat Black"/>
-                        <a:cs typeface="Montserrat Black"/>
-                        <a:sym typeface="Montserrat Black"/>
-                      </a:endParaRPr>
                     </a:p>
                   </a:txBody>
                   <a:tcPr marL="90000" marR="90000" marT="91425" marB="91425" anchor="ctr">
@@ -14088,6 +14066,13 @@
   <p:clrMapOvr>
     <a:masterClrMapping/>
   </p:clrMapOvr>
+  <p:timing>
+    <p:tnLst>
+      <p:par>
+        <p:cTn id="1" dur="indefinite" restart="never" nodeType="tmRoot"/>
+      </p:par>
+    </p:tnLst>
+  </p:timing>
 </p:sld>
 </file>
 
@@ -15329,15 +15314,6 @@
                         </a:rPr>
                         <a:t>TC-36</a:t>
                       </a:r>
-                      <a:endParaRPr lang="en" sz="1600" b="1" dirty="0" smtClean="0">
-                        <a:solidFill>
-                          <a:schemeClr val="tx1"/>
-                        </a:solidFill>
-                        <a:latin typeface="Montserrat Black"/>
-                        <a:ea typeface="Montserrat Black"/>
-                        <a:cs typeface="Montserrat Black"/>
-                        <a:sym typeface="Montserrat Black"/>
-                      </a:endParaRPr>
                     </a:p>
                   </a:txBody>
                   <a:tcPr marL="90000" marR="90000" marT="91425" marB="91425" anchor="ctr">
@@ -15551,6 +15527,13 @@
   <p:clrMapOvr>
     <a:masterClrMapping/>
   </p:clrMapOvr>
+  <p:timing>
+    <p:tnLst>
+      <p:par>
+        <p:cTn id="1" dur="indefinite" restart="never" nodeType="tmRoot"/>
+      </p:par>
+    </p:tnLst>
+  </p:timing>
 </p:sld>
 </file>
 
@@ -16792,15 +16775,6 @@
                         </a:rPr>
                         <a:t>TC-40</a:t>
                       </a:r>
-                      <a:endParaRPr lang="en" sz="1600" b="1" dirty="0" smtClean="0">
-                        <a:solidFill>
-                          <a:schemeClr val="tx1"/>
-                        </a:solidFill>
-                        <a:latin typeface="Montserrat Black"/>
-                        <a:ea typeface="Montserrat Black"/>
-                        <a:cs typeface="Montserrat Black"/>
-                        <a:sym typeface="Montserrat Black"/>
-                      </a:endParaRPr>
                     </a:p>
                   </a:txBody>
                   <a:tcPr marL="90000" marR="90000" marT="91425" marB="91425" anchor="ctr">
@@ -17027,15 +17001,6 @@
                         </a:rPr>
                         <a:t>TC-41</a:t>
                       </a:r>
-                      <a:endParaRPr lang="en" sz="1600" b="1" dirty="0" smtClean="0">
-                        <a:solidFill>
-                          <a:schemeClr val="tx1"/>
-                        </a:solidFill>
-                        <a:latin typeface="Montserrat Black"/>
-                        <a:ea typeface="Montserrat Black"/>
-                        <a:cs typeface="Montserrat Black"/>
-                        <a:sym typeface="Montserrat Black"/>
-                      </a:endParaRPr>
                     </a:p>
                   </a:txBody>
                   <a:tcPr marL="90000" marR="90000" marT="91425" marB="91425" anchor="ctr">
@@ -17274,15 +17239,6 @@
                         </a:rPr>
                         <a:t>TC-42</a:t>
                       </a:r>
-                      <a:endParaRPr lang="en" sz="1600" b="1" dirty="0" smtClean="0">
-                        <a:solidFill>
-                          <a:schemeClr val="tx1"/>
-                        </a:solidFill>
-                        <a:latin typeface="Montserrat Black"/>
-                        <a:ea typeface="Montserrat Black"/>
-                        <a:cs typeface="Montserrat Black"/>
-                        <a:sym typeface="Montserrat Black"/>
-                      </a:endParaRPr>
                     </a:p>
                   </a:txBody>
                   <a:tcPr marL="90000" marR="90000" marT="91425" marB="91425" anchor="ctr">
@@ -17508,6 +17464,13 @@
   <p:clrMapOvr>
     <a:masterClrMapping/>
   </p:clrMapOvr>
+  <p:timing>
+    <p:tnLst>
+      <p:par>
+        <p:cTn id="1" dur="indefinite" restart="never" nodeType="tmRoot"/>
+      </p:par>
+    </p:tnLst>
+  </p:timing>
 </p:sld>
 </file>
 
@@ -17632,6 +17595,13 @@
   <p:clrMapOvr>
     <a:masterClrMapping/>
   </p:clrMapOvr>
+  <p:timing>
+    <p:tnLst>
+      <p:par>
+        <p:cTn id="1" dur="indefinite" restart="never" nodeType="tmRoot"/>
+      </p:par>
+    </p:tnLst>
+  </p:timing>
 </p:sld>
 </file>
 
@@ -17827,6 +17797,13 @@
   <p:clrMapOvr>
     <a:masterClrMapping/>
   </p:clrMapOvr>
+  <p:timing>
+    <p:tnLst>
+      <p:par>
+        <p:cTn id="1" dur="indefinite" restart="never" nodeType="tmRoot"/>
+      </p:par>
+    </p:tnLst>
+  </p:timing>
 </p:sld>
 </file>
 
@@ -19913,6 +19890,13 @@
   <p:clrMapOvr>
     <a:masterClrMapping/>
   </p:clrMapOvr>
+  <p:timing>
+    <p:tnLst>
+      <p:par>
+        <p:cTn id="1" dur="indefinite" restart="never" nodeType="tmRoot"/>
+      </p:par>
+    </p:tnLst>
+  </p:timing>
 </p:sld>
 </file>
 
@@ -20045,6 +20029,13 @@
   <p:clrMapOvr>
     <a:masterClrMapping/>
   </p:clrMapOvr>
+  <p:timing>
+    <p:tnLst>
+      <p:par>
+        <p:cTn id="1" dur="indefinite" restart="never" nodeType="tmRoot"/>
+      </p:par>
+    </p:tnLst>
+  </p:timing>
 </p:sld>
 </file>
 
@@ -20365,6 +20356,13 @@
   <p:clrMapOvr>
     <a:masterClrMapping/>
   </p:clrMapOvr>
+  <p:timing>
+    <p:tnLst>
+      <p:par>
+        <p:cTn id="1" dur="indefinite" restart="never" nodeType="tmRoot"/>
+      </p:par>
+    </p:tnLst>
+  </p:timing>
 </p:sld>
 </file>
 
@@ -20499,6 +20497,13 @@
   <p:clrMapOvr>
     <a:masterClrMapping/>
   </p:clrMapOvr>
+  <p:timing>
+    <p:tnLst>
+      <p:par>
+        <p:cTn id="1" dur="indefinite" restart="never" nodeType="tmRoot"/>
+      </p:par>
+    </p:tnLst>
+  </p:timing>
 </p:sld>
 </file>
 
@@ -21470,6 +21475,13 @@
   <p:clrMapOvr>
     <a:masterClrMapping/>
   </p:clrMapOvr>
+  <p:timing>
+    <p:tnLst>
+      <p:par>
+        <p:cTn id="1" dur="indefinite" restart="never" nodeType="tmRoot"/>
+      </p:par>
+    </p:tnLst>
+  </p:timing>
 </p:sld>
 </file>
 
@@ -22064,6 +22076,13 @@
   <p:clrMapOvr>
     <a:masterClrMapping/>
   </p:clrMapOvr>
+  <p:timing>
+    <p:tnLst>
+      <p:par>
+        <p:cTn id="1" dur="indefinite" restart="never" nodeType="tmRoot"/>
+      </p:par>
+    </p:tnLst>
+  </p:timing>
 </p:sld>
 </file>
 
@@ -22191,6 +22210,13 @@
   <p:clrMapOvr>
     <a:masterClrMapping/>
   </p:clrMapOvr>
+  <p:timing>
+    <p:tnLst>
+      <p:par>
+        <p:cTn id="1" dur="indefinite" restart="never" nodeType="tmRoot"/>
+      </p:par>
+    </p:tnLst>
+  </p:timing>
 </p:sld>
 </file>
 
@@ -22302,6 +22328,13 @@
   <p:clrMapOvr>
     <a:masterClrMapping/>
   </p:clrMapOvr>
+  <p:timing>
+    <p:tnLst>
+      <p:par>
+        <p:cTn id="1" dur="indefinite" restart="never" nodeType="tmRoot"/>
+      </p:par>
+    </p:tnLst>
+  </p:timing>
 </p:sld>
 </file>
 
@@ -22404,6 +22437,13 @@
   <p:clrMapOvr>
     <a:masterClrMapping/>
   </p:clrMapOvr>
+  <p:timing>
+    <p:tnLst>
+      <p:par>
+        <p:cTn id="1" dur="indefinite" restart="never" nodeType="tmRoot"/>
+      </p:par>
+    </p:tnLst>
+  </p:timing>
 </p:sld>
 </file>
 
@@ -22514,6 +22554,286 @@
     <p:extLst>
       <p:ext uri="{BB962C8B-B14F-4D97-AF65-F5344CB8AC3E}">
         <p14:creationId xmlns:p14="http://schemas.microsoft.com/office/powerpoint/2010/main" val="324543133"/>
+      </p:ext>
+    </p:extLst>
+  </p:cSld>
+  <p:clrMapOvr>
+    <a:masterClrMapping/>
+  </p:clrMapOvr>
+  <p:timing>
+    <p:tnLst>
+      <p:par>
+        <p:cTn id="1" dur="indefinite" restart="never" nodeType="tmRoot"/>
+      </p:par>
+    </p:tnLst>
+  </p:timing>
+</p:sld>
+</file>
+
+<file path=ppt/slides/slide26.xml><?xml version="1.0" encoding="utf-8"?>
+<p:sld xmlns:a="http://schemas.openxmlformats.org/drawingml/2006/main" xmlns:r="http://schemas.openxmlformats.org/officeDocument/2006/relationships" xmlns:p="http://schemas.openxmlformats.org/presentationml/2006/main">
+  <p:cSld>
+    <p:spTree>
+      <p:nvGrpSpPr>
+        <p:cNvPr id="1" name=""/>
+        <p:cNvGrpSpPr/>
+        <p:nvPr/>
+      </p:nvGrpSpPr>
+      <p:grpSpPr>
+        <a:xfrm>
+          <a:off x="0" y="0"/>
+          <a:ext cx="0" cy="0"/>
+          <a:chOff x="0" y="0"/>
+          <a:chExt cx="0" cy="0"/>
+        </a:xfrm>
+      </p:grpSpPr>
+      <p:grpSp>
+        <p:nvGrpSpPr>
+          <p:cNvPr id="6" name="Group 5"/>
+          <p:cNvGrpSpPr/>
+          <p:nvPr/>
+        </p:nvGrpSpPr>
+        <p:grpSpPr>
+          <a:xfrm>
+            <a:off x="2182089" y="609600"/>
+            <a:ext cx="4488874" cy="2581260"/>
+            <a:chOff x="2182089" y="609600"/>
+            <a:chExt cx="4488874" cy="2581260"/>
+          </a:xfrm>
+        </p:grpSpPr>
+        <p:pic>
+          <p:nvPicPr>
+            <p:cNvPr id="2" name="Picture 1"/>
+            <p:cNvPicPr>
+              <a:picLocks noChangeAspect="1"/>
+            </p:cNvPicPr>
+            <p:nvPr/>
+          </p:nvPicPr>
+          <p:blipFill rotWithShape="1">
+            <a:blip r:embed="rId2"/>
+            <a:srcRect l="39544" t="20331" r="37124"/>
+            <a:stretch/>
+          </p:blipFill>
+          <p:spPr>
+            <a:xfrm>
+              <a:off x="2182089" y="609600"/>
+              <a:ext cx="1343891" cy="2581260"/>
+            </a:xfrm>
+            <a:prstGeom prst="rect">
+              <a:avLst/>
+            </a:prstGeom>
+          </p:spPr>
+        </p:pic>
+        <p:pic>
+          <p:nvPicPr>
+            <p:cNvPr id="3" name="Picture 2"/>
+            <p:cNvPicPr>
+              <a:picLocks noChangeAspect="1"/>
+            </p:cNvPicPr>
+            <p:nvPr/>
+          </p:nvPicPr>
+          <p:blipFill rotWithShape="1">
+            <a:blip r:embed="rId3"/>
+            <a:srcRect l="34156" t="11138" r="37342" b="9540"/>
+            <a:stretch/>
+          </p:blipFill>
+          <p:spPr>
+            <a:xfrm>
+              <a:off x="5029198" y="609600"/>
+              <a:ext cx="1641765" cy="2570019"/>
+            </a:xfrm>
+            <a:prstGeom prst="rect">
+              <a:avLst/>
+            </a:prstGeom>
+          </p:spPr>
+        </p:pic>
+        <p:pic>
+          <p:nvPicPr>
+            <p:cNvPr id="4" name="Picture 3"/>
+            <p:cNvPicPr>
+              <a:picLocks noChangeAspect="1"/>
+            </p:cNvPicPr>
+            <p:nvPr/>
+          </p:nvPicPr>
+          <p:blipFill rotWithShape="1">
+            <a:blip r:embed="rId4"/>
+            <a:srcRect l="39507" t="11738" r="34395" b="9367"/>
+            <a:stretch/>
+          </p:blipFill>
+          <p:spPr>
+            <a:xfrm>
+              <a:off x="3525980" y="629075"/>
+              <a:ext cx="1503218" cy="2556164"/>
+            </a:xfrm>
+            <a:prstGeom prst="rect">
+              <a:avLst/>
+            </a:prstGeom>
+          </p:spPr>
+        </p:pic>
+      </p:grpSp>
+      <p:sp>
+        <p:nvSpPr>
+          <p:cNvPr id="7" name="TextBox 6"/>
+          <p:cNvSpPr txBox="1"/>
+          <p:nvPr/>
+        </p:nvSpPr>
+        <p:spPr>
+          <a:xfrm>
+            <a:off x="2182089" y="3190860"/>
+            <a:ext cx="1343891" cy="246221"/>
+          </a:xfrm>
+          <a:prstGeom prst="rect">
+            <a:avLst/>
+          </a:prstGeom>
+          <a:noFill/>
+        </p:spPr>
+        <p:txBody>
+          <a:bodyPr wrap="square" rtlCol="0">
+            <a:spAutoFit/>
+          </a:bodyPr>
+          <a:lstStyle/>
+          <a:p>
+            <a:pPr algn="ctr"/>
+            <a:r>
+              <a:rPr lang="en-US" sz="1000" b="1" i="1" u="sng" dirty="0" smtClean="0">
+                <a:solidFill>
+                  <a:srgbClr val="92D050"/>
+                </a:solidFill>
+                <a:effectLst>
+                  <a:outerShdw blurRad="38100" dist="38100" dir="2700000" algn="tl">
+                    <a:srgbClr val="000000">
+                      <a:alpha val="43137"/>
+                    </a:srgbClr>
+                  </a:outerShdw>
+                </a:effectLst>
+              </a:rPr>
+              <a:t>Good</a:t>
+            </a:r>
+            <a:endParaRPr lang="en-US" sz="1000" b="1" i="1" u="sng" dirty="0">
+              <a:solidFill>
+                <a:srgbClr val="92D050"/>
+              </a:solidFill>
+              <a:effectLst>
+                <a:outerShdw blurRad="38100" dist="38100" dir="2700000" algn="tl">
+                  <a:srgbClr val="000000">
+                    <a:alpha val="43137"/>
+                  </a:srgbClr>
+                </a:outerShdw>
+              </a:effectLst>
+            </a:endParaRPr>
+          </a:p>
+        </p:txBody>
+      </p:sp>
+      <p:sp>
+        <p:nvSpPr>
+          <p:cNvPr id="8" name="TextBox 7"/>
+          <p:cNvSpPr txBox="1"/>
+          <p:nvPr/>
+        </p:nvSpPr>
+        <p:spPr>
+          <a:xfrm>
+            <a:off x="3525980" y="3190860"/>
+            <a:ext cx="1343891" cy="246221"/>
+          </a:xfrm>
+          <a:prstGeom prst="rect">
+            <a:avLst/>
+          </a:prstGeom>
+          <a:noFill/>
+        </p:spPr>
+        <p:txBody>
+          <a:bodyPr wrap="square" rtlCol="0">
+            <a:spAutoFit/>
+          </a:bodyPr>
+          <a:lstStyle/>
+          <a:p>
+            <a:pPr algn="ctr"/>
+            <a:r>
+              <a:rPr lang="en-US" sz="1000" b="1" i="1" u="sng" dirty="0" smtClean="0">
+                <a:solidFill>
+                  <a:srgbClr val="FFFF00"/>
+                </a:solidFill>
+                <a:effectLst>
+                  <a:outerShdw blurRad="38100" dist="38100" dir="2700000" algn="tl">
+                    <a:srgbClr val="000000">
+                      <a:alpha val="43137"/>
+                    </a:srgbClr>
+                  </a:outerShdw>
+                </a:effectLst>
+              </a:rPr>
+              <a:t>Moderate</a:t>
+            </a:r>
+            <a:endParaRPr lang="en-US" sz="1000" b="1" i="1" u="sng" dirty="0">
+              <a:solidFill>
+                <a:srgbClr val="FFFF00"/>
+              </a:solidFill>
+              <a:effectLst>
+                <a:outerShdw blurRad="38100" dist="38100" dir="2700000" algn="tl">
+                  <a:srgbClr val="000000">
+                    <a:alpha val="43137"/>
+                  </a:srgbClr>
+                </a:outerShdw>
+              </a:effectLst>
+            </a:endParaRPr>
+          </a:p>
+        </p:txBody>
+      </p:sp>
+      <p:sp>
+        <p:nvSpPr>
+          <p:cNvPr id="9" name="TextBox 8"/>
+          <p:cNvSpPr txBox="1"/>
+          <p:nvPr/>
+        </p:nvSpPr>
+        <p:spPr>
+          <a:xfrm>
+            <a:off x="5178134" y="3190860"/>
+            <a:ext cx="1343891" cy="246221"/>
+          </a:xfrm>
+          <a:prstGeom prst="rect">
+            <a:avLst/>
+          </a:prstGeom>
+          <a:noFill/>
+        </p:spPr>
+        <p:txBody>
+          <a:bodyPr wrap="square" rtlCol="0">
+            <a:spAutoFit/>
+          </a:bodyPr>
+          <a:lstStyle/>
+          <a:p>
+            <a:pPr algn="ctr"/>
+            <a:r>
+              <a:rPr lang="en-US" sz="1000" b="1" i="1" u="sng" dirty="0" smtClean="0">
+                <a:solidFill>
+                  <a:srgbClr val="FF0000"/>
+                </a:solidFill>
+                <a:effectLst>
+                  <a:outerShdw blurRad="38100" dist="38100" dir="2700000" algn="tl">
+                    <a:srgbClr val="000000">
+                      <a:alpha val="43137"/>
+                    </a:srgbClr>
+                  </a:outerShdw>
+                </a:effectLst>
+              </a:rPr>
+              <a:t>Bad</a:t>
+            </a:r>
+            <a:endParaRPr lang="en-US" sz="1000" b="1" i="1" u="sng" dirty="0">
+              <a:solidFill>
+                <a:srgbClr val="FF0000"/>
+              </a:solidFill>
+              <a:effectLst>
+                <a:outerShdw blurRad="38100" dist="38100" dir="2700000" algn="tl">
+                  <a:srgbClr val="000000">
+                    <a:alpha val="43137"/>
+                  </a:srgbClr>
+                </a:outerShdw>
+              </a:effectLst>
+            </a:endParaRPr>
+          </a:p>
+        </p:txBody>
+      </p:sp>
+    </p:spTree>
+    <p:extLst>
+      <p:ext uri="{BB962C8B-B14F-4D97-AF65-F5344CB8AC3E}">
+        <p14:creationId xmlns:p14="http://schemas.microsoft.com/office/powerpoint/2010/main" val="1980199476"/>
       </p:ext>
     </p:extLst>
   </p:cSld>
@@ -23155,6 +23475,13 @@
   <p:clrMapOvr>
     <a:masterClrMapping/>
   </p:clrMapOvr>
+  <p:timing>
+    <p:tnLst>
+      <p:par>
+        <p:cTn id="1" dur="indefinite" restart="never" nodeType="tmRoot"/>
+      </p:par>
+    </p:tnLst>
+  </p:timing>
 </p:sld>
 </file>
 
@@ -25138,6 +25465,13 @@
   <p:clrMapOvr>
     <a:masterClrMapping/>
   </p:clrMapOvr>
+  <p:timing>
+    <p:tnLst>
+      <p:par>
+        <p:cTn id="1" dur="indefinite" restart="never" nodeType="tmRoot"/>
+      </p:par>
+    </p:tnLst>
+  </p:timing>
 </p:sld>
 </file>
 
@@ -26585,6 +26919,13 @@
   <p:clrMapOvr>
     <a:masterClrMapping/>
   </p:clrMapOvr>
+  <p:timing>
+    <p:tnLst>
+      <p:par>
+        <p:cTn id="1" dur="indefinite" restart="never" nodeType="tmRoot"/>
+      </p:par>
+    </p:tnLst>
+  </p:timing>
 </p:sld>
 </file>
 
@@ -28080,6 +28421,13 @@
   <p:clrMapOvr>
     <a:masterClrMapping/>
   </p:clrMapOvr>
+  <p:timing>
+    <p:tnLst>
+      <p:par>
+        <p:cTn id="1" dur="indefinite" restart="never" nodeType="tmRoot"/>
+      </p:par>
+    </p:tnLst>
+  </p:timing>
 </p:sld>
 </file>
 
@@ -29535,6 +29883,13 @@
   <p:clrMapOvr>
     <a:masterClrMapping/>
   </p:clrMapOvr>
+  <p:timing>
+    <p:tnLst>
+      <p:par>
+        <p:cTn id="1" dur="indefinite" restart="never" nodeType="tmRoot"/>
+      </p:par>
+    </p:tnLst>
+  </p:timing>
 </p:sld>
 </file>
 
@@ -31951,6 +32306,13 @@
   <p:clrMapOvr>
     <a:masterClrMapping/>
   </p:clrMapOvr>
+  <p:timing>
+    <p:tnLst>
+      <p:par>
+        <p:cTn id="1" dur="indefinite" restart="never" nodeType="tmRoot"/>
+      </p:par>
+    </p:tnLst>
+  </p:timing>
 </p:sld>
 </file>
 
